--- a/deliverables/04_presentation/01_FOREST_CODE_TWO_PROPERTY_WORKED_EXAMPLES_20260930.pptx
+++ b/deliverables/04_presentation/01_FOREST_CODE_TWO_PROPERTY_WORKED_EXAMPLES_20260930.pptx
@@ -2,19 +2,21 @@
 <file path=ppt/presentation.xml><?xml version="1.0" encoding="utf-8"?>
 <p:presentation xmlns:p="http://schemas.openxmlformats.org/presentationml/2006/main">
   <p:sldMasterIdLst>
-    <p:sldMasterId xmlns:r="http://schemas.openxmlformats.org/officeDocument/2006/relationships" id="2147483648" r:id="R2810184f98c24d1e"/>
+    <p:sldMasterId xmlns:r="http://schemas.openxmlformats.org/officeDocument/2006/relationships" id="2147483648" r:id="Rb5cbba2e0ac3473f"/>
   </p:sldMasterIdLst>
   <p:notesMasterIdLst>
-    <p:notesMasterId xmlns:r="http://schemas.openxmlformats.org/officeDocument/2006/relationships" r:id="R5e9192950d0440b5"/>
+    <p:notesMasterId xmlns:r="http://schemas.openxmlformats.org/officeDocument/2006/relationships" r:id="R10b2762d7c5e48d1"/>
   </p:notesMasterIdLst>
   <p:sldIdLst>
-    <p:sldId xmlns:r="http://schemas.openxmlformats.org/officeDocument/2006/relationships" id="256" r:id="Ra1d66a24af9942ea"/>
-    <p:sldId xmlns:r="http://schemas.openxmlformats.org/officeDocument/2006/relationships" id="257" r:id="R3140e8d9c4b642eb"/>
-    <p:sldId xmlns:r="http://schemas.openxmlformats.org/officeDocument/2006/relationships" id="258" r:id="R52c957bdb41f40cf"/>
-    <p:sldId xmlns:r="http://schemas.openxmlformats.org/officeDocument/2006/relationships" id="259" r:id="Rebdf27241ddc4de6"/>
-    <p:sldId xmlns:r="http://schemas.openxmlformats.org/officeDocument/2006/relationships" id="260" r:id="Rcd433ef5c80c4cf5"/>
-    <p:sldId xmlns:r="http://schemas.openxmlformats.org/officeDocument/2006/relationships" id="261" r:id="R9d1fe6579b774e7e"/>
-    <p:sldId xmlns:r="http://schemas.openxmlformats.org/officeDocument/2006/relationships" id="262" r:id="Re09a3f583ab0406e"/>
+    <p:sldId xmlns:r="http://schemas.openxmlformats.org/officeDocument/2006/relationships" id="256" r:id="R37f1f3dfe3424300"/>
+    <p:sldId xmlns:r="http://schemas.openxmlformats.org/officeDocument/2006/relationships" id="257" r:id="R32811426b79640ed"/>
+    <p:sldId xmlns:r="http://schemas.openxmlformats.org/officeDocument/2006/relationships" id="258" r:id="R44c2cebe6fec4df8"/>
+    <p:sldId xmlns:r="http://schemas.openxmlformats.org/officeDocument/2006/relationships" id="259" r:id="R2ad2fa82263d48dc"/>
+    <p:sldId xmlns:r="http://schemas.openxmlformats.org/officeDocument/2006/relationships" id="260" r:id="Ra026b70cee504706"/>
+    <p:sldId xmlns:r="http://schemas.openxmlformats.org/officeDocument/2006/relationships" id="261" r:id="R03fbee11c8e846df"/>
+    <p:sldId xmlns:r="http://schemas.openxmlformats.org/officeDocument/2006/relationships" id="262" r:id="R11e89f04a17843eb"/>
+    <p:sldId xmlns:r="http://schemas.openxmlformats.org/officeDocument/2006/relationships" id="263" r:id="Rb0997838bc6f4098"/>
+    <p:sldId xmlns:r="http://schemas.openxmlformats.org/officeDocument/2006/relationships" id="264" r:id="Rcbc171c769fc4a05"/>
   </p:sldIdLst>
   <p:sldSz cx="18288000" cy="10287000"/>
   <p:notesSz cx="6858000" cy="9144000"/>
@@ -919,6 +921,138 @@
 </p:notes>
 </file>
 
+<file path=ppt/notesSlides/notesSlide8.xml><?xml version="1.0" encoding="utf-8"?>
+<p:notes xmlns:p="http://schemas.openxmlformats.org/presentationml/2006/main">
+  <p:cSld>
+    <p:spTree>
+      <p:nvGrpSpPr>
+        <p:cNvPr id="1" name=""/>
+        <p:cNvGrpSpPr/>
+        <p:nvPr/>
+      </p:nvGrpSpPr>
+      <p:grpSpPr>
+        <a:xfrm xmlns:a="http://schemas.openxmlformats.org/drawingml/2006/main"/>
+      </p:grpSpPr>
+      <p:sp>
+        <p:nvSpPr>
+          <p:cNvPr id="2" name="Slide Image Placeholder 1"/>
+          <p:cNvSpPr>
+            <a:spLocks xmlns:a="http://schemas.openxmlformats.org/drawingml/2006/main" noGrp="1"/>
+          </p:cNvSpPr>
+          <p:nvPr>
+            <p:ph type="sldImg" idx="0"/>
+          </p:nvPr>
+        </p:nvSpPr>
+        <p:spPr/>
+      </p:sp>
+      <p:sp>
+        <p:nvSpPr>
+          <p:cNvPr id="3" name="Notes Placeholder 2"/>
+          <p:cNvSpPr>
+            <a:spLocks xmlns:a="http://schemas.openxmlformats.org/drawingml/2006/main" noGrp="1"/>
+          </p:cNvSpPr>
+          <p:nvPr>
+            <p:ph type="body" idx="1"/>
+          </p:nvPr>
+        </p:nvSpPr>
+        <p:spPr/>
+        <p:txBody>
+          <a:bodyPr xmlns:a="http://schemas.openxmlformats.org/drawingml/2006/main"/>
+          <a:lstStyle xmlns:a="http://schemas.openxmlformats.org/drawingml/2006/main"/>
+          <a:p xmlns:a="http://schemas.openxmlformats.org/drawingml/2006/main"/>
+        </p:txBody>
+      </p:sp>
+      <p:sp>
+        <p:nvSpPr>
+          <p:cNvPr id="4" name="Slide Number Placeholder 3"/>
+          <p:cNvSpPr>
+            <a:spLocks xmlns:a="http://schemas.openxmlformats.org/drawingml/2006/main" noGrp="1"/>
+          </p:cNvSpPr>
+          <p:nvPr>
+            <p:ph type="sldNum" idx="5"/>
+          </p:nvPr>
+        </p:nvSpPr>
+        <p:spPr/>
+        <p:txBody>
+          <a:bodyPr xmlns:a="http://schemas.openxmlformats.org/drawingml/2006/main"/>
+          <a:lstStyle xmlns:a="http://schemas.openxmlformats.org/drawingml/2006/main"/>
+          <a:p xmlns:a="http://schemas.openxmlformats.org/drawingml/2006/main"/>
+        </p:txBody>
+      </p:sp>
+    </p:spTree>
+  </p:cSld>
+  <p:clrMapOvr>
+    <a:masterClrMapping xmlns:a="http://schemas.openxmlformats.org/drawingml/2006/main"/>
+  </p:clrMapOvr>
+</p:notes>
+</file>
+
+<file path=ppt/notesSlides/notesSlide9.xml><?xml version="1.0" encoding="utf-8"?>
+<p:notes xmlns:p="http://schemas.openxmlformats.org/presentationml/2006/main">
+  <p:cSld>
+    <p:spTree>
+      <p:nvGrpSpPr>
+        <p:cNvPr id="1" name=""/>
+        <p:cNvGrpSpPr/>
+        <p:nvPr/>
+      </p:nvGrpSpPr>
+      <p:grpSpPr>
+        <a:xfrm xmlns:a="http://schemas.openxmlformats.org/drawingml/2006/main"/>
+      </p:grpSpPr>
+      <p:sp>
+        <p:nvSpPr>
+          <p:cNvPr id="2" name="Slide Image Placeholder 1"/>
+          <p:cNvSpPr>
+            <a:spLocks xmlns:a="http://schemas.openxmlformats.org/drawingml/2006/main" noGrp="1"/>
+          </p:cNvSpPr>
+          <p:nvPr>
+            <p:ph type="sldImg" idx="0"/>
+          </p:nvPr>
+        </p:nvSpPr>
+        <p:spPr/>
+      </p:sp>
+      <p:sp>
+        <p:nvSpPr>
+          <p:cNvPr id="3" name="Notes Placeholder 2"/>
+          <p:cNvSpPr>
+            <a:spLocks xmlns:a="http://schemas.openxmlformats.org/drawingml/2006/main" noGrp="1"/>
+          </p:cNvSpPr>
+          <p:nvPr>
+            <p:ph type="body" idx="1"/>
+          </p:nvPr>
+        </p:nvSpPr>
+        <p:spPr/>
+        <p:txBody>
+          <a:bodyPr xmlns:a="http://schemas.openxmlformats.org/drawingml/2006/main"/>
+          <a:lstStyle xmlns:a="http://schemas.openxmlformats.org/drawingml/2006/main"/>
+          <a:p xmlns:a="http://schemas.openxmlformats.org/drawingml/2006/main"/>
+        </p:txBody>
+      </p:sp>
+      <p:sp>
+        <p:nvSpPr>
+          <p:cNvPr id="4" name="Slide Number Placeholder 3"/>
+          <p:cNvSpPr>
+            <a:spLocks xmlns:a="http://schemas.openxmlformats.org/drawingml/2006/main" noGrp="1"/>
+          </p:cNvSpPr>
+          <p:nvPr>
+            <p:ph type="sldNum" idx="5"/>
+          </p:nvPr>
+        </p:nvSpPr>
+        <p:spPr/>
+        <p:txBody>
+          <a:bodyPr xmlns:a="http://schemas.openxmlformats.org/drawingml/2006/main"/>
+          <a:lstStyle xmlns:a="http://schemas.openxmlformats.org/drawingml/2006/main"/>
+          <a:p xmlns:a="http://schemas.openxmlformats.org/drawingml/2006/main"/>
+        </p:txBody>
+      </p:sp>
+    </p:spTree>
+  </p:cSld>
+  <p:clrMapOvr>
+    <a:masterClrMapping xmlns:a="http://schemas.openxmlformats.org/drawingml/2006/main"/>
+  </p:clrMapOvr>
+</p:notes>
+</file>
+
 <file path=ppt/slideLayouts/slideLayout2.xml><?xml version="1.0" encoding="utf-8"?>
 <p:sldLayout xmlns:p="http://schemas.openxmlformats.org/presentationml/2006/main" type="title">
   <p:cSld name="Title Slide">
@@ -957,7 +1091,7 @@
   </p:cSld>
   <p:clrMap bg1="lt1" tx1="dk1" bg2="lt2" tx2="dk2" accent1="accent1" accent2="accent2" accent3="accent3" accent4="accent4" accent5="accent5" accent6="accent6" hlink="hlink" folHlink="folHlink"/>
   <p:sldLayoutIdLst>
-    <p:sldLayoutId xmlns:r="http://schemas.openxmlformats.org/officeDocument/2006/relationships" id="2147483649" r:id="R213b1f8f37b94a61"/>
+    <p:sldLayoutId xmlns:r="http://schemas.openxmlformats.org/officeDocument/2006/relationships" id="2147483649" r:id="R778834c6e6964746"/>
   </p:sldLayoutIdLst>
   <p:txStyles>
     <p:titleStyle>
@@ -1256,7 +1390,7 @@
           <p:cNvPr id="1" name="cover-eyebrow">
             <a:extLst xmlns:a="http://schemas.openxmlformats.org/drawingml/2006/main">
               <a:ext uri="{FF2B5EF4-FFF2-40B4-BE49-F238E27FC236}">
-                <a16:creationId xmlns:a16="http://schemas.microsoft.com/office/drawing/2014/main" id="{C1FF82AF-EB73-4897-8514-7026DCD11B86}"/>
+                <a16:creationId xmlns:a16="http://schemas.microsoft.com/office/drawing/2014/main" id="{8E4276E5-E613-467B-B1C9-E2A1A7EA4544}"/>
               </a:ext>
             </a:extLst>
           </p:cNvPr>
@@ -1301,7 +1435,7 @@
           <p:cNvPr id="2" name="cover-title">
             <a:extLst xmlns:a="http://schemas.openxmlformats.org/drawingml/2006/main">
               <a:ext uri="{FF2B5EF4-FFF2-40B4-BE49-F238E27FC236}">
-                <a16:creationId xmlns:a16="http://schemas.microsoft.com/office/drawing/2014/main" id="{258E4862-B04A-4946-B69A-4A8B4BE6A8BB}"/>
+                <a16:creationId xmlns:a16="http://schemas.microsoft.com/office/drawing/2014/main" id="{D93999C3-4559-4EC3-975F-13C5E1C407D0}"/>
               </a:ext>
             </a:extLst>
           </p:cNvPr>
@@ -1363,7 +1497,7 @@
           <p:cNvPr id="3" name="cover-rule">
             <a:extLst xmlns:a="http://schemas.openxmlformats.org/drawingml/2006/main">
               <a:ext uri="{FF2B5EF4-FFF2-40B4-BE49-F238E27FC236}">
-                <a16:creationId xmlns:a16="http://schemas.microsoft.com/office/drawing/2014/main" id="{89F58FC6-2F98-4256-9277-406C5D5F4BBE}"/>
+                <a16:creationId xmlns:a16="http://schemas.microsoft.com/office/drawing/2014/main" id="{22597D26-0EF7-4761-B8D9-CA5E7BD43F79}"/>
               </a:ext>
             </a:extLst>
           </p:cNvPr>
@@ -1396,7 +1530,7 @@
           <p:cNvPr id="4" name="cover-promise">
             <a:extLst xmlns:a="http://schemas.openxmlformats.org/drawingml/2006/main">
               <a:ext uri="{FF2B5EF4-FFF2-40B4-BE49-F238E27FC236}">
-                <a16:creationId xmlns:a16="http://schemas.microsoft.com/office/drawing/2014/main" id="{2EEA85DD-0316-44D2-9872-BBA9C3190C42}"/>
+                <a16:creationId xmlns:a16="http://schemas.microsoft.com/office/drawing/2014/main" id="{879119F7-9A7A-484C-941A-20B35F0BF0E0}"/>
               </a:ext>
             </a:extLst>
           </p:cNvPr>
@@ -1441,7 +1575,7 @@
           <p:cNvPr id="5" name="">
             <a:extLst xmlns:a="http://schemas.openxmlformats.org/drawingml/2006/main">
               <a:ext uri="{FF2B5EF4-FFF2-40B4-BE49-F238E27FC236}">
-                <a16:creationId xmlns:a16="http://schemas.microsoft.com/office/drawing/2014/main" id="{00DC93C9-D5FE-45F7-8F6F-1EAABD521084}"/>
+                <a16:creationId xmlns:a16="http://schemas.microsoft.com/office/drawing/2014/main" id="{9A14D62F-D72C-467F-8A9C-BBB9AF7A6DE0}"/>
               </a:ext>
             </a:extLst>
           </p:cNvPr>
@@ -1486,7 +1620,7 @@
           <p:cNvPr id="6" name="">
             <a:extLst xmlns:a="http://schemas.openxmlformats.org/drawingml/2006/main">
               <a:ext uri="{FF2B5EF4-FFF2-40B4-BE49-F238E27FC236}">
-                <a16:creationId xmlns:a16="http://schemas.microsoft.com/office/drawing/2014/main" id="{852760E3-5373-47E0-84D9-02AB1CEF6F33}"/>
+                <a16:creationId xmlns:a16="http://schemas.microsoft.com/office/drawing/2014/main" id="{DAB96C73-5A62-4308-84C2-B282297E3193}"/>
               </a:ext>
             </a:extLst>
           </p:cNvPr>
@@ -1529,7 +1663,7 @@
     </p:spTree>
     <p:extLst>
       <p:ext uri="{BB962C8B-B14F-4D97-AF65-F5344CB8AC3E}">
-        <p14:creationId xmlns:p14="http://schemas.microsoft.com/office/powerpoint/2010/main" val="18973046"/>
+        <p14:creationId xmlns:p14="http://schemas.microsoft.com/office/powerpoint/2010/main" val="198226493"/>
       </p:ext>
     </p:extLst>
   </p:cSld>
@@ -1553,7 +1687,7 @@
           <p:cNvPr id="1" name="slide-title-2">
             <a:extLst xmlns:a="http://schemas.openxmlformats.org/drawingml/2006/main">
               <a:ext uri="{FF2B5EF4-FFF2-40B4-BE49-F238E27FC236}">
-                <a16:creationId xmlns:a16="http://schemas.microsoft.com/office/drawing/2014/main" id="{4B452F6C-08B4-411C-8B42-567FB766A596}"/>
+                <a16:creationId xmlns:a16="http://schemas.microsoft.com/office/drawing/2014/main" id="{D8E933A0-E0C2-434C-8514-4FDD4BEAC2DA}"/>
               </a:ext>
             </a:extLst>
           </p:cNvPr>
@@ -1598,7 +1732,7 @@
           <p:cNvPr id="2" name="slide-subtitle-2">
             <a:extLst xmlns:a="http://schemas.openxmlformats.org/drawingml/2006/main">
               <a:ext uri="{FF2B5EF4-FFF2-40B4-BE49-F238E27FC236}">
-                <a16:creationId xmlns:a16="http://schemas.microsoft.com/office/drawing/2014/main" id="{EDED5141-F9E9-4A0B-B798-DBB0751DCC11}"/>
+                <a16:creationId xmlns:a16="http://schemas.microsoft.com/office/drawing/2014/main" id="{A82B9491-D041-4730-95C7-A7A0D854C5D2}"/>
               </a:ext>
             </a:extLst>
           </p:cNvPr>
@@ -1643,7 +1777,7 @@
           <p:cNvPr id="3" name="">
             <a:extLst xmlns:a="http://schemas.openxmlformats.org/drawingml/2006/main">
               <a:ext uri="{FF2B5EF4-FFF2-40B4-BE49-F238E27FC236}">
-                <a16:creationId xmlns:a16="http://schemas.microsoft.com/office/drawing/2014/main" id="{2A8208C6-73AC-47D4-AB43-DB9BDA209D76}"/>
+                <a16:creationId xmlns:a16="http://schemas.microsoft.com/office/drawing/2014/main" id="{42583A58-C302-4A42-A6BE-67739D341152}"/>
               </a:ext>
             </a:extLst>
           </p:cNvPr>
@@ -1688,7 +1822,7 @@
           <p:cNvPr id="4" name="">
             <a:extLst xmlns:a="http://schemas.openxmlformats.org/drawingml/2006/main">
               <a:ext uri="{FF2B5EF4-FFF2-40B4-BE49-F238E27FC236}">
-                <a16:creationId xmlns:a16="http://schemas.microsoft.com/office/drawing/2014/main" id="{F0270D8A-FDA8-4B76-B02B-2DA2EBEDF707}"/>
+                <a16:creationId xmlns:a16="http://schemas.microsoft.com/office/drawing/2014/main" id="{47611044-AF04-4262-8652-86713A2B70D0}"/>
               </a:ext>
             </a:extLst>
           </p:cNvPr>
@@ -1733,7 +1867,7 @@
           <p:cNvPr id="5" name="">
             <a:extLst xmlns:a="http://schemas.openxmlformats.org/drawingml/2006/main">
               <a:ext uri="{FF2B5EF4-FFF2-40B4-BE49-F238E27FC236}">
-                <a16:creationId xmlns:a16="http://schemas.microsoft.com/office/drawing/2014/main" id="{3E07E0E0-9F87-454B-87F9-98BEE07BA088}"/>
+                <a16:creationId xmlns:a16="http://schemas.microsoft.com/office/drawing/2014/main" id="{E1A15761-0D54-43FA-95FC-271094DF0008}"/>
               </a:ext>
             </a:extLst>
           </p:cNvPr>
@@ -1778,7 +1912,7 @@
           <p:cNvPr id="6" name="">
             <a:extLst xmlns:a="http://schemas.openxmlformats.org/drawingml/2006/main">
               <a:ext uri="{FF2B5EF4-FFF2-40B4-BE49-F238E27FC236}">
-                <a16:creationId xmlns:a16="http://schemas.microsoft.com/office/drawing/2014/main" id="{D52C677A-EC75-4FD0-A0F2-CBC0A615EE81}"/>
+                <a16:creationId xmlns:a16="http://schemas.microsoft.com/office/drawing/2014/main" id="{A87C7344-F7EA-414C-88A5-79166BC15D17}"/>
               </a:ext>
             </a:extLst>
           </p:cNvPr>
@@ -1823,7 +1957,7 @@
           <p:cNvPr id="7" name="">
             <a:extLst xmlns:a="http://schemas.openxmlformats.org/drawingml/2006/main">
               <a:ext uri="{FF2B5EF4-FFF2-40B4-BE49-F238E27FC236}">
-                <a16:creationId xmlns:a16="http://schemas.microsoft.com/office/drawing/2014/main" id="{DCA32F67-7D4D-4623-AC30-87159013FC30}"/>
+                <a16:creationId xmlns:a16="http://schemas.microsoft.com/office/drawing/2014/main" id="{51682D90-0B64-4E26-90D9-2D3785FF9098}"/>
               </a:ext>
             </a:extLst>
           </p:cNvPr>
@@ -1868,7 +2002,7 @@
           <p:cNvPr id="8" name="">
             <a:extLst xmlns:a="http://schemas.openxmlformats.org/drawingml/2006/main">
               <a:ext uri="{FF2B5EF4-FFF2-40B4-BE49-F238E27FC236}">
-                <a16:creationId xmlns:a16="http://schemas.microsoft.com/office/drawing/2014/main" id="{44DF3384-A9C3-4055-A9B2-497779D9FFF5}"/>
+                <a16:creationId xmlns:a16="http://schemas.microsoft.com/office/drawing/2014/main" id="{6C1E58D0-9F9F-4A2B-B361-4C829999751E}"/>
               </a:ext>
             </a:extLst>
           </p:cNvPr>
@@ -1913,7 +2047,7 @@
           <p:cNvPr id="9" name="">
             <a:extLst xmlns:a="http://schemas.openxmlformats.org/drawingml/2006/main">
               <a:ext uri="{FF2B5EF4-FFF2-40B4-BE49-F238E27FC236}">
-                <a16:creationId xmlns:a16="http://schemas.microsoft.com/office/drawing/2014/main" id="{2D07FB65-5F88-4D58-85F5-87745BF90739}"/>
+                <a16:creationId xmlns:a16="http://schemas.microsoft.com/office/drawing/2014/main" id="{711963B1-889B-4FCC-803F-E900C8E58866}"/>
               </a:ext>
             </a:extLst>
           </p:cNvPr>
@@ -1958,7 +2092,7 @@
           <p:cNvPr id="10" name="">
             <a:extLst xmlns:a="http://schemas.openxmlformats.org/drawingml/2006/main">
               <a:ext uri="{FF2B5EF4-FFF2-40B4-BE49-F238E27FC236}">
-                <a16:creationId xmlns:a16="http://schemas.microsoft.com/office/drawing/2014/main" id="{0DDF4FB5-D752-4968-8876-A0BC4D227D8F}"/>
+                <a16:creationId xmlns:a16="http://schemas.microsoft.com/office/drawing/2014/main" id="{89C0DC7C-8710-43EB-A21D-80E784A9F897}"/>
               </a:ext>
             </a:extLst>
           </p:cNvPr>
@@ -2003,7 +2137,7 @@
           <p:cNvPr id="11" name="">
             <a:extLst xmlns:a="http://schemas.openxmlformats.org/drawingml/2006/main">
               <a:ext uri="{FF2B5EF4-FFF2-40B4-BE49-F238E27FC236}">
-                <a16:creationId xmlns:a16="http://schemas.microsoft.com/office/drawing/2014/main" id="{D47D4A17-0074-4800-9F20-60778A2C2135}"/>
+                <a16:creationId xmlns:a16="http://schemas.microsoft.com/office/drawing/2014/main" id="{7CB63386-642E-484D-A6BF-21FA1D70A652}"/>
               </a:ext>
             </a:extLst>
           </p:cNvPr>
@@ -2048,7 +2182,7 @@
           <p:cNvPr id="12" name="">
             <a:extLst xmlns:a="http://schemas.openxmlformats.org/drawingml/2006/main">
               <a:ext uri="{FF2B5EF4-FFF2-40B4-BE49-F238E27FC236}">
-                <a16:creationId xmlns:a16="http://schemas.microsoft.com/office/drawing/2014/main" id="{5622CBF2-1ACE-4F6D-958F-822F5BDDB461}"/>
+                <a16:creationId xmlns:a16="http://schemas.microsoft.com/office/drawing/2014/main" id="{2F8EAA14-06BB-4202-8152-1DCAE89B6C46}"/>
               </a:ext>
             </a:extLst>
           </p:cNvPr>
@@ -2093,7 +2227,7 @@
           <p:cNvPr id="13" name="">
             <a:extLst xmlns:a="http://schemas.openxmlformats.org/drawingml/2006/main">
               <a:ext uri="{FF2B5EF4-FFF2-40B4-BE49-F238E27FC236}">
-                <a16:creationId xmlns:a16="http://schemas.microsoft.com/office/drawing/2014/main" id="{A955C5F0-2431-4702-AB59-6CA9B9F087E3}"/>
+                <a16:creationId xmlns:a16="http://schemas.microsoft.com/office/drawing/2014/main" id="{E943573E-6989-4AC1-952F-376776C61AF2}"/>
               </a:ext>
             </a:extLst>
           </p:cNvPr>
@@ -2138,7 +2272,7 @@
           <p:cNvPr id="14" name="">
             <a:extLst xmlns:a="http://schemas.openxmlformats.org/drawingml/2006/main">
               <a:ext uri="{FF2B5EF4-FFF2-40B4-BE49-F238E27FC236}">
-                <a16:creationId xmlns:a16="http://schemas.microsoft.com/office/drawing/2014/main" id="{BF93E95D-B27D-49CB-9D2C-73366D0DD301}"/>
+                <a16:creationId xmlns:a16="http://schemas.microsoft.com/office/drawing/2014/main" id="{F0194758-8133-4278-87DD-C17223335E13}"/>
               </a:ext>
             </a:extLst>
           </p:cNvPr>
@@ -2183,7 +2317,7 @@
           <p:cNvPr id="15" name="">
             <a:extLst xmlns:a="http://schemas.openxmlformats.org/drawingml/2006/main">
               <a:ext uri="{FF2B5EF4-FFF2-40B4-BE49-F238E27FC236}">
-                <a16:creationId xmlns:a16="http://schemas.microsoft.com/office/drawing/2014/main" id="{87A8DAC8-D3EC-4691-A25D-46B30256BA81}"/>
+                <a16:creationId xmlns:a16="http://schemas.microsoft.com/office/drawing/2014/main" id="{ACA9C644-ACE8-4F4E-B565-8596DA3C67F8}"/>
               </a:ext>
             </a:extLst>
           </p:cNvPr>
@@ -2228,7 +2362,7 @@
           <p:cNvPr id="16" name="">
             <a:extLst xmlns:a="http://schemas.openxmlformats.org/drawingml/2006/main">
               <a:ext uri="{FF2B5EF4-FFF2-40B4-BE49-F238E27FC236}">
-                <a16:creationId xmlns:a16="http://schemas.microsoft.com/office/drawing/2014/main" id="{433F39CB-B191-4E41-9006-71716F9CEBAD}"/>
+                <a16:creationId xmlns:a16="http://schemas.microsoft.com/office/drawing/2014/main" id="{A85B4588-C6FA-4541-A07A-516AB2E93E82}"/>
               </a:ext>
             </a:extLst>
           </p:cNvPr>
@@ -2273,7 +2407,7 @@
           <p:cNvPr id="17" name="source-2">
             <a:extLst xmlns:a="http://schemas.openxmlformats.org/drawingml/2006/main">
               <a:ext uri="{FF2B5EF4-FFF2-40B4-BE49-F238E27FC236}">
-                <a16:creationId xmlns:a16="http://schemas.microsoft.com/office/drawing/2014/main" id="{9E6194ED-2EE5-4E46-964A-FB0BBA6B225C}"/>
+                <a16:creationId xmlns:a16="http://schemas.microsoft.com/office/drawing/2014/main" id="{DEF29105-064C-40E2-A737-E9F51B51DE0C}"/>
               </a:ext>
             </a:extLst>
           </p:cNvPr>
@@ -2318,7 +2452,7 @@
           <p:cNvPr id="18" name="page-2">
             <a:extLst xmlns:a="http://schemas.openxmlformats.org/drawingml/2006/main">
               <a:ext uri="{FF2B5EF4-FFF2-40B4-BE49-F238E27FC236}">
-                <a16:creationId xmlns:a16="http://schemas.microsoft.com/office/drawing/2014/main" id="{3653E325-717F-472D-874B-632F24525380}"/>
+                <a16:creationId xmlns:a16="http://schemas.microsoft.com/office/drawing/2014/main" id="{42B29973-1A15-49AB-BF44-FA0D4BC65E6E}"/>
               </a:ext>
             </a:extLst>
           </p:cNvPr>
@@ -2361,7 +2495,7 @@
     </p:spTree>
     <p:extLst>
       <p:ext uri="{BB962C8B-B14F-4D97-AF65-F5344CB8AC3E}">
-        <p14:creationId xmlns:p14="http://schemas.microsoft.com/office/powerpoint/2010/main" val="1220336490"/>
+        <p14:creationId xmlns:p14="http://schemas.microsoft.com/office/powerpoint/2010/main" val="2072211796"/>
       </p:ext>
     </p:extLst>
   </p:cSld>
@@ -2385,7 +2519,7 @@
           <p:cNvPr id="1" name="slide-title-3">
             <a:extLst xmlns:a="http://schemas.openxmlformats.org/drawingml/2006/main">
               <a:ext uri="{FF2B5EF4-FFF2-40B4-BE49-F238E27FC236}">
-                <a16:creationId xmlns:a16="http://schemas.microsoft.com/office/drawing/2014/main" id="{84C0CB92-935C-4C10-8150-F7B6AA9DACB6}"/>
+                <a16:creationId xmlns:a16="http://schemas.microsoft.com/office/drawing/2014/main" id="{07B5498C-EBE3-4879-9D26-276E1B52C39A}"/>
               </a:ext>
             </a:extLst>
           </p:cNvPr>
@@ -2430,7 +2564,7 @@
           <p:cNvPr id="2" name="slide-subtitle-3">
             <a:extLst xmlns:a="http://schemas.openxmlformats.org/drawingml/2006/main">
               <a:ext uri="{FF2B5EF4-FFF2-40B4-BE49-F238E27FC236}">
-                <a16:creationId xmlns:a16="http://schemas.microsoft.com/office/drawing/2014/main" id="{FF835CF1-8F59-4884-A4CF-F99F78A9DBCC}"/>
+                <a16:creationId xmlns:a16="http://schemas.microsoft.com/office/drawing/2014/main" id="{90994DF5-A98C-4F4E-9A21-C82F74D64AF5}"/>
               </a:ext>
             </a:extLst>
           </p:cNvPr>
@@ -2475,7 +2609,7 @@
           <p:cNvPr id="3" name="">
             <a:extLst xmlns:a="http://schemas.openxmlformats.org/drawingml/2006/main">
               <a:ext uri="{FF2B5EF4-FFF2-40B4-BE49-F238E27FC236}">
-                <a16:creationId xmlns:a16="http://schemas.microsoft.com/office/drawing/2014/main" id="{EF3FF73A-564F-4ED4-ADD4-5DA99482B565}"/>
+                <a16:creationId xmlns:a16="http://schemas.microsoft.com/office/drawing/2014/main" id="{CAC390E1-0866-4911-8AD0-639F3A742615}"/>
               </a:ext>
             </a:extLst>
           </p:cNvPr>
@@ -2520,7 +2654,7 @@
           <p:cNvPr id="4" name="">
             <a:extLst xmlns:a="http://schemas.openxmlformats.org/drawingml/2006/main">
               <a:ext uri="{FF2B5EF4-FFF2-40B4-BE49-F238E27FC236}">
-                <a16:creationId xmlns:a16="http://schemas.microsoft.com/office/drawing/2014/main" id="{7DFF3235-3F0E-48B8-9B27-E61AEEF6F608}"/>
+                <a16:creationId xmlns:a16="http://schemas.microsoft.com/office/drawing/2014/main" id="{9298DF1B-6D36-46FC-9DCF-5A1FACF2F236}"/>
               </a:ext>
             </a:extLst>
           </p:cNvPr>
@@ -2565,7 +2699,7 @@
           <p:cNvPr id="5" name="">
             <a:extLst xmlns:a="http://schemas.openxmlformats.org/drawingml/2006/main">
               <a:ext uri="{FF2B5EF4-FFF2-40B4-BE49-F238E27FC236}">
-                <a16:creationId xmlns:a16="http://schemas.microsoft.com/office/drawing/2014/main" id="{C634AB80-AA1F-401A-B3B0-C7DA656E4083}"/>
+                <a16:creationId xmlns:a16="http://schemas.microsoft.com/office/drawing/2014/main" id="{8A8A24A2-5087-40EB-A6FA-74C95F504B72}"/>
               </a:ext>
             </a:extLst>
           </p:cNvPr>
@@ -2610,7 +2744,7 @@
           <p:cNvPr id="6" name="">
             <a:extLst xmlns:a="http://schemas.openxmlformats.org/drawingml/2006/main">
               <a:ext uri="{FF2B5EF4-FFF2-40B4-BE49-F238E27FC236}">
-                <a16:creationId xmlns:a16="http://schemas.microsoft.com/office/drawing/2014/main" id="{C46D04CC-40BB-4CF5-90F2-AE316A70F197}"/>
+                <a16:creationId xmlns:a16="http://schemas.microsoft.com/office/drawing/2014/main" id="{33BB8B82-A25C-4477-AE60-50A1C3C9FB6F}"/>
               </a:ext>
             </a:extLst>
           </p:cNvPr>
@@ -2655,7 +2789,7 @@
           <p:cNvPr id="7" name="">
             <a:extLst xmlns:a="http://schemas.openxmlformats.org/drawingml/2006/main">
               <a:ext uri="{FF2B5EF4-FFF2-40B4-BE49-F238E27FC236}">
-                <a16:creationId xmlns:a16="http://schemas.microsoft.com/office/drawing/2014/main" id="{B3C9F9B4-1320-4196-B764-347325A1D5B6}"/>
+                <a16:creationId xmlns:a16="http://schemas.microsoft.com/office/drawing/2014/main" id="{08A6E330-A756-4897-9DA3-42C08E84DD17}"/>
               </a:ext>
             </a:extLst>
           </p:cNvPr>
@@ -2700,7 +2834,7 @@
           <p:cNvPr id="8" name="">
             <a:extLst xmlns:a="http://schemas.openxmlformats.org/drawingml/2006/main">
               <a:ext uri="{FF2B5EF4-FFF2-40B4-BE49-F238E27FC236}">
-                <a16:creationId xmlns:a16="http://schemas.microsoft.com/office/drawing/2014/main" id="{B900B501-ED7C-465E-B086-83B342A83666}"/>
+                <a16:creationId xmlns:a16="http://schemas.microsoft.com/office/drawing/2014/main" id="{40A62964-1094-4DB4-89AB-295BE97A7B5C}"/>
               </a:ext>
             </a:extLst>
           </p:cNvPr>
@@ -2745,7 +2879,7 @@
           <p:cNvPr id="9" name="">
             <a:extLst xmlns:a="http://schemas.openxmlformats.org/drawingml/2006/main">
               <a:ext uri="{FF2B5EF4-FFF2-40B4-BE49-F238E27FC236}">
-                <a16:creationId xmlns:a16="http://schemas.microsoft.com/office/drawing/2014/main" id="{36D078EA-A01C-49F1-8752-0D32423EF3C8}"/>
+                <a16:creationId xmlns:a16="http://schemas.microsoft.com/office/drawing/2014/main" id="{86448C2C-F5FB-4C24-A12B-211130B70287}"/>
               </a:ext>
             </a:extLst>
           </p:cNvPr>
@@ -2790,7 +2924,7 @@
           <p:cNvPr id="10" name="">
             <a:extLst xmlns:a="http://schemas.openxmlformats.org/drawingml/2006/main">
               <a:ext uri="{FF2B5EF4-FFF2-40B4-BE49-F238E27FC236}">
-                <a16:creationId xmlns:a16="http://schemas.microsoft.com/office/drawing/2014/main" id="{9C4CF0ED-C378-4435-88CF-41694AC59D8A}"/>
+                <a16:creationId xmlns:a16="http://schemas.microsoft.com/office/drawing/2014/main" id="{4F393D0F-8384-42E8-B71F-B4F151D14923}"/>
               </a:ext>
             </a:extLst>
           </p:cNvPr>
@@ -2835,7 +2969,7 @@
           <p:cNvPr id="11" name="">
             <a:extLst xmlns:a="http://schemas.openxmlformats.org/drawingml/2006/main">
               <a:ext uri="{FF2B5EF4-FFF2-40B4-BE49-F238E27FC236}">
-                <a16:creationId xmlns:a16="http://schemas.microsoft.com/office/drawing/2014/main" id="{8FFD9DA4-A82C-447B-B340-2088DE1D4713}"/>
+                <a16:creationId xmlns:a16="http://schemas.microsoft.com/office/drawing/2014/main" id="{37BB8C3E-A332-47EC-9CBE-33B2C8397555}"/>
               </a:ext>
             </a:extLst>
           </p:cNvPr>
@@ -2880,7 +3014,7 @@
           <p:cNvPr id="12" name="">
             <a:extLst xmlns:a="http://schemas.openxmlformats.org/drawingml/2006/main">
               <a:ext uri="{FF2B5EF4-FFF2-40B4-BE49-F238E27FC236}">
-                <a16:creationId xmlns:a16="http://schemas.microsoft.com/office/drawing/2014/main" id="{8C8F75EA-2760-4680-8717-596E595CD40F}"/>
+                <a16:creationId xmlns:a16="http://schemas.microsoft.com/office/drawing/2014/main" id="{E6E86C6C-2964-4E49-93CD-3C55E5485159}"/>
               </a:ext>
             </a:extLst>
           </p:cNvPr>
@@ -2925,7 +3059,7 @@
           <p:cNvPr id="13" name="">
             <a:extLst xmlns:a="http://schemas.openxmlformats.org/drawingml/2006/main">
               <a:ext uri="{FF2B5EF4-FFF2-40B4-BE49-F238E27FC236}">
-                <a16:creationId xmlns:a16="http://schemas.microsoft.com/office/drawing/2014/main" id="{2B221123-3C23-4598-A785-035A6D3D0E77}"/>
+                <a16:creationId xmlns:a16="http://schemas.microsoft.com/office/drawing/2014/main" id="{F22D7452-9D29-4A5C-B468-C255ECD5B9CB}"/>
               </a:ext>
             </a:extLst>
           </p:cNvPr>
@@ -2970,7 +3104,7 @@
           <p:cNvPr id="14" name="">
             <a:extLst xmlns:a="http://schemas.openxmlformats.org/drawingml/2006/main">
               <a:ext uri="{FF2B5EF4-FFF2-40B4-BE49-F238E27FC236}">
-                <a16:creationId xmlns:a16="http://schemas.microsoft.com/office/drawing/2014/main" id="{CB3EB4CD-7D7C-450F-88DD-D32694889F23}"/>
+                <a16:creationId xmlns:a16="http://schemas.microsoft.com/office/drawing/2014/main" id="{C73E37E9-6B0F-4553-8A01-C52C6C9C09C0}"/>
               </a:ext>
             </a:extLst>
           </p:cNvPr>
@@ -3015,7 +3149,7 @@
           <p:cNvPr id="15" name="">
             <a:extLst xmlns:a="http://schemas.openxmlformats.org/drawingml/2006/main">
               <a:ext uri="{FF2B5EF4-FFF2-40B4-BE49-F238E27FC236}">
-                <a16:creationId xmlns:a16="http://schemas.microsoft.com/office/drawing/2014/main" id="{9F69CB3B-D1BB-4F1A-A369-C09700BBD497}"/>
+                <a16:creationId xmlns:a16="http://schemas.microsoft.com/office/drawing/2014/main" id="{C518191D-75FF-43B6-BFCF-A8139A0601B6}"/>
               </a:ext>
             </a:extLst>
           </p:cNvPr>
@@ -3060,7 +3194,7 @@
           <p:cNvPr id="16" name="">
             <a:extLst xmlns:a="http://schemas.openxmlformats.org/drawingml/2006/main">
               <a:ext uri="{FF2B5EF4-FFF2-40B4-BE49-F238E27FC236}">
-                <a16:creationId xmlns:a16="http://schemas.microsoft.com/office/drawing/2014/main" id="{677C4D0B-8025-4C56-8F14-EF3FE15FFF5C}"/>
+                <a16:creationId xmlns:a16="http://schemas.microsoft.com/office/drawing/2014/main" id="{A28AFA15-CBDD-4103-B9F9-B3B3CBE65A1E}"/>
               </a:ext>
             </a:extLst>
           </p:cNvPr>
@@ -3105,7 +3239,7 @@
           <p:cNvPr id="17" name="">
             <a:extLst xmlns:a="http://schemas.openxmlformats.org/drawingml/2006/main">
               <a:ext uri="{FF2B5EF4-FFF2-40B4-BE49-F238E27FC236}">
-                <a16:creationId xmlns:a16="http://schemas.microsoft.com/office/drawing/2014/main" id="{EE3A2F1F-7EEF-43D7-8E36-E480D6154688}"/>
+                <a16:creationId xmlns:a16="http://schemas.microsoft.com/office/drawing/2014/main" id="{69FA13AB-A41D-4500-AE89-855AA347F56C}"/>
               </a:ext>
             </a:extLst>
           </p:cNvPr>
@@ -3150,7 +3284,7 @@
           <p:cNvPr id="18" name="">
             <a:extLst xmlns:a="http://schemas.openxmlformats.org/drawingml/2006/main">
               <a:ext uri="{FF2B5EF4-FFF2-40B4-BE49-F238E27FC236}">
-                <a16:creationId xmlns:a16="http://schemas.microsoft.com/office/drawing/2014/main" id="{4903FCF6-EDEA-45C5-ABDF-63E3D3443790}"/>
+                <a16:creationId xmlns:a16="http://schemas.microsoft.com/office/drawing/2014/main" id="{5947D1CF-77B7-458E-9FD4-75EECF4A9747}"/>
               </a:ext>
             </a:extLst>
           </p:cNvPr>
@@ -3195,7 +3329,7 @@
           <p:cNvPr id="19" name="">
             <a:extLst xmlns:a="http://schemas.openxmlformats.org/drawingml/2006/main">
               <a:ext uri="{FF2B5EF4-FFF2-40B4-BE49-F238E27FC236}">
-                <a16:creationId xmlns:a16="http://schemas.microsoft.com/office/drawing/2014/main" id="{6387421A-CCFB-48FA-AD00-AC8E355DAFFF}"/>
+                <a16:creationId xmlns:a16="http://schemas.microsoft.com/office/drawing/2014/main" id="{EE591F54-5E7D-4089-8023-BCA60BF73369}"/>
               </a:ext>
             </a:extLst>
           </p:cNvPr>
@@ -3240,7 +3374,7 @@
           <p:cNvPr id="20" name="">
             <a:extLst xmlns:a="http://schemas.openxmlformats.org/drawingml/2006/main">
               <a:ext uri="{FF2B5EF4-FFF2-40B4-BE49-F238E27FC236}">
-                <a16:creationId xmlns:a16="http://schemas.microsoft.com/office/drawing/2014/main" id="{A7A31D58-1431-4386-B2EA-FB08A4B73A0F}"/>
+                <a16:creationId xmlns:a16="http://schemas.microsoft.com/office/drawing/2014/main" id="{0AE0613B-7366-4E27-BFFE-771C359B80F8}"/>
               </a:ext>
             </a:extLst>
           </p:cNvPr>
@@ -3285,7 +3419,7 @@
           <p:cNvPr id="21" name="">
             <a:extLst xmlns:a="http://schemas.openxmlformats.org/drawingml/2006/main">
               <a:ext uri="{FF2B5EF4-FFF2-40B4-BE49-F238E27FC236}">
-                <a16:creationId xmlns:a16="http://schemas.microsoft.com/office/drawing/2014/main" id="{4066BC54-954B-43CB-823D-B7951334B42A}"/>
+                <a16:creationId xmlns:a16="http://schemas.microsoft.com/office/drawing/2014/main" id="{98DFCAD3-5FC4-47E6-B2AD-9A74F709D8A0}"/>
               </a:ext>
             </a:extLst>
           </p:cNvPr>
@@ -3330,7 +3464,7 @@
           <p:cNvPr id="22" name="">
             <a:extLst xmlns:a="http://schemas.openxmlformats.org/drawingml/2006/main">
               <a:ext uri="{FF2B5EF4-FFF2-40B4-BE49-F238E27FC236}">
-                <a16:creationId xmlns:a16="http://schemas.microsoft.com/office/drawing/2014/main" id="{416378FC-0A30-4B67-8F63-5026CE34BA10}"/>
+                <a16:creationId xmlns:a16="http://schemas.microsoft.com/office/drawing/2014/main" id="{8AFF9757-6A48-474A-AF7B-88BC44371434}"/>
               </a:ext>
             </a:extLst>
           </p:cNvPr>
@@ -3375,7 +3509,7 @@
           <p:cNvPr id="23" name="">
             <a:extLst xmlns:a="http://schemas.openxmlformats.org/drawingml/2006/main">
               <a:ext uri="{FF2B5EF4-FFF2-40B4-BE49-F238E27FC236}">
-                <a16:creationId xmlns:a16="http://schemas.microsoft.com/office/drawing/2014/main" id="{BC4E2B10-0B33-4479-A5CA-171A4E6887D6}"/>
+                <a16:creationId xmlns:a16="http://schemas.microsoft.com/office/drawing/2014/main" id="{11E0BFBC-B6CE-4922-9F26-3321DE9375C3}"/>
               </a:ext>
             </a:extLst>
           </p:cNvPr>
@@ -3420,7 +3554,7 @@
           <p:cNvPr id="24" name="">
             <a:extLst xmlns:a="http://schemas.openxmlformats.org/drawingml/2006/main">
               <a:ext uri="{FF2B5EF4-FFF2-40B4-BE49-F238E27FC236}">
-                <a16:creationId xmlns:a16="http://schemas.microsoft.com/office/drawing/2014/main" id="{473A03C3-218F-4DF8-933D-29455173F57C}"/>
+                <a16:creationId xmlns:a16="http://schemas.microsoft.com/office/drawing/2014/main" id="{67408896-62C7-406B-8631-FB8F92FEC66D}"/>
               </a:ext>
             </a:extLst>
           </p:cNvPr>
@@ -3465,7 +3599,7 @@
           <p:cNvPr id="25" name="">
             <a:extLst xmlns:a="http://schemas.openxmlformats.org/drawingml/2006/main">
               <a:ext uri="{FF2B5EF4-FFF2-40B4-BE49-F238E27FC236}">
-                <a16:creationId xmlns:a16="http://schemas.microsoft.com/office/drawing/2014/main" id="{B3FAE313-8C8A-4668-9EC1-B08F5BC78167}"/>
+                <a16:creationId xmlns:a16="http://schemas.microsoft.com/office/drawing/2014/main" id="{8989D13E-F53A-40A7-BC9B-BE5A3FB8E8D8}"/>
               </a:ext>
             </a:extLst>
           </p:cNvPr>
@@ -3510,7 +3644,7 @@
           <p:cNvPr id="26" name="">
             <a:extLst xmlns:a="http://schemas.openxmlformats.org/drawingml/2006/main">
               <a:ext uri="{FF2B5EF4-FFF2-40B4-BE49-F238E27FC236}">
-                <a16:creationId xmlns:a16="http://schemas.microsoft.com/office/drawing/2014/main" id="{4EF51C81-C06F-4118-9107-4E38BE37646F}"/>
+                <a16:creationId xmlns:a16="http://schemas.microsoft.com/office/drawing/2014/main" id="{D7E9F77F-0F43-4733-92F0-084ADD5B55FF}"/>
               </a:ext>
             </a:extLst>
           </p:cNvPr>
@@ -3555,7 +3689,7 @@
           <p:cNvPr id="27" name="property-key-3">
             <a:extLst xmlns:a="http://schemas.openxmlformats.org/drawingml/2006/main">
               <a:ext uri="{FF2B5EF4-FFF2-40B4-BE49-F238E27FC236}">
-                <a16:creationId xmlns:a16="http://schemas.microsoft.com/office/drawing/2014/main" id="{F0D8487F-D99D-45FD-9602-282EC6B41729}"/>
+                <a16:creationId xmlns:a16="http://schemas.microsoft.com/office/drawing/2014/main" id="{1337453D-04EB-49AD-B749-07500BFA1314}"/>
               </a:ext>
             </a:extLst>
           </p:cNvPr>
@@ -3600,7 +3734,7 @@
           <p:cNvPr id="28" name="source-3">
             <a:extLst xmlns:a="http://schemas.openxmlformats.org/drawingml/2006/main">
               <a:ext uri="{FF2B5EF4-FFF2-40B4-BE49-F238E27FC236}">
-                <a16:creationId xmlns:a16="http://schemas.microsoft.com/office/drawing/2014/main" id="{BC1E58D3-8886-42A7-9197-56B2587F3D0F}"/>
+                <a16:creationId xmlns:a16="http://schemas.microsoft.com/office/drawing/2014/main" id="{F5A9331C-D5FE-4AC1-A740-7079DB790F32}"/>
               </a:ext>
             </a:extLst>
           </p:cNvPr>
@@ -3645,7 +3779,7 @@
           <p:cNvPr id="29" name="page-3">
             <a:extLst xmlns:a="http://schemas.openxmlformats.org/drawingml/2006/main">
               <a:ext uri="{FF2B5EF4-FFF2-40B4-BE49-F238E27FC236}">
-                <a16:creationId xmlns:a16="http://schemas.microsoft.com/office/drawing/2014/main" id="{81A984CF-7F7F-4990-B567-A6A95C3E0C25}"/>
+                <a16:creationId xmlns:a16="http://schemas.microsoft.com/office/drawing/2014/main" id="{C66B28E6-7B54-4B19-B7DB-EBC90D333CFF}"/>
               </a:ext>
             </a:extLst>
           </p:cNvPr>
@@ -3688,7 +3822,7 @@
     </p:spTree>
     <p:extLst>
       <p:ext uri="{BB962C8B-B14F-4D97-AF65-F5344CB8AC3E}">
-        <p14:creationId xmlns:p14="http://schemas.microsoft.com/office/powerpoint/2010/main" val="1568093993"/>
+        <p14:creationId xmlns:p14="http://schemas.microsoft.com/office/powerpoint/2010/main" val="1094102114"/>
       </p:ext>
     </p:extLst>
   </p:cSld>
@@ -3712,7 +3846,7 @@
           <p:cNvPr id="1" name="slide-title-4">
             <a:extLst xmlns:a="http://schemas.openxmlformats.org/drawingml/2006/main">
               <a:ext uri="{FF2B5EF4-FFF2-40B4-BE49-F238E27FC236}">
-                <a16:creationId xmlns:a16="http://schemas.microsoft.com/office/drawing/2014/main" id="{01160476-BC88-4AC5-BA95-0395DF4327F7}"/>
+                <a16:creationId xmlns:a16="http://schemas.microsoft.com/office/drawing/2014/main" id="{2D3C04FC-1886-486B-A958-FFFAF4EEB4B7}"/>
               </a:ext>
             </a:extLst>
           </p:cNvPr>
@@ -3747,7 +3881,7 @@
                   <a:srgbClr val="17312B"/>
                 </a:solidFill>
               </a:rPr>
-              <a:t>Large-property calculation chain</a:t>
+              <a:t>Large property · satellite context</a:t>
             </a:r>
           </a:p>
         </p:txBody>
@@ -3757,7 +3891,7 @@
           <p:cNvPr id="2" name="slide-subtitle-4">
             <a:extLst xmlns:a="http://schemas.openxmlformats.org/drawingml/2006/main">
               <a:ext uri="{FF2B5EF4-FFF2-40B4-BE49-F238E27FC236}">
-                <a16:creationId xmlns:a16="http://schemas.microsoft.com/office/drawing/2014/main" id="{A355FB53-7540-4F05-98FA-D46AB43383B6}"/>
+                <a16:creationId xmlns:a16="http://schemas.microsoft.com/office/drawing/2014/main" id="{25C01EFA-49DE-487B-90AA-E6BA939F237D}"/>
               </a:ext>
             </a:extLst>
           </p:cNvPr>
@@ -3769,7 +3903,7 @@
         <p:spPr>
           <a:xfrm xmlns:a="http://schemas.openxmlformats.org/drawingml/2006/main">
             <a:off x="857250" y="1276350"/>
-            <a:ext cx="7905750" cy="552450"/>
+            <a:ext cx="5791200" cy="552450"/>
           </a:xfrm>
           <a:prstGeom xmlns:a="http://schemas.openxmlformats.org/drawingml/2006/main" prst="rect">
             <a:avLst/>
@@ -3792,636 +3926,478 @@
                   <a:srgbClr val="5D716C"/>
                 </a:solidFill>
               </a:rPr>
-              <a:t>Article 68 determines LR; APP and secondary vegetation are calculated separately.</a:t>
-            </a:r>
-          </a:p>
-        </p:txBody>
-      </p:sp>
-      <p:sp>
-        <p:nvSpPr>
-          <p:cNvPr id="3" name="">
-            <a:extLst xmlns:a="http://schemas.openxmlformats.org/drawingml/2006/main">
-              <a:ext uri="{FF2B5EF4-FFF2-40B4-BE49-F238E27FC236}">
-                <a16:creationId xmlns:a16="http://schemas.microsoft.com/office/drawing/2014/main" id="{B069AF7F-1F92-499F-895D-ED4B3D65EAC0}"/>
-              </a:ext>
-            </a:extLst>
-          </p:cNvPr>
-          <p:cNvSpPr>
-            <a:spLocks xmlns:a="http://schemas.openxmlformats.org/drawingml/2006/main" noGrp="1"/>
-          </p:cNvSpPr>
-          <p:nvPr/>
-        </p:nvSpPr>
-        <p:spPr>
-          <a:xfrm xmlns:a="http://schemas.openxmlformats.org/drawingml/2006/main">
-            <a:off x="1066800" y="2305050"/>
-            <a:ext cx="7753350" cy="247650"/>
-          </a:xfrm>
-          <a:prstGeom xmlns:a="http://schemas.openxmlformats.org/drawingml/2006/main" prst="rect">
-            <a:avLst/>
-          </a:prstGeom>
-        </p:spPr>
-        <p:txBody>
-          <a:bodyPr xmlns:a="http://schemas.openxmlformats.org/drawingml/2006/main" lIns="0" tIns="0" rIns="0" bIns="0"/>
-          <a:lstStyle xmlns:a="http://schemas.openxmlformats.org/drawingml/2006/main"/>
-          <a:p xmlns:a="http://schemas.openxmlformats.org/drawingml/2006/main">
-            <a:pPr>
-              <a:defRPr sz="1275" b="1">
+              <a:t>The CAR property polygon is overlaid on Esri World Imagery.</a:t>
+            </a:r>
+          </a:p>
+        </p:txBody>
+      </p:sp>
+      <p:pic>
+        <p:nvPicPr>
+          <p:cNvPr id="3" name="property-map-4"/>
+          <p:cNvPicPr>
+            <a:picLocks xmlns:a="http://schemas.openxmlformats.org/drawingml/2006/main" noChangeAspect="1"/>
+          </p:cNvPicPr>
+          <p:nvPr/>
+        </p:nvPicPr>
+        <p:blipFill>
+          <a:blip xmlns:r="http://schemas.openxmlformats.org/officeDocument/2006/relationships" xmlns:a="http://schemas.openxmlformats.org/drawingml/2006/main" r:embed="Rfcaa60d7097043a5"/>
+          <a:stretch xmlns:a="http://schemas.openxmlformats.org/drawingml/2006/main"/>
+        </p:blipFill>
+        <p:spPr>
+          <a:xfrm xmlns:a="http://schemas.openxmlformats.org/drawingml/2006/main">
+            <a:off x="2558168" y="2143125"/>
+            <a:ext cx="8828264" cy="6667500"/>
+          </a:xfrm>
+          <a:prstGeom xmlns:a="http://schemas.openxmlformats.org/drawingml/2006/main" prst="rect">
+            <a:avLst/>
+          </a:prstGeom>
+        </p:spPr>
+      </p:pic>
+      <p:sp>
+        <p:nvSpPr>
+          <p:cNvPr id="4" name="">
+            <a:extLst xmlns:a="http://schemas.openxmlformats.org/drawingml/2006/main">
+              <a:ext uri="{FF2B5EF4-FFF2-40B4-BE49-F238E27FC236}">
+                <a16:creationId xmlns:a16="http://schemas.microsoft.com/office/drawing/2014/main" id="{55D1A436-52FB-4F5A-98A3-609FBE2EAC6F}"/>
+              </a:ext>
+            </a:extLst>
+          </p:cNvPr>
+          <p:cNvSpPr>
+            <a:spLocks xmlns:a="http://schemas.openxmlformats.org/drawingml/2006/main" noGrp="1"/>
+          </p:cNvSpPr>
+          <p:nvPr/>
+        </p:nvSpPr>
+        <p:spPr>
+          <a:xfrm xmlns:a="http://schemas.openxmlformats.org/drawingml/2006/main">
+            <a:off x="13525500" y="2667000"/>
+            <a:ext cx="2152650" cy="304800"/>
+          </a:xfrm>
+          <a:prstGeom xmlns:a="http://schemas.openxmlformats.org/drawingml/2006/main" prst="rect">
+            <a:avLst/>
+          </a:prstGeom>
+        </p:spPr>
+        <p:txBody>
+          <a:bodyPr xmlns:a="http://schemas.openxmlformats.org/drawingml/2006/main" lIns="0" tIns="0" rIns="0" bIns="0"/>
+          <a:lstStyle xmlns:a="http://schemas.openxmlformats.org/drawingml/2006/main"/>
+          <a:p xmlns:a="http://schemas.openxmlformats.org/drawingml/2006/main">
+            <a:pPr>
+              <a:defRPr sz="1275">
+                <a:solidFill>
+                  <a:srgbClr val="5D716C"/>
+                </a:solidFill>
+              </a:defRPr>
+            </a:pPr>
+            <a:r>
+              <a:rPr sz="1275">
+                <a:solidFill>
+                  <a:srgbClr val="5D716C"/>
+                </a:solidFill>
+              </a:rPr>
+              <a:t>Property area</a:t>
+            </a:r>
+          </a:p>
+        </p:txBody>
+      </p:sp>
+      <p:sp>
+        <p:nvSpPr>
+          <p:cNvPr id="5" name="">
+            <a:extLst xmlns:a="http://schemas.openxmlformats.org/drawingml/2006/main">
+              <a:ext uri="{FF2B5EF4-FFF2-40B4-BE49-F238E27FC236}">
+                <a16:creationId xmlns:a16="http://schemas.microsoft.com/office/drawing/2014/main" id="{40BEEC7E-2C4E-45E1-B0D5-A17BE3479674}"/>
+              </a:ext>
+            </a:extLst>
+          </p:cNvPr>
+          <p:cNvSpPr>
+            <a:spLocks xmlns:a="http://schemas.openxmlformats.org/drawingml/2006/main" noGrp="1"/>
+          </p:cNvSpPr>
+          <p:nvPr/>
+        </p:nvSpPr>
+        <p:spPr>
+          <a:xfrm xmlns:a="http://schemas.openxmlformats.org/drawingml/2006/main">
+            <a:off x="15678150" y="2647950"/>
+            <a:ext cx="1581150" cy="323850"/>
+          </a:xfrm>
+          <a:prstGeom xmlns:a="http://schemas.openxmlformats.org/drawingml/2006/main" prst="rect">
+            <a:avLst/>
+          </a:prstGeom>
+        </p:spPr>
+        <p:txBody>
+          <a:bodyPr xmlns:a="http://schemas.openxmlformats.org/drawingml/2006/main" lIns="0" tIns="0" rIns="0" bIns="0"/>
+          <a:lstStyle xmlns:a="http://schemas.openxmlformats.org/drawingml/2006/main"/>
+          <a:p xmlns:a="http://schemas.openxmlformats.org/drawingml/2006/main">
+            <a:pPr>
+              <a:defRPr sz="1650" b="1">
                 <a:solidFill>
                   <a:srgbClr val="1E6B52"/>
                 </a:solidFill>
               </a:defRPr>
             </a:pPr>
             <a:r>
-              <a:rPr sz="1275" b="1">
+              <a:rPr sz="1650" b="1">
                 <a:solidFill>
                   <a:srgbClr val="1E6B52"/>
                 </a:solidFill>
               </a:rPr>
-              <a:t>2000 legal test</a:t>
-            </a:r>
-          </a:p>
-        </p:txBody>
-      </p:sp>
-      <p:sp>
-        <p:nvSpPr>
-          <p:cNvPr id="4" name="">
-            <a:extLst xmlns:a="http://schemas.openxmlformats.org/drawingml/2006/main">
-              <a:ext uri="{FF2B5EF4-FFF2-40B4-BE49-F238E27FC236}">
-                <a16:creationId xmlns:a16="http://schemas.microsoft.com/office/drawing/2014/main" id="{22723B75-8E37-4868-907E-5FA852E76CCE}"/>
-              </a:ext>
-            </a:extLst>
-          </p:cNvPr>
-          <p:cNvSpPr>
-            <a:spLocks xmlns:a="http://schemas.openxmlformats.org/drawingml/2006/main" noGrp="1"/>
-          </p:cNvSpPr>
-          <p:nvPr/>
-        </p:nvSpPr>
-        <p:spPr>
-          <a:xfrm xmlns:a="http://schemas.openxmlformats.org/drawingml/2006/main">
-            <a:off x="1066800" y="2609850"/>
-            <a:ext cx="7753350" cy="323850"/>
-          </a:xfrm>
-          <a:prstGeom xmlns:a="http://schemas.openxmlformats.org/drawingml/2006/main" prst="rect">
-            <a:avLst/>
-          </a:prstGeom>
-        </p:spPr>
-        <p:txBody>
-          <a:bodyPr xmlns:a="http://schemas.openxmlformats.org/drawingml/2006/main" lIns="0" tIns="0" rIns="0" bIns="0"/>
-          <a:lstStyle xmlns:a="http://schemas.openxmlformats.org/drawingml/2006/main"/>
-          <a:p xmlns:a="http://schemas.openxmlformats.org/drawingml/2006/main">
-            <a:pPr>
-              <a:defRPr sz="1425">
-                <a:solidFill>
-                  <a:srgbClr val="17312B"/>
-                </a:solidFill>
-              </a:defRPr>
-            </a:pPr>
-            <a:r>
-              <a:rPr sz="1425">
-                <a:solidFill>
-                  <a:srgbClr val="17312B"/>
-                </a:solidFill>
-              </a:rPr>
-              <a:t>326.79 ha ≥ 170.75 ha</a:t>
-            </a:r>
-          </a:p>
-        </p:txBody>
-      </p:sp>
-      <p:sp>
-        <p:nvSpPr>
-          <p:cNvPr id="5" name="">
-            <a:extLst xmlns:a="http://schemas.openxmlformats.org/drawingml/2006/main">
-              <a:ext uri="{FF2B5EF4-FFF2-40B4-BE49-F238E27FC236}">
-                <a16:creationId xmlns:a16="http://schemas.microsoft.com/office/drawing/2014/main" id="{A1947969-27AE-4695-A753-AF00C1FB457B}"/>
-              </a:ext>
-            </a:extLst>
-          </p:cNvPr>
-          <p:cNvSpPr>
-            <a:spLocks xmlns:a="http://schemas.openxmlformats.org/drawingml/2006/main" noGrp="1"/>
-          </p:cNvSpPr>
-          <p:nvPr/>
-        </p:nvSpPr>
-        <p:spPr>
-          <a:xfrm xmlns:a="http://schemas.openxmlformats.org/drawingml/2006/main">
-            <a:off x="1066800" y="2990850"/>
-            <a:ext cx="7753350" cy="342900"/>
-          </a:xfrm>
-          <a:prstGeom xmlns:a="http://schemas.openxmlformats.org/drawingml/2006/main" prst="rect">
-            <a:avLst/>
-          </a:prstGeom>
-        </p:spPr>
-        <p:txBody>
-          <a:bodyPr xmlns:a="http://schemas.openxmlformats.org/drawingml/2006/main" lIns="0" tIns="0" rIns="0" bIns="0"/>
-          <a:lstStyle xmlns:a="http://schemas.openxmlformats.org/drawingml/2006/main"/>
-          <a:p xmlns:a="http://schemas.openxmlformats.org/drawingml/2006/main">
-            <a:pPr>
-              <a:defRPr sz="1800" b="1">
+              <a:t>599.92 ha</a:t>
+            </a:r>
+          </a:p>
+        </p:txBody>
+      </p:sp>
+      <p:sp>
+        <p:nvSpPr>
+          <p:cNvPr id="6" name="">
+            <a:extLst xmlns:a="http://schemas.openxmlformats.org/drawingml/2006/main">
+              <a:ext uri="{FF2B5EF4-FFF2-40B4-BE49-F238E27FC236}">
+                <a16:creationId xmlns:a16="http://schemas.microsoft.com/office/drawing/2014/main" id="{5D58411E-9246-461F-A06E-3CC5B9516642}"/>
+              </a:ext>
+            </a:extLst>
+          </p:cNvPr>
+          <p:cNvSpPr>
+            <a:spLocks xmlns:a="http://schemas.openxmlformats.org/drawingml/2006/main" noGrp="1"/>
+          </p:cNvSpPr>
+          <p:nvPr/>
+        </p:nvSpPr>
+        <p:spPr>
+          <a:xfrm xmlns:a="http://schemas.openxmlformats.org/drawingml/2006/main">
+            <a:off x="13525500" y="4000500"/>
+            <a:ext cx="2152650" cy="304800"/>
+          </a:xfrm>
+          <a:prstGeom xmlns:a="http://schemas.openxmlformats.org/drawingml/2006/main" prst="rect">
+            <a:avLst/>
+          </a:prstGeom>
+        </p:spPr>
+        <p:txBody>
+          <a:bodyPr xmlns:a="http://schemas.openxmlformats.org/drawingml/2006/main" lIns="0" tIns="0" rIns="0" bIns="0"/>
+          <a:lstStyle xmlns:a="http://schemas.openxmlformats.org/drawingml/2006/main"/>
+          <a:p xmlns:a="http://schemas.openxmlformats.org/drawingml/2006/main">
+            <a:pPr>
+              <a:defRPr sz="1275">
+                <a:solidFill>
+                  <a:srgbClr val="5D716C"/>
+                </a:solidFill>
+              </a:defRPr>
+            </a:pPr>
+            <a:r>
+              <a:rPr sz="1275">
+                <a:solidFill>
+                  <a:srgbClr val="5D716C"/>
+                </a:solidFill>
+              </a:rPr>
+              <a:t>Forest area</a:t>
+            </a:r>
+          </a:p>
+        </p:txBody>
+      </p:sp>
+      <p:sp>
+        <p:nvSpPr>
+          <p:cNvPr id="7" name="">
+            <a:extLst xmlns:a="http://schemas.openxmlformats.org/drawingml/2006/main">
+              <a:ext uri="{FF2B5EF4-FFF2-40B4-BE49-F238E27FC236}">
+                <a16:creationId xmlns:a16="http://schemas.microsoft.com/office/drawing/2014/main" id="{D7C9C3EE-D9BF-4A24-944C-9BA7D2A5FA1D}"/>
+              </a:ext>
+            </a:extLst>
+          </p:cNvPr>
+          <p:cNvSpPr>
+            <a:spLocks xmlns:a="http://schemas.openxmlformats.org/drawingml/2006/main" noGrp="1"/>
+          </p:cNvSpPr>
+          <p:nvPr/>
+        </p:nvSpPr>
+        <p:spPr>
+          <a:xfrm xmlns:a="http://schemas.openxmlformats.org/drawingml/2006/main">
+            <a:off x="15678150" y="3981450"/>
+            <a:ext cx="1581150" cy="323850"/>
+          </a:xfrm>
+          <a:prstGeom xmlns:a="http://schemas.openxmlformats.org/drawingml/2006/main" prst="rect">
+            <a:avLst/>
+          </a:prstGeom>
+        </p:spPr>
+        <p:txBody>
+          <a:bodyPr xmlns:a="http://schemas.openxmlformats.org/drawingml/2006/main" lIns="0" tIns="0" rIns="0" bIns="0"/>
+          <a:lstStyle xmlns:a="http://schemas.openxmlformats.org/drawingml/2006/main"/>
+          <a:p xmlns:a="http://schemas.openxmlformats.org/drawingml/2006/main">
+            <a:pPr>
+              <a:defRPr sz="1650" b="1">
                 <a:solidFill>
                   <a:srgbClr val="1E6B52"/>
                 </a:solidFill>
               </a:defRPr>
             </a:pPr>
             <a:r>
-              <a:rPr sz="1800" b="1">
+              <a:rPr sz="1650" b="1">
                 <a:solidFill>
                   <a:srgbClr val="1E6B52"/>
                 </a:solidFill>
               </a:rPr>
-              <a:t>= Historical floor applies: 170.75 ha</a:t>
-            </a:r>
-          </a:p>
-        </p:txBody>
-      </p:sp>
-      <p:sp>
-        <p:nvSpPr>
-          <p:cNvPr id="6" name="">
-            <a:extLst xmlns:a="http://schemas.openxmlformats.org/drawingml/2006/main">
-              <a:ext uri="{FF2B5EF4-FFF2-40B4-BE49-F238E27FC236}">
-                <a16:creationId xmlns:a16="http://schemas.microsoft.com/office/drawing/2014/main" id="{0410AEC7-1549-458C-BA00-C18EA3E12BAE}"/>
-              </a:ext>
-            </a:extLst>
-          </p:cNvPr>
-          <p:cNvSpPr>
-            <a:spLocks xmlns:a="http://schemas.openxmlformats.org/drawingml/2006/main" noGrp="1"/>
-          </p:cNvSpPr>
-          <p:nvPr/>
-        </p:nvSpPr>
-        <p:spPr>
-          <a:xfrm xmlns:a="http://schemas.openxmlformats.org/drawingml/2006/main">
-            <a:off x="9467850" y="2305050"/>
-            <a:ext cx="7753350" cy="247650"/>
-          </a:xfrm>
-          <a:prstGeom xmlns:a="http://schemas.openxmlformats.org/drawingml/2006/main" prst="rect">
-            <a:avLst/>
-          </a:prstGeom>
-        </p:spPr>
-        <p:txBody>
-          <a:bodyPr xmlns:a="http://schemas.openxmlformats.org/drawingml/2006/main" lIns="0" tIns="0" rIns="0" bIns="0"/>
-          <a:lstStyle xmlns:a="http://schemas.openxmlformats.org/drawingml/2006/main"/>
-          <a:p xmlns:a="http://schemas.openxmlformats.org/drawingml/2006/main">
-            <a:pPr>
-              <a:defRPr sz="1275" b="1">
+              <a:t>169.21 ha</a:t>
+            </a:r>
+          </a:p>
+        </p:txBody>
+      </p:sp>
+      <p:sp>
+        <p:nvSpPr>
+          <p:cNvPr id="8" name="">
+            <a:extLst xmlns:a="http://schemas.openxmlformats.org/drawingml/2006/main">
+              <a:ext uri="{FF2B5EF4-FFF2-40B4-BE49-F238E27FC236}">
+                <a16:creationId xmlns:a16="http://schemas.microsoft.com/office/drawing/2014/main" id="{5445F0EC-767D-45D8-AC39-0F8E9DDC2415}"/>
+              </a:ext>
+            </a:extLst>
+          </p:cNvPr>
+          <p:cNvSpPr>
+            <a:spLocks xmlns:a="http://schemas.openxmlformats.org/drawingml/2006/main" noGrp="1"/>
+          </p:cNvSpPr>
+          <p:nvPr/>
+        </p:nvSpPr>
+        <p:spPr>
+          <a:xfrm xmlns:a="http://schemas.openxmlformats.org/drawingml/2006/main">
+            <a:off x="13525500" y="5334000"/>
+            <a:ext cx="2152650" cy="304800"/>
+          </a:xfrm>
+          <a:prstGeom xmlns:a="http://schemas.openxmlformats.org/drawingml/2006/main" prst="rect">
+            <a:avLst/>
+          </a:prstGeom>
+        </p:spPr>
+        <p:txBody>
+          <a:bodyPr xmlns:a="http://schemas.openxmlformats.org/drawingml/2006/main" lIns="0" tIns="0" rIns="0" bIns="0"/>
+          <a:lstStyle xmlns:a="http://schemas.openxmlformats.org/drawingml/2006/main"/>
+          <a:p xmlns:a="http://schemas.openxmlformats.org/drawingml/2006/main">
+            <a:pPr>
+              <a:defRPr sz="1275">
+                <a:solidFill>
+                  <a:srgbClr val="5D716C"/>
+                </a:solidFill>
+              </a:defRPr>
+            </a:pPr>
+            <a:r>
+              <a:rPr sz="1275">
+                <a:solidFill>
+                  <a:srgbClr val="5D716C"/>
+                </a:solidFill>
+              </a:rPr>
+              <a:t>Cerrado area</a:t>
+            </a:r>
+          </a:p>
+        </p:txBody>
+      </p:sp>
+      <p:sp>
+        <p:nvSpPr>
+          <p:cNvPr id="9" name="">
+            <a:extLst xmlns:a="http://schemas.openxmlformats.org/drawingml/2006/main">
+              <a:ext uri="{FF2B5EF4-FFF2-40B4-BE49-F238E27FC236}">
+                <a16:creationId xmlns:a16="http://schemas.microsoft.com/office/drawing/2014/main" id="{D77B08BC-D11B-4FEF-B9E1-8ED6AEA6FA7A}"/>
+              </a:ext>
+            </a:extLst>
+          </p:cNvPr>
+          <p:cNvSpPr>
+            <a:spLocks xmlns:a="http://schemas.openxmlformats.org/drawingml/2006/main" noGrp="1"/>
+          </p:cNvSpPr>
+          <p:nvPr/>
+        </p:nvSpPr>
+        <p:spPr>
+          <a:xfrm xmlns:a="http://schemas.openxmlformats.org/drawingml/2006/main">
+            <a:off x="15678150" y="5314950"/>
+            <a:ext cx="1581150" cy="323850"/>
+          </a:xfrm>
+          <a:prstGeom xmlns:a="http://schemas.openxmlformats.org/drawingml/2006/main" prst="rect">
+            <a:avLst/>
+          </a:prstGeom>
+        </p:spPr>
+        <p:txBody>
+          <a:bodyPr xmlns:a="http://schemas.openxmlformats.org/drawingml/2006/main" lIns="0" tIns="0" rIns="0" bIns="0"/>
+          <a:lstStyle xmlns:a="http://schemas.openxmlformats.org/drawingml/2006/main"/>
+          <a:p xmlns:a="http://schemas.openxmlformats.org/drawingml/2006/main">
+            <a:pPr>
+              <a:defRPr sz="1650" b="1">
                 <a:solidFill>
                   <a:srgbClr val="1E6B52"/>
                 </a:solidFill>
               </a:defRPr>
             </a:pPr>
             <a:r>
-              <a:rPr sz="1275" b="1">
+              <a:rPr sz="1650" b="1">
                 <a:solidFill>
                   <a:srgbClr val="1E6B52"/>
                 </a:solidFill>
               </a:rPr>
-              <a:t>Legal Reserve deficit</a:t>
-            </a:r>
-          </a:p>
-        </p:txBody>
-      </p:sp>
-      <p:sp>
-        <p:nvSpPr>
-          <p:cNvPr id="7" name="">
-            <a:extLst xmlns:a="http://schemas.openxmlformats.org/drawingml/2006/main">
-              <a:ext uri="{FF2B5EF4-FFF2-40B4-BE49-F238E27FC236}">
-                <a16:creationId xmlns:a16="http://schemas.microsoft.com/office/drawing/2014/main" id="{25198E79-8F97-4A4B-A07C-E3BC229B9B5F}"/>
-              </a:ext>
-            </a:extLst>
-          </p:cNvPr>
-          <p:cNvSpPr>
-            <a:spLocks xmlns:a="http://schemas.openxmlformats.org/drawingml/2006/main" noGrp="1"/>
-          </p:cNvSpPr>
-          <p:nvPr/>
-        </p:nvSpPr>
-        <p:spPr>
-          <a:xfrm xmlns:a="http://schemas.openxmlformats.org/drawingml/2006/main">
-            <a:off x="9467850" y="2609850"/>
-            <a:ext cx="7753350" cy="323850"/>
-          </a:xfrm>
-          <a:prstGeom xmlns:a="http://schemas.openxmlformats.org/drawingml/2006/main" prst="rect">
-            <a:avLst/>
-          </a:prstGeom>
-        </p:spPr>
-        <p:txBody>
-          <a:bodyPr xmlns:a="http://schemas.openxmlformats.org/drawingml/2006/main" lIns="0" tIns="0" rIns="0" bIns="0"/>
-          <a:lstStyle xmlns:a="http://schemas.openxmlformats.org/drawingml/2006/main"/>
-          <a:p xmlns:a="http://schemas.openxmlformats.org/drawingml/2006/main">
-            <a:pPr>
-              <a:defRPr sz="1425">
-                <a:solidFill>
-                  <a:srgbClr val="17312B"/>
-                </a:solidFill>
-              </a:defRPr>
-            </a:pPr>
-            <a:r>
-              <a:rPr sz="1425">
-                <a:solidFill>
-                  <a:srgbClr val="17312B"/>
-                </a:solidFill>
-              </a:rPr>
-              <a:t>170.75 ha − 118.13 ha</a:t>
-            </a:r>
-          </a:p>
-        </p:txBody>
-      </p:sp>
-      <p:sp>
-        <p:nvSpPr>
-          <p:cNvPr id="8" name="">
-            <a:extLst xmlns:a="http://schemas.openxmlformats.org/drawingml/2006/main">
-              <a:ext uri="{FF2B5EF4-FFF2-40B4-BE49-F238E27FC236}">
-                <a16:creationId xmlns:a16="http://schemas.microsoft.com/office/drawing/2014/main" id="{960301A8-131B-4324-873A-4B167F135945}"/>
-              </a:ext>
-            </a:extLst>
-          </p:cNvPr>
-          <p:cNvSpPr>
-            <a:spLocks xmlns:a="http://schemas.openxmlformats.org/drawingml/2006/main" noGrp="1"/>
-          </p:cNvSpPr>
-          <p:nvPr/>
-        </p:nvSpPr>
-        <p:spPr>
-          <a:xfrm xmlns:a="http://schemas.openxmlformats.org/drawingml/2006/main">
-            <a:off x="9467850" y="2990850"/>
-            <a:ext cx="7753350" cy="342900"/>
-          </a:xfrm>
-          <a:prstGeom xmlns:a="http://schemas.openxmlformats.org/drawingml/2006/main" prst="rect">
-            <a:avLst/>
-          </a:prstGeom>
-        </p:spPr>
-        <p:txBody>
-          <a:bodyPr xmlns:a="http://schemas.openxmlformats.org/drawingml/2006/main" lIns="0" tIns="0" rIns="0" bIns="0"/>
-          <a:lstStyle xmlns:a="http://schemas.openxmlformats.org/drawingml/2006/main"/>
-          <a:p xmlns:a="http://schemas.openxmlformats.org/drawingml/2006/main">
-            <a:pPr>
-              <a:defRPr sz="1800" b="1">
+              <a:t>430.71 ha</a:t>
+            </a:r>
+          </a:p>
+        </p:txBody>
+      </p:sp>
+      <p:sp>
+        <p:nvSpPr>
+          <p:cNvPr id="10" name="">
+            <a:extLst xmlns:a="http://schemas.openxmlformats.org/drawingml/2006/main">
+              <a:ext uri="{FF2B5EF4-FFF2-40B4-BE49-F238E27FC236}">
+                <a16:creationId xmlns:a16="http://schemas.microsoft.com/office/drawing/2014/main" id="{5CBCA03B-C1A1-4F33-964F-6DCD2001CF26}"/>
+              </a:ext>
+            </a:extLst>
+          </p:cNvPr>
+          <p:cNvSpPr>
+            <a:spLocks xmlns:a="http://schemas.openxmlformats.org/drawingml/2006/main" noGrp="1"/>
+          </p:cNvSpPr>
+          <p:nvPr/>
+        </p:nvSpPr>
+        <p:spPr>
+          <a:xfrm xmlns:a="http://schemas.openxmlformats.org/drawingml/2006/main">
+            <a:off x="13525500" y="6667500"/>
+            <a:ext cx="2152650" cy="304800"/>
+          </a:xfrm>
+          <a:prstGeom xmlns:a="http://schemas.openxmlformats.org/drawingml/2006/main" prst="rect">
+            <a:avLst/>
+          </a:prstGeom>
+        </p:spPr>
+        <p:txBody>
+          <a:bodyPr xmlns:a="http://schemas.openxmlformats.org/drawingml/2006/main" lIns="0" tIns="0" rIns="0" bIns="0"/>
+          <a:lstStyle xmlns:a="http://schemas.openxmlformats.org/drawingml/2006/main"/>
+          <a:p xmlns:a="http://schemas.openxmlformats.org/drawingml/2006/main">
+            <a:pPr>
+              <a:defRPr sz="1275">
+                <a:solidFill>
+                  <a:srgbClr val="5D716C"/>
+                </a:solidFill>
+              </a:defRPr>
+            </a:pPr>
+            <a:r>
+              <a:rPr sz="1275">
+                <a:solidFill>
+                  <a:srgbClr val="5D716C"/>
+                </a:solidFill>
+              </a:rPr>
+              <a:t>Fiscal modules</a:t>
+            </a:r>
+          </a:p>
+        </p:txBody>
+      </p:sp>
+      <p:sp>
+        <p:nvSpPr>
+          <p:cNvPr id="11" name="">
+            <a:extLst xmlns:a="http://schemas.openxmlformats.org/drawingml/2006/main">
+              <a:ext uri="{FF2B5EF4-FFF2-40B4-BE49-F238E27FC236}">
+                <a16:creationId xmlns:a16="http://schemas.microsoft.com/office/drawing/2014/main" id="{01F3697B-4ADC-474B-B8EE-A5B4BEA3AEDB}"/>
+              </a:ext>
+            </a:extLst>
+          </p:cNvPr>
+          <p:cNvSpPr>
+            <a:spLocks xmlns:a="http://schemas.openxmlformats.org/drawingml/2006/main" noGrp="1"/>
+          </p:cNvSpPr>
+          <p:nvPr/>
+        </p:nvSpPr>
+        <p:spPr>
+          <a:xfrm xmlns:a="http://schemas.openxmlformats.org/drawingml/2006/main">
+            <a:off x="15678150" y="6648450"/>
+            <a:ext cx="1581150" cy="323850"/>
+          </a:xfrm>
+          <a:prstGeom xmlns:a="http://schemas.openxmlformats.org/drawingml/2006/main" prst="rect">
+            <a:avLst/>
+          </a:prstGeom>
+        </p:spPr>
+        <p:txBody>
+          <a:bodyPr xmlns:a="http://schemas.openxmlformats.org/drawingml/2006/main" lIns="0" tIns="0" rIns="0" bIns="0"/>
+          <a:lstStyle xmlns:a="http://schemas.openxmlformats.org/drawingml/2006/main"/>
+          <a:p xmlns:a="http://schemas.openxmlformats.org/drawingml/2006/main">
+            <a:pPr>
+              <a:defRPr sz="1650" b="1">
                 <a:solidFill>
                   <a:srgbClr val="1E6B52"/>
                 </a:solidFill>
               </a:defRPr>
             </a:pPr>
             <a:r>
-              <a:rPr sz="1800" b="1">
+              <a:rPr sz="1650" b="1">
                 <a:solidFill>
                   <a:srgbClr val="1E6B52"/>
                 </a:solidFill>
               </a:rPr>
-              <a:t>= 52.61 ha</a:t>
-            </a:r>
-          </a:p>
-        </p:txBody>
-      </p:sp>
-      <p:sp>
-        <p:nvSpPr>
-          <p:cNvPr id="9" name="">
-            <a:extLst xmlns:a="http://schemas.openxmlformats.org/drawingml/2006/main">
-              <a:ext uri="{FF2B5EF4-FFF2-40B4-BE49-F238E27FC236}">
-                <a16:creationId xmlns:a16="http://schemas.microsoft.com/office/drawing/2014/main" id="{B631D80B-261D-441B-9ED0-326EAEECD852}"/>
-              </a:ext>
-            </a:extLst>
-          </p:cNvPr>
-          <p:cNvSpPr>
-            <a:spLocks xmlns:a="http://schemas.openxmlformats.org/drawingml/2006/main" noGrp="1"/>
-          </p:cNvSpPr>
-          <p:nvPr/>
-        </p:nvSpPr>
-        <p:spPr>
-          <a:xfrm xmlns:a="http://schemas.openxmlformats.org/drawingml/2006/main">
-            <a:off x="1066800" y="5124450"/>
-            <a:ext cx="7753350" cy="247650"/>
-          </a:xfrm>
-          <a:prstGeom xmlns:a="http://schemas.openxmlformats.org/drawingml/2006/main" prst="rect">
-            <a:avLst/>
-          </a:prstGeom>
-        </p:spPr>
-        <p:txBody>
-          <a:bodyPr xmlns:a="http://schemas.openxmlformats.org/drawingml/2006/main" lIns="0" tIns="0" rIns="0" bIns="0"/>
-          <a:lstStyle xmlns:a="http://schemas.openxmlformats.org/drawingml/2006/main"/>
-          <a:p xmlns:a="http://schemas.openxmlformats.org/drawingml/2006/main">
-            <a:pPr>
-              <a:defRPr sz="1275" b="1">
+              <a:t>6.00</a:t>
+            </a:r>
+          </a:p>
+        </p:txBody>
+      </p:sp>
+      <p:sp>
+        <p:nvSpPr>
+          <p:cNvPr id="12" name="">
+            <a:extLst xmlns:a="http://schemas.openxmlformats.org/drawingml/2006/main">
+              <a:ext uri="{FF2B5EF4-FFF2-40B4-BE49-F238E27FC236}">
+                <a16:creationId xmlns:a16="http://schemas.microsoft.com/office/drawing/2014/main" id="{78624DFC-2D4D-4720-9675-86F265779DE1}"/>
+              </a:ext>
+            </a:extLst>
+          </p:cNvPr>
+          <p:cNvSpPr>
+            <a:spLocks xmlns:a="http://schemas.openxmlformats.org/drawingml/2006/main" noGrp="1"/>
+          </p:cNvSpPr>
+          <p:nvPr/>
+        </p:nvSpPr>
+        <p:spPr>
+          <a:xfrm xmlns:a="http://schemas.openxmlformats.org/drawingml/2006/main">
+            <a:off x="13525500" y="8001000"/>
+            <a:ext cx="2152650" cy="304800"/>
+          </a:xfrm>
+          <a:prstGeom xmlns:a="http://schemas.openxmlformats.org/drawingml/2006/main" prst="rect">
+            <a:avLst/>
+          </a:prstGeom>
+        </p:spPr>
+        <p:txBody>
+          <a:bodyPr xmlns:a="http://schemas.openxmlformats.org/drawingml/2006/main" lIns="0" tIns="0" rIns="0" bIns="0"/>
+          <a:lstStyle xmlns:a="http://schemas.openxmlformats.org/drawingml/2006/main"/>
+          <a:p xmlns:a="http://schemas.openxmlformats.org/drawingml/2006/main">
+            <a:pPr>
+              <a:defRPr sz="1275">
+                <a:solidFill>
+                  <a:srgbClr val="5D716C"/>
+                </a:solidFill>
+              </a:defRPr>
+            </a:pPr>
+            <a:r>
+              <a:rPr sz="1275">
+                <a:solidFill>
+                  <a:srgbClr val="5D716C"/>
+                </a:solidFill>
+              </a:rPr>
+              <a:t>Baseline liability</a:t>
+            </a:r>
+          </a:p>
+        </p:txBody>
+      </p:sp>
+      <p:sp>
+        <p:nvSpPr>
+          <p:cNvPr id="13" name="">
+            <a:extLst xmlns:a="http://schemas.openxmlformats.org/drawingml/2006/main">
+              <a:ext uri="{FF2B5EF4-FFF2-40B4-BE49-F238E27FC236}">
+                <a16:creationId xmlns:a16="http://schemas.microsoft.com/office/drawing/2014/main" id="{7F21B490-08C0-4962-8B53-10028A852ED2}"/>
+              </a:ext>
+            </a:extLst>
+          </p:cNvPr>
+          <p:cNvSpPr>
+            <a:spLocks xmlns:a="http://schemas.openxmlformats.org/drawingml/2006/main" noGrp="1"/>
+          </p:cNvSpPr>
+          <p:nvPr/>
+        </p:nvSpPr>
+        <p:spPr>
+          <a:xfrm xmlns:a="http://schemas.openxmlformats.org/drawingml/2006/main">
+            <a:off x="15678150" y="7981950"/>
+            <a:ext cx="1581150" cy="323850"/>
+          </a:xfrm>
+          <a:prstGeom xmlns:a="http://schemas.openxmlformats.org/drawingml/2006/main" prst="rect">
+            <a:avLst/>
+          </a:prstGeom>
+        </p:spPr>
+        <p:txBody>
+          <a:bodyPr xmlns:a="http://schemas.openxmlformats.org/drawingml/2006/main" lIns="0" tIns="0" rIns="0" bIns="0"/>
+          <a:lstStyle xmlns:a="http://schemas.openxmlformats.org/drawingml/2006/main"/>
+          <a:p xmlns:a="http://schemas.openxmlformats.org/drawingml/2006/main">
+            <a:pPr>
+              <a:defRPr sz="1650" b="1">
                 <a:solidFill>
                   <a:srgbClr val="1E6B52"/>
                 </a:solidFill>
               </a:defRPr>
             </a:pPr>
             <a:r>
-              <a:rPr sz="1275" b="1">
+              <a:rPr sz="1650" b="1">
                 <a:solidFill>
                   <a:srgbClr val="1E6B52"/>
                 </a:solidFill>
               </a:rPr>
-              <a:t>LR pathway</a:t>
-            </a:r>
-          </a:p>
-        </p:txBody>
-      </p:sp>
-      <p:sp>
-        <p:nvSpPr>
-          <p:cNvPr id="10" name="">
-            <a:extLst xmlns:a="http://schemas.openxmlformats.org/drawingml/2006/main">
-              <a:ext uri="{FF2B5EF4-FFF2-40B4-BE49-F238E27FC236}">
-                <a16:creationId xmlns:a16="http://schemas.microsoft.com/office/drawing/2014/main" id="{C2CE252F-B9C0-4EA2-A443-339628595070}"/>
-              </a:ext>
-            </a:extLst>
-          </p:cNvPr>
-          <p:cNvSpPr>
-            <a:spLocks xmlns:a="http://schemas.openxmlformats.org/drawingml/2006/main" noGrp="1"/>
-          </p:cNvSpPr>
-          <p:nvPr/>
-        </p:nvSpPr>
-        <p:spPr>
-          <a:xfrm xmlns:a="http://schemas.openxmlformats.org/drawingml/2006/main">
-            <a:off x="1066800" y="5429250"/>
-            <a:ext cx="7753350" cy="323850"/>
-          </a:xfrm>
-          <a:prstGeom xmlns:a="http://schemas.openxmlformats.org/drawingml/2006/main" prst="rect">
-            <a:avLst/>
-          </a:prstGeom>
-        </p:spPr>
-        <p:txBody>
-          <a:bodyPr xmlns:a="http://schemas.openxmlformats.org/drawingml/2006/main" lIns="0" tIns="0" rIns="0" bIns="0"/>
-          <a:lstStyle xmlns:a="http://schemas.openxmlformats.org/drawingml/2006/main"/>
-          <a:p xmlns:a="http://schemas.openxmlformats.org/drawingml/2006/main">
-            <a:pPr>
-              <a:defRPr sz="1425">
-                <a:solidFill>
-                  <a:srgbClr val="17312B"/>
-                </a:solidFill>
-              </a:defRPr>
-            </a:pPr>
-            <a:r>
-              <a:rPr sz="1425">
-                <a:solidFill>
-                  <a:srgbClr val="17312B"/>
-                </a:solidFill>
-              </a:rPr>
-              <a:t>Restore = MIN(post-2008 clearing, LR deficit)</a:t>
-            </a:r>
-          </a:p>
-        </p:txBody>
-      </p:sp>
-      <p:sp>
-        <p:nvSpPr>
-          <p:cNvPr id="11" name="">
-            <a:extLst xmlns:a="http://schemas.openxmlformats.org/drawingml/2006/main">
-              <a:ext uri="{FF2B5EF4-FFF2-40B4-BE49-F238E27FC236}">
-                <a16:creationId xmlns:a16="http://schemas.microsoft.com/office/drawing/2014/main" id="{58623343-4D16-4D7B-9B2B-2A4BEEA94B78}"/>
-              </a:ext>
-            </a:extLst>
-          </p:cNvPr>
-          <p:cNvSpPr>
-            <a:spLocks xmlns:a="http://schemas.openxmlformats.org/drawingml/2006/main" noGrp="1"/>
-          </p:cNvSpPr>
-          <p:nvPr/>
-        </p:nvSpPr>
-        <p:spPr>
-          <a:xfrm xmlns:a="http://schemas.openxmlformats.org/drawingml/2006/main">
-            <a:off x="1066800" y="5810250"/>
-            <a:ext cx="7753350" cy="342900"/>
-          </a:xfrm>
-          <a:prstGeom xmlns:a="http://schemas.openxmlformats.org/drawingml/2006/main" prst="rect">
-            <a:avLst/>
-          </a:prstGeom>
-        </p:spPr>
-        <p:txBody>
-          <a:bodyPr xmlns:a="http://schemas.openxmlformats.org/drawingml/2006/main" lIns="0" tIns="0" rIns="0" bIns="0"/>
-          <a:lstStyle xmlns:a="http://schemas.openxmlformats.org/drawingml/2006/main"/>
-          <a:p xmlns:a="http://schemas.openxmlformats.org/drawingml/2006/main">
-            <a:pPr>
-              <a:defRPr sz="1800" b="1">
-                <a:solidFill>
-                  <a:srgbClr val="1E6B52"/>
-                </a:solidFill>
-              </a:defRPr>
-            </a:pPr>
-            <a:r>
-              <a:rPr sz="1800" b="1">
-                <a:solidFill>
-                  <a:srgbClr val="1E6B52"/>
-                </a:solidFill>
-              </a:rPr>
-              <a:t>= 0.00 ha restore · 52.61 ha compensate</a:t>
-            </a:r>
-          </a:p>
-        </p:txBody>
-      </p:sp>
-      <p:sp>
-        <p:nvSpPr>
-          <p:cNvPr id="12" name="">
-            <a:extLst xmlns:a="http://schemas.openxmlformats.org/drawingml/2006/main">
-              <a:ext uri="{FF2B5EF4-FFF2-40B4-BE49-F238E27FC236}">
-                <a16:creationId xmlns:a16="http://schemas.microsoft.com/office/drawing/2014/main" id="{4C2283F0-2741-4608-9BDF-004955581245}"/>
-              </a:ext>
-            </a:extLst>
-          </p:cNvPr>
-          <p:cNvSpPr>
-            <a:spLocks xmlns:a="http://schemas.openxmlformats.org/drawingml/2006/main" noGrp="1"/>
-          </p:cNvSpPr>
-          <p:nvPr/>
-        </p:nvSpPr>
-        <p:spPr>
-          <a:xfrm xmlns:a="http://schemas.openxmlformats.org/drawingml/2006/main">
-            <a:off x="9467850" y="5124450"/>
-            <a:ext cx="7753350" cy="247650"/>
-          </a:xfrm>
-          <a:prstGeom xmlns:a="http://schemas.openxmlformats.org/drawingml/2006/main" prst="rect">
-            <a:avLst/>
-          </a:prstGeom>
-        </p:spPr>
-        <p:txBody>
-          <a:bodyPr xmlns:a="http://schemas.openxmlformats.org/drawingml/2006/main" lIns="0" tIns="0" rIns="0" bIns="0"/>
-          <a:lstStyle xmlns:a="http://schemas.openxmlformats.org/drawingml/2006/main"/>
-          <a:p xmlns:a="http://schemas.openxmlformats.org/drawingml/2006/main">
-            <a:pPr>
-              <a:defRPr sz="1275" b="1">
-                <a:solidFill>
-                  <a:srgbClr val="1E6B52"/>
-                </a:solidFill>
-              </a:defRPr>
-            </a:pPr>
-            <a:r>
-              <a:rPr sz="1275" b="1">
-                <a:solidFill>
-                  <a:srgbClr val="1E6B52"/>
-                </a:solidFill>
-              </a:rPr>
-              <a:t>APP restoration</a:t>
-            </a:r>
-          </a:p>
-        </p:txBody>
-      </p:sp>
-      <p:sp>
-        <p:nvSpPr>
-          <p:cNvPr id="13" name="">
-            <a:extLst xmlns:a="http://schemas.openxmlformats.org/drawingml/2006/main">
-              <a:ext uri="{FF2B5EF4-FFF2-40B4-BE49-F238E27FC236}">
-                <a16:creationId xmlns:a16="http://schemas.microsoft.com/office/drawing/2014/main" id="{7DF3B3DD-B370-4E93-988A-E195CFA08DEE}"/>
-              </a:ext>
-            </a:extLst>
-          </p:cNvPr>
-          <p:cNvSpPr>
-            <a:spLocks xmlns:a="http://schemas.openxmlformats.org/drawingml/2006/main" noGrp="1"/>
-          </p:cNvSpPr>
-          <p:nvPr/>
-        </p:nvSpPr>
-        <p:spPr>
-          <a:xfrm xmlns:a="http://schemas.openxmlformats.org/drawingml/2006/main">
-            <a:off x="9467850" y="5429250"/>
-            <a:ext cx="7753350" cy="323850"/>
-          </a:xfrm>
-          <a:prstGeom xmlns:a="http://schemas.openxmlformats.org/drawingml/2006/main" prst="rect">
-            <a:avLst/>
-          </a:prstGeom>
-        </p:spPr>
-        <p:txBody>
-          <a:bodyPr xmlns:a="http://schemas.openxmlformats.org/drawingml/2006/main" lIns="0" tIns="0" rIns="0" bIns="0"/>
-          <a:lstStyle xmlns:a="http://schemas.openxmlformats.org/drawingml/2006/main"/>
-          <a:p xmlns:a="http://schemas.openxmlformats.org/drawingml/2006/main">
-            <a:pPr>
-              <a:defRPr sz="1425">
-                <a:solidFill>
-                  <a:srgbClr val="17312B"/>
-                </a:solidFill>
-              </a:defRPr>
-            </a:pPr>
-            <a:r>
-              <a:rPr sz="1425">
-                <a:solidFill>
-                  <a:srgbClr val="17312B"/>
-                </a:solidFill>
-              </a:rPr>
-              <a:t>Pre-2008 component after cap + post-2008 APP clearing</a:t>
-            </a:r>
-          </a:p>
-        </p:txBody>
-      </p:sp>
-      <p:sp>
-        <p:nvSpPr>
-          <p:cNvPr id="14" name="">
-            <a:extLst xmlns:a="http://schemas.openxmlformats.org/drawingml/2006/main">
-              <a:ext uri="{FF2B5EF4-FFF2-40B4-BE49-F238E27FC236}">
-                <a16:creationId xmlns:a16="http://schemas.microsoft.com/office/drawing/2014/main" id="{07116BAA-86B7-4744-9124-A015CB511FAB}"/>
-              </a:ext>
-            </a:extLst>
-          </p:cNvPr>
-          <p:cNvSpPr>
-            <a:spLocks xmlns:a="http://schemas.openxmlformats.org/drawingml/2006/main" noGrp="1"/>
-          </p:cNvSpPr>
-          <p:nvPr/>
-        </p:nvSpPr>
-        <p:spPr>
-          <a:xfrm xmlns:a="http://schemas.openxmlformats.org/drawingml/2006/main">
-            <a:off x="9467850" y="5810250"/>
-            <a:ext cx="7753350" cy="342900"/>
-          </a:xfrm>
-          <a:prstGeom xmlns:a="http://schemas.openxmlformats.org/drawingml/2006/main" prst="rect">
-            <a:avLst/>
-          </a:prstGeom>
-        </p:spPr>
-        <p:txBody>
-          <a:bodyPr xmlns:a="http://schemas.openxmlformats.org/drawingml/2006/main" lIns="0" tIns="0" rIns="0" bIns="0"/>
-          <a:lstStyle xmlns:a="http://schemas.openxmlformats.org/drawingml/2006/main"/>
-          <a:p xmlns:a="http://schemas.openxmlformats.org/drawingml/2006/main">
-            <a:pPr>
-              <a:defRPr sz="1800" b="1">
-                <a:solidFill>
-                  <a:srgbClr val="1E6B52"/>
-                </a:solidFill>
-              </a:defRPr>
-            </a:pPr>
-            <a:r>
-              <a:rPr sz="1800" b="1">
-                <a:solidFill>
-                  <a:srgbClr val="1E6B52"/>
-                </a:solidFill>
-              </a:rPr>
-              <a:t>= 0.00 ha</a:t>
-            </a:r>
-          </a:p>
-        </p:txBody>
-      </p:sp>
-      <p:sp>
-        <p:nvSpPr>
-          <p:cNvPr id="15" name="">
-            <a:extLst xmlns:a="http://schemas.openxmlformats.org/drawingml/2006/main">
-              <a:ext uri="{FF2B5EF4-FFF2-40B4-BE49-F238E27FC236}">
-                <a16:creationId xmlns:a16="http://schemas.microsoft.com/office/drawing/2014/main" id="{9E8086C1-63FB-4CC0-87D2-A7D14BA512ED}"/>
-              </a:ext>
-            </a:extLst>
-          </p:cNvPr>
-          <p:cNvSpPr>
-            <a:spLocks xmlns:a="http://schemas.openxmlformats.org/drawingml/2006/main" noGrp="1"/>
-          </p:cNvSpPr>
-          <p:nvPr/>
-        </p:nvSpPr>
-        <p:spPr>
-          <a:xfrm xmlns:a="http://schemas.openxmlformats.org/drawingml/2006/main">
-            <a:off x="857250" y="7848600"/>
-            <a:ext cx="6800850" cy="266700"/>
-          </a:xfrm>
-          <a:prstGeom xmlns:a="http://schemas.openxmlformats.org/drawingml/2006/main" prst="rect">
-            <a:avLst/>
-          </a:prstGeom>
-        </p:spPr>
-        <p:txBody>
-          <a:bodyPr xmlns:a="http://schemas.openxmlformats.org/drawingml/2006/main" lIns="0" tIns="0" rIns="0" bIns="0"/>
-          <a:lstStyle xmlns:a="http://schemas.openxmlformats.org/drawingml/2006/main"/>
-          <a:p xmlns:a="http://schemas.openxmlformats.org/drawingml/2006/main">
-            <a:pPr>
-              <a:defRPr sz="1275" b="1">
-                <a:solidFill>
-                  <a:srgbClr val="5D716C"/>
-                </a:solidFill>
-              </a:defRPr>
-            </a:pPr>
-            <a:r>
-              <a:rPr sz="1275" b="1">
-                <a:solidFill>
-                  <a:srgbClr val="5D716C"/>
-                </a:solidFill>
-              </a:rPr>
-              <a:t>BASELINE TOTAL</a:t>
-            </a:r>
-          </a:p>
-        </p:txBody>
-      </p:sp>
-      <p:sp>
-        <p:nvSpPr>
-          <p:cNvPr id="16" name="">
-            <a:extLst xmlns:a="http://schemas.openxmlformats.org/drawingml/2006/main">
-              <a:ext uri="{FF2B5EF4-FFF2-40B4-BE49-F238E27FC236}">
-                <a16:creationId xmlns:a16="http://schemas.microsoft.com/office/drawing/2014/main" id="{3986555D-6F99-4AD1-AC66-952510035D3F}"/>
-              </a:ext>
-            </a:extLst>
-          </p:cNvPr>
-          <p:cNvSpPr>
-            <a:spLocks xmlns:a="http://schemas.openxmlformats.org/drawingml/2006/main" noGrp="1"/>
-          </p:cNvSpPr>
-          <p:nvPr/>
-        </p:nvSpPr>
-        <p:spPr>
-          <a:xfrm xmlns:a="http://schemas.openxmlformats.org/drawingml/2006/main">
-            <a:off x="857250" y="8191500"/>
-            <a:ext cx="6800850" cy="552450"/>
-          </a:xfrm>
-          <a:prstGeom xmlns:a="http://schemas.openxmlformats.org/drawingml/2006/main" prst="rect">
-            <a:avLst/>
-          </a:prstGeom>
-        </p:spPr>
-        <p:txBody>
-          <a:bodyPr xmlns:a="http://schemas.openxmlformats.org/drawingml/2006/main" lIns="0" tIns="0" rIns="0" bIns="0"/>
-          <a:lstStyle xmlns:a="http://schemas.openxmlformats.org/drawingml/2006/main"/>
-          <a:p xmlns:a="http://schemas.openxmlformats.org/drawingml/2006/main">
-            <a:pPr>
-              <a:defRPr sz="3300" b="1">
-                <a:solidFill>
-                  <a:srgbClr val="B95B4C"/>
-                </a:solidFill>
-              </a:defRPr>
-            </a:pPr>
-            <a:r>
-              <a:rPr sz="3300" b="1">
-                <a:solidFill>
-                  <a:srgbClr val="B95B4C"/>
-                </a:solidFill>
-              </a:rPr>
               <a:t>52.61 ha</a:t>
             </a:r>
           </a:p>
@@ -4429,100 +4405,55 @@
       </p:sp>
       <p:sp>
         <p:nvSpPr>
-          <p:cNvPr id="17" name="">
-            <a:extLst xmlns:a="http://schemas.openxmlformats.org/drawingml/2006/main">
-              <a:ext uri="{FF2B5EF4-FFF2-40B4-BE49-F238E27FC236}">
-                <a16:creationId xmlns:a16="http://schemas.microsoft.com/office/drawing/2014/main" id="{061222FD-B5F9-4A50-9C4E-4BDACD0FC5CF}"/>
-              </a:ext>
-            </a:extLst>
-          </p:cNvPr>
-          <p:cNvSpPr>
-            <a:spLocks xmlns:a="http://schemas.openxmlformats.org/drawingml/2006/main" noGrp="1"/>
-          </p:cNvSpPr>
-          <p:nvPr/>
-        </p:nvSpPr>
-        <p:spPr>
-          <a:xfrm xmlns:a="http://schemas.openxmlformats.org/drawingml/2006/main">
-            <a:off x="7924800" y="7848600"/>
-            <a:ext cx="9505950" cy="266700"/>
-          </a:xfrm>
-          <a:prstGeom xmlns:a="http://schemas.openxmlformats.org/drawingml/2006/main" prst="rect">
-            <a:avLst/>
-          </a:prstGeom>
-        </p:spPr>
-        <p:txBody>
-          <a:bodyPr xmlns:a="http://schemas.openxmlformats.org/drawingml/2006/main" lIns="0" tIns="0" rIns="0" bIns="0"/>
-          <a:lstStyle xmlns:a="http://schemas.openxmlformats.org/drawingml/2006/main"/>
-          <a:p xmlns:a="http://schemas.openxmlformats.org/drawingml/2006/main">
-            <a:pPr>
-              <a:defRPr sz="1275" b="1">
-                <a:solidFill>
-                  <a:srgbClr val="5D716C"/>
-                </a:solidFill>
-              </a:defRPr>
-            </a:pPr>
-            <a:r>
-              <a:rPr sz="1275" b="1">
-                <a:solidFill>
-                  <a:srgbClr val="5D716C"/>
-                </a:solidFill>
-              </a:rPr>
-              <a:t>SECONDARY VEGETATION SCENARIO</a:t>
-            </a:r>
-          </a:p>
-        </p:txBody>
-      </p:sp>
-      <p:sp>
-        <p:nvSpPr>
-          <p:cNvPr id="18" name="">
-            <a:extLst xmlns:a="http://schemas.openxmlformats.org/drawingml/2006/main">
-              <a:ext uri="{FF2B5EF4-FFF2-40B4-BE49-F238E27FC236}">
-                <a16:creationId xmlns:a16="http://schemas.microsoft.com/office/drawing/2014/main" id="{97445F53-427C-48B5-B11B-63FAA7C5E386}"/>
-              </a:ext>
-            </a:extLst>
-          </p:cNvPr>
-          <p:cNvSpPr>
-            <a:spLocks xmlns:a="http://schemas.openxmlformats.org/drawingml/2006/main" noGrp="1"/>
-          </p:cNvSpPr>
-          <p:nvPr/>
-        </p:nvSpPr>
-        <p:spPr>
-          <a:xfrm xmlns:a="http://schemas.openxmlformats.org/drawingml/2006/main">
-            <a:off x="7924800" y="8191500"/>
-            <a:ext cx="9505950" cy="552450"/>
-          </a:xfrm>
-          <a:prstGeom xmlns:a="http://schemas.openxmlformats.org/drawingml/2006/main" prst="rect">
-            <a:avLst/>
-          </a:prstGeom>
-        </p:spPr>
-        <p:txBody>
-          <a:bodyPr xmlns:a="http://schemas.openxmlformats.org/drawingml/2006/main" lIns="0" tIns="0" rIns="0" bIns="0"/>
-          <a:lstStyle xmlns:a="http://schemas.openxmlformats.org/drawingml/2006/main"/>
-          <a:p xmlns:a="http://schemas.openxmlformats.org/drawingml/2006/main">
-            <a:pPr>
-              <a:defRPr sz="2625" b="1">
-                <a:solidFill>
-                  <a:srgbClr val="1E6B52"/>
-                </a:solidFill>
-              </a:defRPr>
-            </a:pPr>
-            <a:r>
-              <a:rPr sz="2625" b="1">
-                <a:solidFill>
-                  <a:srgbClr val="1E6B52"/>
-                </a:solidFill>
-              </a:rPr>
-              <a:t>79.11 ha added → 0.00 ha remaining</a:t>
-            </a:r>
-          </a:p>
-        </p:txBody>
-      </p:sp>
-      <p:sp>
-        <p:nvSpPr>
-          <p:cNvPr id="19" name="source-4">
-            <a:extLst xmlns:a="http://schemas.openxmlformats.org/drawingml/2006/main">
-              <a:ext uri="{FF2B5EF4-FFF2-40B4-BE49-F238E27FC236}">
-                <a16:creationId xmlns:a16="http://schemas.microsoft.com/office/drawing/2014/main" id="{BEB116BF-78EC-471E-93A8-372B20E930C1}"/>
+          <p:cNvPr id="14" name="map-property-key-4">
+            <a:extLst xmlns:a="http://schemas.openxmlformats.org/drawingml/2006/main">
+              <a:ext uri="{FF2B5EF4-FFF2-40B4-BE49-F238E27FC236}">
+                <a16:creationId xmlns:a16="http://schemas.microsoft.com/office/drawing/2014/main" id="{8CA43CE4-1905-4ACB-816E-F65CFADC04BB}"/>
+              </a:ext>
+            </a:extLst>
+          </p:cNvPr>
+          <p:cNvSpPr>
+            <a:spLocks xmlns:a="http://schemas.openxmlformats.org/drawingml/2006/main" noGrp="1"/>
+          </p:cNvSpPr>
+          <p:nvPr/>
+        </p:nvSpPr>
+        <p:spPr>
+          <a:xfrm xmlns:a="http://schemas.openxmlformats.org/drawingml/2006/main">
+            <a:off x="857250" y="9010650"/>
+            <a:ext cx="16573500" cy="247650"/>
+          </a:xfrm>
+          <a:prstGeom xmlns:a="http://schemas.openxmlformats.org/drawingml/2006/main" prst="rect">
+            <a:avLst/>
+          </a:prstGeom>
+        </p:spPr>
+        <p:txBody>
+          <a:bodyPr xmlns:a="http://schemas.openxmlformats.org/drawingml/2006/main" lIns="0" tIns="0" rIns="0" bIns="0"/>
+          <a:lstStyle xmlns:a="http://schemas.openxmlformats.org/drawingml/2006/main"/>
+          <a:p xmlns:a="http://schemas.openxmlformats.org/drawingml/2006/main">
+            <a:pPr>
+              <a:defRPr sz="975">
+                <a:solidFill>
+                  <a:srgbClr val="5D716C"/>
+                </a:solidFill>
+              </a:defRPr>
+            </a:pPr>
+            <a:r>
+              <a:rPr sz="975">
+                <a:solidFill>
+                  <a:srgbClr val="5D716C"/>
+                </a:solidFill>
+              </a:rPr>
+              <a:t>CAR boundary: MT-5107875-FCDC7412E5B04C10A7B5B8FA8CE4B049</a:t>
+            </a:r>
+          </a:p>
+        </p:txBody>
+      </p:sp>
+      <p:sp>
+        <p:nvSpPr>
+          <p:cNvPr id="15" name="source-4">
+            <a:extLst xmlns:a="http://schemas.openxmlformats.org/drawingml/2006/main">
+              <a:ext uri="{FF2B5EF4-FFF2-40B4-BE49-F238E27FC236}">
+                <a16:creationId xmlns:a16="http://schemas.microsoft.com/office/drawing/2014/main" id="{83BBB11A-7E10-42F6-B4B0-05DEAEDC7A3B}"/>
               </a:ext>
             </a:extLst>
           </p:cNvPr>
@@ -4564,10 +4495,10 @@
       </p:sp>
       <p:sp>
         <p:nvSpPr>
-          <p:cNvPr id="20" name="page-4">
-            <a:extLst xmlns:a="http://schemas.openxmlformats.org/drawingml/2006/main">
-              <a:ext uri="{FF2B5EF4-FFF2-40B4-BE49-F238E27FC236}">
-                <a16:creationId xmlns:a16="http://schemas.microsoft.com/office/drawing/2014/main" id="{0FC867BF-A337-4EAE-86D3-A20348EAEF49}"/>
+          <p:cNvPr id="16" name="page-4">
+            <a:extLst xmlns:a="http://schemas.openxmlformats.org/drawingml/2006/main">
+              <a:ext uri="{FF2B5EF4-FFF2-40B4-BE49-F238E27FC236}">
+                <a16:creationId xmlns:a16="http://schemas.microsoft.com/office/drawing/2014/main" id="{7FA51B12-BC20-4358-A8D2-DD0A94BF1AE5}"/>
               </a:ext>
             </a:extLst>
           </p:cNvPr>
@@ -4610,7 +4541,7 @@
     </p:spTree>
     <p:extLst>
       <p:ext uri="{BB962C8B-B14F-4D97-AF65-F5344CB8AC3E}">
-        <p14:creationId xmlns:p14="http://schemas.microsoft.com/office/powerpoint/2010/main" val="1370090632"/>
+        <p14:creationId xmlns:p14="http://schemas.microsoft.com/office/powerpoint/2010/main" val="558526263"/>
       </p:ext>
     </p:extLst>
   </p:cSld>
@@ -4634,7 +4565,7 @@
           <p:cNvPr id="1" name="slide-title-5">
             <a:extLst xmlns:a="http://schemas.openxmlformats.org/drawingml/2006/main">
               <a:ext uri="{FF2B5EF4-FFF2-40B4-BE49-F238E27FC236}">
-                <a16:creationId xmlns:a16="http://schemas.microsoft.com/office/drawing/2014/main" id="{355C4709-A95E-46EB-8635-7B5AA0C1FB42}"/>
+                <a16:creationId xmlns:a16="http://schemas.microsoft.com/office/drawing/2014/main" id="{8AB4E243-5E86-4B80-ABC9-B54B52AFC3A1}"/>
               </a:ext>
             </a:extLst>
           </p:cNvPr>
@@ -4669,7 +4600,7 @@
                   <a:srgbClr val="17312B"/>
                 </a:solidFill>
               </a:rPr>
-              <a:t>Small property · inputs and cut-off tests</a:t>
+              <a:t>Large-property calculation chain</a:t>
             </a:r>
           </a:p>
         </p:txBody>
@@ -4679,7 +4610,7 @@
           <p:cNvPr id="2" name="slide-subtitle-5">
             <a:extLst xmlns:a="http://schemas.openxmlformats.org/drawingml/2006/main">
               <a:ext uri="{FF2B5EF4-FFF2-40B4-BE49-F238E27FC236}">
-                <a16:creationId xmlns:a16="http://schemas.microsoft.com/office/drawing/2014/main" id="{E6AD1A15-64B2-4DEA-8F54-0D9D06E7B0E5}"/>
+                <a16:creationId xmlns:a16="http://schemas.microsoft.com/office/drawing/2014/main" id="{50D3F0C2-1625-46D5-81C8-F8272D3E6D0C}"/>
               </a:ext>
             </a:extLst>
           </p:cNvPr>
@@ -4691,7 +4622,7 @@
         <p:spPr>
           <a:xfrm xmlns:a="http://schemas.openxmlformats.org/drawingml/2006/main">
             <a:off x="857250" y="1276350"/>
-            <a:ext cx="6838950" cy="552450"/>
+            <a:ext cx="7905750" cy="552450"/>
           </a:xfrm>
           <a:prstGeom xmlns:a="http://schemas.openxmlformats.org/drawingml/2006/main" prst="rect">
             <a:avLst/>
@@ -4714,7 +4645,7 @@
                   <a:srgbClr val="5D716C"/>
                 </a:solidFill>
               </a:rPr>
-              <a:t>2.41 fiscal modules · SIMCAR Validated · forest and cerrado both &gt; 0 ha</a:t>
+              <a:t>Article 68 determines LR; APP and secondary vegetation are calculated separately.</a:t>
             </a:r>
           </a:p>
         </p:txBody>
@@ -4724,42 +4655,42 @@
           <p:cNvPr id="3" name="">
             <a:extLst xmlns:a="http://schemas.openxmlformats.org/drawingml/2006/main">
               <a:ext uri="{FF2B5EF4-FFF2-40B4-BE49-F238E27FC236}">
-                <a16:creationId xmlns:a16="http://schemas.microsoft.com/office/drawing/2014/main" id="{D9137F80-F67B-4CF0-B10B-57EB341942A2}"/>
-              </a:ext>
-            </a:extLst>
-          </p:cNvPr>
-          <p:cNvSpPr>
-            <a:spLocks xmlns:a="http://schemas.openxmlformats.org/drawingml/2006/main" noGrp="1"/>
-          </p:cNvSpPr>
-          <p:nvPr/>
-        </p:nvSpPr>
-        <p:spPr>
-          <a:xfrm xmlns:a="http://schemas.openxmlformats.org/drawingml/2006/main">
-            <a:off x="1028700" y="2838450"/>
-            <a:ext cx="2895600" cy="304800"/>
-          </a:xfrm>
-          <a:prstGeom xmlns:a="http://schemas.openxmlformats.org/drawingml/2006/main" prst="rect">
-            <a:avLst/>
-          </a:prstGeom>
-        </p:spPr>
-        <p:txBody>
-          <a:bodyPr xmlns:a="http://schemas.openxmlformats.org/drawingml/2006/main" lIns="0" tIns="0" rIns="0" bIns="0"/>
-          <a:lstStyle xmlns:a="http://schemas.openxmlformats.org/drawingml/2006/main"/>
-          <a:p xmlns:a="http://schemas.openxmlformats.org/drawingml/2006/main">
-            <a:pPr>
-              <a:defRPr sz="1275">
-                <a:solidFill>
-                  <a:srgbClr val="5D716C"/>
-                </a:solidFill>
-              </a:defRPr>
-            </a:pPr>
-            <a:r>
-              <a:rPr sz="1275">
-                <a:solidFill>
-                  <a:srgbClr val="5D716C"/>
-                </a:solidFill>
-              </a:rPr>
-              <a:t>Property area</a:t>
+                <a16:creationId xmlns:a16="http://schemas.microsoft.com/office/drawing/2014/main" id="{C463E34B-DD44-4F05-A5C8-61B83FB71B21}"/>
+              </a:ext>
+            </a:extLst>
+          </p:cNvPr>
+          <p:cNvSpPr>
+            <a:spLocks xmlns:a="http://schemas.openxmlformats.org/drawingml/2006/main" noGrp="1"/>
+          </p:cNvSpPr>
+          <p:nvPr/>
+        </p:nvSpPr>
+        <p:spPr>
+          <a:xfrm xmlns:a="http://schemas.openxmlformats.org/drawingml/2006/main">
+            <a:off x="1066800" y="2305050"/>
+            <a:ext cx="7753350" cy="247650"/>
+          </a:xfrm>
+          <a:prstGeom xmlns:a="http://schemas.openxmlformats.org/drawingml/2006/main" prst="rect">
+            <a:avLst/>
+          </a:prstGeom>
+        </p:spPr>
+        <p:txBody>
+          <a:bodyPr xmlns:a="http://schemas.openxmlformats.org/drawingml/2006/main" lIns="0" tIns="0" rIns="0" bIns="0"/>
+          <a:lstStyle xmlns:a="http://schemas.openxmlformats.org/drawingml/2006/main"/>
+          <a:p xmlns:a="http://schemas.openxmlformats.org/drawingml/2006/main">
+            <a:pPr>
+              <a:defRPr sz="1275" b="1">
+                <a:solidFill>
+                  <a:srgbClr val="1E6B52"/>
+                </a:solidFill>
+              </a:defRPr>
+            </a:pPr>
+            <a:r>
+              <a:rPr sz="1275" b="1">
+                <a:solidFill>
+                  <a:srgbClr val="1E6B52"/>
+                </a:solidFill>
+              </a:rPr>
+              <a:t>2000 legal test</a:t>
             </a:r>
           </a:p>
         </p:txBody>
@@ -4769,42 +4700,42 @@
           <p:cNvPr id="4" name="">
             <a:extLst xmlns:a="http://schemas.openxmlformats.org/drawingml/2006/main">
               <a:ext uri="{FF2B5EF4-FFF2-40B4-BE49-F238E27FC236}">
-                <a16:creationId xmlns:a16="http://schemas.microsoft.com/office/drawing/2014/main" id="{10ECC85E-AB5D-4A68-B119-2790E7058004}"/>
-              </a:ext>
-            </a:extLst>
-          </p:cNvPr>
-          <p:cNvSpPr>
-            <a:spLocks xmlns:a="http://schemas.openxmlformats.org/drawingml/2006/main" noGrp="1"/>
-          </p:cNvSpPr>
-          <p:nvPr/>
-        </p:nvSpPr>
-        <p:spPr>
-          <a:xfrm xmlns:a="http://schemas.openxmlformats.org/drawingml/2006/main">
-            <a:off x="3924300" y="2819400"/>
-            <a:ext cx="2133600" cy="323850"/>
-          </a:xfrm>
-          <a:prstGeom xmlns:a="http://schemas.openxmlformats.org/drawingml/2006/main" prst="rect">
-            <a:avLst/>
-          </a:prstGeom>
-        </p:spPr>
-        <p:txBody>
-          <a:bodyPr xmlns:a="http://schemas.openxmlformats.org/drawingml/2006/main" lIns="0" tIns="0" rIns="0" bIns="0"/>
-          <a:lstStyle xmlns:a="http://schemas.openxmlformats.org/drawingml/2006/main"/>
-          <a:p xmlns:a="http://schemas.openxmlformats.org/drawingml/2006/main">
-            <a:pPr>
-              <a:defRPr sz="1650" b="1">
-                <a:solidFill>
-                  <a:srgbClr val="D49A45"/>
-                </a:solidFill>
-              </a:defRPr>
-            </a:pPr>
-            <a:r>
-              <a:rPr sz="1650" b="1">
-                <a:solidFill>
-                  <a:srgbClr val="D49A45"/>
-                </a:solidFill>
-              </a:rPr>
-              <a:t>193.20 ha</a:t>
+                <a16:creationId xmlns:a16="http://schemas.microsoft.com/office/drawing/2014/main" id="{3CEF73B1-AC18-4F6B-B14E-F650531553BF}"/>
+              </a:ext>
+            </a:extLst>
+          </p:cNvPr>
+          <p:cNvSpPr>
+            <a:spLocks xmlns:a="http://schemas.openxmlformats.org/drawingml/2006/main" noGrp="1"/>
+          </p:cNvSpPr>
+          <p:nvPr/>
+        </p:nvSpPr>
+        <p:spPr>
+          <a:xfrm xmlns:a="http://schemas.openxmlformats.org/drawingml/2006/main">
+            <a:off x="1066800" y="2609850"/>
+            <a:ext cx="7753350" cy="323850"/>
+          </a:xfrm>
+          <a:prstGeom xmlns:a="http://schemas.openxmlformats.org/drawingml/2006/main" prst="rect">
+            <a:avLst/>
+          </a:prstGeom>
+        </p:spPr>
+        <p:txBody>
+          <a:bodyPr xmlns:a="http://schemas.openxmlformats.org/drawingml/2006/main" lIns="0" tIns="0" rIns="0" bIns="0"/>
+          <a:lstStyle xmlns:a="http://schemas.openxmlformats.org/drawingml/2006/main"/>
+          <a:p xmlns:a="http://schemas.openxmlformats.org/drawingml/2006/main">
+            <a:pPr>
+              <a:defRPr sz="1425">
+                <a:solidFill>
+                  <a:srgbClr val="17312B"/>
+                </a:solidFill>
+              </a:defRPr>
+            </a:pPr>
+            <a:r>
+              <a:rPr sz="1425">
+                <a:solidFill>
+                  <a:srgbClr val="17312B"/>
+                </a:solidFill>
+              </a:rPr>
+              <a:t>326.79 ha ≥ 170.75 ha</a:t>
             </a:r>
           </a:p>
         </p:txBody>
@@ -4814,42 +4745,42 @@
           <p:cNvPr id="5" name="">
             <a:extLst xmlns:a="http://schemas.openxmlformats.org/drawingml/2006/main">
               <a:ext uri="{FF2B5EF4-FFF2-40B4-BE49-F238E27FC236}">
-                <a16:creationId xmlns:a16="http://schemas.microsoft.com/office/drawing/2014/main" id="{8F4DAD13-7486-4E92-95EE-9FF47771A5D3}"/>
-              </a:ext>
-            </a:extLst>
-          </p:cNvPr>
-          <p:cNvSpPr>
-            <a:spLocks xmlns:a="http://schemas.openxmlformats.org/drawingml/2006/main" noGrp="1"/>
-          </p:cNvSpPr>
-          <p:nvPr/>
-        </p:nvSpPr>
-        <p:spPr>
-          <a:xfrm xmlns:a="http://schemas.openxmlformats.org/drawingml/2006/main">
-            <a:off x="1028700" y="4476750"/>
-            <a:ext cx="2895600" cy="304800"/>
-          </a:xfrm>
-          <a:prstGeom xmlns:a="http://schemas.openxmlformats.org/drawingml/2006/main" prst="rect">
-            <a:avLst/>
-          </a:prstGeom>
-        </p:spPr>
-        <p:txBody>
-          <a:bodyPr xmlns:a="http://schemas.openxmlformats.org/drawingml/2006/main" lIns="0" tIns="0" rIns="0" bIns="0"/>
-          <a:lstStyle xmlns:a="http://schemas.openxmlformats.org/drawingml/2006/main"/>
-          <a:p xmlns:a="http://schemas.openxmlformats.org/drawingml/2006/main">
-            <a:pPr>
-              <a:defRPr sz="1275">
-                <a:solidFill>
-                  <a:srgbClr val="5D716C"/>
-                </a:solidFill>
-              </a:defRPr>
-            </a:pPr>
-            <a:r>
-              <a:rPr sz="1275">
-                <a:solidFill>
-                  <a:srgbClr val="5D716C"/>
-                </a:solidFill>
-              </a:rPr>
-              <a:t>Fiscal modules</a:t>
+                <a16:creationId xmlns:a16="http://schemas.microsoft.com/office/drawing/2014/main" id="{3ACE5852-B7C8-4F5F-A11A-294B1E19CB5A}"/>
+              </a:ext>
+            </a:extLst>
+          </p:cNvPr>
+          <p:cNvSpPr>
+            <a:spLocks xmlns:a="http://schemas.openxmlformats.org/drawingml/2006/main" noGrp="1"/>
+          </p:cNvSpPr>
+          <p:nvPr/>
+        </p:nvSpPr>
+        <p:spPr>
+          <a:xfrm xmlns:a="http://schemas.openxmlformats.org/drawingml/2006/main">
+            <a:off x="1066800" y="2990850"/>
+            <a:ext cx="7753350" cy="342900"/>
+          </a:xfrm>
+          <a:prstGeom xmlns:a="http://schemas.openxmlformats.org/drawingml/2006/main" prst="rect">
+            <a:avLst/>
+          </a:prstGeom>
+        </p:spPr>
+        <p:txBody>
+          <a:bodyPr xmlns:a="http://schemas.openxmlformats.org/drawingml/2006/main" lIns="0" tIns="0" rIns="0" bIns="0"/>
+          <a:lstStyle xmlns:a="http://schemas.openxmlformats.org/drawingml/2006/main"/>
+          <a:p xmlns:a="http://schemas.openxmlformats.org/drawingml/2006/main">
+            <a:pPr>
+              <a:defRPr sz="1800" b="1">
+                <a:solidFill>
+                  <a:srgbClr val="1E6B52"/>
+                </a:solidFill>
+              </a:defRPr>
+            </a:pPr>
+            <a:r>
+              <a:rPr sz="1800" b="1">
+                <a:solidFill>
+                  <a:srgbClr val="1E6B52"/>
+                </a:solidFill>
+              </a:rPr>
+              <a:t>= Historical floor applies: 170.75 ha</a:t>
             </a:r>
           </a:p>
         </p:txBody>
@@ -4859,42 +4790,42 @@
           <p:cNvPr id="6" name="">
             <a:extLst xmlns:a="http://schemas.openxmlformats.org/drawingml/2006/main">
               <a:ext uri="{FF2B5EF4-FFF2-40B4-BE49-F238E27FC236}">
-                <a16:creationId xmlns:a16="http://schemas.microsoft.com/office/drawing/2014/main" id="{6C1F6D90-6455-4DC9-82FC-ADA5F7780436}"/>
-              </a:ext>
-            </a:extLst>
-          </p:cNvPr>
-          <p:cNvSpPr>
-            <a:spLocks xmlns:a="http://schemas.openxmlformats.org/drawingml/2006/main" noGrp="1"/>
-          </p:cNvSpPr>
-          <p:nvPr/>
-        </p:nvSpPr>
-        <p:spPr>
-          <a:xfrm xmlns:a="http://schemas.openxmlformats.org/drawingml/2006/main">
-            <a:off x="3924300" y="4457700"/>
-            <a:ext cx="2133600" cy="323850"/>
-          </a:xfrm>
-          <a:prstGeom xmlns:a="http://schemas.openxmlformats.org/drawingml/2006/main" prst="rect">
-            <a:avLst/>
-          </a:prstGeom>
-        </p:spPr>
-        <p:txBody>
-          <a:bodyPr xmlns:a="http://schemas.openxmlformats.org/drawingml/2006/main" lIns="0" tIns="0" rIns="0" bIns="0"/>
-          <a:lstStyle xmlns:a="http://schemas.openxmlformats.org/drawingml/2006/main"/>
-          <a:p xmlns:a="http://schemas.openxmlformats.org/drawingml/2006/main">
-            <a:pPr>
-              <a:defRPr sz="1650" b="1">
-                <a:solidFill>
-                  <a:srgbClr val="D49A45"/>
-                </a:solidFill>
-              </a:defRPr>
-            </a:pPr>
-            <a:r>
-              <a:rPr sz="1650" b="1">
-                <a:solidFill>
-                  <a:srgbClr val="D49A45"/>
-                </a:solidFill>
-              </a:rPr>
-              <a:t>2.41</a:t>
+                <a16:creationId xmlns:a16="http://schemas.microsoft.com/office/drawing/2014/main" id="{4F117332-F922-472F-BE6C-A13A0D515C8D}"/>
+              </a:ext>
+            </a:extLst>
+          </p:cNvPr>
+          <p:cNvSpPr>
+            <a:spLocks xmlns:a="http://schemas.openxmlformats.org/drawingml/2006/main" noGrp="1"/>
+          </p:cNvSpPr>
+          <p:nvPr/>
+        </p:nvSpPr>
+        <p:spPr>
+          <a:xfrm xmlns:a="http://schemas.openxmlformats.org/drawingml/2006/main">
+            <a:off x="9467850" y="2305050"/>
+            <a:ext cx="7753350" cy="247650"/>
+          </a:xfrm>
+          <a:prstGeom xmlns:a="http://schemas.openxmlformats.org/drawingml/2006/main" prst="rect">
+            <a:avLst/>
+          </a:prstGeom>
+        </p:spPr>
+        <p:txBody>
+          <a:bodyPr xmlns:a="http://schemas.openxmlformats.org/drawingml/2006/main" lIns="0" tIns="0" rIns="0" bIns="0"/>
+          <a:lstStyle xmlns:a="http://schemas.openxmlformats.org/drawingml/2006/main"/>
+          <a:p xmlns:a="http://schemas.openxmlformats.org/drawingml/2006/main">
+            <a:pPr>
+              <a:defRPr sz="1275" b="1">
+                <a:solidFill>
+                  <a:srgbClr val="1E6B52"/>
+                </a:solidFill>
+              </a:defRPr>
+            </a:pPr>
+            <a:r>
+              <a:rPr sz="1275" b="1">
+                <a:solidFill>
+                  <a:srgbClr val="1E6B52"/>
+                </a:solidFill>
+              </a:rPr>
+              <a:t>Legal Reserve deficit</a:t>
             </a:r>
           </a:p>
         </p:txBody>
@@ -4904,42 +4835,42 @@
           <p:cNvPr id="7" name="">
             <a:extLst xmlns:a="http://schemas.openxmlformats.org/drawingml/2006/main">
               <a:ext uri="{FF2B5EF4-FFF2-40B4-BE49-F238E27FC236}">
-                <a16:creationId xmlns:a16="http://schemas.microsoft.com/office/drawing/2014/main" id="{3D2F0E3B-4EBD-4229-8B49-DFB2CD7EAA45}"/>
-              </a:ext>
-            </a:extLst>
-          </p:cNvPr>
-          <p:cNvSpPr>
-            <a:spLocks xmlns:a="http://schemas.openxmlformats.org/drawingml/2006/main" noGrp="1"/>
-          </p:cNvSpPr>
-          <p:nvPr/>
-        </p:nvSpPr>
-        <p:spPr>
-          <a:xfrm xmlns:a="http://schemas.openxmlformats.org/drawingml/2006/main">
-            <a:off x="1028700" y="6115050"/>
-            <a:ext cx="2895600" cy="304800"/>
-          </a:xfrm>
-          <a:prstGeom xmlns:a="http://schemas.openxmlformats.org/drawingml/2006/main" prst="rect">
-            <a:avLst/>
-          </a:prstGeom>
-        </p:spPr>
-        <p:txBody>
-          <a:bodyPr xmlns:a="http://schemas.openxmlformats.org/drawingml/2006/main" lIns="0" tIns="0" rIns="0" bIns="0"/>
-          <a:lstStyle xmlns:a="http://schemas.openxmlformats.org/drawingml/2006/main"/>
-          <a:p xmlns:a="http://schemas.openxmlformats.org/drawingml/2006/main">
-            <a:pPr>
-              <a:defRPr sz="1275">
-                <a:solidFill>
-                  <a:srgbClr val="5D716C"/>
-                </a:solidFill>
-              </a:defRPr>
-            </a:pPr>
-            <a:r>
-              <a:rPr sz="1275">
-                <a:solidFill>
-                  <a:srgbClr val="5D716C"/>
-                </a:solidFill>
-              </a:rPr>
-              <a:t>Forest area</a:t>
+                <a16:creationId xmlns:a16="http://schemas.microsoft.com/office/drawing/2014/main" id="{9904F5DF-6974-438D-BB99-037DA89EFB30}"/>
+              </a:ext>
+            </a:extLst>
+          </p:cNvPr>
+          <p:cNvSpPr>
+            <a:spLocks xmlns:a="http://schemas.openxmlformats.org/drawingml/2006/main" noGrp="1"/>
+          </p:cNvSpPr>
+          <p:nvPr/>
+        </p:nvSpPr>
+        <p:spPr>
+          <a:xfrm xmlns:a="http://schemas.openxmlformats.org/drawingml/2006/main">
+            <a:off x="9467850" y="2609850"/>
+            <a:ext cx="7753350" cy="323850"/>
+          </a:xfrm>
+          <a:prstGeom xmlns:a="http://schemas.openxmlformats.org/drawingml/2006/main" prst="rect">
+            <a:avLst/>
+          </a:prstGeom>
+        </p:spPr>
+        <p:txBody>
+          <a:bodyPr xmlns:a="http://schemas.openxmlformats.org/drawingml/2006/main" lIns="0" tIns="0" rIns="0" bIns="0"/>
+          <a:lstStyle xmlns:a="http://schemas.openxmlformats.org/drawingml/2006/main"/>
+          <a:p xmlns:a="http://schemas.openxmlformats.org/drawingml/2006/main">
+            <a:pPr>
+              <a:defRPr sz="1425">
+                <a:solidFill>
+                  <a:srgbClr val="17312B"/>
+                </a:solidFill>
+              </a:defRPr>
+            </a:pPr>
+            <a:r>
+              <a:rPr sz="1425">
+                <a:solidFill>
+                  <a:srgbClr val="17312B"/>
+                </a:solidFill>
+              </a:rPr>
+              <a:t>170.75 ha − 118.13 ha</a:t>
             </a:r>
           </a:p>
         </p:txBody>
@@ -4949,42 +4880,42 @@
           <p:cNvPr id="8" name="">
             <a:extLst xmlns:a="http://schemas.openxmlformats.org/drawingml/2006/main">
               <a:ext uri="{FF2B5EF4-FFF2-40B4-BE49-F238E27FC236}">
-                <a16:creationId xmlns:a16="http://schemas.microsoft.com/office/drawing/2014/main" id="{A6B1C80F-94F7-4E0F-9FF6-8D2483CD40E0}"/>
-              </a:ext>
-            </a:extLst>
-          </p:cNvPr>
-          <p:cNvSpPr>
-            <a:spLocks xmlns:a="http://schemas.openxmlformats.org/drawingml/2006/main" noGrp="1"/>
-          </p:cNvSpPr>
-          <p:nvPr/>
-        </p:nvSpPr>
-        <p:spPr>
-          <a:xfrm xmlns:a="http://schemas.openxmlformats.org/drawingml/2006/main">
-            <a:off x="3924300" y="6115050"/>
-            <a:ext cx="2133600" cy="323850"/>
-          </a:xfrm>
-          <a:prstGeom xmlns:a="http://schemas.openxmlformats.org/drawingml/2006/main" prst="rect">
-            <a:avLst/>
-          </a:prstGeom>
-        </p:spPr>
-        <p:txBody>
-          <a:bodyPr xmlns:a="http://schemas.openxmlformats.org/drawingml/2006/main" lIns="0" tIns="0" rIns="0" bIns="0"/>
-          <a:lstStyle xmlns:a="http://schemas.openxmlformats.org/drawingml/2006/main"/>
-          <a:p xmlns:a="http://schemas.openxmlformats.org/drawingml/2006/main">
-            <a:pPr>
-              <a:defRPr sz="1650" b="1">
-                <a:solidFill>
-                  <a:srgbClr val="D49A45"/>
-                </a:solidFill>
-              </a:defRPr>
-            </a:pPr>
-            <a:r>
-              <a:rPr sz="1650" b="1">
-                <a:solidFill>
-                  <a:srgbClr val="D49A45"/>
-                </a:solidFill>
-              </a:rPr>
-              <a:t>108.66 ha</a:t>
+                <a16:creationId xmlns:a16="http://schemas.microsoft.com/office/drawing/2014/main" id="{507FF6C6-3828-4EB6-908E-358A48CC9365}"/>
+              </a:ext>
+            </a:extLst>
+          </p:cNvPr>
+          <p:cNvSpPr>
+            <a:spLocks xmlns:a="http://schemas.openxmlformats.org/drawingml/2006/main" noGrp="1"/>
+          </p:cNvSpPr>
+          <p:nvPr/>
+        </p:nvSpPr>
+        <p:spPr>
+          <a:xfrm xmlns:a="http://schemas.openxmlformats.org/drawingml/2006/main">
+            <a:off x="9467850" y="2990850"/>
+            <a:ext cx="7753350" cy="342900"/>
+          </a:xfrm>
+          <a:prstGeom xmlns:a="http://schemas.openxmlformats.org/drawingml/2006/main" prst="rect">
+            <a:avLst/>
+          </a:prstGeom>
+        </p:spPr>
+        <p:txBody>
+          <a:bodyPr xmlns:a="http://schemas.openxmlformats.org/drawingml/2006/main" lIns="0" tIns="0" rIns="0" bIns="0"/>
+          <a:lstStyle xmlns:a="http://schemas.openxmlformats.org/drawingml/2006/main"/>
+          <a:p xmlns:a="http://schemas.openxmlformats.org/drawingml/2006/main">
+            <a:pPr>
+              <a:defRPr sz="1800" b="1">
+                <a:solidFill>
+                  <a:srgbClr val="1E6B52"/>
+                </a:solidFill>
+              </a:defRPr>
+            </a:pPr>
+            <a:r>
+              <a:rPr sz="1800" b="1">
+                <a:solidFill>
+                  <a:srgbClr val="1E6B52"/>
+                </a:solidFill>
+              </a:rPr>
+              <a:t>= 52.61 ha</a:t>
             </a:r>
           </a:p>
         </p:txBody>
@@ -4994,42 +4925,42 @@
           <p:cNvPr id="9" name="">
             <a:extLst xmlns:a="http://schemas.openxmlformats.org/drawingml/2006/main">
               <a:ext uri="{FF2B5EF4-FFF2-40B4-BE49-F238E27FC236}">
-                <a16:creationId xmlns:a16="http://schemas.microsoft.com/office/drawing/2014/main" id="{7AD11EED-4D3B-42D6-9BBD-012B5A960B4C}"/>
-              </a:ext>
-            </a:extLst>
-          </p:cNvPr>
-          <p:cNvSpPr>
-            <a:spLocks xmlns:a="http://schemas.openxmlformats.org/drawingml/2006/main" noGrp="1"/>
-          </p:cNvSpPr>
-          <p:nvPr/>
-        </p:nvSpPr>
-        <p:spPr>
-          <a:xfrm xmlns:a="http://schemas.openxmlformats.org/drawingml/2006/main">
-            <a:off x="1028700" y="7753350"/>
-            <a:ext cx="2895600" cy="304800"/>
-          </a:xfrm>
-          <a:prstGeom xmlns:a="http://schemas.openxmlformats.org/drawingml/2006/main" prst="rect">
-            <a:avLst/>
-          </a:prstGeom>
-        </p:spPr>
-        <p:txBody>
-          <a:bodyPr xmlns:a="http://schemas.openxmlformats.org/drawingml/2006/main" lIns="0" tIns="0" rIns="0" bIns="0"/>
-          <a:lstStyle xmlns:a="http://schemas.openxmlformats.org/drawingml/2006/main"/>
-          <a:p xmlns:a="http://schemas.openxmlformats.org/drawingml/2006/main">
-            <a:pPr>
-              <a:defRPr sz="1275">
-                <a:solidFill>
-                  <a:srgbClr val="5D716C"/>
-                </a:solidFill>
-              </a:defRPr>
-            </a:pPr>
-            <a:r>
-              <a:rPr sz="1275">
-                <a:solidFill>
-                  <a:srgbClr val="5D716C"/>
-                </a:solidFill>
-              </a:rPr>
-              <a:t>Cerrado area</a:t>
+                <a16:creationId xmlns:a16="http://schemas.microsoft.com/office/drawing/2014/main" id="{1511FB53-5567-401D-981D-9267C5396C7C}"/>
+              </a:ext>
+            </a:extLst>
+          </p:cNvPr>
+          <p:cNvSpPr>
+            <a:spLocks xmlns:a="http://schemas.openxmlformats.org/drawingml/2006/main" noGrp="1"/>
+          </p:cNvSpPr>
+          <p:nvPr/>
+        </p:nvSpPr>
+        <p:spPr>
+          <a:xfrm xmlns:a="http://schemas.openxmlformats.org/drawingml/2006/main">
+            <a:off x="1066800" y="5124450"/>
+            <a:ext cx="7753350" cy="247650"/>
+          </a:xfrm>
+          <a:prstGeom xmlns:a="http://schemas.openxmlformats.org/drawingml/2006/main" prst="rect">
+            <a:avLst/>
+          </a:prstGeom>
+        </p:spPr>
+        <p:txBody>
+          <a:bodyPr xmlns:a="http://schemas.openxmlformats.org/drawingml/2006/main" lIns="0" tIns="0" rIns="0" bIns="0"/>
+          <a:lstStyle xmlns:a="http://schemas.openxmlformats.org/drawingml/2006/main"/>
+          <a:p xmlns:a="http://schemas.openxmlformats.org/drawingml/2006/main">
+            <a:pPr>
+              <a:defRPr sz="1275" b="1">
+                <a:solidFill>
+                  <a:srgbClr val="1E6B52"/>
+                </a:solidFill>
+              </a:defRPr>
+            </a:pPr>
+            <a:r>
+              <a:rPr sz="1275" b="1">
+                <a:solidFill>
+                  <a:srgbClr val="1E6B52"/>
+                </a:solidFill>
+              </a:rPr>
+              <a:t>LR pathway</a:t>
             </a:r>
           </a:p>
         </p:txBody>
@@ -5039,42 +4970,42 @@
           <p:cNvPr id="10" name="">
             <a:extLst xmlns:a="http://schemas.openxmlformats.org/drawingml/2006/main">
               <a:ext uri="{FF2B5EF4-FFF2-40B4-BE49-F238E27FC236}">
-                <a16:creationId xmlns:a16="http://schemas.microsoft.com/office/drawing/2014/main" id="{A327619D-44C9-4CFF-BABE-AD5BC19818ED}"/>
-              </a:ext>
-            </a:extLst>
-          </p:cNvPr>
-          <p:cNvSpPr>
-            <a:spLocks xmlns:a="http://schemas.openxmlformats.org/drawingml/2006/main" noGrp="1"/>
-          </p:cNvSpPr>
-          <p:nvPr/>
-        </p:nvSpPr>
-        <p:spPr>
-          <a:xfrm xmlns:a="http://schemas.openxmlformats.org/drawingml/2006/main">
-            <a:off x="3924300" y="7753350"/>
-            <a:ext cx="2133600" cy="323850"/>
-          </a:xfrm>
-          <a:prstGeom xmlns:a="http://schemas.openxmlformats.org/drawingml/2006/main" prst="rect">
-            <a:avLst/>
-          </a:prstGeom>
-        </p:spPr>
-        <p:txBody>
-          <a:bodyPr xmlns:a="http://schemas.openxmlformats.org/drawingml/2006/main" lIns="0" tIns="0" rIns="0" bIns="0"/>
-          <a:lstStyle xmlns:a="http://schemas.openxmlformats.org/drawingml/2006/main"/>
-          <a:p xmlns:a="http://schemas.openxmlformats.org/drawingml/2006/main">
-            <a:pPr>
-              <a:defRPr sz="1650" b="1">
-                <a:solidFill>
-                  <a:srgbClr val="D49A45"/>
-                </a:solidFill>
-              </a:defRPr>
-            </a:pPr>
-            <a:r>
-              <a:rPr sz="1650" b="1">
-                <a:solidFill>
-                  <a:srgbClr val="D49A45"/>
-                </a:solidFill>
-              </a:rPr>
-              <a:t>80.90 ha</a:t>
+                <a16:creationId xmlns:a16="http://schemas.microsoft.com/office/drawing/2014/main" id="{6E6FB89C-0D5D-4E49-A5C5-956D9ACDFCA7}"/>
+              </a:ext>
+            </a:extLst>
+          </p:cNvPr>
+          <p:cNvSpPr>
+            <a:spLocks xmlns:a="http://schemas.openxmlformats.org/drawingml/2006/main" noGrp="1"/>
+          </p:cNvSpPr>
+          <p:nvPr/>
+        </p:nvSpPr>
+        <p:spPr>
+          <a:xfrm xmlns:a="http://schemas.openxmlformats.org/drawingml/2006/main">
+            <a:off x="1066800" y="5429250"/>
+            <a:ext cx="7753350" cy="323850"/>
+          </a:xfrm>
+          <a:prstGeom xmlns:a="http://schemas.openxmlformats.org/drawingml/2006/main" prst="rect">
+            <a:avLst/>
+          </a:prstGeom>
+        </p:spPr>
+        <p:txBody>
+          <a:bodyPr xmlns:a="http://schemas.openxmlformats.org/drawingml/2006/main" lIns="0" tIns="0" rIns="0" bIns="0"/>
+          <a:lstStyle xmlns:a="http://schemas.openxmlformats.org/drawingml/2006/main"/>
+          <a:p xmlns:a="http://schemas.openxmlformats.org/drawingml/2006/main">
+            <a:pPr>
+              <a:defRPr sz="1425">
+                <a:solidFill>
+                  <a:srgbClr val="17312B"/>
+                </a:solidFill>
+              </a:defRPr>
+            </a:pPr>
+            <a:r>
+              <a:rPr sz="1425">
+                <a:solidFill>
+                  <a:srgbClr val="17312B"/>
+                </a:solidFill>
+              </a:rPr>
+              <a:t>Restore = MIN(post-2008 clearing, LR deficit)</a:t>
             </a:r>
           </a:p>
         </p:txBody>
@@ -5084,42 +5015,42 @@
           <p:cNvPr id="11" name="">
             <a:extLst xmlns:a="http://schemas.openxmlformats.org/drawingml/2006/main">
               <a:ext uri="{FF2B5EF4-FFF2-40B4-BE49-F238E27FC236}">
-                <a16:creationId xmlns:a16="http://schemas.microsoft.com/office/drawing/2014/main" id="{11BFC0ED-EF03-47F5-AD3A-DD8F6EC2F847}"/>
-              </a:ext>
-            </a:extLst>
-          </p:cNvPr>
-          <p:cNvSpPr>
-            <a:spLocks xmlns:a="http://schemas.openxmlformats.org/drawingml/2006/main" noGrp="1"/>
-          </p:cNvSpPr>
-          <p:nvPr/>
-        </p:nvSpPr>
-        <p:spPr>
-          <a:xfrm xmlns:a="http://schemas.openxmlformats.org/drawingml/2006/main">
-            <a:off x="6629400" y="2838450"/>
-            <a:ext cx="2895600" cy="304800"/>
-          </a:xfrm>
-          <a:prstGeom xmlns:a="http://schemas.openxmlformats.org/drawingml/2006/main" prst="rect">
-            <a:avLst/>
-          </a:prstGeom>
-        </p:spPr>
-        <p:txBody>
-          <a:bodyPr xmlns:a="http://schemas.openxmlformats.org/drawingml/2006/main" lIns="0" tIns="0" rIns="0" bIns="0"/>
-          <a:lstStyle xmlns:a="http://schemas.openxmlformats.org/drawingml/2006/main"/>
-          <a:p xmlns:a="http://schemas.openxmlformats.org/drawingml/2006/main">
-            <a:pPr>
-              <a:defRPr sz="1275">
-                <a:solidFill>
-                  <a:srgbClr val="5D716C"/>
-                </a:solidFill>
-              </a:defRPr>
-            </a:pPr>
-            <a:r>
-              <a:rPr sz="1275">
-                <a:solidFill>
-                  <a:srgbClr val="5D716C"/>
-                </a:solidFill>
-              </a:rPr>
-              <a:t>Consolidated area 2000</a:t>
+                <a16:creationId xmlns:a16="http://schemas.microsoft.com/office/drawing/2014/main" id="{140DD76A-1AC0-4FEA-96BD-CEFC6BA518C5}"/>
+              </a:ext>
+            </a:extLst>
+          </p:cNvPr>
+          <p:cNvSpPr>
+            <a:spLocks xmlns:a="http://schemas.openxmlformats.org/drawingml/2006/main" noGrp="1"/>
+          </p:cNvSpPr>
+          <p:nvPr/>
+        </p:nvSpPr>
+        <p:spPr>
+          <a:xfrm xmlns:a="http://schemas.openxmlformats.org/drawingml/2006/main">
+            <a:off x="1066800" y="5810250"/>
+            <a:ext cx="7753350" cy="342900"/>
+          </a:xfrm>
+          <a:prstGeom xmlns:a="http://schemas.openxmlformats.org/drawingml/2006/main" prst="rect">
+            <a:avLst/>
+          </a:prstGeom>
+        </p:spPr>
+        <p:txBody>
+          <a:bodyPr xmlns:a="http://schemas.openxmlformats.org/drawingml/2006/main" lIns="0" tIns="0" rIns="0" bIns="0"/>
+          <a:lstStyle xmlns:a="http://schemas.openxmlformats.org/drawingml/2006/main"/>
+          <a:p xmlns:a="http://schemas.openxmlformats.org/drawingml/2006/main">
+            <a:pPr>
+              <a:defRPr sz="1800" b="1">
+                <a:solidFill>
+                  <a:srgbClr val="1E6B52"/>
+                </a:solidFill>
+              </a:defRPr>
+            </a:pPr>
+            <a:r>
+              <a:rPr sz="1800" b="1">
+                <a:solidFill>
+                  <a:srgbClr val="1E6B52"/>
+                </a:solidFill>
+              </a:rPr>
+              <a:t>= 0.00 ha restore · 52.61 ha compensate</a:t>
             </a:r>
           </a:p>
         </p:txBody>
@@ -5129,42 +5060,42 @@
           <p:cNvPr id="12" name="">
             <a:extLst xmlns:a="http://schemas.openxmlformats.org/drawingml/2006/main">
               <a:ext uri="{FF2B5EF4-FFF2-40B4-BE49-F238E27FC236}">
-                <a16:creationId xmlns:a16="http://schemas.microsoft.com/office/drawing/2014/main" id="{003089BB-65E4-4F0F-802B-E025BD38FA5D}"/>
-              </a:ext>
-            </a:extLst>
-          </p:cNvPr>
-          <p:cNvSpPr>
-            <a:spLocks xmlns:a="http://schemas.openxmlformats.org/drawingml/2006/main" noGrp="1"/>
-          </p:cNvSpPr>
-          <p:nvPr/>
-        </p:nvSpPr>
-        <p:spPr>
-          <a:xfrm xmlns:a="http://schemas.openxmlformats.org/drawingml/2006/main">
-            <a:off x="9525000" y="2819400"/>
-            <a:ext cx="2133600" cy="323850"/>
-          </a:xfrm>
-          <a:prstGeom xmlns:a="http://schemas.openxmlformats.org/drawingml/2006/main" prst="rect">
-            <a:avLst/>
-          </a:prstGeom>
-        </p:spPr>
-        <p:txBody>
-          <a:bodyPr xmlns:a="http://schemas.openxmlformats.org/drawingml/2006/main" lIns="0" tIns="0" rIns="0" bIns="0"/>
-          <a:lstStyle xmlns:a="http://schemas.openxmlformats.org/drawingml/2006/main"/>
-          <a:p xmlns:a="http://schemas.openxmlformats.org/drawingml/2006/main">
-            <a:pPr>
-              <a:defRPr sz="1650" b="1">
-                <a:solidFill>
-                  <a:srgbClr val="D49A45"/>
-                </a:solidFill>
-              </a:defRPr>
-            </a:pPr>
-            <a:r>
-              <a:rPr sz="1650" b="1">
-                <a:solidFill>
-                  <a:srgbClr val="D49A45"/>
-                </a:solidFill>
-              </a:rPr>
-              <a:t>140.02 ha</a:t>
+                <a16:creationId xmlns:a16="http://schemas.microsoft.com/office/drawing/2014/main" id="{D974E101-92B2-4C99-A6F1-14434C5C1A0C}"/>
+              </a:ext>
+            </a:extLst>
+          </p:cNvPr>
+          <p:cNvSpPr>
+            <a:spLocks xmlns:a="http://schemas.openxmlformats.org/drawingml/2006/main" noGrp="1"/>
+          </p:cNvSpPr>
+          <p:nvPr/>
+        </p:nvSpPr>
+        <p:spPr>
+          <a:xfrm xmlns:a="http://schemas.openxmlformats.org/drawingml/2006/main">
+            <a:off x="9467850" y="5124450"/>
+            <a:ext cx="7753350" cy="247650"/>
+          </a:xfrm>
+          <a:prstGeom xmlns:a="http://schemas.openxmlformats.org/drawingml/2006/main" prst="rect">
+            <a:avLst/>
+          </a:prstGeom>
+        </p:spPr>
+        <p:txBody>
+          <a:bodyPr xmlns:a="http://schemas.openxmlformats.org/drawingml/2006/main" lIns="0" tIns="0" rIns="0" bIns="0"/>
+          <a:lstStyle xmlns:a="http://schemas.openxmlformats.org/drawingml/2006/main"/>
+          <a:p xmlns:a="http://schemas.openxmlformats.org/drawingml/2006/main">
+            <a:pPr>
+              <a:defRPr sz="1275" b="1">
+                <a:solidFill>
+                  <a:srgbClr val="1E6B52"/>
+                </a:solidFill>
+              </a:defRPr>
+            </a:pPr>
+            <a:r>
+              <a:rPr sz="1275" b="1">
+                <a:solidFill>
+                  <a:srgbClr val="1E6B52"/>
+                </a:solidFill>
+              </a:rPr>
+              <a:t>APP restoration</a:t>
             </a:r>
           </a:p>
         </p:txBody>
@@ -5174,42 +5105,42 @@
           <p:cNvPr id="13" name="">
             <a:extLst xmlns:a="http://schemas.openxmlformats.org/drawingml/2006/main">
               <a:ext uri="{FF2B5EF4-FFF2-40B4-BE49-F238E27FC236}">
-                <a16:creationId xmlns:a16="http://schemas.microsoft.com/office/drawing/2014/main" id="{BE4E17AE-9C03-4886-BC43-CD395B155EB9}"/>
-              </a:ext>
-            </a:extLst>
-          </p:cNvPr>
-          <p:cNvSpPr>
-            <a:spLocks xmlns:a="http://schemas.openxmlformats.org/drawingml/2006/main" noGrp="1"/>
-          </p:cNvSpPr>
-          <p:nvPr/>
-        </p:nvSpPr>
-        <p:spPr>
-          <a:xfrm xmlns:a="http://schemas.openxmlformats.org/drawingml/2006/main">
-            <a:off x="6629400" y="4476750"/>
-            <a:ext cx="2895600" cy="304800"/>
-          </a:xfrm>
-          <a:prstGeom xmlns:a="http://schemas.openxmlformats.org/drawingml/2006/main" prst="rect">
-            <a:avLst/>
-          </a:prstGeom>
-        </p:spPr>
-        <p:txBody>
-          <a:bodyPr xmlns:a="http://schemas.openxmlformats.org/drawingml/2006/main" lIns="0" tIns="0" rIns="0" bIns="0"/>
-          <a:lstStyle xmlns:a="http://schemas.openxmlformats.org/drawingml/2006/main"/>
-          <a:p xmlns:a="http://schemas.openxmlformats.org/drawingml/2006/main">
-            <a:pPr>
-              <a:defRPr sz="1275">
-                <a:solidFill>
-                  <a:srgbClr val="5D716C"/>
-                </a:solidFill>
-              </a:defRPr>
-            </a:pPr>
-            <a:r>
-              <a:rPr sz="1275">
-                <a:solidFill>
-                  <a:srgbClr val="5D716C"/>
-                </a:solidFill>
-              </a:rPr>
-              <a:t>Vegetation in 2000</a:t>
+                <a16:creationId xmlns:a16="http://schemas.microsoft.com/office/drawing/2014/main" id="{3A164367-9F74-44DD-A001-28E15D422A7C}"/>
+              </a:ext>
+            </a:extLst>
+          </p:cNvPr>
+          <p:cNvSpPr>
+            <a:spLocks xmlns:a="http://schemas.openxmlformats.org/drawingml/2006/main" noGrp="1"/>
+          </p:cNvSpPr>
+          <p:nvPr/>
+        </p:nvSpPr>
+        <p:spPr>
+          <a:xfrm xmlns:a="http://schemas.openxmlformats.org/drawingml/2006/main">
+            <a:off x="9467850" y="5429250"/>
+            <a:ext cx="7753350" cy="323850"/>
+          </a:xfrm>
+          <a:prstGeom xmlns:a="http://schemas.openxmlformats.org/drawingml/2006/main" prst="rect">
+            <a:avLst/>
+          </a:prstGeom>
+        </p:spPr>
+        <p:txBody>
+          <a:bodyPr xmlns:a="http://schemas.openxmlformats.org/drawingml/2006/main" lIns="0" tIns="0" rIns="0" bIns="0"/>
+          <a:lstStyle xmlns:a="http://schemas.openxmlformats.org/drawingml/2006/main"/>
+          <a:p xmlns:a="http://schemas.openxmlformats.org/drawingml/2006/main">
+            <a:pPr>
+              <a:defRPr sz="1425">
+                <a:solidFill>
+                  <a:srgbClr val="17312B"/>
+                </a:solidFill>
+              </a:defRPr>
+            </a:pPr>
+            <a:r>
+              <a:rPr sz="1425">
+                <a:solidFill>
+                  <a:srgbClr val="17312B"/>
+                </a:solidFill>
+              </a:rPr>
+              <a:t>Pre-2008 component after cap + post-2008 APP clearing</a:t>
             </a:r>
           </a:p>
         </p:txBody>
@@ -5219,42 +5150,42 @@
           <p:cNvPr id="14" name="">
             <a:extLst xmlns:a="http://schemas.openxmlformats.org/drawingml/2006/main">
               <a:ext uri="{FF2B5EF4-FFF2-40B4-BE49-F238E27FC236}">
-                <a16:creationId xmlns:a16="http://schemas.microsoft.com/office/drawing/2014/main" id="{EC62ABD2-E7BC-4925-948C-B8453E94F691}"/>
-              </a:ext>
-            </a:extLst>
-          </p:cNvPr>
-          <p:cNvSpPr>
-            <a:spLocks xmlns:a="http://schemas.openxmlformats.org/drawingml/2006/main" noGrp="1"/>
-          </p:cNvSpPr>
-          <p:nvPr/>
-        </p:nvSpPr>
-        <p:spPr>
-          <a:xfrm xmlns:a="http://schemas.openxmlformats.org/drawingml/2006/main">
-            <a:off x="9525000" y="4457700"/>
-            <a:ext cx="2133600" cy="323850"/>
-          </a:xfrm>
-          <a:prstGeom xmlns:a="http://schemas.openxmlformats.org/drawingml/2006/main" prst="rect">
-            <a:avLst/>
-          </a:prstGeom>
-        </p:spPr>
-        <p:txBody>
-          <a:bodyPr xmlns:a="http://schemas.openxmlformats.org/drawingml/2006/main" lIns="0" tIns="0" rIns="0" bIns="0"/>
-          <a:lstStyle xmlns:a="http://schemas.openxmlformats.org/drawingml/2006/main"/>
-          <a:p xmlns:a="http://schemas.openxmlformats.org/drawingml/2006/main">
-            <a:pPr>
-              <a:defRPr sz="1650" b="1">
-                <a:solidFill>
-                  <a:srgbClr val="D49A45"/>
-                </a:solidFill>
-              </a:defRPr>
-            </a:pPr>
-            <a:r>
-              <a:rPr sz="1650" b="1">
-                <a:solidFill>
-                  <a:srgbClr val="D49A45"/>
-                </a:solidFill>
-              </a:rPr>
-              <a:t>53.18 ha</a:t>
+                <a16:creationId xmlns:a16="http://schemas.microsoft.com/office/drawing/2014/main" id="{C8CA0928-6FA8-4530-97F9-3638C2168473}"/>
+              </a:ext>
+            </a:extLst>
+          </p:cNvPr>
+          <p:cNvSpPr>
+            <a:spLocks xmlns:a="http://schemas.openxmlformats.org/drawingml/2006/main" noGrp="1"/>
+          </p:cNvSpPr>
+          <p:nvPr/>
+        </p:nvSpPr>
+        <p:spPr>
+          <a:xfrm xmlns:a="http://schemas.openxmlformats.org/drawingml/2006/main">
+            <a:off x="9467850" y="5810250"/>
+            <a:ext cx="7753350" cy="342900"/>
+          </a:xfrm>
+          <a:prstGeom xmlns:a="http://schemas.openxmlformats.org/drawingml/2006/main" prst="rect">
+            <a:avLst/>
+          </a:prstGeom>
+        </p:spPr>
+        <p:txBody>
+          <a:bodyPr xmlns:a="http://schemas.openxmlformats.org/drawingml/2006/main" lIns="0" tIns="0" rIns="0" bIns="0"/>
+          <a:lstStyle xmlns:a="http://schemas.openxmlformats.org/drawingml/2006/main"/>
+          <a:p xmlns:a="http://schemas.openxmlformats.org/drawingml/2006/main">
+            <a:pPr>
+              <a:defRPr sz="1800" b="1">
+                <a:solidFill>
+                  <a:srgbClr val="1E6B52"/>
+                </a:solidFill>
+              </a:defRPr>
+            </a:pPr>
+            <a:r>
+              <a:rPr sz="1800" b="1">
+                <a:solidFill>
+                  <a:srgbClr val="1E6B52"/>
+                </a:solidFill>
+              </a:rPr>
+              <a:t>= 0.00 ha</a:t>
             </a:r>
           </a:p>
         </p:txBody>
@@ -5264,42 +5195,42 @@
           <p:cNvPr id="15" name="">
             <a:extLst xmlns:a="http://schemas.openxmlformats.org/drawingml/2006/main">
               <a:ext uri="{FF2B5EF4-FFF2-40B4-BE49-F238E27FC236}">
-                <a16:creationId xmlns:a16="http://schemas.microsoft.com/office/drawing/2014/main" id="{1FB03BD8-E491-4711-A1B1-FB2EB48E991A}"/>
-              </a:ext>
-            </a:extLst>
-          </p:cNvPr>
-          <p:cNvSpPr>
-            <a:spLocks xmlns:a="http://schemas.openxmlformats.org/drawingml/2006/main" noGrp="1"/>
-          </p:cNvSpPr>
-          <p:nvPr/>
-        </p:nvSpPr>
-        <p:spPr>
-          <a:xfrm xmlns:a="http://schemas.openxmlformats.org/drawingml/2006/main">
-            <a:off x="6629400" y="6115050"/>
-            <a:ext cx="2895600" cy="304800"/>
-          </a:xfrm>
-          <a:prstGeom xmlns:a="http://schemas.openxmlformats.org/drawingml/2006/main" prst="rect">
-            <a:avLst/>
-          </a:prstGeom>
-        </p:spPr>
-        <p:txBody>
-          <a:bodyPr xmlns:a="http://schemas.openxmlformats.org/drawingml/2006/main" lIns="0" tIns="0" rIns="0" bIns="0"/>
-          <a:lstStyle xmlns:a="http://schemas.openxmlformats.org/drawingml/2006/main"/>
-          <a:p xmlns:a="http://schemas.openxmlformats.org/drawingml/2006/main">
-            <a:pPr>
-              <a:defRPr sz="1275">
-                <a:solidFill>
-                  <a:srgbClr val="5D716C"/>
-                </a:solidFill>
-              </a:defRPr>
-            </a:pPr>
-            <a:r>
-              <a:rPr sz="1275">
-                <a:solidFill>
-                  <a:srgbClr val="5D716C"/>
-                </a:solidFill>
-              </a:rPr>
-              <a:t>Consolidated area 2008</a:t>
+                <a16:creationId xmlns:a16="http://schemas.microsoft.com/office/drawing/2014/main" id="{44C5A19A-E265-4620-B80D-FD38E121707A}"/>
+              </a:ext>
+            </a:extLst>
+          </p:cNvPr>
+          <p:cNvSpPr>
+            <a:spLocks xmlns:a="http://schemas.openxmlformats.org/drawingml/2006/main" noGrp="1"/>
+          </p:cNvSpPr>
+          <p:nvPr/>
+        </p:nvSpPr>
+        <p:spPr>
+          <a:xfrm xmlns:a="http://schemas.openxmlformats.org/drawingml/2006/main">
+            <a:off x="857250" y="7848600"/>
+            <a:ext cx="6800850" cy="266700"/>
+          </a:xfrm>
+          <a:prstGeom xmlns:a="http://schemas.openxmlformats.org/drawingml/2006/main" prst="rect">
+            <a:avLst/>
+          </a:prstGeom>
+        </p:spPr>
+        <p:txBody>
+          <a:bodyPr xmlns:a="http://schemas.openxmlformats.org/drawingml/2006/main" lIns="0" tIns="0" rIns="0" bIns="0"/>
+          <a:lstStyle xmlns:a="http://schemas.openxmlformats.org/drawingml/2006/main"/>
+          <a:p xmlns:a="http://schemas.openxmlformats.org/drawingml/2006/main">
+            <a:pPr>
+              <a:defRPr sz="1275" b="1">
+                <a:solidFill>
+                  <a:srgbClr val="5D716C"/>
+                </a:solidFill>
+              </a:defRPr>
+            </a:pPr>
+            <a:r>
+              <a:rPr sz="1275" b="1">
+                <a:solidFill>
+                  <a:srgbClr val="5D716C"/>
+                </a:solidFill>
+              </a:rPr>
+              <a:t>BASELINE TOTAL</a:t>
             </a:r>
           </a:p>
         </p:txBody>
@@ -5309,42 +5240,42 @@
           <p:cNvPr id="16" name="">
             <a:extLst xmlns:a="http://schemas.openxmlformats.org/drawingml/2006/main">
               <a:ext uri="{FF2B5EF4-FFF2-40B4-BE49-F238E27FC236}">
-                <a16:creationId xmlns:a16="http://schemas.microsoft.com/office/drawing/2014/main" id="{2B5C2534-3890-4EFB-91B9-F412F93CFEF3}"/>
-              </a:ext>
-            </a:extLst>
-          </p:cNvPr>
-          <p:cNvSpPr>
-            <a:spLocks xmlns:a="http://schemas.openxmlformats.org/drawingml/2006/main" noGrp="1"/>
-          </p:cNvSpPr>
-          <p:nvPr/>
-        </p:nvSpPr>
-        <p:spPr>
-          <a:xfrm xmlns:a="http://schemas.openxmlformats.org/drawingml/2006/main">
-            <a:off x="9525000" y="6115050"/>
-            <a:ext cx="2133600" cy="323850"/>
-          </a:xfrm>
-          <a:prstGeom xmlns:a="http://schemas.openxmlformats.org/drawingml/2006/main" prst="rect">
-            <a:avLst/>
-          </a:prstGeom>
-        </p:spPr>
-        <p:txBody>
-          <a:bodyPr xmlns:a="http://schemas.openxmlformats.org/drawingml/2006/main" lIns="0" tIns="0" rIns="0" bIns="0"/>
-          <a:lstStyle xmlns:a="http://schemas.openxmlformats.org/drawingml/2006/main"/>
-          <a:p xmlns:a="http://schemas.openxmlformats.org/drawingml/2006/main">
-            <a:pPr>
-              <a:defRPr sz="1650" b="1">
-                <a:solidFill>
-                  <a:srgbClr val="D49A45"/>
-                </a:solidFill>
-              </a:defRPr>
-            </a:pPr>
-            <a:r>
-              <a:rPr sz="1650" b="1">
-                <a:solidFill>
-                  <a:srgbClr val="D49A45"/>
-                </a:solidFill>
-              </a:rPr>
-              <a:t>64.85 ha</a:t>
+                <a16:creationId xmlns:a16="http://schemas.microsoft.com/office/drawing/2014/main" id="{885A431D-404D-461A-A4E8-208F49A4070F}"/>
+              </a:ext>
+            </a:extLst>
+          </p:cNvPr>
+          <p:cNvSpPr>
+            <a:spLocks xmlns:a="http://schemas.openxmlformats.org/drawingml/2006/main" noGrp="1"/>
+          </p:cNvSpPr>
+          <p:nvPr/>
+        </p:nvSpPr>
+        <p:spPr>
+          <a:xfrm xmlns:a="http://schemas.openxmlformats.org/drawingml/2006/main">
+            <a:off x="857250" y="8191500"/>
+            <a:ext cx="6800850" cy="552450"/>
+          </a:xfrm>
+          <a:prstGeom xmlns:a="http://schemas.openxmlformats.org/drawingml/2006/main" prst="rect">
+            <a:avLst/>
+          </a:prstGeom>
+        </p:spPr>
+        <p:txBody>
+          <a:bodyPr xmlns:a="http://schemas.openxmlformats.org/drawingml/2006/main" lIns="0" tIns="0" rIns="0" bIns="0"/>
+          <a:lstStyle xmlns:a="http://schemas.openxmlformats.org/drawingml/2006/main"/>
+          <a:p xmlns:a="http://schemas.openxmlformats.org/drawingml/2006/main">
+            <a:pPr>
+              <a:defRPr sz="3300" b="1">
+                <a:solidFill>
+                  <a:srgbClr val="B95B4C"/>
+                </a:solidFill>
+              </a:defRPr>
+            </a:pPr>
+            <a:r>
+              <a:rPr sz="3300" b="1">
+                <a:solidFill>
+                  <a:srgbClr val="B95B4C"/>
+                </a:solidFill>
+              </a:rPr>
+              <a:t>52.61 ha</a:t>
             </a:r>
           </a:p>
         </p:txBody>
@@ -5354,42 +5285,42 @@
           <p:cNvPr id="17" name="">
             <a:extLst xmlns:a="http://schemas.openxmlformats.org/drawingml/2006/main">
               <a:ext uri="{FF2B5EF4-FFF2-40B4-BE49-F238E27FC236}">
-                <a16:creationId xmlns:a16="http://schemas.microsoft.com/office/drawing/2014/main" id="{9667BDB9-CE3C-46F7-8F68-6CB9CF09600C}"/>
-              </a:ext>
-            </a:extLst>
-          </p:cNvPr>
-          <p:cNvSpPr>
-            <a:spLocks xmlns:a="http://schemas.openxmlformats.org/drawingml/2006/main" noGrp="1"/>
-          </p:cNvSpPr>
-          <p:nvPr/>
-        </p:nvSpPr>
-        <p:spPr>
-          <a:xfrm xmlns:a="http://schemas.openxmlformats.org/drawingml/2006/main">
-            <a:off x="6629400" y="7753350"/>
-            <a:ext cx="2895600" cy="304800"/>
-          </a:xfrm>
-          <a:prstGeom xmlns:a="http://schemas.openxmlformats.org/drawingml/2006/main" prst="rect">
-            <a:avLst/>
-          </a:prstGeom>
-        </p:spPr>
-        <p:txBody>
-          <a:bodyPr xmlns:a="http://schemas.openxmlformats.org/drawingml/2006/main" lIns="0" tIns="0" rIns="0" bIns="0"/>
-          <a:lstStyle xmlns:a="http://schemas.openxmlformats.org/drawingml/2006/main"/>
-          <a:p xmlns:a="http://schemas.openxmlformats.org/drawingml/2006/main">
-            <a:pPr>
-              <a:defRPr sz="1275">
-                <a:solidFill>
-                  <a:srgbClr val="5D716C"/>
-                </a:solidFill>
-              </a:defRPr>
-            </a:pPr>
-            <a:r>
-              <a:rPr sz="1275">
-                <a:solidFill>
-                  <a:srgbClr val="5D716C"/>
-                </a:solidFill>
-              </a:rPr>
-              <a:t>Vegetation in 2008</a:t>
+                <a16:creationId xmlns:a16="http://schemas.microsoft.com/office/drawing/2014/main" id="{13A13541-7A1A-4CA3-929B-78ED16B29AC3}"/>
+              </a:ext>
+            </a:extLst>
+          </p:cNvPr>
+          <p:cNvSpPr>
+            <a:spLocks xmlns:a="http://schemas.openxmlformats.org/drawingml/2006/main" noGrp="1"/>
+          </p:cNvSpPr>
+          <p:nvPr/>
+        </p:nvSpPr>
+        <p:spPr>
+          <a:xfrm xmlns:a="http://schemas.openxmlformats.org/drawingml/2006/main">
+            <a:off x="7924800" y="7848600"/>
+            <a:ext cx="9505950" cy="266700"/>
+          </a:xfrm>
+          <a:prstGeom xmlns:a="http://schemas.openxmlformats.org/drawingml/2006/main" prst="rect">
+            <a:avLst/>
+          </a:prstGeom>
+        </p:spPr>
+        <p:txBody>
+          <a:bodyPr xmlns:a="http://schemas.openxmlformats.org/drawingml/2006/main" lIns="0" tIns="0" rIns="0" bIns="0"/>
+          <a:lstStyle xmlns:a="http://schemas.openxmlformats.org/drawingml/2006/main"/>
+          <a:p xmlns:a="http://schemas.openxmlformats.org/drawingml/2006/main">
+            <a:pPr>
+              <a:defRPr sz="1275" b="1">
+                <a:solidFill>
+                  <a:srgbClr val="5D716C"/>
+                </a:solidFill>
+              </a:defRPr>
+            </a:pPr>
+            <a:r>
+              <a:rPr sz="1275" b="1">
+                <a:solidFill>
+                  <a:srgbClr val="5D716C"/>
+                </a:solidFill>
+              </a:rPr>
+              <a:t>SECONDARY VEGETATION SCENARIO</a:t>
             </a:r>
           </a:p>
         </p:txBody>
@@ -5399,457 +5330,52 @@
           <p:cNvPr id="18" name="">
             <a:extLst xmlns:a="http://schemas.openxmlformats.org/drawingml/2006/main">
               <a:ext uri="{FF2B5EF4-FFF2-40B4-BE49-F238E27FC236}">
-                <a16:creationId xmlns:a16="http://schemas.microsoft.com/office/drawing/2014/main" id="{357AFCCF-E748-428D-8D17-EC8C4FDDEDC9}"/>
-              </a:ext>
-            </a:extLst>
-          </p:cNvPr>
-          <p:cNvSpPr>
-            <a:spLocks xmlns:a="http://schemas.openxmlformats.org/drawingml/2006/main" noGrp="1"/>
-          </p:cNvSpPr>
-          <p:nvPr/>
-        </p:nvSpPr>
-        <p:spPr>
-          <a:xfrm xmlns:a="http://schemas.openxmlformats.org/drawingml/2006/main">
-            <a:off x="9525000" y="7753350"/>
-            <a:ext cx="2133600" cy="323850"/>
-          </a:xfrm>
-          <a:prstGeom xmlns:a="http://schemas.openxmlformats.org/drawingml/2006/main" prst="rect">
-            <a:avLst/>
-          </a:prstGeom>
-        </p:spPr>
-        <p:txBody>
-          <a:bodyPr xmlns:a="http://schemas.openxmlformats.org/drawingml/2006/main" lIns="0" tIns="0" rIns="0" bIns="0"/>
-          <a:lstStyle xmlns:a="http://schemas.openxmlformats.org/drawingml/2006/main"/>
-          <a:p xmlns:a="http://schemas.openxmlformats.org/drawingml/2006/main">
-            <a:pPr>
-              <a:defRPr sz="1650" b="1">
-                <a:solidFill>
-                  <a:srgbClr val="D49A45"/>
-                </a:solidFill>
-              </a:defRPr>
-            </a:pPr>
-            <a:r>
-              <a:rPr sz="1650" b="1">
-                <a:solidFill>
-                  <a:srgbClr val="D49A45"/>
-                </a:solidFill>
-              </a:rPr>
-              <a:t>128.34 ha</a:t>
-            </a:r>
-          </a:p>
-        </p:txBody>
-      </p:sp>
-      <p:sp>
-        <p:nvSpPr>
-          <p:cNvPr id="19" name="">
-            <a:extLst xmlns:a="http://schemas.openxmlformats.org/drawingml/2006/main">
-              <a:ext uri="{FF2B5EF4-FFF2-40B4-BE49-F238E27FC236}">
-                <a16:creationId xmlns:a16="http://schemas.microsoft.com/office/drawing/2014/main" id="{DE32AD48-B847-4E59-A0C2-84BED2540F97}"/>
-              </a:ext>
-            </a:extLst>
-          </p:cNvPr>
-          <p:cNvSpPr>
-            <a:spLocks xmlns:a="http://schemas.openxmlformats.org/drawingml/2006/main" noGrp="1"/>
-          </p:cNvSpPr>
-          <p:nvPr/>
-        </p:nvSpPr>
-        <p:spPr>
-          <a:xfrm xmlns:a="http://schemas.openxmlformats.org/drawingml/2006/main">
-            <a:off x="12230100" y="2838450"/>
-            <a:ext cx="2895600" cy="304800"/>
-          </a:xfrm>
-          <a:prstGeom xmlns:a="http://schemas.openxmlformats.org/drawingml/2006/main" prst="rect">
-            <a:avLst/>
-          </a:prstGeom>
-        </p:spPr>
-        <p:txBody>
-          <a:bodyPr xmlns:a="http://schemas.openxmlformats.org/drawingml/2006/main" lIns="0" tIns="0" rIns="0" bIns="0"/>
-          <a:lstStyle xmlns:a="http://schemas.openxmlformats.org/drawingml/2006/main"/>
-          <a:p xmlns:a="http://schemas.openxmlformats.org/drawingml/2006/main">
-            <a:pPr>
-              <a:defRPr sz="1275">
-                <a:solidFill>
-                  <a:srgbClr val="5D716C"/>
-                </a:solidFill>
-              </a:defRPr>
-            </a:pPr>
-            <a:r>
-              <a:rPr sz="1275">
-                <a:solidFill>
-                  <a:srgbClr val="5D716C"/>
-                </a:solidFill>
-              </a:rPr>
-              <a:t>Article 12 ceiling</a:t>
-            </a:r>
-          </a:p>
-        </p:txBody>
-      </p:sp>
-      <p:sp>
-        <p:nvSpPr>
-          <p:cNvPr id="20" name="">
-            <a:extLst xmlns:a="http://schemas.openxmlformats.org/drawingml/2006/main">
-              <a:ext uri="{FF2B5EF4-FFF2-40B4-BE49-F238E27FC236}">
-                <a16:creationId xmlns:a16="http://schemas.microsoft.com/office/drawing/2014/main" id="{35B9FDBB-BE4C-497D-A561-D57766755A80}"/>
-              </a:ext>
-            </a:extLst>
-          </p:cNvPr>
-          <p:cNvSpPr>
-            <a:spLocks xmlns:a="http://schemas.openxmlformats.org/drawingml/2006/main" noGrp="1"/>
-          </p:cNvSpPr>
-          <p:nvPr/>
-        </p:nvSpPr>
-        <p:spPr>
-          <a:xfrm xmlns:a="http://schemas.openxmlformats.org/drawingml/2006/main">
-            <a:off x="15125700" y="2819400"/>
-            <a:ext cx="2133600" cy="323850"/>
-          </a:xfrm>
-          <a:prstGeom xmlns:a="http://schemas.openxmlformats.org/drawingml/2006/main" prst="rect">
-            <a:avLst/>
-          </a:prstGeom>
-        </p:spPr>
-        <p:txBody>
-          <a:bodyPr xmlns:a="http://schemas.openxmlformats.org/drawingml/2006/main" lIns="0" tIns="0" rIns="0" bIns="0"/>
-          <a:lstStyle xmlns:a="http://schemas.openxmlformats.org/drawingml/2006/main"/>
-          <a:p xmlns:a="http://schemas.openxmlformats.org/drawingml/2006/main">
-            <a:pPr>
-              <a:defRPr sz="1650" b="1">
-                <a:solidFill>
-                  <a:srgbClr val="D49A45"/>
-                </a:solidFill>
-              </a:defRPr>
-            </a:pPr>
-            <a:r>
-              <a:rPr sz="1650" b="1">
-                <a:solidFill>
-                  <a:srgbClr val="D49A45"/>
-                </a:solidFill>
-              </a:rPr>
-              <a:t>115.24 ha</a:t>
-            </a:r>
-          </a:p>
-        </p:txBody>
-      </p:sp>
-      <p:sp>
-        <p:nvSpPr>
-          <p:cNvPr id="21" name="">
-            <a:extLst xmlns:a="http://schemas.openxmlformats.org/drawingml/2006/main">
-              <a:ext uri="{FF2B5EF4-FFF2-40B4-BE49-F238E27FC236}">
-                <a16:creationId xmlns:a16="http://schemas.microsoft.com/office/drawing/2014/main" id="{DB969A4E-39F8-44AC-B8CE-8F0CB6D5DA74}"/>
-              </a:ext>
-            </a:extLst>
-          </p:cNvPr>
-          <p:cNvSpPr>
-            <a:spLocks xmlns:a="http://schemas.openxmlformats.org/drawingml/2006/main" noGrp="1"/>
-          </p:cNvSpPr>
-          <p:nvPr/>
-        </p:nvSpPr>
-        <p:spPr>
-          <a:xfrm xmlns:a="http://schemas.openxmlformats.org/drawingml/2006/main">
-            <a:off x="12230100" y="4476750"/>
-            <a:ext cx="2895600" cy="304800"/>
-          </a:xfrm>
-          <a:prstGeom xmlns:a="http://schemas.openxmlformats.org/drawingml/2006/main" prst="rect">
-            <a:avLst/>
-          </a:prstGeom>
-        </p:spPr>
-        <p:txBody>
-          <a:bodyPr xmlns:a="http://schemas.openxmlformats.org/drawingml/2006/main" lIns="0" tIns="0" rIns="0" bIns="0"/>
-          <a:lstStyle xmlns:a="http://schemas.openxmlformats.org/drawingml/2006/main"/>
-          <a:p xmlns:a="http://schemas.openxmlformats.org/drawingml/2006/main">
-            <a:pPr>
-              <a:defRPr sz="1275">
-                <a:solidFill>
-                  <a:srgbClr val="5D716C"/>
-                </a:solidFill>
-              </a:defRPr>
-            </a:pPr>
-            <a:r>
-              <a:rPr sz="1275">
-                <a:solidFill>
-                  <a:srgbClr val="5D716C"/>
-                </a:solidFill>
-              </a:rPr>
-              <a:t>Article 68 floor</a:t>
-            </a:r>
-          </a:p>
-        </p:txBody>
-      </p:sp>
-      <p:sp>
-        <p:nvSpPr>
-          <p:cNvPr id="22" name="">
-            <a:extLst xmlns:a="http://schemas.openxmlformats.org/drawingml/2006/main">
-              <a:ext uri="{FF2B5EF4-FFF2-40B4-BE49-F238E27FC236}">
-                <a16:creationId xmlns:a16="http://schemas.microsoft.com/office/drawing/2014/main" id="{C68E54DC-3408-4190-B2A2-FA5A1AFC706B}"/>
-              </a:ext>
-            </a:extLst>
-          </p:cNvPr>
-          <p:cNvSpPr>
-            <a:spLocks xmlns:a="http://schemas.openxmlformats.org/drawingml/2006/main" noGrp="1"/>
-          </p:cNvSpPr>
-          <p:nvPr/>
-        </p:nvSpPr>
-        <p:spPr>
-          <a:xfrm xmlns:a="http://schemas.openxmlformats.org/drawingml/2006/main">
-            <a:off x="15125700" y="4457700"/>
-            <a:ext cx="2133600" cy="323850"/>
-          </a:xfrm>
-          <a:prstGeom xmlns:a="http://schemas.openxmlformats.org/drawingml/2006/main" prst="rect">
-            <a:avLst/>
-          </a:prstGeom>
-        </p:spPr>
-        <p:txBody>
-          <a:bodyPr xmlns:a="http://schemas.openxmlformats.org/drawingml/2006/main" lIns="0" tIns="0" rIns="0" bIns="0"/>
-          <a:lstStyle xmlns:a="http://schemas.openxmlformats.org/drawingml/2006/main"/>
-          <a:p xmlns:a="http://schemas.openxmlformats.org/drawingml/2006/main">
-            <a:pPr>
-              <a:defRPr sz="1650" b="1">
-                <a:solidFill>
-                  <a:srgbClr val="D49A45"/>
-                </a:solidFill>
-              </a:defRPr>
-            </a:pPr>
-            <a:r>
-              <a:rPr sz="1650" b="1">
-                <a:solidFill>
-                  <a:srgbClr val="D49A45"/>
-                </a:solidFill>
-              </a:rPr>
-              <a:t>70.51 ha</a:t>
-            </a:r>
-          </a:p>
-        </p:txBody>
-      </p:sp>
-      <p:sp>
-        <p:nvSpPr>
-          <p:cNvPr id="23" name="">
-            <a:extLst xmlns:a="http://schemas.openxmlformats.org/drawingml/2006/main">
-              <a:ext uri="{FF2B5EF4-FFF2-40B4-BE49-F238E27FC236}">
-                <a16:creationId xmlns:a16="http://schemas.microsoft.com/office/drawing/2014/main" id="{305574A7-C895-421D-A923-406B773EA915}"/>
-              </a:ext>
-            </a:extLst>
-          </p:cNvPr>
-          <p:cNvSpPr>
-            <a:spLocks xmlns:a="http://schemas.openxmlformats.org/drawingml/2006/main" noGrp="1"/>
-          </p:cNvSpPr>
-          <p:nvPr/>
-        </p:nvSpPr>
-        <p:spPr>
-          <a:xfrm xmlns:a="http://schemas.openxmlformats.org/drawingml/2006/main">
-            <a:off x="12230100" y="6115050"/>
-            <a:ext cx="2895600" cy="304800"/>
-          </a:xfrm>
-          <a:prstGeom xmlns:a="http://schemas.openxmlformats.org/drawingml/2006/main" prst="rect">
-            <a:avLst/>
-          </a:prstGeom>
-        </p:spPr>
-        <p:txBody>
-          <a:bodyPr xmlns:a="http://schemas.openxmlformats.org/drawingml/2006/main" lIns="0" tIns="0" rIns="0" bIns="0"/>
-          <a:lstStyle xmlns:a="http://schemas.openxmlformats.org/drawingml/2006/main"/>
-          <a:p xmlns:a="http://schemas.openxmlformats.org/drawingml/2006/main">
-            <a:pPr>
-              <a:defRPr sz="1275">
-                <a:solidFill>
-                  <a:srgbClr val="5D716C"/>
-                </a:solidFill>
-              </a:defRPr>
-            </a:pPr>
-            <a:r>
-              <a:rPr sz="1275">
-                <a:solidFill>
-                  <a:srgbClr val="5D716C"/>
-                </a:solidFill>
-              </a:rPr>
-              <a:t>Article 67 requirement</a:t>
-            </a:r>
-          </a:p>
-        </p:txBody>
-      </p:sp>
-      <p:sp>
-        <p:nvSpPr>
-          <p:cNvPr id="24" name="">
-            <a:extLst xmlns:a="http://schemas.openxmlformats.org/drawingml/2006/main">
-              <a:ext uri="{FF2B5EF4-FFF2-40B4-BE49-F238E27FC236}">
-                <a16:creationId xmlns:a16="http://schemas.microsoft.com/office/drawing/2014/main" id="{F0D68CA8-0687-49A2-9A9B-CBD74DFEEB81}"/>
-              </a:ext>
-            </a:extLst>
-          </p:cNvPr>
-          <p:cNvSpPr>
-            <a:spLocks xmlns:a="http://schemas.openxmlformats.org/drawingml/2006/main" noGrp="1"/>
-          </p:cNvSpPr>
-          <p:nvPr/>
-        </p:nvSpPr>
-        <p:spPr>
-          <a:xfrm xmlns:a="http://schemas.openxmlformats.org/drawingml/2006/main">
-            <a:off x="15125700" y="6115050"/>
-            <a:ext cx="2133600" cy="323850"/>
-          </a:xfrm>
-          <a:prstGeom xmlns:a="http://schemas.openxmlformats.org/drawingml/2006/main" prst="rect">
-            <a:avLst/>
-          </a:prstGeom>
-        </p:spPr>
-        <p:txBody>
-          <a:bodyPr xmlns:a="http://schemas.openxmlformats.org/drawingml/2006/main" lIns="0" tIns="0" rIns="0" bIns="0"/>
-          <a:lstStyle xmlns:a="http://schemas.openxmlformats.org/drawingml/2006/main"/>
-          <a:p xmlns:a="http://schemas.openxmlformats.org/drawingml/2006/main">
-            <a:pPr>
-              <a:defRPr sz="1650" b="1">
-                <a:solidFill>
-                  <a:srgbClr val="D49A45"/>
-                </a:solidFill>
-              </a:defRPr>
-            </a:pPr>
-            <a:r>
-              <a:rPr sz="1650" b="1">
-                <a:solidFill>
-                  <a:srgbClr val="D49A45"/>
-                </a:solidFill>
-              </a:rPr>
-              <a:t>115.24 ha</a:t>
-            </a:r>
-          </a:p>
-        </p:txBody>
-      </p:sp>
-      <p:sp>
-        <p:nvSpPr>
-          <p:cNvPr id="25" name="">
-            <a:extLst xmlns:a="http://schemas.openxmlformats.org/drawingml/2006/main">
-              <a:ext uri="{FF2B5EF4-FFF2-40B4-BE49-F238E27FC236}">
-                <a16:creationId xmlns:a16="http://schemas.microsoft.com/office/drawing/2014/main" id="{3F26F0DF-8758-4C51-B856-222C85B7C81B}"/>
-              </a:ext>
-            </a:extLst>
-          </p:cNvPr>
-          <p:cNvSpPr>
-            <a:spLocks xmlns:a="http://schemas.openxmlformats.org/drawingml/2006/main" noGrp="1"/>
-          </p:cNvSpPr>
-          <p:nvPr/>
-        </p:nvSpPr>
-        <p:spPr>
-          <a:xfrm xmlns:a="http://schemas.openxmlformats.org/drawingml/2006/main">
-            <a:off x="12230100" y="7753350"/>
-            <a:ext cx="2895600" cy="304800"/>
-          </a:xfrm>
-          <a:prstGeom xmlns:a="http://schemas.openxmlformats.org/drawingml/2006/main" prst="rect">
-            <a:avLst/>
-          </a:prstGeom>
-        </p:spPr>
-        <p:txBody>
-          <a:bodyPr xmlns:a="http://schemas.openxmlformats.org/drawingml/2006/main" lIns="0" tIns="0" rIns="0" bIns="0"/>
-          <a:lstStyle xmlns:a="http://schemas.openxmlformats.org/drawingml/2006/main"/>
-          <a:p xmlns:a="http://schemas.openxmlformats.org/drawingml/2006/main">
-            <a:pPr>
-              <a:defRPr sz="1275">
-                <a:solidFill>
-                  <a:srgbClr val="5D716C"/>
-                </a:solidFill>
-              </a:defRPr>
-            </a:pPr>
-            <a:r>
-              <a:rPr sz="1275">
-                <a:solidFill>
-                  <a:srgbClr val="5D716C"/>
-                </a:solidFill>
-              </a:rPr>
-              <a:t>Current native vegetation</a:t>
-            </a:r>
-          </a:p>
-        </p:txBody>
-      </p:sp>
-      <p:sp>
-        <p:nvSpPr>
-          <p:cNvPr id="26" name="">
-            <a:extLst xmlns:a="http://schemas.openxmlformats.org/drawingml/2006/main">
-              <a:ext uri="{FF2B5EF4-FFF2-40B4-BE49-F238E27FC236}">
-                <a16:creationId xmlns:a16="http://schemas.microsoft.com/office/drawing/2014/main" id="{95518363-D585-432F-9EBA-E827950179CD}"/>
-              </a:ext>
-            </a:extLst>
-          </p:cNvPr>
-          <p:cNvSpPr>
-            <a:spLocks xmlns:a="http://schemas.openxmlformats.org/drawingml/2006/main" noGrp="1"/>
-          </p:cNvSpPr>
-          <p:nvPr/>
-        </p:nvSpPr>
-        <p:spPr>
-          <a:xfrm xmlns:a="http://schemas.openxmlformats.org/drawingml/2006/main">
-            <a:off x="15125700" y="7753350"/>
-            <a:ext cx="2133600" cy="323850"/>
-          </a:xfrm>
-          <a:prstGeom xmlns:a="http://schemas.openxmlformats.org/drawingml/2006/main" prst="rect">
-            <a:avLst/>
-          </a:prstGeom>
-        </p:spPr>
-        <p:txBody>
-          <a:bodyPr xmlns:a="http://schemas.openxmlformats.org/drawingml/2006/main" lIns="0" tIns="0" rIns="0" bIns="0"/>
-          <a:lstStyle xmlns:a="http://schemas.openxmlformats.org/drawingml/2006/main"/>
-          <a:p xmlns:a="http://schemas.openxmlformats.org/drawingml/2006/main">
-            <a:pPr>
-              <a:defRPr sz="1650" b="1">
-                <a:solidFill>
-                  <a:srgbClr val="D49A45"/>
-                </a:solidFill>
-              </a:defRPr>
-            </a:pPr>
-            <a:r>
-              <a:rPr sz="1650" b="1">
-                <a:solidFill>
-                  <a:srgbClr val="D49A45"/>
-                </a:solidFill>
-              </a:rPr>
-              <a:t>61.34 ha</a:t>
-            </a:r>
-          </a:p>
-        </p:txBody>
-      </p:sp>
-      <p:sp>
-        <p:nvSpPr>
-          <p:cNvPr id="27" name="property-key-5">
-            <a:extLst xmlns:a="http://schemas.openxmlformats.org/drawingml/2006/main">
-              <a:ext uri="{FF2B5EF4-FFF2-40B4-BE49-F238E27FC236}">
-                <a16:creationId xmlns:a16="http://schemas.microsoft.com/office/drawing/2014/main" id="{C1A60B4A-76C4-43DD-A2EC-1407AE7DA480}"/>
-              </a:ext>
-            </a:extLst>
-          </p:cNvPr>
-          <p:cNvSpPr>
-            <a:spLocks xmlns:a="http://schemas.openxmlformats.org/drawingml/2006/main" noGrp="1"/>
-          </p:cNvSpPr>
-          <p:nvPr/>
-        </p:nvSpPr>
-        <p:spPr>
-          <a:xfrm xmlns:a="http://schemas.openxmlformats.org/drawingml/2006/main">
-            <a:off x="857250" y="8953500"/>
-            <a:ext cx="16573500" cy="285750"/>
-          </a:xfrm>
-          <a:prstGeom xmlns:a="http://schemas.openxmlformats.org/drawingml/2006/main" prst="rect">
-            <a:avLst/>
-          </a:prstGeom>
-        </p:spPr>
-        <p:txBody>
-          <a:bodyPr xmlns:a="http://schemas.openxmlformats.org/drawingml/2006/main" lIns="0" tIns="0" rIns="0" bIns="0"/>
-          <a:lstStyle xmlns:a="http://schemas.openxmlformats.org/drawingml/2006/main"/>
-          <a:p xmlns:a="http://schemas.openxmlformats.org/drawingml/2006/main">
-            <a:pPr>
-              <a:defRPr sz="1050">
-                <a:solidFill>
-                  <a:srgbClr val="5D716C"/>
-                </a:solidFill>
-              </a:defRPr>
-            </a:pPr>
-            <a:r>
-              <a:rPr sz="1050">
-                <a:solidFill>
-                  <a:srgbClr val="5D716C"/>
-                </a:solidFill>
-              </a:rPr>
-              <a:t>Property key: MT-5103437-3035138E282C4E6686B61959CF506B0D</a:t>
-            </a:r>
-          </a:p>
-        </p:txBody>
-      </p:sp>
-      <p:sp>
-        <p:nvSpPr>
-          <p:cNvPr id="28" name="source-5">
-            <a:extLst xmlns:a="http://schemas.openxmlformats.org/drawingml/2006/main">
-              <a:ext uri="{FF2B5EF4-FFF2-40B4-BE49-F238E27FC236}">
-                <a16:creationId xmlns:a16="http://schemas.microsoft.com/office/drawing/2014/main" id="{CB253BA3-08E8-4849-9BF0-590C16636943}"/>
+                <a16:creationId xmlns:a16="http://schemas.microsoft.com/office/drawing/2014/main" id="{A34738D4-A6C7-488C-A416-646BCD308905}"/>
+              </a:ext>
+            </a:extLst>
+          </p:cNvPr>
+          <p:cNvSpPr>
+            <a:spLocks xmlns:a="http://schemas.openxmlformats.org/drawingml/2006/main" noGrp="1"/>
+          </p:cNvSpPr>
+          <p:nvPr/>
+        </p:nvSpPr>
+        <p:spPr>
+          <a:xfrm xmlns:a="http://schemas.openxmlformats.org/drawingml/2006/main">
+            <a:off x="7924800" y="8191500"/>
+            <a:ext cx="9505950" cy="552450"/>
+          </a:xfrm>
+          <a:prstGeom xmlns:a="http://schemas.openxmlformats.org/drawingml/2006/main" prst="rect">
+            <a:avLst/>
+          </a:prstGeom>
+        </p:spPr>
+        <p:txBody>
+          <a:bodyPr xmlns:a="http://schemas.openxmlformats.org/drawingml/2006/main" lIns="0" tIns="0" rIns="0" bIns="0"/>
+          <a:lstStyle xmlns:a="http://schemas.openxmlformats.org/drawingml/2006/main"/>
+          <a:p xmlns:a="http://schemas.openxmlformats.org/drawingml/2006/main">
+            <a:pPr>
+              <a:defRPr sz="2625" b="1">
+                <a:solidFill>
+                  <a:srgbClr val="1E6B52"/>
+                </a:solidFill>
+              </a:defRPr>
+            </a:pPr>
+            <a:r>
+              <a:rPr sz="2625" b="1">
+                <a:solidFill>
+                  <a:srgbClr val="1E6B52"/>
+                </a:solidFill>
+              </a:rPr>
+              <a:t>79.11 ha added → 0.00 ha remaining</a:t>
+            </a:r>
+          </a:p>
+        </p:txBody>
+      </p:sp>
+      <p:sp>
+        <p:nvSpPr>
+          <p:cNvPr id="19" name="source-5">
+            <a:extLst xmlns:a="http://schemas.openxmlformats.org/drawingml/2006/main">
+              <a:ext uri="{FF2B5EF4-FFF2-40B4-BE49-F238E27FC236}">
+                <a16:creationId xmlns:a16="http://schemas.microsoft.com/office/drawing/2014/main" id="{A4D49B8C-17B1-4381-84B9-6D9858758702}"/>
               </a:ext>
             </a:extLst>
           </p:cNvPr>
@@ -5891,10 +5417,10 @@
       </p:sp>
       <p:sp>
         <p:nvSpPr>
-          <p:cNvPr id="29" name="page-5">
-            <a:extLst xmlns:a="http://schemas.openxmlformats.org/drawingml/2006/main">
-              <a:ext uri="{FF2B5EF4-FFF2-40B4-BE49-F238E27FC236}">
-                <a16:creationId xmlns:a16="http://schemas.microsoft.com/office/drawing/2014/main" id="{A00CAF30-2301-43C4-8E02-6D0693461A69}"/>
+          <p:cNvPr id="20" name="page-5">
+            <a:extLst xmlns:a="http://schemas.openxmlformats.org/drawingml/2006/main">
+              <a:ext uri="{FF2B5EF4-FFF2-40B4-BE49-F238E27FC236}">
+                <a16:creationId xmlns:a16="http://schemas.microsoft.com/office/drawing/2014/main" id="{D4CFE375-EBF2-4017-BFEF-5DE436C522F8}"/>
               </a:ext>
             </a:extLst>
           </p:cNvPr>
@@ -5937,7 +5463,7 @@
     </p:spTree>
     <p:extLst>
       <p:ext uri="{BB962C8B-B14F-4D97-AF65-F5344CB8AC3E}">
-        <p14:creationId xmlns:p14="http://schemas.microsoft.com/office/powerpoint/2010/main" val="66508062"/>
+        <p14:creationId xmlns:p14="http://schemas.microsoft.com/office/powerpoint/2010/main" val="2056756788"/>
       </p:ext>
     </p:extLst>
   </p:cSld>
@@ -5961,7 +5487,7 @@
           <p:cNvPr id="1" name="slide-title-6">
             <a:extLst xmlns:a="http://schemas.openxmlformats.org/drawingml/2006/main">
               <a:ext uri="{FF2B5EF4-FFF2-40B4-BE49-F238E27FC236}">
-                <a16:creationId xmlns:a16="http://schemas.microsoft.com/office/drawing/2014/main" id="{6B14D2E3-73F1-410A-8A7D-716CB96D1AE9}"/>
+                <a16:creationId xmlns:a16="http://schemas.microsoft.com/office/drawing/2014/main" id="{F35878E0-45F1-4C16-A324-6293CFD0335D}"/>
               </a:ext>
             </a:extLst>
           </p:cNvPr>
@@ -5996,7 +5522,7 @@
                   <a:srgbClr val="17312B"/>
                 </a:solidFill>
               </a:rPr>
-              <a:t>Small-property calculation chain</a:t>
+              <a:t>Small property · inputs and cut-off tests</a:t>
             </a:r>
           </a:p>
         </p:txBody>
@@ -6006,7 +5532,7 @@
           <p:cNvPr id="2" name="slide-subtitle-6">
             <a:extLst xmlns:a="http://schemas.openxmlformats.org/drawingml/2006/main">
               <a:ext uri="{FF2B5EF4-FFF2-40B4-BE49-F238E27FC236}">
-                <a16:creationId xmlns:a16="http://schemas.microsoft.com/office/drawing/2014/main" id="{F405D6BE-D5EA-4852-8419-FC1984018783}"/>
+                <a16:creationId xmlns:a16="http://schemas.microsoft.com/office/drawing/2014/main" id="{91E3B448-5FFA-406C-8297-B0DA3E73958B}"/>
               </a:ext>
             </a:extLst>
           </p:cNvPr>
@@ -6018,7 +5544,7 @@
         <p:spPr>
           <a:xfrm xmlns:a="http://schemas.openxmlformats.org/drawingml/2006/main">
             <a:off x="857250" y="1276350"/>
-            <a:ext cx="7905750" cy="552450"/>
+            <a:ext cx="6838950" cy="552450"/>
           </a:xfrm>
           <a:prstGeom xmlns:a="http://schemas.openxmlformats.org/drawingml/2006/main" prst="rect">
             <a:avLst/>
@@ -6041,7 +5567,7 @@
                   <a:srgbClr val="5D716C"/>
                 </a:solidFill>
               </a:rPr>
-              <a:t>Article 67 determines LR; APP and secondary vegetation are calculated separately.</a:t>
+              <a:t>2.41 fiscal modules · SIMCAR Validated · forest and cerrado both &gt; 0 ha</a:t>
             </a:r>
           </a:p>
         </p:txBody>
@@ -6051,87 +5577,87 @@
           <p:cNvPr id="3" name="">
             <a:extLst xmlns:a="http://schemas.openxmlformats.org/drawingml/2006/main">
               <a:ext uri="{FF2B5EF4-FFF2-40B4-BE49-F238E27FC236}">
-                <a16:creationId xmlns:a16="http://schemas.microsoft.com/office/drawing/2014/main" id="{70AEA6E8-C9E7-4BF5-B8E9-60CF92EC136B}"/>
-              </a:ext>
-            </a:extLst>
-          </p:cNvPr>
-          <p:cNvSpPr>
-            <a:spLocks xmlns:a="http://schemas.openxmlformats.org/drawingml/2006/main" noGrp="1"/>
-          </p:cNvSpPr>
-          <p:nvPr/>
-        </p:nvSpPr>
-        <p:spPr>
-          <a:xfrm xmlns:a="http://schemas.openxmlformats.org/drawingml/2006/main">
-            <a:off x="1066800" y="2305050"/>
-            <a:ext cx="7753350" cy="247650"/>
-          </a:xfrm>
-          <a:prstGeom xmlns:a="http://schemas.openxmlformats.org/drawingml/2006/main" prst="rect">
-            <a:avLst/>
-          </a:prstGeom>
-        </p:spPr>
-        <p:txBody>
-          <a:bodyPr xmlns:a="http://schemas.openxmlformats.org/drawingml/2006/main" lIns="0" tIns="0" rIns="0" bIns="0"/>
-          <a:lstStyle xmlns:a="http://schemas.openxmlformats.org/drawingml/2006/main"/>
-          <a:p xmlns:a="http://schemas.openxmlformats.org/drawingml/2006/main">
-            <a:pPr>
-              <a:defRPr sz="1275" b="1">
+                <a16:creationId xmlns:a16="http://schemas.microsoft.com/office/drawing/2014/main" id="{C17493DF-7630-465E-9A52-38BB49CFFA0B}"/>
+              </a:ext>
+            </a:extLst>
+          </p:cNvPr>
+          <p:cNvSpPr>
+            <a:spLocks xmlns:a="http://schemas.openxmlformats.org/drawingml/2006/main" noGrp="1"/>
+          </p:cNvSpPr>
+          <p:nvPr/>
+        </p:nvSpPr>
+        <p:spPr>
+          <a:xfrm xmlns:a="http://schemas.openxmlformats.org/drawingml/2006/main">
+            <a:off x="1028700" y="2838450"/>
+            <a:ext cx="2895600" cy="304800"/>
+          </a:xfrm>
+          <a:prstGeom xmlns:a="http://schemas.openxmlformats.org/drawingml/2006/main" prst="rect">
+            <a:avLst/>
+          </a:prstGeom>
+        </p:spPr>
+        <p:txBody>
+          <a:bodyPr xmlns:a="http://schemas.openxmlformats.org/drawingml/2006/main" lIns="0" tIns="0" rIns="0" bIns="0"/>
+          <a:lstStyle xmlns:a="http://schemas.openxmlformats.org/drawingml/2006/main"/>
+          <a:p xmlns:a="http://schemas.openxmlformats.org/drawingml/2006/main">
+            <a:pPr>
+              <a:defRPr sz="1275">
+                <a:solidFill>
+                  <a:srgbClr val="5D716C"/>
+                </a:solidFill>
+              </a:defRPr>
+            </a:pPr>
+            <a:r>
+              <a:rPr sz="1275">
+                <a:solidFill>
+                  <a:srgbClr val="5D716C"/>
+                </a:solidFill>
+              </a:rPr>
+              <a:t>Property area</a:t>
+            </a:r>
+          </a:p>
+        </p:txBody>
+      </p:sp>
+      <p:sp>
+        <p:nvSpPr>
+          <p:cNvPr id="4" name="">
+            <a:extLst xmlns:a="http://schemas.openxmlformats.org/drawingml/2006/main">
+              <a:ext uri="{FF2B5EF4-FFF2-40B4-BE49-F238E27FC236}">
+                <a16:creationId xmlns:a16="http://schemas.microsoft.com/office/drawing/2014/main" id="{F6529C7E-F29D-45C1-8924-1246F0538F83}"/>
+              </a:ext>
+            </a:extLst>
+          </p:cNvPr>
+          <p:cNvSpPr>
+            <a:spLocks xmlns:a="http://schemas.openxmlformats.org/drawingml/2006/main" noGrp="1"/>
+          </p:cNvSpPr>
+          <p:nvPr/>
+        </p:nvSpPr>
+        <p:spPr>
+          <a:xfrm xmlns:a="http://schemas.openxmlformats.org/drawingml/2006/main">
+            <a:off x="3924300" y="2819400"/>
+            <a:ext cx="2133600" cy="323850"/>
+          </a:xfrm>
+          <a:prstGeom xmlns:a="http://schemas.openxmlformats.org/drawingml/2006/main" prst="rect">
+            <a:avLst/>
+          </a:prstGeom>
+        </p:spPr>
+        <p:txBody>
+          <a:bodyPr xmlns:a="http://schemas.openxmlformats.org/drawingml/2006/main" lIns="0" tIns="0" rIns="0" bIns="0"/>
+          <a:lstStyle xmlns:a="http://schemas.openxmlformats.org/drawingml/2006/main"/>
+          <a:p xmlns:a="http://schemas.openxmlformats.org/drawingml/2006/main">
+            <a:pPr>
+              <a:defRPr sz="1650" b="1">
                 <a:solidFill>
                   <a:srgbClr val="D49A45"/>
                 </a:solidFill>
               </a:defRPr>
             </a:pPr>
             <a:r>
-              <a:rPr sz="1275" b="1">
+              <a:rPr sz="1650" b="1">
                 <a:solidFill>
                   <a:srgbClr val="D49A45"/>
                 </a:solidFill>
               </a:rPr>
-              <a:t>2008 cut-off</a:t>
-            </a:r>
-          </a:p>
-        </p:txBody>
-      </p:sp>
-      <p:sp>
-        <p:nvSpPr>
-          <p:cNvPr id="4" name="">
-            <a:extLst xmlns:a="http://schemas.openxmlformats.org/drawingml/2006/main">
-              <a:ext uri="{FF2B5EF4-FFF2-40B4-BE49-F238E27FC236}">
-                <a16:creationId xmlns:a16="http://schemas.microsoft.com/office/drawing/2014/main" id="{20B5C49D-521F-405A-A58A-44A74020BBC3}"/>
-              </a:ext>
-            </a:extLst>
-          </p:cNvPr>
-          <p:cNvSpPr>
-            <a:spLocks xmlns:a="http://schemas.openxmlformats.org/drawingml/2006/main" noGrp="1"/>
-          </p:cNvSpPr>
-          <p:nvPr/>
-        </p:nvSpPr>
-        <p:spPr>
-          <a:xfrm xmlns:a="http://schemas.openxmlformats.org/drawingml/2006/main">
-            <a:off x="1066800" y="2609850"/>
-            <a:ext cx="7753350" cy="323850"/>
-          </a:xfrm>
-          <a:prstGeom xmlns:a="http://schemas.openxmlformats.org/drawingml/2006/main" prst="rect">
-            <a:avLst/>
-          </a:prstGeom>
-        </p:spPr>
-        <p:txBody>
-          <a:bodyPr xmlns:a="http://schemas.openxmlformats.org/drawingml/2006/main" lIns="0" tIns="0" rIns="0" bIns="0"/>
-          <a:lstStyle xmlns:a="http://schemas.openxmlformats.org/drawingml/2006/main"/>
-          <a:p xmlns:a="http://schemas.openxmlformats.org/drawingml/2006/main">
-            <a:pPr>
-              <a:defRPr sz="1425">
-                <a:solidFill>
-                  <a:srgbClr val="17312B"/>
-                </a:solidFill>
-              </a:defRPr>
-            </a:pPr>
-            <a:r>
-              <a:rPr sz="1425">
-                <a:solidFill>
-                  <a:srgbClr val="17312B"/>
-                </a:solidFill>
-              </a:rPr>
-              <a:t>MIN(115.24 ha, 128.34 ha)</a:t>
+              <a:t>193.20 ha</a:t>
             </a:r>
           </a:p>
         </p:txBody>
@@ -6141,637 +5667,1042 @@
           <p:cNvPr id="5" name="">
             <a:extLst xmlns:a="http://schemas.openxmlformats.org/drawingml/2006/main">
               <a:ext uri="{FF2B5EF4-FFF2-40B4-BE49-F238E27FC236}">
-                <a16:creationId xmlns:a16="http://schemas.microsoft.com/office/drawing/2014/main" id="{EC8BA9D6-96CD-4D7E-B837-8E30261A0FDF}"/>
-              </a:ext>
-            </a:extLst>
-          </p:cNvPr>
-          <p:cNvSpPr>
-            <a:spLocks xmlns:a="http://schemas.openxmlformats.org/drawingml/2006/main" noGrp="1"/>
-          </p:cNvSpPr>
-          <p:nvPr/>
-        </p:nvSpPr>
-        <p:spPr>
-          <a:xfrm xmlns:a="http://schemas.openxmlformats.org/drawingml/2006/main">
-            <a:off x="1066800" y="2990850"/>
-            <a:ext cx="7753350" cy="342900"/>
-          </a:xfrm>
-          <a:prstGeom xmlns:a="http://schemas.openxmlformats.org/drawingml/2006/main" prst="rect">
-            <a:avLst/>
-          </a:prstGeom>
-        </p:spPr>
-        <p:txBody>
-          <a:bodyPr xmlns:a="http://schemas.openxmlformats.org/drawingml/2006/main" lIns="0" tIns="0" rIns="0" bIns="0"/>
-          <a:lstStyle xmlns:a="http://schemas.openxmlformats.org/drawingml/2006/main"/>
-          <a:p xmlns:a="http://schemas.openxmlformats.org/drawingml/2006/main">
-            <a:pPr>
-              <a:defRPr sz="1800" b="1">
+                <a16:creationId xmlns:a16="http://schemas.microsoft.com/office/drawing/2014/main" id="{39CEEFFB-0AC0-439B-946C-7E048FA7522B}"/>
+              </a:ext>
+            </a:extLst>
+          </p:cNvPr>
+          <p:cNvSpPr>
+            <a:spLocks xmlns:a="http://schemas.openxmlformats.org/drawingml/2006/main" noGrp="1"/>
+          </p:cNvSpPr>
+          <p:nvPr/>
+        </p:nvSpPr>
+        <p:spPr>
+          <a:xfrm xmlns:a="http://schemas.openxmlformats.org/drawingml/2006/main">
+            <a:off x="1028700" y="4476750"/>
+            <a:ext cx="2895600" cy="304800"/>
+          </a:xfrm>
+          <a:prstGeom xmlns:a="http://schemas.openxmlformats.org/drawingml/2006/main" prst="rect">
+            <a:avLst/>
+          </a:prstGeom>
+        </p:spPr>
+        <p:txBody>
+          <a:bodyPr xmlns:a="http://schemas.openxmlformats.org/drawingml/2006/main" lIns="0" tIns="0" rIns="0" bIns="0"/>
+          <a:lstStyle xmlns:a="http://schemas.openxmlformats.org/drawingml/2006/main"/>
+          <a:p xmlns:a="http://schemas.openxmlformats.org/drawingml/2006/main">
+            <a:pPr>
+              <a:defRPr sz="1275">
+                <a:solidFill>
+                  <a:srgbClr val="5D716C"/>
+                </a:solidFill>
+              </a:defRPr>
+            </a:pPr>
+            <a:r>
+              <a:rPr sz="1275">
+                <a:solidFill>
+                  <a:srgbClr val="5D716C"/>
+                </a:solidFill>
+              </a:rPr>
+              <a:t>Fiscal modules</a:t>
+            </a:r>
+          </a:p>
+        </p:txBody>
+      </p:sp>
+      <p:sp>
+        <p:nvSpPr>
+          <p:cNvPr id="6" name="">
+            <a:extLst xmlns:a="http://schemas.openxmlformats.org/drawingml/2006/main">
+              <a:ext uri="{FF2B5EF4-FFF2-40B4-BE49-F238E27FC236}">
+                <a16:creationId xmlns:a16="http://schemas.microsoft.com/office/drawing/2014/main" id="{F836D0B7-9923-49A9-A636-CD15FF34946A}"/>
+              </a:ext>
+            </a:extLst>
+          </p:cNvPr>
+          <p:cNvSpPr>
+            <a:spLocks xmlns:a="http://schemas.openxmlformats.org/drawingml/2006/main" noGrp="1"/>
+          </p:cNvSpPr>
+          <p:nvPr/>
+        </p:nvSpPr>
+        <p:spPr>
+          <a:xfrm xmlns:a="http://schemas.openxmlformats.org/drawingml/2006/main">
+            <a:off x="3924300" y="4457700"/>
+            <a:ext cx="2133600" cy="323850"/>
+          </a:xfrm>
+          <a:prstGeom xmlns:a="http://schemas.openxmlformats.org/drawingml/2006/main" prst="rect">
+            <a:avLst/>
+          </a:prstGeom>
+        </p:spPr>
+        <p:txBody>
+          <a:bodyPr xmlns:a="http://schemas.openxmlformats.org/drawingml/2006/main" lIns="0" tIns="0" rIns="0" bIns="0"/>
+          <a:lstStyle xmlns:a="http://schemas.openxmlformats.org/drawingml/2006/main"/>
+          <a:p xmlns:a="http://schemas.openxmlformats.org/drawingml/2006/main">
+            <a:pPr>
+              <a:defRPr sz="1650" b="1">
                 <a:solidFill>
                   <a:srgbClr val="D49A45"/>
                 </a:solidFill>
               </a:defRPr>
             </a:pPr>
             <a:r>
-              <a:rPr sz="1800" b="1">
+              <a:rPr sz="1650" b="1">
                 <a:solidFill>
                   <a:srgbClr val="D49A45"/>
                 </a:solidFill>
               </a:rPr>
-              <a:t>= Article 67 requirement: 115.24 ha</a:t>
-            </a:r>
-          </a:p>
-        </p:txBody>
-      </p:sp>
-      <p:sp>
-        <p:nvSpPr>
-          <p:cNvPr id="6" name="">
-            <a:extLst xmlns:a="http://schemas.openxmlformats.org/drawingml/2006/main">
-              <a:ext uri="{FF2B5EF4-FFF2-40B4-BE49-F238E27FC236}">
-                <a16:creationId xmlns:a16="http://schemas.microsoft.com/office/drawing/2014/main" id="{256B692E-A8CF-4284-8815-1B50F330512D}"/>
-              </a:ext>
-            </a:extLst>
-          </p:cNvPr>
-          <p:cNvSpPr>
-            <a:spLocks xmlns:a="http://schemas.openxmlformats.org/drawingml/2006/main" noGrp="1"/>
-          </p:cNvSpPr>
-          <p:nvPr/>
-        </p:nvSpPr>
-        <p:spPr>
-          <a:xfrm xmlns:a="http://schemas.openxmlformats.org/drawingml/2006/main">
-            <a:off x="9467850" y="2305050"/>
-            <a:ext cx="7753350" cy="247650"/>
-          </a:xfrm>
-          <a:prstGeom xmlns:a="http://schemas.openxmlformats.org/drawingml/2006/main" prst="rect">
-            <a:avLst/>
-          </a:prstGeom>
-        </p:spPr>
-        <p:txBody>
-          <a:bodyPr xmlns:a="http://schemas.openxmlformats.org/drawingml/2006/main" lIns="0" tIns="0" rIns="0" bIns="0"/>
-          <a:lstStyle xmlns:a="http://schemas.openxmlformats.org/drawingml/2006/main"/>
-          <a:p xmlns:a="http://schemas.openxmlformats.org/drawingml/2006/main">
-            <a:pPr>
-              <a:defRPr sz="1275" b="1">
+              <a:t>2.41</a:t>
+            </a:r>
+          </a:p>
+        </p:txBody>
+      </p:sp>
+      <p:sp>
+        <p:nvSpPr>
+          <p:cNvPr id="7" name="">
+            <a:extLst xmlns:a="http://schemas.openxmlformats.org/drawingml/2006/main">
+              <a:ext uri="{FF2B5EF4-FFF2-40B4-BE49-F238E27FC236}">
+                <a16:creationId xmlns:a16="http://schemas.microsoft.com/office/drawing/2014/main" id="{B02AC2AB-2E3D-4F4E-BB4E-52DB6FBE9E66}"/>
+              </a:ext>
+            </a:extLst>
+          </p:cNvPr>
+          <p:cNvSpPr>
+            <a:spLocks xmlns:a="http://schemas.openxmlformats.org/drawingml/2006/main" noGrp="1"/>
+          </p:cNvSpPr>
+          <p:nvPr/>
+        </p:nvSpPr>
+        <p:spPr>
+          <a:xfrm xmlns:a="http://schemas.openxmlformats.org/drawingml/2006/main">
+            <a:off x="1028700" y="6115050"/>
+            <a:ext cx="2895600" cy="304800"/>
+          </a:xfrm>
+          <a:prstGeom xmlns:a="http://schemas.openxmlformats.org/drawingml/2006/main" prst="rect">
+            <a:avLst/>
+          </a:prstGeom>
+        </p:spPr>
+        <p:txBody>
+          <a:bodyPr xmlns:a="http://schemas.openxmlformats.org/drawingml/2006/main" lIns="0" tIns="0" rIns="0" bIns="0"/>
+          <a:lstStyle xmlns:a="http://schemas.openxmlformats.org/drawingml/2006/main"/>
+          <a:p xmlns:a="http://schemas.openxmlformats.org/drawingml/2006/main">
+            <a:pPr>
+              <a:defRPr sz="1275">
+                <a:solidFill>
+                  <a:srgbClr val="5D716C"/>
+                </a:solidFill>
+              </a:defRPr>
+            </a:pPr>
+            <a:r>
+              <a:rPr sz="1275">
+                <a:solidFill>
+                  <a:srgbClr val="5D716C"/>
+                </a:solidFill>
+              </a:rPr>
+              <a:t>Forest area</a:t>
+            </a:r>
+          </a:p>
+        </p:txBody>
+      </p:sp>
+      <p:sp>
+        <p:nvSpPr>
+          <p:cNvPr id="8" name="">
+            <a:extLst xmlns:a="http://schemas.openxmlformats.org/drawingml/2006/main">
+              <a:ext uri="{FF2B5EF4-FFF2-40B4-BE49-F238E27FC236}">
+                <a16:creationId xmlns:a16="http://schemas.microsoft.com/office/drawing/2014/main" id="{60F7A070-DF63-490E-B92E-20BF585EB8B2}"/>
+              </a:ext>
+            </a:extLst>
+          </p:cNvPr>
+          <p:cNvSpPr>
+            <a:spLocks xmlns:a="http://schemas.openxmlformats.org/drawingml/2006/main" noGrp="1"/>
+          </p:cNvSpPr>
+          <p:nvPr/>
+        </p:nvSpPr>
+        <p:spPr>
+          <a:xfrm xmlns:a="http://schemas.openxmlformats.org/drawingml/2006/main">
+            <a:off x="3924300" y="6115050"/>
+            <a:ext cx="2133600" cy="323850"/>
+          </a:xfrm>
+          <a:prstGeom xmlns:a="http://schemas.openxmlformats.org/drawingml/2006/main" prst="rect">
+            <a:avLst/>
+          </a:prstGeom>
+        </p:spPr>
+        <p:txBody>
+          <a:bodyPr xmlns:a="http://schemas.openxmlformats.org/drawingml/2006/main" lIns="0" tIns="0" rIns="0" bIns="0"/>
+          <a:lstStyle xmlns:a="http://schemas.openxmlformats.org/drawingml/2006/main"/>
+          <a:p xmlns:a="http://schemas.openxmlformats.org/drawingml/2006/main">
+            <a:pPr>
+              <a:defRPr sz="1650" b="1">
                 <a:solidFill>
                   <a:srgbClr val="D49A45"/>
                 </a:solidFill>
               </a:defRPr>
             </a:pPr>
             <a:r>
-              <a:rPr sz="1275" b="1">
+              <a:rPr sz="1650" b="1">
                 <a:solidFill>
                   <a:srgbClr val="D49A45"/>
                 </a:solidFill>
               </a:rPr>
-              <a:t>Legal Reserve deficit</a:t>
-            </a:r>
-          </a:p>
-        </p:txBody>
-      </p:sp>
-      <p:sp>
-        <p:nvSpPr>
-          <p:cNvPr id="7" name="">
-            <a:extLst xmlns:a="http://schemas.openxmlformats.org/drawingml/2006/main">
-              <a:ext uri="{FF2B5EF4-FFF2-40B4-BE49-F238E27FC236}">
-                <a16:creationId xmlns:a16="http://schemas.microsoft.com/office/drawing/2014/main" id="{98A39E47-A011-4293-80A2-26021DA13EF9}"/>
-              </a:ext>
-            </a:extLst>
-          </p:cNvPr>
-          <p:cNvSpPr>
-            <a:spLocks xmlns:a="http://schemas.openxmlformats.org/drawingml/2006/main" noGrp="1"/>
-          </p:cNvSpPr>
-          <p:nvPr/>
-        </p:nvSpPr>
-        <p:spPr>
-          <a:xfrm xmlns:a="http://schemas.openxmlformats.org/drawingml/2006/main">
-            <a:off x="9467850" y="2609850"/>
-            <a:ext cx="7753350" cy="323850"/>
-          </a:xfrm>
-          <a:prstGeom xmlns:a="http://schemas.openxmlformats.org/drawingml/2006/main" prst="rect">
-            <a:avLst/>
-          </a:prstGeom>
-        </p:spPr>
-        <p:txBody>
-          <a:bodyPr xmlns:a="http://schemas.openxmlformats.org/drawingml/2006/main" lIns="0" tIns="0" rIns="0" bIns="0"/>
-          <a:lstStyle xmlns:a="http://schemas.openxmlformats.org/drawingml/2006/main"/>
-          <a:p xmlns:a="http://schemas.openxmlformats.org/drawingml/2006/main">
-            <a:pPr>
-              <a:defRPr sz="1425">
-                <a:solidFill>
-                  <a:srgbClr val="17312B"/>
-                </a:solidFill>
-              </a:defRPr>
-            </a:pPr>
-            <a:r>
-              <a:rPr sz="1425">
-                <a:solidFill>
-                  <a:srgbClr val="17312B"/>
-                </a:solidFill>
-              </a:rPr>
-              <a:t>115.24 ha − 61.34 ha</a:t>
-            </a:r>
-          </a:p>
-        </p:txBody>
-      </p:sp>
-      <p:sp>
-        <p:nvSpPr>
-          <p:cNvPr id="8" name="">
-            <a:extLst xmlns:a="http://schemas.openxmlformats.org/drawingml/2006/main">
-              <a:ext uri="{FF2B5EF4-FFF2-40B4-BE49-F238E27FC236}">
-                <a16:creationId xmlns:a16="http://schemas.microsoft.com/office/drawing/2014/main" id="{AB057EA0-BB50-4637-A599-31F0ACB4616F}"/>
-              </a:ext>
-            </a:extLst>
-          </p:cNvPr>
-          <p:cNvSpPr>
-            <a:spLocks xmlns:a="http://schemas.openxmlformats.org/drawingml/2006/main" noGrp="1"/>
-          </p:cNvSpPr>
-          <p:nvPr/>
-        </p:nvSpPr>
-        <p:spPr>
-          <a:xfrm xmlns:a="http://schemas.openxmlformats.org/drawingml/2006/main">
-            <a:off x="9467850" y="2990850"/>
-            <a:ext cx="7753350" cy="342900"/>
-          </a:xfrm>
-          <a:prstGeom xmlns:a="http://schemas.openxmlformats.org/drawingml/2006/main" prst="rect">
-            <a:avLst/>
-          </a:prstGeom>
-        </p:spPr>
-        <p:txBody>
-          <a:bodyPr xmlns:a="http://schemas.openxmlformats.org/drawingml/2006/main" lIns="0" tIns="0" rIns="0" bIns="0"/>
-          <a:lstStyle xmlns:a="http://schemas.openxmlformats.org/drawingml/2006/main"/>
-          <a:p xmlns:a="http://schemas.openxmlformats.org/drawingml/2006/main">
-            <a:pPr>
-              <a:defRPr sz="1800" b="1">
+              <a:t>108.66 ha</a:t>
+            </a:r>
+          </a:p>
+        </p:txBody>
+      </p:sp>
+      <p:sp>
+        <p:nvSpPr>
+          <p:cNvPr id="9" name="">
+            <a:extLst xmlns:a="http://schemas.openxmlformats.org/drawingml/2006/main">
+              <a:ext uri="{FF2B5EF4-FFF2-40B4-BE49-F238E27FC236}">
+                <a16:creationId xmlns:a16="http://schemas.microsoft.com/office/drawing/2014/main" id="{CC54D0DC-FAD3-4885-8756-3A7841A626B1}"/>
+              </a:ext>
+            </a:extLst>
+          </p:cNvPr>
+          <p:cNvSpPr>
+            <a:spLocks xmlns:a="http://schemas.openxmlformats.org/drawingml/2006/main" noGrp="1"/>
+          </p:cNvSpPr>
+          <p:nvPr/>
+        </p:nvSpPr>
+        <p:spPr>
+          <a:xfrm xmlns:a="http://schemas.openxmlformats.org/drawingml/2006/main">
+            <a:off x="1028700" y="7753350"/>
+            <a:ext cx="2895600" cy="304800"/>
+          </a:xfrm>
+          <a:prstGeom xmlns:a="http://schemas.openxmlformats.org/drawingml/2006/main" prst="rect">
+            <a:avLst/>
+          </a:prstGeom>
+        </p:spPr>
+        <p:txBody>
+          <a:bodyPr xmlns:a="http://schemas.openxmlformats.org/drawingml/2006/main" lIns="0" tIns="0" rIns="0" bIns="0"/>
+          <a:lstStyle xmlns:a="http://schemas.openxmlformats.org/drawingml/2006/main"/>
+          <a:p xmlns:a="http://schemas.openxmlformats.org/drawingml/2006/main">
+            <a:pPr>
+              <a:defRPr sz="1275">
+                <a:solidFill>
+                  <a:srgbClr val="5D716C"/>
+                </a:solidFill>
+              </a:defRPr>
+            </a:pPr>
+            <a:r>
+              <a:rPr sz="1275">
+                <a:solidFill>
+                  <a:srgbClr val="5D716C"/>
+                </a:solidFill>
+              </a:rPr>
+              <a:t>Cerrado area</a:t>
+            </a:r>
+          </a:p>
+        </p:txBody>
+      </p:sp>
+      <p:sp>
+        <p:nvSpPr>
+          <p:cNvPr id="10" name="">
+            <a:extLst xmlns:a="http://schemas.openxmlformats.org/drawingml/2006/main">
+              <a:ext uri="{FF2B5EF4-FFF2-40B4-BE49-F238E27FC236}">
+                <a16:creationId xmlns:a16="http://schemas.microsoft.com/office/drawing/2014/main" id="{7FFA393D-5DD5-4240-BB82-C37A19B487FE}"/>
+              </a:ext>
+            </a:extLst>
+          </p:cNvPr>
+          <p:cNvSpPr>
+            <a:spLocks xmlns:a="http://schemas.openxmlformats.org/drawingml/2006/main" noGrp="1"/>
+          </p:cNvSpPr>
+          <p:nvPr/>
+        </p:nvSpPr>
+        <p:spPr>
+          <a:xfrm xmlns:a="http://schemas.openxmlformats.org/drawingml/2006/main">
+            <a:off x="3924300" y="7753350"/>
+            <a:ext cx="2133600" cy="323850"/>
+          </a:xfrm>
+          <a:prstGeom xmlns:a="http://schemas.openxmlformats.org/drawingml/2006/main" prst="rect">
+            <a:avLst/>
+          </a:prstGeom>
+        </p:spPr>
+        <p:txBody>
+          <a:bodyPr xmlns:a="http://schemas.openxmlformats.org/drawingml/2006/main" lIns="0" tIns="0" rIns="0" bIns="0"/>
+          <a:lstStyle xmlns:a="http://schemas.openxmlformats.org/drawingml/2006/main"/>
+          <a:p xmlns:a="http://schemas.openxmlformats.org/drawingml/2006/main">
+            <a:pPr>
+              <a:defRPr sz="1650" b="1">
                 <a:solidFill>
                   <a:srgbClr val="D49A45"/>
                 </a:solidFill>
               </a:defRPr>
             </a:pPr>
             <a:r>
-              <a:rPr sz="1800" b="1">
+              <a:rPr sz="1650" b="1">
                 <a:solidFill>
                   <a:srgbClr val="D49A45"/>
                 </a:solidFill>
               </a:rPr>
-              <a:t>= 53.90 ha</a:t>
-            </a:r>
-          </a:p>
-        </p:txBody>
-      </p:sp>
-      <p:sp>
-        <p:nvSpPr>
-          <p:cNvPr id="9" name="">
-            <a:extLst xmlns:a="http://schemas.openxmlformats.org/drawingml/2006/main">
-              <a:ext uri="{FF2B5EF4-FFF2-40B4-BE49-F238E27FC236}">
-                <a16:creationId xmlns:a16="http://schemas.microsoft.com/office/drawing/2014/main" id="{762875CA-46FA-4B63-80E8-B2302D3F17A3}"/>
-              </a:ext>
-            </a:extLst>
-          </p:cNvPr>
-          <p:cNvSpPr>
-            <a:spLocks xmlns:a="http://schemas.openxmlformats.org/drawingml/2006/main" noGrp="1"/>
-          </p:cNvSpPr>
-          <p:nvPr/>
-        </p:nvSpPr>
-        <p:spPr>
-          <a:xfrm xmlns:a="http://schemas.openxmlformats.org/drawingml/2006/main">
-            <a:off x="1066800" y="5124450"/>
-            <a:ext cx="7753350" cy="247650"/>
-          </a:xfrm>
-          <a:prstGeom xmlns:a="http://schemas.openxmlformats.org/drawingml/2006/main" prst="rect">
-            <a:avLst/>
-          </a:prstGeom>
-        </p:spPr>
-        <p:txBody>
-          <a:bodyPr xmlns:a="http://schemas.openxmlformats.org/drawingml/2006/main" lIns="0" tIns="0" rIns="0" bIns="0"/>
-          <a:lstStyle xmlns:a="http://schemas.openxmlformats.org/drawingml/2006/main"/>
-          <a:p xmlns:a="http://schemas.openxmlformats.org/drawingml/2006/main">
-            <a:pPr>
-              <a:defRPr sz="1275" b="1">
+              <a:t>80.90 ha</a:t>
+            </a:r>
+          </a:p>
+        </p:txBody>
+      </p:sp>
+      <p:sp>
+        <p:nvSpPr>
+          <p:cNvPr id="11" name="">
+            <a:extLst xmlns:a="http://schemas.openxmlformats.org/drawingml/2006/main">
+              <a:ext uri="{FF2B5EF4-FFF2-40B4-BE49-F238E27FC236}">
+                <a16:creationId xmlns:a16="http://schemas.microsoft.com/office/drawing/2014/main" id="{E9ACB863-6BC6-45A9-BF91-BC4B9C20C26E}"/>
+              </a:ext>
+            </a:extLst>
+          </p:cNvPr>
+          <p:cNvSpPr>
+            <a:spLocks xmlns:a="http://schemas.openxmlformats.org/drawingml/2006/main" noGrp="1"/>
+          </p:cNvSpPr>
+          <p:nvPr/>
+        </p:nvSpPr>
+        <p:spPr>
+          <a:xfrm xmlns:a="http://schemas.openxmlformats.org/drawingml/2006/main">
+            <a:off x="6629400" y="2838450"/>
+            <a:ext cx="2895600" cy="304800"/>
+          </a:xfrm>
+          <a:prstGeom xmlns:a="http://schemas.openxmlformats.org/drawingml/2006/main" prst="rect">
+            <a:avLst/>
+          </a:prstGeom>
+        </p:spPr>
+        <p:txBody>
+          <a:bodyPr xmlns:a="http://schemas.openxmlformats.org/drawingml/2006/main" lIns="0" tIns="0" rIns="0" bIns="0"/>
+          <a:lstStyle xmlns:a="http://schemas.openxmlformats.org/drawingml/2006/main"/>
+          <a:p xmlns:a="http://schemas.openxmlformats.org/drawingml/2006/main">
+            <a:pPr>
+              <a:defRPr sz="1275">
+                <a:solidFill>
+                  <a:srgbClr val="5D716C"/>
+                </a:solidFill>
+              </a:defRPr>
+            </a:pPr>
+            <a:r>
+              <a:rPr sz="1275">
+                <a:solidFill>
+                  <a:srgbClr val="5D716C"/>
+                </a:solidFill>
+              </a:rPr>
+              <a:t>Consolidated area 2000</a:t>
+            </a:r>
+          </a:p>
+        </p:txBody>
+      </p:sp>
+      <p:sp>
+        <p:nvSpPr>
+          <p:cNvPr id="12" name="">
+            <a:extLst xmlns:a="http://schemas.openxmlformats.org/drawingml/2006/main">
+              <a:ext uri="{FF2B5EF4-FFF2-40B4-BE49-F238E27FC236}">
+                <a16:creationId xmlns:a16="http://schemas.microsoft.com/office/drawing/2014/main" id="{C341BC7E-85C6-4258-B62F-73A05EE140E2}"/>
+              </a:ext>
+            </a:extLst>
+          </p:cNvPr>
+          <p:cNvSpPr>
+            <a:spLocks xmlns:a="http://schemas.openxmlformats.org/drawingml/2006/main" noGrp="1"/>
+          </p:cNvSpPr>
+          <p:nvPr/>
+        </p:nvSpPr>
+        <p:spPr>
+          <a:xfrm xmlns:a="http://schemas.openxmlformats.org/drawingml/2006/main">
+            <a:off x="9525000" y="2819400"/>
+            <a:ext cx="2133600" cy="323850"/>
+          </a:xfrm>
+          <a:prstGeom xmlns:a="http://schemas.openxmlformats.org/drawingml/2006/main" prst="rect">
+            <a:avLst/>
+          </a:prstGeom>
+        </p:spPr>
+        <p:txBody>
+          <a:bodyPr xmlns:a="http://schemas.openxmlformats.org/drawingml/2006/main" lIns="0" tIns="0" rIns="0" bIns="0"/>
+          <a:lstStyle xmlns:a="http://schemas.openxmlformats.org/drawingml/2006/main"/>
+          <a:p xmlns:a="http://schemas.openxmlformats.org/drawingml/2006/main">
+            <a:pPr>
+              <a:defRPr sz="1650" b="1">
                 <a:solidFill>
                   <a:srgbClr val="D49A45"/>
                 </a:solidFill>
               </a:defRPr>
             </a:pPr>
             <a:r>
-              <a:rPr sz="1275" b="1">
+              <a:rPr sz="1650" b="1">
                 <a:solidFill>
                   <a:srgbClr val="D49A45"/>
                 </a:solidFill>
               </a:rPr>
-              <a:t>LR pathway</a:t>
-            </a:r>
-          </a:p>
-        </p:txBody>
-      </p:sp>
-      <p:sp>
-        <p:nvSpPr>
-          <p:cNvPr id="10" name="">
-            <a:extLst xmlns:a="http://schemas.openxmlformats.org/drawingml/2006/main">
-              <a:ext uri="{FF2B5EF4-FFF2-40B4-BE49-F238E27FC236}">
-                <a16:creationId xmlns:a16="http://schemas.microsoft.com/office/drawing/2014/main" id="{3CE04B7A-6FD3-40C1-9F2E-F3B50BD7FCA3}"/>
-              </a:ext>
-            </a:extLst>
-          </p:cNvPr>
-          <p:cNvSpPr>
-            <a:spLocks xmlns:a="http://schemas.openxmlformats.org/drawingml/2006/main" noGrp="1"/>
-          </p:cNvSpPr>
-          <p:nvPr/>
-        </p:nvSpPr>
-        <p:spPr>
-          <a:xfrm xmlns:a="http://schemas.openxmlformats.org/drawingml/2006/main">
-            <a:off x="1066800" y="5429250"/>
-            <a:ext cx="7753350" cy="323850"/>
-          </a:xfrm>
-          <a:prstGeom xmlns:a="http://schemas.openxmlformats.org/drawingml/2006/main" prst="rect">
-            <a:avLst/>
-          </a:prstGeom>
-        </p:spPr>
-        <p:txBody>
-          <a:bodyPr xmlns:a="http://schemas.openxmlformats.org/drawingml/2006/main" lIns="0" tIns="0" rIns="0" bIns="0"/>
-          <a:lstStyle xmlns:a="http://schemas.openxmlformats.org/drawingml/2006/main"/>
-          <a:p xmlns:a="http://schemas.openxmlformats.org/drawingml/2006/main">
-            <a:pPr>
-              <a:defRPr sz="1425">
-                <a:solidFill>
-                  <a:srgbClr val="17312B"/>
-                </a:solidFill>
-              </a:defRPr>
-            </a:pPr>
-            <a:r>
-              <a:rPr sz="1425">
-                <a:solidFill>
-                  <a:srgbClr val="17312B"/>
-                </a:solidFill>
-              </a:rPr>
-              <a:t>Restore = MIN(post-2008 clearing, LR deficit)</a:t>
-            </a:r>
-          </a:p>
-        </p:txBody>
-      </p:sp>
-      <p:sp>
-        <p:nvSpPr>
-          <p:cNvPr id="11" name="">
-            <a:extLst xmlns:a="http://schemas.openxmlformats.org/drawingml/2006/main">
-              <a:ext uri="{FF2B5EF4-FFF2-40B4-BE49-F238E27FC236}">
-                <a16:creationId xmlns:a16="http://schemas.microsoft.com/office/drawing/2014/main" id="{196A59AA-A508-4844-A397-CE354D892CE7}"/>
-              </a:ext>
-            </a:extLst>
-          </p:cNvPr>
-          <p:cNvSpPr>
-            <a:spLocks xmlns:a="http://schemas.openxmlformats.org/drawingml/2006/main" noGrp="1"/>
-          </p:cNvSpPr>
-          <p:nvPr/>
-        </p:nvSpPr>
-        <p:spPr>
-          <a:xfrm xmlns:a="http://schemas.openxmlformats.org/drawingml/2006/main">
-            <a:off x="1066800" y="5810250"/>
-            <a:ext cx="7753350" cy="342900"/>
-          </a:xfrm>
-          <a:prstGeom xmlns:a="http://schemas.openxmlformats.org/drawingml/2006/main" prst="rect">
-            <a:avLst/>
-          </a:prstGeom>
-        </p:spPr>
-        <p:txBody>
-          <a:bodyPr xmlns:a="http://schemas.openxmlformats.org/drawingml/2006/main" lIns="0" tIns="0" rIns="0" bIns="0"/>
-          <a:lstStyle xmlns:a="http://schemas.openxmlformats.org/drawingml/2006/main"/>
-          <a:p xmlns:a="http://schemas.openxmlformats.org/drawingml/2006/main">
-            <a:pPr>
-              <a:defRPr sz="1800" b="1">
+              <a:t>140.02 ha</a:t>
+            </a:r>
+          </a:p>
+        </p:txBody>
+      </p:sp>
+      <p:sp>
+        <p:nvSpPr>
+          <p:cNvPr id="13" name="">
+            <a:extLst xmlns:a="http://schemas.openxmlformats.org/drawingml/2006/main">
+              <a:ext uri="{FF2B5EF4-FFF2-40B4-BE49-F238E27FC236}">
+                <a16:creationId xmlns:a16="http://schemas.microsoft.com/office/drawing/2014/main" id="{4DD71143-5C9B-4437-9DAF-E779B857DE8D}"/>
+              </a:ext>
+            </a:extLst>
+          </p:cNvPr>
+          <p:cNvSpPr>
+            <a:spLocks xmlns:a="http://schemas.openxmlformats.org/drawingml/2006/main" noGrp="1"/>
+          </p:cNvSpPr>
+          <p:nvPr/>
+        </p:nvSpPr>
+        <p:spPr>
+          <a:xfrm xmlns:a="http://schemas.openxmlformats.org/drawingml/2006/main">
+            <a:off x="6629400" y="4476750"/>
+            <a:ext cx="2895600" cy="304800"/>
+          </a:xfrm>
+          <a:prstGeom xmlns:a="http://schemas.openxmlformats.org/drawingml/2006/main" prst="rect">
+            <a:avLst/>
+          </a:prstGeom>
+        </p:spPr>
+        <p:txBody>
+          <a:bodyPr xmlns:a="http://schemas.openxmlformats.org/drawingml/2006/main" lIns="0" tIns="0" rIns="0" bIns="0"/>
+          <a:lstStyle xmlns:a="http://schemas.openxmlformats.org/drawingml/2006/main"/>
+          <a:p xmlns:a="http://schemas.openxmlformats.org/drawingml/2006/main">
+            <a:pPr>
+              <a:defRPr sz="1275">
+                <a:solidFill>
+                  <a:srgbClr val="5D716C"/>
+                </a:solidFill>
+              </a:defRPr>
+            </a:pPr>
+            <a:r>
+              <a:rPr sz="1275">
+                <a:solidFill>
+                  <a:srgbClr val="5D716C"/>
+                </a:solidFill>
+              </a:rPr>
+              <a:t>Vegetation in 2000</a:t>
+            </a:r>
+          </a:p>
+        </p:txBody>
+      </p:sp>
+      <p:sp>
+        <p:nvSpPr>
+          <p:cNvPr id="14" name="">
+            <a:extLst xmlns:a="http://schemas.openxmlformats.org/drawingml/2006/main">
+              <a:ext uri="{FF2B5EF4-FFF2-40B4-BE49-F238E27FC236}">
+                <a16:creationId xmlns:a16="http://schemas.microsoft.com/office/drawing/2014/main" id="{70425789-CD3D-41F8-9AC3-C0FDBFF6DE27}"/>
+              </a:ext>
+            </a:extLst>
+          </p:cNvPr>
+          <p:cNvSpPr>
+            <a:spLocks xmlns:a="http://schemas.openxmlformats.org/drawingml/2006/main" noGrp="1"/>
+          </p:cNvSpPr>
+          <p:nvPr/>
+        </p:nvSpPr>
+        <p:spPr>
+          <a:xfrm xmlns:a="http://schemas.openxmlformats.org/drawingml/2006/main">
+            <a:off x="9525000" y="4457700"/>
+            <a:ext cx="2133600" cy="323850"/>
+          </a:xfrm>
+          <a:prstGeom xmlns:a="http://schemas.openxmlformats.org/drawingml/2006/main" prst="rect">
+            <a:avLst/>
+          </a:prstGeom>
+        </p:spPr>
+        <p:txBody>
+          <a:bodyPr xmlns:a="http://schemas.openxmlformats.org/drawingml/2006/main" lIns="0" tIns="0" rIns="0" bIns="0"/>
+          <a:lstStyle xmlns:a="http://schemas.openxmlformats.org/drawingml/2006/main"/>
+          <a:p xmlns:a="http://schemas.openxmlformats.org/drawingml/2006/main">
+            <a:pPr>
+              <a:defRPr sz="1650" b="1">
                 <a:solidFill>
                   <a:srgbClr val="D49A45"/>
                 </a:solidFill>
               </a:defRPr>
             </a:pPr>
             <a:r>
-              <a:rPr sz="1800" b="1">
+              <a:rPr sz="1650" b="1">
                 <a:solidFill>
                   <a:srgbClr val="D49A45"/>
                 </a:solidFill>
               </a:rPr>
-              <a:t>= 0.00 ha restore · 53.90 ha compensate</a:t>
-            </a:r>
-          </a:p>
-        </p:txBody>
-      </p:sp>
-      <p:sp>
-        <p:nvSpPr>
-          <p:cNvPr id="12" name="">
-            <a:extLst xmlns:a="http://schemas.openxmlformats.org/drawingml/2006/main">
-              <a:ext uri="{FF2B5EF4-FFF2-40B4-BE49-F238E27FC236}">
-                <a16:creationId xmlns:a16="http://schemas.microsoft.com/office/drawing/2014/main" id="{71B977A1-81C8-48E9-90D7-31A31A39C093}"/>
-              </a:ext>
-            </a:extLst>
-          </p:cNvPr>
-          <p:cNvSpPr>
-            <a:spLocks xmlns:a="http://schemas.openxmlformats.org/drawingml/2006/main" noGrp="1"/>
-          </p:cNvSpPr>
-          <p:nvPr/>
-        </p:nvSpPr>
-        <p:spPr>
-          <a:xfrm xmlns:a="http://schemas.openxmlformats.org/drawingml/2006/main">
-            <a:off x="9467850" y="5124450"/>
-            <a:ext cx="7753350" cy="247650"/>
-          </a:xfrm>
-          <a:prstGeom xmlns:a="http://schemas.openxmlformats.org/drawingml/2006/main" prst="rect">
-            <a:avLst/>
-          </a:prstGeom>
-        </p:spPr>
-        <p:txBody>
-          <a:bodyPr xmlns:a="http://schemas.openxmlformats.org/drawingml/2006/main" lIns="0" tIns="0" rIns="0" bIns="0"/>
-          <a:lstStyle xmlns:a="http://schemas.openxmlformats.org/drawingml/2006/main"/>
-          <a:p xmlns:a="http://schemas.openxmlformats.org/drawingml/2006/main">
-            <a:pPr>
-              <a:defRPr sz="1275" b="1">
+              <a:t>53.18 ha</a:t>
+            </a:r>
+          </a:p>
+        </p:txBody>
+      </p:sp>
+      <p:sp>
+        <p:nvSpPr>
+          <p:cNvPr id="15" name="">
+            <a:extLst xmlns:a="http://schemas.openxmlformats.org/drawingml/2006/main">
+              <a:ext uri="{FF2B5EF4-FFF2-40B4-BE49-F238E27FC236}">
+                <a16:creationId xmlns:a16="http://schemas.microsoft.com/office/drawing/2014/main" id="{A0295B64-E61C-49A0-984A-4888640A9AB3}"/>
+              </a:ext>
+            </a:extLst>
+          </p:cNvPr>
+          <p:cNvSpPr>
+            <a:spLocks xmlns:a="http://schemas.openxmlformats.org/drawingml/2006/main" noGrp="1"/>
+          </p:cNvSpPr>
+          <p:nvPr/>
+        </p:nvSpPr>
+        <p:spPr>
+          <a:xfrm xmlns:a="http://schemas.openxmlformats.org/drawingml/2006/main">
+            <a:off x="6629400" y="6115050"/>
+            <a:ext cx="2895600" cy="304800"/>
+          </a:xfrm>
+          <a:prstGeom xmlns:a="http://schemas.openxmlformats.org/drawingml/2006/main" prst="rect">
+            <a:avLst/>
+          </a:prstGeom>
+        </p:spPr>
+        <p:txBody>
+          <a:bodyPr xmlns:a="http://schemas.openxmlformats.org/drawingml/2006/main" lIns="0" tIns="0" rIns="0" bIns="0"/>
+          <a:lstStyle xmlns:a="http://schemas.openxmlformats.org/drawingml/2006/main"/>
+          <a:p xmlns:a="http://schemas.openxmlformats.org/drawingml/2006/main">
+            <a:pPr>
+              <a:defRPr sz="1275">
+                <a:solidFill>
+                  <a:srgbClr val="5D716C"/>
+                </a:solidFill>
+              </a:defRPr>
+            </a:pPr>
+            <a:r>
+              <a:rPr sz="1275">
+                <a:solidFill>
+                  <a:srgbClr val="5D716C"/>
+                </a:solidFill>
+              </a:rPr>
+              <a:t>Consolidated area 2008</a:t>
+            </a:r>
+          </a:p>
+        </p:txBody>
+      </p:sp>
+      <p:sp>
+        <p:nvSpPr>
+          <p:cNvPr id="16" name="">
+            <a:extLst xmlns:a="http://schemas.openxmlformats.org/drawingml/2006/main">
+              <a:ext uri="{FF2B5EF4-FFF2-40B4-BE49-F238E27FC236}">
+                <a16:creationId xmlns:a16="http://schemas.microsoft.com/office/drawing/2014/main" id="{DC8CE83D-4D7C-4361-B32F-894C19E9DD4E}"/>
+              </a:ext>
+            </a:extLst>
+          </p:cNvPr>
+          <p:cNvSpPr>
+            <a:spLocks xmlns:a="http://schemas.openxmlformats.org/drawingml/2006/main" noGrp="1"/>
+          </p:cNvSpPr>
+          <p:nvPr/>
+        </p:nvSpPr>
+        <p:spPr>
+          <a:xfrm xmlns:a="http://schemas.openxmlformats.org/drawingml/2006/main">
+            <a:off x="9525000" y="6115050"/>
+            <a:ext cx="2133600" cy="323850"/>
+          </a:xfrm>
+          <a:prstGeom xmlns:a="http://schemas.openxmlformats.org/drawingml/2006/main" prst="rect">
+            <a:avLst/>
+          </a:prstGeom>
+        </p:spPr>
+        <p:txBody>
+          <a:bodyPr xmlns:a="http://schemas.openxmlformats.org/drawingml/2006/main" lIns="0" tIns="0" rIns="0" bIns="0"/>
+          <a:lstStyle xmlns:a="http://schemas.openxmlformats.org/drawingml/2006/main"/>
+          <a:p xmlns:a="http://schemas.openxmlformats.org/drawingml/2006/main">
+            <a:pPr>
+              <a:defRPr sz="1650" b="1">
                 <a:solidFill>
                   <a:srgbClr val="D49A45"/>
                 </a:solidFill>
               </a:defRPr>
             </a:pPr>
             <a:r>
-              <a:rPr sz="1275" b="1">
+              <a:rPr sz="1650" b="1">
                 <a:solidFill>
                   <a:srgbClr val="D49A45"/>
                 </a:solidFill>
               </a:rPr>
-              <a:t>APP restoration</a:t>
-            </a:r>
-          </a:p>
-        </p:txBody>
-      </p:sp>
-      <p:sp>
-        <p:nvSpPr>
-          <p:cNvPr id="13" name="">
-            <a:extLst xmlns:a="http://schemas.openxmlformats.org/drawingml/2006/main">
-              <a:ext uri="{FF2B5EF4-FFF2-40B4-BE49-F238E27FC236}">
-                <a16:creationId xmlns:a16="http://schemas.microsoft.com/office/drawing/2014/main" id="{A78941B9-4277-4B33-9CA7-DA588AA24BFA}"/>
-              </a:ext>
-            </a:extLst>
-          </p:cNvPr>
-          <p:cNvSpPr>
-            <a:spLocks xmlns:a="http://schemas.openxmlformats.org/drawingml/2006/main" noGrp="1"/>
-          </p:cNvSpPr>
-          <p:nvPr/>
-        </p:nvSpPr>
-        <p:spPr>
-          <a:xfrm xmlns:a="http://schemas.openxmlformats.org/drawingml/2006/main">
-            <a:off x="9467850" y="5429250"/>
-            <a:ext cx="7753350" cy="323850"/>
-          </a:xfrm>
-          <a:prstGeom xmlns:a="http://schemas.openxmlformats.org/drawingml/2006/main" prst="rect">
-            <a:avLst/>
-          </a:prstGeom>
-        </p:spPr>
-        <p:txBody>
-          <a:bodyPr xmlns:a="http://schemas.openxmlformats.org/drawingml/2006/main" lIns="0" tIns="0" rIns="0" bIns="0"/>
-          <a:lstStyle xmlns:a="http://schemas.openxmlformats.org/drawingml/2006/main"/>
-          <a:p xmlns:a="http://schemas.openxmlformats.org/drawingml/2006/main">
-            <a:pPr>
-              <a:defRPr sz="1425">
-                <a:solidFill>
-                  <a:srgbClr val="17312B"/>
-                </a:solidFill>
-              </a:defRPr>
-            </a:pPr>
-            <a:r>
-              <a:rPr sz="1425">
-                <a:solidFill>
-                  <a:srgbClr val="17312B"/>
-                </a:solidFill>
-              </a:rPr>
-              <a:t>Pre-2008 component after cap + post-2008 APP clearing</a:t>
-            </a:r>
-          </a:p>
-        </p:txBody>
-      </p:sp>
-      <p:sp>
-        <p:nvSpPr>
-          <p:cNvPr id="14" name="">
-            <a:extLst xmlns:a="http://schemas.openxmlformats.org/drawingml/2006/main">
-              <a:ext uri="{FF2B5EF4-FFF2-40B4-BE49-F238E27FC236}">
-                <a16:creationId xmlns:a16="http://schemas.microsoft.com/office/drawing/2014/main" id="{608CA631-43C7-4AC4-8E7D-7F0CC55A0F4D}"/>
-              </a:ext>
-            </a:extLst>
-          </p:cNvPr>
-          <p:cNvSpPr>
-            <a:spLocks xmlns:a="http://schemas.openxmlformats.org/drawingml/2006/main" noGrp="1"/>
-          </p:cNvSpPr>
-          <p:nvPr/>
-        </p:nvSpPr>
-        <p:spPr>
-          <a:xfrm xmlns:a="http://schemas.openxmlformats.org/drawingml/2006/main">
-            <a:off x="9467850" y="5810250"/>
-            <a:ext cx="7753350" cy="342900"/>
-          </a:xfrm>
-          <a:prstGeom xmlns:a="http://schemas.openxmlformats.org/drawingml/2006/main" prst="rect">
-            <a:avLst/>
-          </a:prstGeom>
-        </p:spPr>
-        <p:txBody>
-          <a:bodyPr xmlns:a="http://schemas.openxmlformats.org/drawingml/2006/main" lIns="0" tIns="0" rIns="0" bIns="0"/>
-          <a:lstStyle xmlns:a="http://schemas.openxmlformats.org/drawingml/2006/main"/>
-          <a:p xmlns:a="http://schemas.openxmlformats.org/drawingml/2006/main">
-            <a:pPr>
-              <a:defRPr sz="1800" b="1">
+              <a:t>64.85 ha</a:t>
+            </a:r>
+          </a:p>
+        </p:txBody>
+      </p:sp>
+      <p:sp>
+        <p:nvSpPr>
+          <p:cNvPr id="17" name="">
+            <a:extLst xmlns:a="http://schemas.openxmlformats.org/drawingml/2006/main">
+              <a:ext uri="{FF2B5EF4-FFF2-40B4-BE49-F238E27FC236}">
+                <a16:creationId xmlns:a16="http://schemas.microsoft.com/office/drawing/2014/main" id="{E27F6100-A1CC-4078-9033-9F4E79DA21EF}"/>
+              </a:ext>
+            </a:extLst>
+          </p:cNvPr>
+          <p:cNvSpPr>
+            <a:spLocks xmlns:a="http://schemas.openxmlformats.org/drawingml/2006/main" noGrp="1"/>
+          </p:cNvSpPr>
+          <p:nvPr/>
+        </p:nvSpPr>
+        <p:spPr>
+          <a:xfrm xmlns:a="http://schemas.openxmlformats.org/drawingml/2006/main">
+            <a:off x="6629400" y="7753350"/>
+            <a:ext cx="2895600" cy="304800"/>
+          </a:xfrm>
+          <a:prstGeom xmlns:a="http://schemas.openxmlformats.org/drawingml/2006/main" prst="rect">
+            <a:avLst/>
+          </a:prstGeom>
+        </p:spPr>
+        <p:txBody>
+          <a:bodyPr xmlns:a="http://schemas.openxmlformats.org/drawingml/2006/main" lIns="0" tIns="0" rIns="0" bIns="0"/>
+          <a:lstStyle xmlns:a="http://schemas.openxmlformats.org/drawingml/2006/main"/>
+          <a:p xmlns:a="http://schemas.openxmlformats.org/drawingml/2006/main">
+            <a:pPr>
+              <a:defRPr sz="1275">
+                <a:solidFill>
+                  <a:srgbClr val="5D716C"/>
+                </a:solidFill>
+              </a:defRPr>
+            </a:pPr>
+            <a:r>
+              <a:rPr sz="1275">
+                <a:solidFill>
+                  <a:srgbClr val="5D716C"/>
+                </a:solidFill>
+              </a:rPr>
+              <a:t>Vegetation in 2008</a:t>
+            </a:r>
+          </a:p>
+        </p:txBody>
+      </p:sp>
+      <p:sp>
+        <p:nvSpPr>
+          <p:cNvPr id="18" name="">
+            <a:extLst xmlns:a="http://schemas.openxmlformats.org/drawingml/2006/main">
+              <a:ext uri="{FF2B5EF4-FFF2-40B4-BE49-F238E27FC236}">
+                <a16:creationId xmlns:a16="http://schemas.microsoft.com/office/drawing/2014/main" id="{BDDFED06-D353-4EB5-9027-87E0C730681D}"/>
+              </a:ext>
+            </a:extLst>
+          </p:cNvPr>
+          <p:cNvSpPr>
+            <a:spLocks xmlns:a="http://schemas.openxmlformats.org/drawingml/2006/main" noGrp="1"/>
+          </p:cNvSpPr>
+          <p:nvPr/>
+        </p:nvSpPr>
+        <p:spPr>
+          <a:xfrm xmlns:a="http://schemas.openxmlformats.org/drawingml/2006/main">
+            <a:off x="9525000" y="7753350"/>
+            <a:ext cx="2133600" cy="323850"/>
+          </a:xfrm>
+          <a:prstGeom xmlns:a="http://schemas.openxmlformats.org/drawingml/2006/main" prst="rect">
+            <a:avLst/>
+          </a:prstGeom>
+        </p:spPr>
+        <p:txBody>
+          <a:bodyPr xmlns:a="http://schemas.openxmlformats.org/drawingml/2006/main" lIns="0" tIns="0" rIns="0" bIns="0"/>
+          <a:lstStyle xmlns:a="http://schemas.openxmlformats.org/drawingml/2006/main"/>
+          <a:p xmlns:a="http://schemas.openxmlformats.org/drawingml/2006/main">
+            <a:pPr>
+              <a:defRPr sz="1650" b="1">
                 <a:solidFill>
                   <a:srgbClr val="D49A45"/>
                 </a:solidFill>
               </a:defRPr>
             </a:pPr>
             <a:r>
-              <a:rPr sz="1800" b="1">
+              <a:rPr sz="1650" b="1">
                 <a:solidFill>
                   <a:srgbClr val="D49A45"/>
                 </a:solidFill>
               </a:rPr>
-              <a:t>= 3.17 ha</a:t>
-            </a:r>
-          </a:p>
-        </p:txBody>
-      </p:sp>
-      <p:sp>
-        <p:nvSpPr>
-          <p:cNvPr id="15" name="">
-            <a:extLst xmlns:a="http://schemas.openxmlformats.org/drawingml/2006/main">
-              <a:ext uri="{FF2B5EF4-FFF2-40B4-BE49-F238E27FC236}">
-                <a16:creationId xmlns:a16="http://schemas.microsoft.com/office/drawing/2014/main" id="{DD5CAEDB-EF28-43F0-B372-9A837C3E981D}"/>
-              </a:ext>
-            </a:extLst>
-          </p:cNvPr>
-          <p:cNvSpPr>
-            <a:spLocks xmlns:a="http://schemas.openxmlformats.org/drawingml/2006/main" noGrp="1"/>
-          </p:cNvSpPr>
-          <p:nvPr/>
-        </p:nvSpPr>
-        <p:spPr>
-          <a:xfrm xmlns:a="http://schemas.openxmlformats.org/drawingml/2006/main">
-            <a:off x="857250" y="7848600"/>
-            <a:ext cx="6800850" cy="266700"/>
-          </a:xfrm>
-          <a:prstGeom xmlns:a="http://schemas.openxmlformats.org/drawingml/2006/main" prst="rect">
-            <a:avLst/>
-          </a:prstGeom>
-        </p:spPr>
-        <p:txBody>
-          <a:bodyPr xmlns:a="http://schemas.openxmlformats.org/drawingml/2006/main" lIns="0" tIns="0" rIns="0" bIns="0"/>
-          <a:lstStyle xmlns:a="http://schemas.openxmlformats.org/drawingml/2006/main"/>
-          <a:p xmlns:a="http://schemas.openxmlformats.org/drawingml/2006/main">
-            <a:pPr>
-              <a:defRPr sz="1275" b="1">
-                <a:solidFill>
-                  <a:srgbClr val="5D716C"/>
-                </a:solidFill>
-              </a:defRPr>
-            </a:pPr>
-            <a:r>
-              <a:rPr sz="1275" b="1">
-                <a:solidFill>
-                  <a:srgbClr val="5D716C"/>
-                </a:solidFill>
-              </a:rPr>
-              <a:t>BASELINE TOTAL</a:t>
-            </a:r>
-          </a:p>
-        </p:txBody>
-      </p:sp>
-      <p:sp>
-        <p:nvSpPr>
-          <p:cNvPr id="16" name="">
-            <a:extLst xmlns:a="http://schemas.openxmlformats.org/drawingml/2006/main">
-              <a:ext uri="{FF2B5EF4-FFF2-40B4-BE49-F238E27FC236}">
-                <a16:creationId xmlns:a16="http://schemas.microsoft.com/office/drawing/2014/main" id="{79F86C04-162F-4AA0-ABC7-63ED619D6065}"/>
-              </a:ext>
-            </a:extLst>
-          </p:cNvPr>
-          <p:cNvSpPr>
-            <a:spLocks xmlns:a="http://schemas.openxmlformats.org/drawingml/2006/main" noGrp="1"/>
-          </p:cNvSpPr>
-          <p:nvPr/>
-        </p:nvSpPr>
-        <p:spPr>
-          <a:xfrm xmlns:a="http://schemas.openxmlformats.org/drawingml/2006/main">
-            <a:off x="857250" y="8191500"/>
-            <a:ext cx="6800850" cy="552450"/>
-          </a:xfrm>
-          <a:prstGeom xmlns:a="http://schemas.openxmlformats.org/drawingml/2006/main" prst="rect">
-            <a:avLst/>
-          </a:prstGeom>
-        </p:spPr>
-        <p:txBody>
-          <a:bodyPr xmlns:a="http://schemas.openxmlformats.org/drawingml/2006/main" lIns="0" tIns="0" rIns="0" bIns="0"/>
-          <a:lstStyle xmlns:a="http://schemas.openxmlformats.org/drawingml/2006/main"/>
-          <a:p xmlns:a="http://schemas.openxmlformats.org/drawingml/2006/main">
-            <a:pPr>
-              <a:defRPr sz="3300" b="1">
-                <a:solidFill>
-                  <a:srgbClr val="B95B4C"/>
-                </a:solidFill>
-              </a:defRPr>
-            </a:pPr>
-            <a:r>
-              <a:rPr sz="3300" b="1">
-                <a:solidFill>
-                  <a:srgbClr val="B95B4C"/>
-                </a:solidFill>
-              </a:rPr>
-              <a:t>57.07 ha</a:t>
-            </a:r>
-          </a:p>
-        </p:txBody>
-      </p:sp>
-      <p:sp>
-        <p:nvSpPr>
-          <p:cNvPr id="17" name="">
-            <a:extLst xmlns:a="http://schemas.openxmlformats.org/drawingml/2006/main">
-              <a:ext uri="{FF2B5EF4-FFF2-40B4-BE49-F238E27FC236}">
-                <a16:creationId xmlns:a16="http://schemas.microsoft.com/office/drawing/2014/main" id="{6F13C24B-E381-48F8-9012-9B6C38F402CB}"/>
-              </a:ext>
-            </a:extLst>
-          </p:cNvPr>
-          <p:cNvSpPr>
-            <a:spLocks xmlns:a="http://schemas.openxmlformats.org/drawingml/2006/main" noGrp="1"/>
-          </p:cNvSpPr>
-          <p:nvPr/>
-        </p:nvSpPr>
-        <p:spPr>
-          <a:xfrm xmlns:a="http://schemas.openxmlformats.org/drawingml/2006/main">
-            <a:off x="7924800" y="7848600"/>
-            <a:ext cx="9505950" cy="266700"/>
-          </a:xfrm>
-          <a:prstGeom xmlns:a="http://schemas.openxmlformats.org/drawingml/2006/main" prst="rect">
-            <a:avLst/>
-          </a:prstGeom>
-        </p:spPr>
-        <p:txBody>
-          <a:bodyPr xmlns:a="http://schemas.openxmlformats.org/drawingml/2006/main" lIns="0" tIns="0" rIns="0" bIns="0"/>
-          <a:lstStyle xmlns:a="http://schemas.openxmlformats.org/drawingml/2006/main"/>
-          <a:p xmlns:a="http://schemas.openxmlformats.org/drawingml/2006/main">
-            <a:pPr>
-              <a:defRPr sz="1275" b="1">
-                <a:solidFill>
-                  <a:srgbClr val="5D716C"/>
-                </a:solidFill>
-              </a:defRPr>
-            </a:pPr>
-            <a:r>
-              <a:rPr sz="1275" b="1">
-                <a:solidFill>
-                  <a:srgbClr val="5D716C"/>
-                </a:solidFill>
-              </a:rPr>
-              <a:t>SECONDARY VEGETATION SCENARIO</a:t>
-            </a:r>
-          </a:p>
-        </p:txBody>
-      </p:sp>
-      <p:sp>
-        <p:nvSpPr>
-          <p:cNvPr id="18" name="">
-            <a:extLst xmlns:a="http://schemas.openxmlformats.org/drawingml/2006/main">
-              <a:ext uri="{FF2B5EF4-FFF2-40B4-BE49-F238E27FC236}">
-                <a16:creationId xmlns:a16="http://schemas.microsoft.com/office/drawing/2014/main" id="{29B2B822-A4E8-49D2-B2FA-26CF4F45D098}"/>
-              </a:ext>
-            </a:extLst>
-          </p:cNvPr>
-          <p:cNvSpPr>
-            <a:spLocks xmlns:a="http://schemas.openxmlformats.org/drawingml/2006/main" noGrp="1"/>
-          </p:cNvSpPr>
-          <p:nvPr/>
-        </p:nvSpPr>
-        <p:spPr>
-          <a:xfrm xmlns:a="http://schemas.openxmlformats.org/drawingml/2006/main">
-            <a:off x="7924800" y="8191500"/>
-            <a:ext cx="9505950" cy="552450"/>
-          </a:xfrm>
-          <a:prstGeom xmlns:a="http://schemas.openxmlformats.org/drawingml/2006/main" prst="rect">
-            <a:avLst/>
-          </a:prstGeom>
-        </p:spPr>
-        <p:txBody>
-          <a:bodyPr xmlns:a="http://schemas.openxmlformats.org/drawingml/2006/main" lIns="0" tIns="0" rIns="0" bIns="0"/>
-          <a:lstStyle xmlns:a="http://schemas.openxmlformats.org/drawingml/2006/main"/>
-          <a:p xmlns:a="http://schemas.openxmlformats.org/drawingml/2006/main">
-            <a:pPr>
-              <a:defRPr sz="2625" b="1">
-                <a:solidFill>
-                  <a:srgbClr val="1E6B52"/>
-                </a:solidFill>
-              </a:defRPr>
-            </a:pPr>
-            <a:r>
-              <a:rPr sz="2625" b="1">
-                <a:solidFill>
-                  <a:srgbClr val="1E6B52"/>
-                </a:solidFill>
-              </a:rPr>
-              <a:t>48.40 ha added → 8.67 ha remaining</a:t>
-            </a:r>
-          </a:p>
-        </p:txBody>
-      </p:sp>
-      <p:sp>
-        <p:nvSpPr>
-          <p:cNvPr id="19" name="source-6">
-            <a:extLst xmlns:a="http://schemas.openxmlformats.org/drawingml/2006/main">
-              <a:ext uri="{FF2B5EF4-FFF2-40B4-BE49-F238E27FC236}">
-                <a16:creationId xmlns:a16="http://schemas.microsoft.com/office/drawing/2014/main" id="{89B6F4B2-5E36-444F-84B1-A9E089A4F030}"/>
+              <a:t>128.34 ha</a:t>
+            </a:r>
+          </a:p>
+        </p:txBody>
+      </p:sp>
+      <p:sp>
+        <p:nvSpPr>
+          <p:cNvPr id="19" name="">
+            <a:extLst xmlns:a="http://schemas.openxmlformats.org/drawingml/2006/main">
+              <a:ext uri="{FF2B5EF4-FFF2-40B4-BE49-F238E27FC236}">
+                <a16:creationId xmlns:a16="http://schemas.microsoft.com/office/drawing/2014/main" id="{31F75485-5320-4FFB-BE27-D917730A46D1}"/>
+              </a:ext>
+            </a:extLst>
+          </p:cNvPr>
+          <p:cNvSpPr>
+            <a:spLocks xmlns:a="http://schemas.openxmlformats.org/drawingml/2006/main" noGrp="1"/>
+          </p:cNvSpPr>
+          <p:nvPr/>
+        </p:nvSpPr>
+        <p:spPr>
+          <a:xfrm xmlns:a="http://schemas.openxmlformats.org/drawingml/2006/main">
+            <a:off x="12230100" y="2838450"/>
+            <a:ext cx="2895600" cy="304800"/>
+          </a:xfrm>
+          <a:prstGeom xmlns:a="http://schemas.openxmlformats.org/drawingml/2006/main" prst="rect">
+            <a:avLst/>
+          </a:prstGeom>
+        </p:spPr>
+        <p:txBody>
+          <a:bodyPr xmlns:a="http://schemas.openxmlformats.org/drawingml/2006/main" lIns="0" tIns="0" rIns="0" bIns="0"/>
+          <a:lstStyle xmlns:a="http://schemas.openxmlformats.org/drawingml/2006/main"/>
+          <a:p xmlns:a="http://schemas.openxmlformats.org/drawingml/2006/main">
+            <a:pPr>
+              <a:defRPr sz="1275">
+                <a:solidFill>
+                  <a:srgbClr val="5D716C"/>
+                </a:solidFill>
+              </a:defRPr>
+            </a:pPr>
+            <a:r>
+              <a:rPr sz="1275">
+                <a:solidFill>
+                  <a:srgbClr val="5D716C"/>
+                </a:solidFill>
+              </a:rPr>
+              <a:t>Article 12 ceiling</a:t>
+            </a:r>
+          </a:p>
+        </p:txBody>
+      </p:sp>
+      <p:sp>
+        <p:nvSpPr>
+          <p:cNvPr id="20" name="">
+            <a:extLst xmlns:a="http://schemas.openxmlformats.org/drawingml/2006/main">
+              <a:ext uri="{FF2B5EF4-FFF2-40B4-BE49-F238E27FC236}">
+                <a16:creationId xmlns:a16="http://schemas.microsoft.com/office/drawing/2014/main" id="{42CDB045-F6CF-42B7-9771-C6FE09AE610F}"/>
+              </a:ext>
+            </a:extLst>
+          </p:cNvPr>
+          <p:cNvSpPr>
+            <a:spLocks xmlns:a="http://schemas.openxmlformats.org/drawingml/2006/main" noGrp="1"/>
+          </p:cNvSpPr>
+          <p:nvPr/>
+        </p:nvSpPr>
+        <p:spPr>
+          <a:xfrm xmlns:a="http://schemas.openxmlformats.org/drawingml/2006/main">
+            <a:off x="15125700" y="2819400"/>
+            <a:ext cx="2133600" cy="323850"/>
+          </a:xfrm>
+          <a:prstGeom xmlns:a="http://schemas.openxmlformats.org/drawingml/2006/main" prst="rect">
+            <a:avLst/>
+          </a:prstGeom>
+        </p:spPr>
+        <p:txBody>
+          <a:bodyPr xmlns:a="http://schemas.openxmlformats.org/drawingml/2006/main" lIns="0" tIns="0" rIns="0" bIns="0"/>
+          <a:lstStyle xmlns:a="http://schemas.openxmlformats.org/drawingml/2006/main"/>
+          <a:p xmlns:a="http://schemas.openxmlformats.org/drawingml/2006/main">
+            <a:pPr>
+              <a:defRPr sz="1650" b="1">
+                <a:solidFill>
+                  <a:srgbClr val="D49A45"/>
+                </a:solidFill>
+              </a:defRPr>
+            </a:pPr>
+            <a:r>
+              <a:rPr sz="1650" b="1">
+                <a:solidFill>
+                  <a:srgbClr val="D49A45"/>
+                </a:solidFill>
+              </a:rPr>
+              <a:t>115.24 ha</a:t>
+            </a:r>
+          </a:p>
+        </p:txBody>
+      </p:sp>
+      <p:sp>
+        <p:nvSpPr>
+          <p:cNvPr id="21" name="">
+            <a:extLst xmlns:a="http://schemas.openxmlformats.org/drawingml/2006/main">
+              <a:ext uri="{FF2B5EF4-FFF2-40B4-BE49-F238E27FC236}">
+                <a16:creationId xmlns:a16="http://schemas.microsoft.com/office/drawing/2014/main" id="{4195B256-BE31-4EB6-88CF-9A60EAC64D0E}"/>
+              </a:ext>
+            </a:extLst>
+          </p:cNvPr>
+          <p:cNvSpPr>
+            <a:spLocks xmlns:a="http://schemas.openxmlformats.org/drawingml/2006/main" noGrp="1"/>
+          </p:cNvSpPr>
+          <p:nvPr/>
+        </p:nvSpPr>
+        <p:spPr>
+          <a:xfrm xmlns:a="http://schemas.openxmlformats.org/drawingml/2006/main">
+            <a:off x="12230100" y="4476750"/>
+            <a:ext cx="2895600" cy="304800"/>
+          </a:xfrm>
+          <a:prstGeom xmlns:a="http://schemas.openxmlformats.org/drawingml/2006/main" prst="rect">
+            <a:avLst/>
+          </a:prstGeom>
+        </p:spPr>
+        <p:txBody>
+          <a:bodyPr xmlns:a="http://schemas.openxmlformats.org/drawingml/2006/main" lIns="0" tIns="0" rIns="0" bIns="0"/>
+          <a:lstStyle xmlns:a="http://schemas.openxmlformats.org/drawingml/2006/main"/>
+          <a:p xmlns:a="http://schemas.openxmlformats.org/drawingml/2006/main">
+            <a:pPr>
+              <a:defRPr sz="1275">
+                <a:solidFill>
+                  <a:srgbClr val="5D716C"/>
+                </a:solidFill>
+              </a:defRPr>
+            </a:pPr>
+            <a:r>
+              <a:rPr sz="1275">
+                <a:solidFill>
+                  <a:srgbClr val="5D716C"/>
+                </a:solidFill>
+              </a:rPr>
+              <a:t>Article 68 floor</a:t>
+            </a:r>
+          </a:p>
+        </p:txBody>
+      </p:sp>
+      <p:sp>
+        <p:nvSpPr>
+          <p:cNvPr id="22" name="">
+            <a:extLst xmlns:a="http://schemas.openxmlformats.org/drawingml/2006/main">
+              <a:ext uri="{FF2B5EF4-FFF2-40B4-BE49-F238E27FC236}">
+                <a16:creationId xmlns:a16="http://schemas.microsoft.com/office/drawing/2014/main" id="{29F23616-942A-4150-AB47-C45918F061A4}"/>
+              </a:ext>
+            </a:extLst>
+          </p:cNvPr>
+          <p:cNvSpPr>
+            <a:spLocks xmlns:a="http://schemas.openxmlformats.org/drawingml/2006/main" noGrp="1"/>
+          </p:cNvSpPr>
+          <p:nvPr/>
+        </p:nvSpPr>
+        <p:spPr>
+          <a:xfrm xmlns:a="http://schemas.openxmlformats.org/drawingml/2006/main">
+            <a:off x="15125700" y="4457700"/>
+            <a:ext cx="2133600" cy="323850"/>
+          </a:xfrm>
+          <a:prstGeom xmlns:a="http://schemas.openxmlformats.org/drawingml/2006/main" prst="rect">
+            <a:avLst/>
+          </a:prstGeom>
+        </p:spPr>
+        <p:txBody>
+          <a:bodyPr xmlns:a="http://schemas.openxmlformats.org/drawingml/2006/main" lIns="0" tIns="0" rIns="0" bIns="0"/>
+          <a:lstStyle xmlns:a="http://schemas.openxmlformats.org/drawingml/2006/main"/>
+          <a:p xmlns:a="http://schemas.openxmlformats.org/drawingml/2006/main">
+            <a:pPr>
+              <a:defRPr sz="1650" b="1">
+                <a:solidFill>
+                  <a:srgbClr val="D49A45"/>
+                </a:solidFill>
+              </a:defRPr>
+            </a:pPr>
+            <a:r>
+              <a:rPr sz="1650" b="1">
+                <a:solidFill>
+                  <a:srgbClr val="D49A45"/>
+                </a:solidFill>
+              </a:rPr>
+              <a:t>70.51 ha</a:t>
+            </a:r>
+          </a:p>
+        </p:txBody>
+      </p:sp>
+      <p:sp>
+        <p:nvSpPr>
+          <p:cNvPr id="23" name="">
+            <a:extLst xmlns:a="http://schemas.openxmlformats.org/drawingml/2006/main">
+              <a:ext uri="{FF2B5EF4-FFF2-40B4-BE49-F238E27FC236}">
+                <a16:creationId xmlns:a16="http://schemas.microsoft.com/office/drawing/2014/main" id="{4BA7392E-C59F-44DA-A15C-C7757A3C59CE}"/>
+              </a:ext>
+            </a:extLst>
+          </p:cNvPr>
+          <p:cNvSpPr>
+            <a:spLocks xmlns:a="http://schemas.openxmlformats.org/drawingml/2006/main" noGrp="1"/>
+          </p:cNvSpPr>
+          <p:nvPr/>
+        </p:nvSpPr>
+        <p:spPr>
+          <a:xfrm xmlns:a="http://schemas.openxmlformats.org/drawingml/2006/main">
+            <a:off x="12230100" y="6115050"/>
+            <a:ext cx="2895600" cy="304800"/>
+          </a:xfrm>
+          <a:prstGeom xmlns:a="http://schemas.openxmlformats.org/drawingml/2006/main" prst="rect">
+            <a:avLst/>
+          </a:prstGeom>
+        </p:spPr>
+        <p:txBody>
+          <a:bodyPr xmlns:a="http://schemas.openxmlformats.org/drawingml/2006/main" lIns="0" tIns="0" rIns="0" bIns="0"/>
+          <a:lstStyle xmlns:a="http://schemas.openxmlformats.org/drawingml/2006/main"/>
+          <a:p xmlns:a="http://schemas.openxmlformats.org/drawingml/2006/main">
+            <a:pPr>
+              <a:defRPr sz="1275">
+                <a:solidFill>
+                  <a:srgbClr val="5D716C"/>
+                </a:solidFill>
+              </a:defRPr>
+            </a:pPr>
+            <a:r>
+              <a:rPr sz="1275">
+                <a:solidFill>
+                  <a:srgbClr val="5D716C"/>
+                </a:solidFill>
+              </a:rPr>
+              <a:t>Article 67 requirement</a:t>
+            </a:r>
+          </a:p>
+        </p:txBody>
+      </p:sp>
+      <p:sp>
+        <p:nvSpPr>
+          <p:cNvPr id="24" name="">
+            <a:extLst xmlns:a="http://schemas.openxmlformats.org/drawingml/2006/main">
+              <a:ext uri="{FF2B5EF4-FFF2-40B4-BE49-F238E27FC236}">
+                <a16:creationId xmlns:a16="http://schemas.microsoft.com/office/drawing/2014/main" id="{320E5444-073D-4EB0-9A7C-EB6779FD2FC9}"/>
+              </a:ext>
+            </a:extLst>
+          </p:cNvPr>
+          <p:cNvSpPr>
+            <a:spLocks xmlns:a="http://schemas.openxmlformats.org/drawingml/2006/main" noGrp="1"/>
+          </p:cNvSpPr>
+          <p:nvPr/>
+        </p:nvSpPr>
+        <p:spPr>
+          <a:xfrm xmlns:a="http://schemas.openxmlformats.org/drawingml/2006/main">
+            <a:off x="15125700" y="6115050"/>
+            <a:ext cx="2133600" cy="323850"/>
+          </a:xfrm>
+          <a:prstGeom xmlns:a="http://schemas.openxmlformats.org/drawingml/2006/main" prst="rect">
+            <a:avLst/>
+          </a:prstGeom>
+        </p:spPr>
+        <p:txBody>
+          <a:bodyPr xmlns:a="http://schemas.openxmlformats.org/drawingml/2006/main" lIns="0" tIns="0" rIns="0" bIns="0"/>
+          <a:lstStyle xmlns:a="http://schemas.openxmlformats.org/drawingml/2006/main"/>
+          <a:p xmlns:a="http://schemas.openxmlformats.org/drawingml/2006/main">
+            <a:pPr>
+              <a:defRPr sz="1650" b="1">
+                <a:solidFill>
+                  <a:srgbClr val="D49A45"/>
+                </a:solidFill>
+              </a:defRPr>
+            </a:pPr>
+            <a:r>
+              <a:rPr sz="1650" b="1">
+                <a:solidFill>
+                  <a:srgbClr val="D49A45"/>
+                </a:solidFill>
+              </a:rPr>
+              <a:t>115.24 ha</a:t>
+            </a:r>
+          </a:p>
+        </p:txBody>
+      </p:sp>
+      <p:sp>
+        <p:nvSpPr>
+          <p:cNvPr id="25" name="">
+            <a:extLst xmlns:a="http://schemas.openxmlformats.org/drawingml/2006/main">
+              <a:ext uri="{FF2B5EF4-FFF2-40B4-BE49-F238E27FC236}">
+                <a16:creationId xmlns:a16="http://schemas.microsoft.com/office/drawing/2014/main" id="{FE37BBE6-9F12-480B-B0F7-26E351BE3F7A}"/>
+              </a:ext>
+            </a:extLst>
+          </p:cNvPr>
+          <p:cNvSpPr>
+            <a:spLocks xmlns:a="http://schemas.openxmlformats.org/drawingml/2006/main" noGrp="1"/>
+          </p:cNvSpPr>
+          <p:nvPr/>
+        </p:nvSpPr>
+        <p:spPr>
+          <a:xfrm xmlns:a="http://schemas.openxmlformats.org/drawingml/2006/main">
+            <a:off x="12230100" y="7753350"/>
+            <a:ext cx="2895600" cy="304800"/>
+          </a:xfrm>
+          <a:prstGeom xmlns:a="http://schemas.openxmlformats.org/drawingml/2006/main" prst="rect">
+            <a:avLst/>
+          </a:prstGeom>
+        </p:spPr>
+        <p:txBody>
+          <a:bodyPr xmlns:a="http://schemas.openxmlformats.org/drawingml/2006/main" lIns="0" tIns="0" rIns="0" bIns="0"/>
+          <a:lstStyle xmlns:a="http://schemas.openxmlformats.org/drawingml/2006/main"/>
+          <a:p xmlns:a="http://schemas.openxmlformats.org/drawingml/2006/main">
+            <a:pPr>
+              <a:defRPr sz="1275">
+                <a:solidFill>
+                  <a:srgbClr val="5D716C"/>
+                </a:solidFill>
+              </a:defRPr>
+            </a:pPr>
+            <a:r>
+              <a:rPr sz="1275">
+                <a:solidFill>
+                  <a:srgbClr val="5D716C"/>
+                </a:solidFill>
+              </a:rPr>
+              <a:t>Current native vegetation</a:t>
+            </a:r>
+          </a:p>
+        </p:txBody>
+      </p:sp>
+      <p:sp>
+        <p:nvSpPr>
+          <p:cNvPr id="26" name="">
+            <a:extLst xmlns:a="http://schemas.openxmlformats.org/drawingml/2006/main">
+              <a:ext uri="{FF2B5EF4-FFF2-40B4-BE49-F238E27FC236}">
+                <a16:creationId xmlns:a16="http://schemas.microsoft.com/office/drawing/2014/main" id="{71EA4623-E6BF-48B5-9C9E-EF61F836C167}"/>
+              </a:ext>
+            </a:extLst>
+          </p:cNvPr>
+          <p:cNvSpPr>
+            <a:spLocks xmlns:a="http://schemas.openxmlformats.org/drawingml/2006/main" noGrp="1"/>
+          </p:cNvSpPr>
+          <p:nvPr/>
+        </p:nvSpPr>
+        <p:spPr>
+          <a:xfrm xmlns:a="http://schemas.openxmlformats.org/drawingml/2006/main">
+            <a:off x="15125700" y="7753350"/>
+            <a:ext cx="2133600" cy="323850"/>
+          </a:xfrm>
+          <a:prstGeom xmlns:a="http://schemas.openxmlformats.org/drawingml/2006/main" prst="rect">
+            <a:avLst/>
+          </a:prstGeom>
+        </p:spPr>
+        <p:txBody>
+          <a:bodyPr xmlns:a="http://schemas.openxmlformats.org/drawingml/2006/main" lIns="0" tIns="0" rIns="0" bIns="0"/>
+          <a:lstStyle xmlns:a="http://schemas.openxmlformats.org/drawingml/2006/main"/>
+          <a:p xmlns:a="http://schemas.openxmlformats.org/drawingml/2006/main">
+            <a:pPr>
+              <a:defRPr sz="1650" b="1">
+                <a:solidFill>
+                  <a:srgbClr val="D49A45"/>
+                </a:solidFill>
+              </a:defRPr>
+            </a:pPr>
+            <a:r>
+              <a:rPr sz="1650" b="1">
+                <a:solidFill>
+                  <a:srgbClr val="D49A45"/>
+                </a:solidFill>
+              </a:rPr>
+              <a:t>61.34 ha</a:t>
+            </a:r>
+          </a:p>
+        </p:txBody>
+      </p:sp>
+      <p:sp>
+        <p:nvSpPr>
+          <p:cNvPr id="27" name="property-key-6">
+            <a:extLst xmlns:a="http://schemas.openxmlformats.org/drawingml/2006/main">
+              <a:ext uri="{FF2B5EF4-FFF2-40B4-BE49-F238E27FC236}">
+                <a16:creationId xmlns:a16="http://schemas.microsoft.com/office/drawing/2014/main" id="{ABB226FF-DA6E-4E7C-9D0A-DF27696523D7}"/>
+              </a:ext>
+            </a:extLst>
+          </p:cNvPr>
+          <p:cNvSpPr>
+            <a:spLocks xmlns:a="http://schemas.openxmlformats.org/drawingml/2006/main" noGrp="1"/>
+          </p:cNvSpPr>
+          <p:nvPr/>
+        </p:nvSpPr>
+        <p:spPr>
+          <a:xfrm xmlns:a="http://schemas.openxmlformats.org/drawingml/2006/main">
+            <a:off x="857250" y="8953500"/>
+            <a:ext cx="16573500" cy="285750"/>
+          </a:xfrm>
+          <a:prstGeom xmlns:a="http://schemas.openxmlformats.org/drawingml/2006/main" prst="rect">
+            <a:avLst/>
+          </a:prstGeom>
+        </p:spPr>
+        <p:txBody>
+          <a:bodyPr xmlns:a="http://schemas.openxmlformats.org/drawingml/2006/main" lIns="0" tIns="0" rIns="0" bIns="0"/>
+          <a:lstStyle xmlns:a="http://schemas.openxmlformats.org/drawingml/2006/main"/>
+          <a:p xmlns:a="http://schemas.openxmlformats.org/drawingml/2006/main">
+            <a:pPr>
+              <a:defRPr sz="1050">
+                <a:solidFill>
+                  <a:srgbClr val="5D716C"/>
+                </a:solidFill>
+              </a:defRPr>
+            </a:pPr>
+            <a:r>
+              <a:rPr sz="1050">
+                <a:solidFill>
+                  <a:srgbClr val="5D716C"/>
+                </a:solidFill>
+              </a:rPr>
+              <a:t>Property key: MT-5103437-3035138E282C4E6686B61959CF506B0D</a:t>
+            </a:r>
+          </a:p>
+        </p:txBody>
+      </p:sp>
+      <p:sp>
+        <p:nvSpPr>
+          <p:cNvPr id="28" name="source-6">
+            <a:extLst xmlns:a="http://schemas.openxmlformats.org/drawingml/2006/main">
+              <a:ext uri="{FF2B5EF4-FFF2-40B4-BE49-F238E27FC236}">
+                <a16:creationId xmlns:a16="http://schemas.microsoft.com/office/drawing/2014/main" id="{4B5597F6-1B6D-45E9-AE6E-4BE25A497F91}"/>
               </a:ext>
             </a:extLst>
           </p:cNvPr>
@@ -6813,10 +6744,10 @@
       </p:sp>
       <p:sp>
         <p:nvSpPr>
-          <p:cNvPr id="20" name="page-6">
-            <a:extLst xmlns:a="http://schemas.openxmlformats.org/drawingml/2006/main">
-              <a:ext uri="{FF2B5EF4-FFF2-40B4-BE49-F238E27FC236}">
-                <a16:creationId xmlns:a16="http://schemas.microsoft.com/office/drawing/2014/main" id="{17A88FCC-60A6-4AF6-AE95-39D0341B4353}"/>
+          <p:cNvPr id="29" name="page-6">
+            <a:extLst xmlns:a="http://schemas.openxmlformats.org/drawingml/2006/main">
+              <a:ext uri="{FF2B5EF4-FFF2-40B4-BE49-F238E27FC236}">
+                <a16:creationId xmlns:a16="http://schemas.microsoft.com/office/drawing/2014/main" id="{15F0A604-208F-4334-8EBC-2C0B2C5AEB3A}"/>
               </a:ext>
             </a:extLst>
           </p:cNvPr>
@@ -6859,7 +6790,7 @@
     </p:spTree>
     <p:extLst>
       <p:ext uri="{BB962C8B-B14F-4D97-AF65-F5344CB8AC3E}">
-        <p14:creationId xmlns:p14="http://schemas.microsoft.com/office/powerpoint/2010/main" val="500508318"/>
+        <p14:creationId xmlns:p14="http://schemas.microsoft.com/office/powerpoint/2010/main" val="65253808"/>
       </p:ext>
     </p:extLst>
   </p:cSld>
@@ -6883,7 +6814,7 @@
           <p:cNvPr id="1" name="slide-title-7">
             <a:extLst xmlns:a="http://schemas.openxmlformats.org/drawingml/2006/main">
               <a:ext uri="{FF2B5EF4-FFF2-40B4-BE49-F238E27FC236}">
-                <a16:creationId xmlns:a16="http://schemas.microsoft.com/office/drawing/2014/main" id="{9B83E7FB-A4E4-43B6-ACB7-69A0C90B9DF8}"/>
+                <a16:creationId xmlns:a16="http://schemas.microsoft.com/office/drawing/2014/main" id="{6C329003-AB4E-4AA8-B54A-BBD63EB9636F}"/>
               </a:ext>
             </a:extLst>
           </p:cNvPr>
@@ -6918,7 +6849,7 @@
                   <a:srgbClr val="17312B"/>
                 </a:solidFill>
               </a:rPr>
-              <a:t>What the two examples make visible</a:t>
+              <a:t>Small property · satellite context</a:t>
             </a:r>
           </a:p>
         </p:txBody>
@@ -6928,7 +6859,7 @@
           <p:cNvPr id="2" name="slide-subtitle-7">
             <a:extLst xmlns:a="http://schemas.openxmlformats.org/drawingml/2006/main">
               <a:ext uri="{FF2B5EF4-FFF2-40B4-BE49-F238E27FC236}">
-                <a16:creationId xmlns:a16="http://schemas.microsoft.com/office/drawing/2014/main" id="{AD48627B-598D-4ACB-8F2D-87B666879473}"/>
+                <a16:creationId xmlns:a16="http://schemas.microsoft.com/office/drawing/2014/main" id="{668C79FC-FD63-4259-8BE1-B402A2A425CD}"/>
               </a:ext>
             </a:extLst>
           </p:cNvPr>
@@ -6940,7 +6871,7 @@
         <p:spPr>
           <a:xfrm xmlns:a="http://schemas.openxmlformats.org/drawingml/2006/main">
             <a:off x="857250" y="1276350"/>
-            <a:ext cx="9791700" cy="552450"/>
+            <a:ext cx="5791200" cy="552450"/>
           </a:xfrm>
           <a:prstGeom xmlns:a="http://schemas.openxmlformats.org/drawingml/2006/main" prst="rect">
             <a:avLst/>
@@ -6963,29 +6894,51 @@
                   <a:srgbClr val="5D716C"/>
                 </a:solidFill>
               </a:rPr>
-              <a:t>The threshold changes the requirement—not the need for transparent inputs and reconciled outputs.</a:t>
-            </a:r>
-          </a:p>
-        </p:txBody>
-      </p:sp>
-      <p:sp>
-        <p:nvSpPr>
-          <p:cNvPr id="3" name="">
-            <a:extLst xmlns:a="http://schemas.openxmlformats.org/drawingml/2006/main">
-              <a:ext uri="{FF2B5EF4-FFF2-40B4-BE49-F238E27FC236}">
-                <a16:creationId xmlns:a16="http://schemas.microsoft.com/office/drawing/2014/main" id="{5AC9E518-3007-4AE0-8D5B-B6A008A18CC6}"/>
-              </a:ext>
-            </a:extLst>
-          </p:cNvPr>
-          <p:cNvSpPr>
-            <a:spLocks xmlns:a="http://schemas.openxmlformats.org/drawingml/2006/main" noGrp="1"/>
-          </p:cNvSpPr>
-          <p:nvPr/>
-        </p:nvSpPr>
-        <p:spPr>
-          <a:xfrm xmlns:a="http://schemas.openxmlformats.org/drawingml/2006/main">
-            <a:off x="1028700" y="2724150"/>
-            <a:ext cx="3105150" cy="304800"/>
+              <a:t>The CAR property polygon is overlaid on Esri World Imagery.</a:t>
+            </a:r>
+          </a:p>
+        </p:txBody>
+      </p:sp>
+      <p:pic>
+        <p:nvPicPr>
+          <p:cNvPr id="3" name="property-map-7"/>
+          <p:cNvPicPr>
+            <a:picLocks xmlns:a="http://schemas.openxmlformats.org/drawingml/2006/main" noChangeAspect="1"/>
+          </p:cNvPicPr>
+          <p:nvPr/>
+        </p:nvPicPr>
+        <p:blipFill>
+          <a:blip xmlns:r="http://schemas.openxmlformats.org/officeDocument/2006/relationships" xmlns:a="http://schemas.openxmlformats.org/drawingml/2006/main" r:embed="R4368ad692ca84454"/>
+          <a:stretch xmlns:a="http://schemas.openxmlformats.org/drawingml/2006/main"/>
+        </p:blipFill>
+        <p:spPr>
+          <a:xfrm xmlns:a="http://schemas.openxmlformats.org/drawingml/2006/main">
+            <a:off x="857250" y="2618332"/>
+            <a:ext cx="12230100" cy="5717086"/>
+          </a:xfrm>
+          <a:prstGeom xmlns:a="http://schemas.openxmlformats.org/drawingml/2006/main" prst="rect">
+            <a:avLst/>
+          </a:prstGeom>
+        </p:spPr>
+      </p:pic>
+      <p:sp>
+        <p:nvSpPr>
+          <p:cNvPr id="4" name="">
+            <a:extLst xmlns:a="http://schemas.openxmlformats.org/drawingml/2006/main">
+              <a:ext uri="{FF2B5EF4-FFF2-40B4-BE49-F238E27FC236}">
+                <a16:creationId xmlns:a16="http://schemas.microsoft.com/office/drawing/2014/main" id="{1978E800-C92B-4366-A3A2-3A6119CFC6D0}"/>
+              </a:ext>
+            </a:extLst>
+          </p:cNvPr>
+          <p:cNvSpPr>
+            <a:spLocks xmlns:a="http://schemas.openxmlformats.org/drawingml/2006/main" noGrp="1"/>
+          </p:cNvSpPr>
+          <p:nvPr/>
+        </p:nvSpPr>
+        <p:spPr>
+          <a:xfrm xmlns:a="http://schemas.openxmlformats.org/drawingml/2006/main">
+            <a:off x="13525500" y="2667000"/>
+            <a:ext cx="2152650" cy="304800"/>
           </a:xfrm>
           <a:prstGeom xmlns:a="http://schemas.openxmlformats.org/drawingml/2006/main" prst="rect">
             <a:avLst/>
@@ -7008,29 +6961,29 @@
                   <a:srgbClr val="5D716C"/>
                 </a:solidFill>
               </a:rPr>
-              <a:t>Property</a:t>
-            </a:r>
-          </a:p>
-        </p:txBody>
-      </p:sp>
-      <p:sp>
-        <p:nvSpPr>
-          <p:cNvPr id="4" name="">
-            <a:extLst xmlns:a="http://schemas.openxmlformats.org/drawingml/2006/main">
-              <a:ext uri="{FF2B5EF4-FFF2-40B4-BE49-F238E27FC236}">
-                <a16:creationId xmlns:a16="http://schemas.microsoft.com/office/drawing/2014/main" id="{4C7CA75D-30D1-4016-9843-33BFD0F4F654}"/>
-              </a:ext>
-            </a:extLst>
-          </p:cNvPr>
-          <p:cNvSpPr>
-            <a:spLocks xmlns:a="http://schemas.openxmlformats.org/drawingml/2006/main" noGrp="1"/>
-          </p:cNvSpPr>
-          <p:nvPr/>
-        </p:nvSpPr>
-        <p:spPr>
-          <a:xfrm xmlns:a="http://schemas.openxmlformats.org/drawingml/2006/main">
-            <a:off x="4133850" y="2724150"/>
-            <a:ext cx="2305050" cy="323850"/>
+              <a:t>Property area</a:t>
+            </a:r>
+          </a:p>
+        </p:txBody>
+      </p:sp>
+      <p:sp>
+        <p:nvSpPr>
+          <p:cNvPr id="5" name="">
+            <a:extLst xmlns:a="http://schemas.openxmlformats.org/drawingml/2006/main">
+              <a:ext uri="{FF2B5EF4-FFF2-40B4-BE49-F238E27FC236}">
+                <a16:creationId xmlns:a16="http://schemas.microsoft.com/office/drawing/2014/main" id="{04F75BFC-1578-471F-BA04-10778021F34E}"/>
+              </a:ext>
+            </a:extLst>
+          </p:cNvPr>
+          <p:cNvSpPr>
+            <a:spLocks xmlns:a="http://schemas.openxmlformats.org/drawingml/2006/main" noGrp="1"/>
+          </p:cNvSpPr>
+          <p:nvPr/>
+        </p:nvSpPr>
+        <p:spPr>
+          <a:xfrm xmlns:a="http://schemas.openxmlformats.org/drawingml/2006/main">
+            <a:off x="15678150" y="2647950"/>
+            <a:ext cx="1581150" cy="323850"/>
           </a:xfrm>
           <a:prstGeom xmlns:a="http://schemas.openxmlformats.org/drawingml/2006/main" prst="rect">
             <a:avLst/>
@@ -7043,39 +6996,39 @@
             <a:pPr>
               <a:defRPr sz="1650" b="1">
                 <a:solidFill>
-                  <a:srgbClr val="1E6B52"/>
+                  <a:srgbClr val="D49A45"/>
                 </a:solidFill>
               </a:defRPr>
             </a:pPr>
             <a:r>
               <a:rPr sz="1650" b="1">
                 <a:solidFill>
-                  <a:srgbClr val="1E6B52"/>
-                </a:solidFill>
-              </a:rPr>
-              <a:t>&gt; 4 modules</a:t>
-            </a:r>
-          </a:p>
-        </p:txBody>
-      </p:sp>
-      <p:sp>
-        <p:nvSpPr>
-          <p:cNvPr id="5" name="">
-            <a:extLst xmlns:a="http://schemas.openxmlformats.org/drawingml/2006/main">
-              <a:ext uri="{FF2B5EF4-FFF2-40B4-BE49-F238E27FC236}">
-                <a16:creationId xmlns:a16="http://schemas.microsoft.com/office/drawing/2014/main" id="{50DA7C73-A0B3-402D-B151-670122625F1C}"/>
-              </a:ext>
-            </a:extLst>
-          </p:cNvPr>
-          <p:cNvSpPr>
-            <a:spLocks xmlns:a="http://schemas.openxmlformats.org/drawingml/2006/main" noGrp="1"/>
-          </p:cNvSpPr>
-          <p:nvPr/>
-        </p:nvSpPr>
-        <p:spPr>
-          <a:xfrm xmlns:a="http://schemas.openxmlformats.org/drawingml/2006/main">
-            <a:off x="1028700" y="4133850"/>
-            <a:ext cx="3105150" cy="304800"/>
+                  <a:srgbClr val="D49A45"/>
+                </a:solidFill>
+              </a:rPr>
+              <a:t>193.20 ha</a:t>
+            </a:r>
+          </a:p>
+        </p:txBody>
+      </p:sp>
+      <p:sp>
+        <p:nvSpPr>
+          <p:cNvPr id="6" name="">
+            <a:extLst xmlns:a="http://schemas.openxmlformats.org/drawingml/2006/main">
+              <a:ext uri="{FF2B5EF4-FFF2-40B4-BE49-F238E27FC236}">
+                <a16:creationId xmlns:a16="http://schemas.microsoft.com/office/drawing/2014/main" id="{2FE5E23F-6D0C-4FF0-96B7-211B1752ADA2}"/>
+              </a:ext>
+            </a:extLst>
+          </p:cNvPr>
+          <p:cNvSpPr>
+            <a:spLocks xmlns:a="http://schemas.openxmlformats.org/drawingml/2006/main" noGrp="1"/>
+          </p:cNvSpPr>
+          <p:nvPr/>
+        </p:nvSpPr>
+        <p:spPr>
+          <a:xfrm xmlns:a="http://schemas.openxmlformats.org/drawingml/2006/main">
+            <a:off x="13525500" y="4000500"/>
+            <a:ext cx="2152650" cy="304800"/>
           </a:xfrm>
           <a:prstGeom xmlns:a="http://schemas.openxmlformats.org/drawingml/2006/main" prst="rect">
             <a:avLst/>
@@ -7098,29 +7051,29 @@
                   <a:srgbClr val="5D716C"/>
                 </a:solidFill>
               </a:rPr>
-              <a:t>Legal branch</a:t>
-            </a:r>
-          </a:p>
-        </p:txBody>
-      </p:sp>
-      <p:sp>
-        <p:nvSpPr>
-          <p:cNvPr id="6" name="">
-            <a:extLst xmlns:a="http://schemas.openxmlformats.org/drawingml/2006/main">
-              <a:ext uri="{FF2B5EF4-FFF2-40B4-BE49-F238E27FC236}">
-                <a16:creationId xmlns:a16="http://schemas.microsoft.com/office/drawing/2014/main" id="{1125247A-C1FA-4792-8140-C251AF941F80}"/>
-              </a:ext>
-            </a:extLst>
-          </p:cNvPr>
-          <p:cNvSpPr>
-            <a:spLocks xmlns:a="http://schemas.openxmlformats.org/drawingml/2006/main" noGrp="1"/>
-          </p:cNvSpPr>
-          <p:nvPr/>
-        </p:nvSpPr>
-        <p:spPr>
-          <a:xfrm xmlns:a="http://schemas.openxmlformats.org/drawingml/2006/main">
-            <a:off x="4133850" y="4133850"/>
-            <a:ext cx="2305050" cy="323850"/>
+              <a:t>Forest area</a:t>
+            </a:r>
+          </a:p>
+        </p:txBody>
+      </p:sp>
+      <p:sp>
+        <p:nvSpPr>
+          <p:cNvPr id="7" name="">
+            <a:extLst xmlns:a="http://schemas.openxmlformats.org/drawingml/2006/main">
+              <a:ext uri="{FF2B5EF4-FFF2-40B4-BE49-F238E27FC236}">
+                <a16:creationId xmlns:a16="http://schemas.microsoft.com/office/drawing/2014/main" id="{86C111B5-A1D0-4192-82C2-495CC4E1566E}"/>
+              </a:ext>
+            </a:extLst>
+          </p:cNvPr>
+          <p:cNvSpPr>
+            <a:spLocks xmlns:a="http://schemas.openxmlformats.org/drawingml/2006/main" noGrp="1"/>
+          </p:cNvSpPr>
+          <p:nvPr/>
+        </p:nvSpPr>
+        <p:spPr>
+          <a:xfrm xmlns:a="http://schemas.openxmlformats.org/drawingml/2006/main">
+            <a:off x="15678150" y="3981450"/>
+            <a:ext cx="1581150" cy="323850"/>
           </a:xfrm>
           <a:prstGeom xmlns:a="http://schemas.openxmlformats.org/drawingml/2006/main" prst="rect">
             <a:avLst/>
@@ -7133,39 +7086,39 @@
             <a:pPr>
               <a:defRPr sz="1650" b="1">
                 <a:solidFill>
-                  <a:srgbClr val="1E6B52"/>
+                  <a:srgbClr val="D49A45"/>
                 </a:solidFill>
               </a:defRPr>
             </a:pPr>
             <a:r>
               <a:rPr sz="1650" b="1">
                 <a:solidFill>
-                  <a:srgbClr val="1E6B52"/>
-                </a:solidFill>
-              </a:rPr>
-              <a:t>Article 68</a:t>
-            </a:r>
-          </a:p>
-        </p:txBody>
-      </p:sp>
-      <p:sp>
-        <p:nvSpPr>
-          <p:cNvPr id="7" name="">
-            <a:extLst xmlns:a="http://schemas.openxmlformats.org/drawingml/2006/main">
-              <a:ext uri="{FF2B5EF4-FFF2-40B4-BE49-F238E27FC236}">
-                <a16:creationId xmlns:a16="http://schemas.microsoft.com/office/drawing/2014/main" id="{B77EECE7-A3FB-437C-884E-BA7452FAEC88}"/>
-              </a:ext>
-            </a:extLst>
-          </p:cNvPr>
-          <p:cNvSpPr>
-            <a:spLocks xmlns:a="http://schemas.openxmlformats.org/drawingml/2006/main" noGrp="1"/>
-          </p:cNvSpPr>
-          <p:nvPr/>
-        </p:nvSpPr>
-        <p:spPr>
-          <a:xfrm xmlns:a="http://schemas.openxmlformats.org/drawingml/2006/main">
-            <a:off x="1028700" y="5543550"/>
-            <a:ext cx="3105150" cy="304800"/>
+                  <a:srgbClr val="D49A45"/>
+                </a:solidFill>
+              </a:rPr>
+              <a:t>108.66 ha</a:t>
+            </a:r>
+          </a:p>
+        </p:txBody>
+      </p:sp>
+      <p:sp>
+        <p:nvSpPr>
+          <p:cNvPr id="8" name="">
+            <a:extLst xmlns:a="http://schemas.openxmlformats.org/drawingml/2006/main">
+              <a:ext uri="{FF2B5EF4-FFF2-40B4-BE49-F238E27FC236}">
+                <a16:creationId xmlns:a16="http://schemas.microsoft.com/office/drawing/2014/main" id="{3B147C3E-ED34-4697-B49D-CE0B859B9A81}"/>
+              </a:ext>
+            </a:extLst>
+          </p:cNvPr>
+          <p:cNvSpPr>
+            <a:spLocks xmlns:a="http://schemas.openxmlformats.org/drawingml/2006/main" noGrp="1"/>
+          </p:cNvSpPr>
+          <p:nvPr/>
+        </p:nvSpPr>
+        <p:spPr>
+          <a:xfrm xmlns:a="http://schemas.openxmlformats.org/drawingml/2006/main">
+            <a:off x="13525500" y="5334000"/>
+            <a:ext cx="2152650" cy="304800"/>
           </a:xfrm>
           <a:prstGeom xmlns:a="http://schemas.openxmlformats.org/drawingml/2006/main" prst="rect">
             <a:avLst/>
@@ -7188,29 +7141,29 @@
                   <a:srgbClr val="5D716C"/>
                 </a:solidFill>
               </a:rPr>
-              <a:t>Requirement</a:t>
-            </a:r>
-          </a:p>
-        </p:txBody>
-      </p:sp>
-      <p:sp>
-        <p:nvSpPr>
-          <p:cNvPr id="8" name="">
-            <a:extLst xmlns:a="http://schemas.openxmlformats.org/drawingml/2006/main">
-              <a:ext uri="{FF2B5EF4-FFF2-40B4-BE49-F238E27FC236}">
-                <a16:creationId xmlns:a16="http://schemas.microsoft.com/office/drawing/2014/main" id="{9321F4BF-7067-4EDE-9F87-39D2AFBD757D}"/>
-              </a:ext>
-            </a:extLst>
-          </p:cNvPr>
-          <p:cNvSpPr>
-            <a:spLocks xmlns:a="http://schemas.openxmlformats.org/drawingml/2006/main" noGrp="1"/>
-          </p:cNvSpPr>
-          <p:nvPr/>
-        </p:nvSpPr>
-        <p:spPr>
-          <a:xfrm xmlns:a="http://schemas.openxmlformats.org/drawingml/2006/main">
-            <a:off x="4133850" y="5543550"/>
-            <a:ext cx="2305050" cy="323850"/>
+              <a:t>Cerrado area</a:t>
+            </a:r>
+          </a:p>
+        </p:txBody>
+      </p:sp>
+      <p:sp>
+        <p:nvSpPr>
+          <p:cNvPr id="9" name="">
+            <a:extLst xmlns:a="http://schemas.openxmlformats.org/drawingml/2006/main">
+              <a:ext uri="{FF2B5EF4-FFF2-40B4-BE49-F238E27FC236}">
+                <a16:creationId xmlns:a16="http://schemas.microsoft.com/office/drawing/2014/main" id="{FEBA4117-121B-4217-899A-BBE789B6913B}"/>
+              </a:ext>
+            </a:extLst>
+          </p:cNvPr>
+          <p:cNvSpPr>
+            <a:spLocks xmlns:a="http://schemas.openxmlformats.org/drawingml/2006/main" noGrp="1"/>
+          </p:cNvSpPr>
+          <p:nvPr/>
+        </p:nvSpPr>
+        <p:spPr>
+          <a:xfrm xmlns:a="http://schemas.openxmlformats.org/drawingml/2006/main">
+            <a:off x="15678150" y="5314950"/>
+            <a:ext cx="1581150" cy="323850"/>
           </a:xfrm>
           <a:prstGeom xmlns:a="http://schemas.openxmlformats.org/drawingml/2006/main" prst="rect">
             <a:avLst/>
@@ -7223,39 +7176,39 @@
             <a:pPr>
               <a:defRPr sz="1650" b="1">
                 <a:solidFill>
-                  <a:srgbClr val="1E6B52"/>
+                  <a:srgbClr val="D49A45"/>
                 </a:solidFill>
               </a:defRPr>
             </a:pPr>
             <a:r>
               <a:rPr sz="1650" b="1">
                 <a:solidFill>
-                  <a:srgbClr val="1E6B52"/>
-                </a:solidFill>
-              </a:rPr>
-              <a:t>170.75 ha</a:t>
-            </a:r>
-          </a:p>
-        </p:txBody>
-      </p:sp>
-      <p:sp>
-        <p:nvSpPr>
-          <p:cNvPr id="9" name="">
-            <a:extLst xmlns:a="http://schemas.openxmlformats.org/drawingml/2006/main">
-              <a:ext uri="{FF2B5EF4-FFF2-40B4-BE49-F238E27FC236}">
-                <a16:creationId xmlns:a16="http://schemas.microsoft.com/office/drawing/2014/main" id="{DF92CEF3-2155-470D-8B22-922A06C504A0}"/>
-              </a:ext>
-            </a:extLst>
-          </p:cNvPr>
-          <p:cNvSpPr>
-            <a:spLocks xmlns:a="http://schemas.openxmlformats.org/drawingml/2006/main" noGrp="1"/>
-          </p:cNvSpPr>
-          <p:nvPr/>
-        </p:nvSpPr>
-        <p:spPr>
-          <a:xfrm xmlns:a="http://schemas.openxmlformats.org/drawingml/2006/main">
-            <a:off x="1028700" y="6953250"/>
-            <a:ext cx="3105150" cy="304800"/>
+                  <a:srgbClr val="D49A45"/>
+                </a:solidFill>
+              </a:rPr>
+              <a:t>80.90 ha</a:t>
+            </a:r>
+          </a:p>
+        </p:txBody>
+      </p:sp>
+      <p:sp>
+        <p:nvSpPr>
+          <p:cNvPr id="10" name="">
+            <a:extLst xmlns:a="http://schemas.openxmlformats.org/drawingml/2006/main">
+              <a:ext uri="{FF2B5EF4-FFF2-40B4-BE49-F238E27FC236}">
+                <a16:creationId xmlns:a16="http://schemas.microsoft.com/office/drawing/2014/main" id="{FD4C74A4-3771-4CCD-BFFA-AECACBF589A8}"/>
+              </a:ext>
+            </a:extLst>
+          </p:cNvPr>
+          <p:cNvSpPr>
+            <a:spLocks xmlns:a="http://schemas.openxmlformats.org/drawingml/2006/main" noGrp="1"/>
+          </p:cNvSpPr>
+          <p:nvPr/>
+        </p:nvSpPr>
+        <p:spPr>
+          <a:xfrm xmlns:a="http://schemas.openxmlformats.org/drawingml/2006/main">
+            <a:off x="13525500" y="6667500"/>
+            <a:ext cx="2152650" cy="304800"/>
           </a:xfrm>
           <a:prstGeom xmlns:a="http://schemas.openxmlformats.org/drawingml/2006/main" prst="rect">
             <a:avLst/>
@@ -7278,29 +7231,29 @@
                   <a:srgbClr val="5D716C"/>
                 </a:solidFill>
               </a:rPr>
-              <a:t>Baseline total</a:t>
-            </a:r>
-          </a:p>
-        </p:txBody>
-      </p:sp>
-      <p:sp>
-        <p:nvSpPr>
-          <p:cNvPr id="10" name="">
-            <a:extLst xmlns:a="http://schemas.openxmlformats.org/drawingml/2006/main">
-              <a:ext uri="{FF2B5EF4-FFF2-40B4-BE49-F238E27FC236}">
-                <a16:creationId xmlns:a16="http://schemas.microsoft.com/office/drawing/2014/main" id="{D44E9EF4-F1B6-474B-81EE-7F1012FA5B39}"/>
-              </a:ext>
-            </a:extLst>
-          </p:cNvPr>
-          <p:cNvSpPr>
-            <a:spLocks xmlns:a="http://schemas.openxmlformats.org/drawingml/2006/main" noGrp="1"/>
-          </p:cNvSpPr>
-          <p:nvPr/>
-        </p:nvSpPr>
-        <p:spPr>
-          <a:xfrm xmlns:a="http://schemas.openxmlformats.org/drawingml/2006/main">
-            <a:off x="4133850" y="6934200"/>
-            <a:ext cx="2305050" cy="323850"/>
+              <a:t>Fiscal modules</a:t>
+            </a:r>
+          </a:p>
+        </p:txBody>
+      </p:sp>
+      <p:sp>
+        <p:nvSpPr>
+          <p:cNvPr id="11" name="">
+            <a:extLst xmlns:a="http://schemas.openxmlformats.org/drawingml/2006/main">
+              <a:ext uri="{FF2B5EF4-FFF2-40B4-BE49-F238E27FC236}">
+                <a16:creationId xmlns:a16="http://schemas.microsoft.com/office/drawing/2014/main" id="{A3FD4597-A2D4-49B1-A6FE-3455F2FD65CE}"/>
+              </a:ext>
+            </a:extLst>
+          </p:cNvPr>
+          <p:cNvSpPr>
+            <a:spLocks xmlns:a="http://schemas.openxmlformats.org/drawingml/2006/main" noGrp="1"/>
+          </p:cNvSpPr>
+          <p:nvPr/>
+        </p:nvSpPr>
+        <p:spPr>
+          <a:xfrm xmlns:a="http://schemas.openxmlformats.org/drawingml/2006/main">
+            <a:off x="15678150" y="6648450"/>
+            <a:ext cx="1581150" cy="323850"/>
           </a:xfrm>
           <a:prstGeom xmlns:a="http://schemas.openxmlformats.org/drawingml/2006/main" prst="rect">
             <a:avLst/>
@@ -7313,39 +7266,39 @@
             <a:pPr>
               <a:defRPr sz="1650" b="1">
                 <a:solidFill>
-                  <a:srgbClr val="1E6B52"/>
+                  <a:srgbClr val="D49A45"/>
                 </a:solidFill>
               </a:defRPr>
             </a:pPr>
             <a:r>
               <a:rPr sz="1650" b="1">
                 <a:solidFill>
-                  <a:srgbClr val="1E6B52"/>
-                </a:solidFill>
-              </a:rPr>
-              <a:t>52.61 ha</a:t>
-            </a:r>
-          </a:p>
-        </p:txBody>
-      </p:sp>
-      <p:sp>
-        <p:nvSpPr>
-          <p:cNvPr id="11" name="">
-            <a:extLst xmlns:a="http://schemas.openxmlformats.org/drawingml/2006/main">
-              <a:ext uri="{FF2B5EF4-FFF2-40B4-BE49-F238E27FC236}">
-                <a16:creationId xmlns:a16="http://schemas.microsoft.com/office/drawing/2014/main" id="{047C3734-F28E-42BE-90D8-B84263CCBCE4}"/>
-              </a:ext>
-            </a:extLst>
-          </p:cNvPr>
-          <p:cNvSpPr>
-            <a:spLocks xmlns:a="http://schemas.openxmlformats.org/drawingml/2006/main" noGrp="1"/>
-          </p:cNvSpPr>
-          <p:nvPr/>
-        </p:nvSpPr>
-        <p:spPr>
-          <a:xfrm xmlns:a="http://schemas.openxmlformats.org/drawingml/2006/main">
-            <a:off x="1028700" y="8362950"/>
-            <a:ext cx="3105150" cy="304800"/>
+                  <a:srgbClr val="D49A45"/>
+                </a:solidFill>
+              </a:rPr>
+              <a:t>2.41</a:t>
+            </a:r>
+          </a:p>
+        </p:txBody>
+      </p:sp>
+      <p:sp>
+        <p:nvSpPr>
+          <p:cNvPr id="12" name="">
+            <a:extLst xmlns:a="http://schemas.openxmlformats.org/drawingml/2006/main">
+              <a:ext uri="{FF2B5EF4-FFF2-40B4-BE49-F238E27FC236}">
+                <a16:creationId xmlns:a16="http://schemas.microsoft.com/office/drawing/2014/main" id="{6E19B321-19D1-42A8-8484-33F59AB86B95}"/>
+              </a:ext>
+            </a:extLst>
+          </p:cNvPr>
+          <p:cNvSpPr>
+            <a:spLocks xmlns:a="http://schemas.openxmlformats.org/drawingml/2006/main" noGrp="1"/>
+          </p:cNvSpPr>
+          <p:nvPr/>
+        </p:nvSpPr>
+        <p:spPr>
+          <a:xfrm xmlns:a="http://schemas.openxmlformats.org/drawingml/2006/main">
+            <a:off x="13525500" y="8001000"/>
+            <a:ext cx="2152650" cy="304800"/>
           </a:xfrm>
           <a:prstGeom xmlns:a="http://schemas.openxmlformats.org/drawingml/2006/main" prst="rect">
             <a:avLst/>
@@ -7368,29 +7321,29 @@
                   <a:srgbClr val="5D716C"/>
                 </a:solidFill>
               </a:rPr>
-              <a:t>With secondary</a:t>
-            </a:r>
-          </a:p>
-        </p:txBody>
-      </p:sp>
-      <p:sp>
-        <p:nvSpPr>
-          <p:cNvPr id="12" name="">
-            <a:extLst xmlns:a="http://schemas.openxmlformats.org/drawingml/2006/main">
-              <a:ext uri="{FF2B5EF4-FFF2-40B4-BE49-F238E27FC236}">
-                <a16:creationId xmlns:a16="http://schemas.microsoft.com/office/drawing/2014/main" id="{8B6CDD84-069C-456B-BABF-76A14F58CCEB}"/>
-              </a:ext>
-            </a:extLst>
-          </p:cNvPr>
-          <p:cNvSpPr>
-            <a:spLocks xmlns:a="http://schemas.openxmlformats.org/drawingml/2006/main" noGrp="1"/>
-          </p:cNvSpPr>
-          <p:nvPr/>
-        </p:nvSpPr>
-        <p:spPr>
-          <a:xfrm xmlns:a="http://schemas.openxmlformats.org/drawingml/2006/main">
-            <a:off x="4133850" y="8343900"/>
-            <a:ext cx="2305050" cy="323850"/>
+              <a:t>Baseline liability</a:t>
+            </a:r>
+          </a:p>
+        </p:txBody>
+      </p:sp>
+      <p:sp>
+        <p:nvSpPr>
+          <p:cNvPr id="13" name="">
+            <a:extLst xmlns:a="http://schemas.openxmlformats.org/drawingml/2006/main">
+              <a:ext uri="{FF2B5EF4-FFF2-40B4-BE49-F238E27FC236}">
+                <a16:creationId xmlns:a16="http://schemas.microsoft.com/office/drawing/2014/main" id="{C015D543-1E76-45FA-AC71-45CF2BC97E43}"/>
+              </a:ext>
+            </a:extLst>
+          </p:cNvPr>
+          <p:cNvSpPr>
+            <a:spLocks xmlns:a="http://schemas.openxmlformats.org/drawingml/2006/main" noGrp="1"/>
+          </p:cNvSpPr>
+          <p:nvPr/>
+        </p:nvSpPr>
+        <p:spPr>
+          <a:xfrm xmlns:a="http://schemas.openxmlformats.org/drawingml/2006/main">
+            <a:off x="15678150" y="7981950"/>
+            <a:ext cx="1581150" cy="323850"/>
           </a:xfrm>
           <a:prstGeom xmlns:a="http://schemas.openxmlformats.org/drawingml/2006/main" prst="rect">
             <a:avLst/>
@@ -7403,375 +7356,15 @@
             <a:pPr>
               <a:defRPr sz="1650" b="1">
                 <a:solidFill>
-                  <a:srgbClr val="1E6B52"/>
+                  <a:srgbClr val="D49A45"/>
                 </a:solidFill>
               </a:defRPr>
             </a:pPr>
             <a:r>
               <a:rPr sz="1650" b="1">
                 <a:solidFill>
-                  <a:srgbClr val="1E6B52"/>
-                </a:solidFill>
-              </a:rPr>
-              <a:t>0.00 ha</a:t>
-            </a:r>
-          </a:p>
-        </p:txBody>
-      </p:sp>
-      <p:sp>
-        <p:nvSpPr>
-          <p:cNvPr id="13" name="">
-            <a:extLst xmlns:a="http://schemas.openxmlformats.org/drawingml/2006/main">
-              <a:ext uri="{FF2B5EF4-FFF2-40B4-BE49-F238E27FC236}">
-                <a16:creationId xmlns:a16="http://schemas.microsoft.com/office/drawing/2014/main" id="{22C10BA8-CFB6-4B73-8CD2-0BC9FB3B5C13}"/>
-              </a:ext>
-            </a:extLst>
-          </p:cNvPr>
-          <p:cNvSpPr>
-            <a:spLocks xmlns:a="http://schemas.openxmlformats.org/drawingml/2006/main" noGrp="1"/>
-          </p:cNvSpPr>
-          <p:nvPr/>
-        </p:nvSpPr>
-        <p:spPr>
-          <a:xfrm xmlns:a="http://schemas.openxmlformats.org/drawingml/2006/main">
-            <a:off x="6953250" y="2724150"/>
-            <a:ext cx="2819400" cy="304800"/>
-          </a:xfrm>
-          <a:prstGeom xmlns:a="http://schemas.openxmlformats.org/drawingml/2006/main" prst="rect">
-            <a:avLst/>
-          </a:prstGeom>
-        </p:spPr>
-        <p:txBody>
-          <a:bodyPr xmlns:a="http://schemas.openxmlformats.org/drawingml/2006/main" lIns="0" tIns="0" rIns="0" bIns="0"/>
-          <a:lstStyle xmlns:a="http://schemas.openxmlformats.org/drawingml/2006/main"/>
-          <a:p xmlns:a="http://schemas.openxmlformats.org/drawingml/2006/main">
-            <a:pPr>
-              <a:defRPr sz="1275">
-                <a:solidFill>
-                  <a:srgbClr val="5D716C"/>
-                </a:solidFill>
-              </a:defRPr>
-            </a:pPr>
-            <a:r>
-              <a:rPr sz="1275">
-                <a:solidFill>
-                  <a:srgbClr val="5D716C"/>
-                </a:solidFill>
-              </a:rPr>
-              <a:t>Property</a:t>
-            </a:r>
-          </a:p>
-        </p:txBody>
-      </p:sp>
-      <p:sp>
-        <p:nvSpPr>
-          <p:cNvPr id="14" name="">
-            <a:extLst xmlns:a="http://schemas.openxmlformats.org/drawingml/2006/main">
-              <a:ext uri="{FF2B5EF4-FFF2-40B4-BE49-F238E27FC236}">
-                <a16:creationId xmlns:a16="http://schemas.microsoft.com/office/drawing/2014/main" id="{C1580866-62A5-47E4-982F-A812A9AD3ADB}"/>
-              </a:ext>
-            </a:extLst>
-          </p:cNvPr>
-          <p:cNvSpPr>
-            <a:spLocks xmlns:a="http://schemas.openxmlformats.org/drawingml/2006/main" noGrp="1"/>
-          </p:cNvSpPr>
-          <p:nvPr/>
-        </p:nvSpPr>
-        <p:spPr>
-          <a:xfrm xmlns:a="http://schemas.openxmlformats.org/drawingml/2006/main">
-            <a:off x="9772650" y="2724150"/>
-            <a:ext cx="2076450" cy="323850"/>
-          </a:xfrm>
-          <a:prstGeom xmlns:a="http://schemas.openxmlformats.org/drawingml/2006/main" prst="rect">
-            <a:avLst/>
-          </a:prstGeom>
-        </p:spPr>
-        <p:txBody>
-          <a:bodyPr xmlns:a="http://schemas.openxmlformats.org/drawingml/2006/main" lIns="0" tIns="0" rIns="0" bIns="0"/>
-          <a:lstStyle xmlns:a="http://schemas.openxmlformats.org/drawingml/2006/main"/>
-          <a:p xmlns:a="http://schemas.openxmlformats.org/drawingml/2006/main">
-            <a:pPr>
-              <a:defRPr sz="1650" b="1">
-                <a:solidFill>
                   <a:srgbClr val="D49A45"/>
                 </a:solidFill>
-              </a:defRPr>
-            </a:pPr>
-            <a:r>
-              <a:rPr sz="1650" b="1">
-                <a:solidFill>
-                  <a:srgbClr val="D49A45"/>
-                </a:solidFill>
-              </a:rPr>
-              <a:t>&lt; 4 modules</a:t>
-            </a:r>
-          </a:p>
-        </p:txBody>
-      </p:sp>
-      <p:sp>
-        <p:nvSpPr>
-          <p:cNvPr id="15" name="">
-            <a:extLst xmlns:a="http://schemas.openxmlformats.org/drawingml/2006/main">
-              <a:ext uri="{FF2B5EF4-FFF2-40B4-BE49-F238E27FC236}">
-                <a16:creationId xmlns:a16="http://schemas.microsoft.com/office/drawing/2014/main" id="{D9716C12-98FA-4345-AE9E-E1739F767813}"/>
-              </a:ext>
-            </a:extLst>
-          </p:cNvPr>
-          <p:cNvSpPr>
-            <a:spLocks xmlns:a="http://schemas.openxmlformats.org/drawingml/2006/main" noGrp="1"/>
-          </p:cNvSpPr>
-          <p:nvPr/>
-        </p:nvSpPr>
-        <p:spPr>
-          <a:xfrm xmlns:a="http://schemas.openxmlformats.org/drawingml/2006/main">
-            <a:off x="6953250" y="4133850"/>
-            <a:ext cx="2819400" cy="304800"/>
-          </a:xfrm>
-          <a:prstGeom xmlns:a="http://schemas.openxmlformats.org/drawingml/2006/main" prst="rect">
-            <a:avLst/>
-          </a:prstGeom>
-        </p:spPr>
-        <p:txBody>
-          <a:bodyPr xmlns:a="http://schemas.openxmlformats.org/drawingml/2006/main" lIns="0" tIns="0" rIns="0" bIns="0"/>
-          <a:lstStyle xmlns:a="http://schemas.openxmlformats.org/drawingml/2006/main"/>
-          <a:p xmlns:a="http://schemas.openxmlformats.org/drawingml/2006/main">
-            <a:pPr>
-              <a:defRPr sz="1275">
-                <a:solidFill>
-                  <a:srgbClr val="5D716C"/>
-                </a:solidFill>
-              </a:defRPr>
-            </a:pPr>
-            <a:r>
-              <a:rPr sz="1275">
-                <a:solidFill>
-                  <a:srgbClr val="5D716C"/>
-                </a:solidFill>
-              </a:rPr>
-              <a:t>Legal branch</a:t>
-            </a:r>
-          </a:p>
-        </p:txBody>
-      </p:sp>
-      <p:sp>
-        <p:nvSpPr>
-          <p:cNvPr id="16" name="">
-            <a:extLst xmlns:a="http://schemas.openxmlformats.org/drawingml/2006/main">
-              <a:ext uri="{FF2B5EF4-FFF2-40B4-BE49-F238E27FC236}">
-                <a16:creationId xmlns:a16="http://schemas.microsoft.com/office/drawing/2014/main" id="{52337A18-391F-44FD-9F53-222FC960592D}"/>
-              </a:ext>
-            </a:extLst>
-          </p:cNvPr>
-          <p:cNvSpPr>
-            <a:spLocks xmlns:a="http://schemas.openxmlformats.org/drawingml/2006/main" noGrp="1"/>
-          </p:cNvSpPr>
-          <p:nvPr/>
-        </p:nvSpPr>
-        <p:spPr>
-          <a:xfrm xmlns:a="http://schemas.openxmlformats.org/drawingml/2006/main">
-            <a:off x="9772650" y="4133850"/>
-            <a:ext cx="2076450" cy="323850"/>
-          </a:xfrm>
-          <a:prstGeom xmlns:a="http://schemas.openxmlformats.org/drawingml/2006/main" prst="rect">
-            <a:avLst/>
-          </a:prstGeom>
-        </p:spPr>
-        <p:txBody>
-          <a:bodyPr xmlns:a="http://schemas.openxmlformats.org/drawingml/2006/main" lIns="0" tIns="0" rIns="0" bIns="0"/>
-          <a:lstStyle xmlns:a="http://schemas.openxmlformats.org/drawingml/2006/main"/>
-          <a:p xmlns:a="http://schemas.openxmlformats.org/drawingml/2006/main">
-            <a:pPr>
-              <a:defRPr sz="1650" b="1">
-                <a:solidFill>
-                  <a:srgbClr val="D49A45"/>
-                </a:solidFill>
-              </a:defRPr>
-            </a:pPr>
-            <a:r>
-              <a:rPr sz="1650" b="1">
-                <a:solidFill>
-                  <a:srgbClr val="D49A45"/>
-                </a:solidFill>
-              </a:rPr>
-              <a:t>Article 67</a:t>
-            </a:r>
-          </a:p>
-        </p:txBody>
-      </p:sp>
-      <p:sp>
-        <p:nvSpPr>
-          <p:cNvPr id="17" name="">
-            <a:extLst xmlns:a="http://schemas.openxmlformats.org/drawingml/2006/main">
-              <a:ext uri="{FF2B5EF4-FFF2-40B4-BE49-F238E27FC236}">
-                <a16:creationId xmlns:a16="http://schemas.microsoft.com/office/drawing/2014/main" id="{F266DA78-5C75-48A0-BA0A-6B17043CD418}"/>
-              </a:ext>
-            </a:extLst>
-          </p:cNvPr>
-          <p:cNvSpPr>
-            <a:spLocks xmlns:a="http://schemas.openxmlformats.org/drawingml/2006/main" noGrp="1"/>
-          </p:cNvSpPr>
-          <p:nvPr/>
-        </p:nvSpPr>
-        <p:spPr>
-          <a:xfrm xmlns:a="http://schemas.openxmlformats.org/drawingml/2006/main">
-            <a:off x="6953250" y="5543550"/>
-            <a:ext cx="2819400" cy="304800"/>
-          </a:xfrm>
-          <a:prstGeom xmlns:a="http://schemas.openxmlformats.org/drawingml/2006/main" prst="rect">
-            <a:avLst/>
-          </a:prstGeom>
-        </p:spPr>
-        <p:txBody>
-          <a:bodyPr xmlns:a="http://schemas.openxmlformats.org/drawingml/2006/main" lIns="0" tIns="0" rIns="0" bIns="0"/>
-          <a:lstStyle xmlns:a="http://schemas.openxmlformats.org/drawingml/2006/main"/>
-          <a:p xmlns:a="http://schemas.openxmlformats.org/drawingml/2006/main">
-            <a:pPr>
-              <a:defRPr sz="1275">
-                <a:solidFill>
-                  <a:srgbClr val="5D716C"/>
-                </a:solidFill>
-              </a:defRPr>
-            </a:pPr>
-            <a:r>
-              <a:rPr sz="1275">
-                <a:solidFill>
-                  <a:srgbClr val="5D716C"/>
-                </a:solidFill>
-              </a:rPr>
-              <a:t>Requirement</a:t>
-            </a:r>
-          </a:p>
-        </p:txBody>
-      </p:sp>
-      <p:sp>
-        <p:nvSpPr>
-          <p:cNvPr id="18" name="">
-            <a:extLst xmlns:a="http://schemas.openxmlformats.org/drawingml/2006/main">
-              <a:ext uri="{FF2B5EF4-FFF2-40B4-BE49-F238E27FC236}">
-                <a16:creationId xmlns:a16="http://schemas.microsoft.com/office/drawing/2014/main" id="{B3DB40A9-2CA1-45CE-8C29-2E578DB1D6F1}"/>
-              </a:ext>
-            </a:extLst>
-          </p:cNvPr>
-          <p:cNvSpPr>
-            <a:spLocks xmlns:a="http://schemas.openxmlformats.org/drawingml/2006/main" noGrp="1"/>
-          </p:cNvSpPr>
-          <p:nvPr/>
-        </p:nvSpPr>
-        <p:spPr>
-          <a:xfrm xmlns:a="http://schemas.openxmlformats.org/drawingml/2006/main">
-            <a:off x="9772650" y="5543550"/>
-            <a:ext cx="2076450" cy="323850"/>
-          </a:xfrm>
-          <a:prstGeom xmlns:a="http://schemas.openxmlformats.org/drawingml/2006/main" prst="rect">
-            <a:avLst/>
-          </a:prstGeom>
-        </p:spPr>
-        <p:txBody>
-          <a:bodyPr xmlns:a="http://schemas.openxmlformats.org/drawingml/2006/main" lIns="0" tIns="0" rIns="0" bIns="0"/>
-          <a:lstStyle xmlns:a="http://schemas.openxmlformats.org/drawingml/2006/main"/>
-          <a:p xmlns:a="http://schemas.openxmlformats.org/drawingml/2006/main">
-            <a:pPr>
-              <a:defRPr sz="1650" b="1">
-                <a:solidFill>
-                  <a:srgbClr val="D49A45"/>
-                </a:solidFill>
-              </a:defRPr>
-            </a:pPr>
-            <a:r>
-              <a:rPr sz="1650" b="1">
-                <a:solidFill>
-                  <a:srgbClr val="D49A45"/>
-                </a:solidFill>
-              </a:rPr>
-              <a:t>115.24 ha</a:t>
-            </a:r>
-          </a:p>
-        </p:txBody>
-      </p:sp>
-      <p:sp>
-        <p:nvSpPr>
-          <p:cNvPr id="19" name="">
-            <a:extLst xmlns:a="http://schemas.openxmlformats.org/drawingml/2006/main">
-              <a:ext uri="{FF2B5EF4-FFF2-40B4-BE49-F238E27FC236}">
-                <a16:creationId xmlns:a16="http://schemas.microsoft.com/office/drawing/2014/main" id="{DCF2CB6B-D955-4A80-9322-F2405CBD7063}"/>
-              </a:ext>
-            </a:extLst>
-          </p:cNvPr>
-          <p:cNvSpPr>
-            <a:spLocks xmlns:a="http://schemas.openxmlformats.org/drawingml/2006/main" noGrp="1"/>
-          </p:cNvSpPr>
-          <p:nvPr/>
-        </p:nvSpPr>
-        <p:spPr>
-          <a:xfrm xmlns:a="http://schemas.openxmlformats.org/drawingml/2006/main">
-            <a:off x="6953250" y="6953250"/>
-            <a:ext cx="2819400" cy="304800"/>
-          </a:xfrm>
-          <a:prstGeom xmlns:a="http://schemas.openxmlformats.org/drawingml/2006/main" prst="rect">
-            <a:avLst/>
-          </a:prstGeom>
-        </p:spPr>
-        <p:txBody>
-          <a:bodyPr xmlns:a="http://schemas.openxmlformats.org/drawingml/2006/main" lIns="0" tIns="0" rIns="0" bIns="0"/>
-          <a:lstStyle xmlns:a="http://schemas.openxmlformats.org/drawingml/2006/main"/>
-          <a:p xmlns:a="http://schemas.openxmlformats.org/drawingml/2006/main">
-            <a:pPr>
-              <a:defRPr sz="1275">
-                <a:solidFill>
-                  <a:srgbClr val="5D716C"/>
-                </a:solidFill>
-              </a:defRPr>
-            </a:pPr>
-            <a:r>
-              <a:rPr sz="1275">
-                <a:solidFill>
-                  <a:srgbClr val="5D716C"/>
-                </a:solidFill>
-              </a:rPr>
-              <a:t>Baseline total</a:t>
-            </a:r>
-          </a:p>
-        </p:txBody>
-      </p:sp>
-      <p:sp>
-        <p:nvSpPr>
-          <p:cNvPr id="20" name="">
-            <a:extLst xmlns:a="http://schemas.openxmlformats.org/drawingml/2006/main">
-              <a:ext uri="{FF2B5EF4-FFF2-40B4-BE49-F238E27FC236}">
-                <a16:creationId xmlns:a16="http://schemas.microsoft.com/office/drawing/2014/main" id="{29AA0B53-91F4-4330-B59D-24E470AF4F89}"/>
-              </a:ext>
-            </a:extLst>
-          </p:cNvPr>
-          <p:cNvSpPr>
-            <a:spLocks xmlns:a="http://schemas.openxmlformats.org/drawingml/2006/main" noGrp="1"/>
-          </p:cNvSpPr>
-          <p:nvPr/>
-        </p:nvSpPr>
-        <p:spPr>
-          <a:xfrm xmlns:a="http://schemas.openxmlformats.org/drawingml/2006/main">
-            <a:off x="9772650" y="6934200"/>
-            <a:ext cx="2076450" cy="323850"/>
-          </a:xfrm>
-          <a:prstGeom xmlns:a="http://schemas.openxmlformats.org/drawingml/2006/main" prst="rect">
-            <a:avLst/>
-          </a:prstGeom>
-        </p:spPr>
-        <p:txBody>
-          <a:bodyPr xmlns:a="http://schemas.openxmlformats.org/drawingml/2006/main" lIns="0" tIns="0" rIns="0" bIns="0"/>
-          <a:lstStyle xmlns:a="http://schemas.openxmlformats.org/drawingml/2006/main"/>
-          <a:p xmlns:a="http://schemas.openxmlformats.org/drawingml/2006/main">
-            <a:pPr>
-              <a:defRPr sz="1650" b="1">
-                <a:solidFill>
-                  <a:srgbClr val="D49A45"/>
-                </a:solidFill>
-              </a:defRPr>
-            </a:pPr>
-            <a:r>
-              <a:rPr sz="1650" b="1">
-                <a:solidFill>
-                  <a:srgbClr val="D49A45"/>
-                </a:solidFill>
               </a:rPr>
               <a:t>57.07 ha</a:t>
             </a:r>
@@ -7780,301 +7373,55 @@
       </p:sp>
       <p:sp>
         <p:nvSpPr>
-          <p:cNvPr id="21" name="">
-            <a:extLst xmlns:a="http://schemas.openxmlformats.org/drawingml/2006/main">
-              <a:ext uri="{FF2B5EF4-FFF2-40B4-BE49-F238E27FC236}">
-                <a16:creationId xmlns:a16="http://schemas.microsoft.com/office/drawing/2014/main" id="{DCEBF388-9042-4E1A-BB52-A1B0A2371C2B}"/>
-              </a:ext>
-            </a:extLst>
-          </p:cNvPr>
-          <p:cNvSpPr>
-            <a:spLocks xmlns:a="http://schemas.openxmlformats.org/drawingml/2006/main" noGrp="1"/>
-          </p:cNvSpPr>
-          <p:nvPr/>
-        </p:nvSpPr>
-        <p:spPr>
-          <a:xfrm xmlns:a="http://schemas.openxmlformats.org/drawingml/2006/main">
-            <a:off x="6953250" y="8362950"/>
-            <a:ext cx="2819400" cy="304800"/>
-          </a:xfrm>
-          <a:prstGeom xmlns:a="http://schemas.openxmlformats.org/drawingml/2006/main" prst="rect">
-            <a:avLst/>
-          </a:prstGeom>
-        </p:spPr>
-        <p:txBody>
-          <a:bodyPr xmlns:a="http://schemas.openxmlformats.org/drawingml/2006/main" lIns="0" tIns="0" rIns="0" bIns="0"/>
-          <a:lstStyle xmlns:a="http://schemas.openxmlformats.org/drawingml/2006/main"/>
-          <a:p xmlns:a="http://schemas.openxmlformats.org/drawingml/2006/main">
-            <a:pPr>
-              <a:defRPr sz="1275">
-                <a:solidFill>
-                  <a:srgbClr val="5D716C"/>
-                </a:solidFill>
-              </a:defRPr>
-            </a:pPr>
-            <a:r>
-              <a:rPr sz="1275">
-                <a:solidFill>
-                  <a:srgbClr val="5D716C"/>
-                </a:solidFill>
-              </a:rPr>
-              <a:t>With secondary</a:t>
-            </a:r>
-          </a:p>
-        </p:txBody>
-      </p:sp>
-      <p:sp>
-        <p:nvSpPr>
-          <p:cNvPr id="22" name="">
-            <a:extLst xmlns:a="http://schemas.openxmlformats.org/drawingml/2006/main">
-              <a:ext uri="{FF2B5EF4-FFF2-40B4-BE49-F238E27FC236}">
-                <a16:creationId xmlns:a16="http://schemas.microsoft.com/office/drawing/2014/main" id="{3BF59616-25BC-465A-B3D4-D4E0CFBC7284}"/>
-              </a:ext>
-            </a:extLst>
-          </p:cNvPr>
-          <p:cNvSpPr>
-            <a:spLocks xmlns:a="http://schemas.openxmlformats.org/drawingml/2006/main" noGrp="1"/>
-          </p:cNvSpPr>
-          <p:nvPr/>
-        </p:nvSpPr>
-        <p:spPr>
-          <a:xfrm xmlns:a="http://schemas.openxmlformats.org/drawingml/2006/main">
-            <a:off x="9772650" y="8343900"/>
-            <a:ext cx="2076450" cy="323850"/>
-          </a:xfrm>
-          <a:prstGeom xmlns:a="http://schemas.openxmlformats.org/drawingml/2006/main" prst="rect">
-            <a:avLst/>
-          </a:prstGeom>
-        </p:spPr>
-        <p:txBody>
-          <a:bodyPr xmlns:a="http://schemas.openxmlformats.org/drawingml/2006/main" lIns="0" tIns="0" rIns="0" bIns="0"/>
-          <a:lstStyle xmlns:a="http://schemas.openxmlformats.org/drawingml/2006/main"/>
-          <a:p xmlns:a="http://schemas.openxmlformats.org/drawingml/2006/main">
-            <a:pPr>
-              <a:defRPr sz="1650" b="1">
-                <a:solidFill>
-                  <a:srgbClr val="D49A45"/>
-                </a:solidFill>
-              </a:defRPr>
-            </a:pPr>
-            <a:r>
-              <a:rPr sz="1650" b="1">
-                <a:solidFill>
-                  <a:srgbClr val="D49A45"/>
-                </a:solidFill>
-              </a:rPr>
-              <a:t>8.67 ha</a:t>
-            </a:r>
-          </a:p>
-        </p:txBody>
-      </p:sp>
-      <p:sp>
-        <p:nvSpPr>
-          <p:cNvPr id="23" name="">
-            <a:extLst xmlns:a="http://schemas.openxmlformats.org/drawingml/2006/main">
-              <a:ext uri="{FF2B5EF4-FFF2-40B4-BE49-F238E27FC236}">
-                <a16:creationId xmlns:a16="http://schemas.microsoft.com/office/drawing/2014/main" id="{61D6AB42-B241-4066-AA35-DD2BC2B0450A}"/>
-              </a:ext>
-            </a:extLst>
-          </p:cNvPr>
-          <p:cNvSpPr>
-            <a:spLocks xmlns:a="http://schemas.openxmlformats.org/drawingml/2006/main" noGrp="1"/>
-          </p:cNvSpPr>
-          <p:nvPr/>
-        </p:nvSpPr>
-        <p:spPr>
-          <a:xfrm xmlns:a="http://schemas.openxmlformats.org/drawingml/2006/main">
-            <a:off x="12458700" y="2419350"/>
-            <a:ext cx="4705350" cy="419100"/>
-          </a:xfrm>
-          <a:prstGeom xmlns:a="http://schemas.openxmlformats.org/drawingml/2006/main" prst="rect">
-            <a:avLst/>
-          </a:prstGeom>
-        </p:spPr>
-        <p:txBody>
-          <a:bodyPr xmlns:a="http://schemas.openxmlformats.org/drawingml/2006/main" lIns="0" tIns="0" rIns="0" bIns="0"/>
-          <a:lstStyle xmlns:a="http://schemas.openxmlformats.org/drawingml/2006/main"/>
-          <a:p xmlns:a="http://schemas.openxmlformats.org/drawingml/2006/main">
-            <a:pPr>
-              <a:defRPr sz="2400" b="1">
-                <a:solidFill>
-                  <a:srgbClr val="17312B"/>
-                </a:solidFill>
-              </a:defRPr>
-            </a:pPr>
-            <a:r>
-              <a:rPr sz="2400" b="1">
-                <a:solidFill>
-                  <a:srgbClr val="17312B"/>
-                </a:solidFill>
-              </a:rPr>
-              <a:t>Audit rules</a:t>
-            </a:r>
-          </a:p>
-        </p:txBody>
-      </p:sp>
-      <p:sp>
-        <p:nvSpPr>
-          <p:cNvPr id="24" name="">
-            <a:extLst xmlns:a="http://schemas.openxmlformats.org/drawingml/2006/main">
-              <a:ext uri="{FF2B5EF4-FFF2-40B4-BE49-F238E27FC236}">
-                <a16:creationId xmlns:a16="http://schemas.microsoft.com/office/drawing/2014/main" id="{3FAD9938-0DC7-4009-AD6D-69DEC40D72EF}"/>
-              </a:ext>
-            </a:extLst>
-          </p:cNvPr>
-          <p:cNvSpPr>
-            <a:spLocks xmlns:a="http://schemas.openxmlformats.org/drawingml/2006/main" noGrp="1"/>
-          </p:cNvSpPr>
-          <p:nvPr/>
-        </p:nvSpPr>
-        <p:spPr>
-          <a:xfrm xmlns:a="http://schemas.openxmlformats.org/drawingml/2006/main">
-            <a:off x="12458700" y="3048000"/>
-            <a:ext cx="4705350" cy="3714750"/>
-          </a:xfrm>
-          <a:prstGeom xmlns:a="http://schemas.openxmlformats.org/drawingml/2006/main" prst="rect">
-            <a:avLst/>
-          </a:prstGeom>
-        </p:spPr>
-        <p:txBody>
-          <a:bodyPr xmlns:a="http://schemas.openxmlformats.org/drawingml/2006/main" lIns="0" tIns="0" rIns="0" bIns="0"/>
-          <a:lstStyle xmlns:a="http://schemas.openxmlformats.org/drawingml/2006/main"/>
-          <a:p xmlns:a="http://schemas.openxmlformats.org/drawingml/2006/main">
-            <a:pPr>
-              <a:defRPr sz="1725">
-                <a:solidFill>
-                  <a:srgbClr val="5D716C"/>
-                </a:solidFill>
-              </a:defRPr>
-            </a:pPr>
-            <a:r>
-              <a:rPr sz="1725">
-                <a:solidFill>
-                  <a:srgbClr val="5D716C"/>
-                </a:solidFill>
-              </a:rPr>
-              <a:t>1. Inputs retain their source-specific columns.</a:t>
-            </a:r>
-          </a:p>
-          <a:p xmlns:a="http://schemas.openxmlformats.org/drawingml/2006/main">
-            <a:r>
-              <a:t/>
-            </a:r>
-          </a:p>
-          <a:p xmlns:a="http://schemas.openxmlformats.org/drawingml/2006/main">
-            <a:pPr>
-              <a:defRPr sz="1725">
-                <a:solidFill>
-                  <a:srgbClr val="5D716C"/>
-                </a:solidFill>
-              </a:defRPr>
-            </a:pPr>
-            <a:r>
-              <a:rPr sz="1725">
-                <a:solidFill>
-                  <a:srgbClr val="5D716C"/>
-                </a:solidFill>
-              </a:rPr>
-              <a:t>2. 2000 and 2008 remain separate cut-offs.</a:t>
-            </a:r>
-          </a:p>
-          <a:p xmlns:a="http://schemas.openxmlformats.org/drawingml/2006/main">
-            <a:r>
-              <a:t/>
-            </a:r>
-          </a:p>
-          <a:p xmlns:a="http://schemas.openxmlformats.org/drawingml/2006/main">
-            <a:pPr>
-              <a:defRPr sz="1725">
-                <a:solidFill>
-                  <a:srgbClr val="5D716C"/>
-                </a:solidFill>
-              </a:defRPr>
-            </a:pPr>
-            <a:r>
-              <a:rPr sz="1725">
-                <a:solidFill>
-                  <a:srgbClr val="5D716C"/>
-                </a:solidFill>
-              </a:rPr>
-              <a:t>3. Restore + compensate = LR deficit.</a:t>
-            </a:r>
-          </a:p>
-          <a:p xmlns:a="http://schemas.openxmlformats.org/drawingml/2006/main">
-            <a:r>
-              <a:t/>
-            </a:r>
-          </a:p>
-          <a:p xmlns:a="http://schemas.openxmlformats.org/drawingml/2006/main">
-            <a:pPr>
-              <a:defRPr sz="1725">
-                <a:solidFill>
-                  <a:srgbClr val="5D716C"/>
-                </a:solidFill>
-              </a:defRPr>
-            </a:pPr>
-            <a:r>
-              <a:rPr sz="1725">
-                <a:solidFill>
-                  <a:srgbClr val="5D716C"/>
-                </a:solidFill>
-              </a:rPr>
-              <a:t>4. Secondary vegetation cannot push vegetation above property area.</a:t>
-            </a:r>
-          </a:p>
-        </p:txBody>
-      </p:sp>
-      <p:sp>
-        <p:nvSpPr>
-          <p:cNvPr id="25" name="">
-            <a:extLst xmlns:a="http://schemas.openxmlformats.org/drawingml/2006/main">
-              <a:ext uri="{FF2B5EF4-FFF2-40B4-BE49-F238E27FC236}">
-                <a16:creationId xmlns:a16="http://schemas.microsoft.com/office/drawing/2014/main" id="{A86C5148-A602-41D0-9D4D-52E2364A620E}"/>
-              </a:ext>
-            </a:extLst>
-          </p:cNvPr>
-          <p:cNvSpPr>
-            <a:spLocks xmlns:a="http://schemas.openxmlformats.org/drawingml/2006/main" noGrp="1"/>
-          </p:cNvSpPr>
-          <p:nvPr/>
-        </p:nvSpPr>
-        <p:spPr>
-          <a:xfrm xmlns:a="http://schemas.openxmlformats.org/drawingml/2006/main">
-            <a:off x="12458700" y="6972300"/>
-            <a:ext cx="4705350" cy="666750"/>
-          </a:xfrm>
-          <a:prstGeom xmlns:a="http://schemas.openxmlformats.org/drawingml/2006/main" prst="rect">
-            <a:avLst/>
-          </a:prstGeom>
-        </p:spPr>
-        <p:txBody>
-          <a:bodyPr xmlns:a="http://schemas.openxmlformats.org/drawingml/2006/main" lIns="0" tIns="0" rIns="0" bIns="0"/>
-          <a:lstStyle xmlns:a="http://schemas.openxmlformats.org/drawingml/2006/main"/>
-          <a:p xmlns:a="http://schemas.openxmlformats.org/drawingml/2006/main">
-            <a:pPr>
-              <a:defRPr sz="1650" b="1">
-                <a:solidFill>
-                  <a:srgbClr val="9FC65B"/>
-                </a:solidFill>
-              </a:defRPr>
-            </a:pPr>
-            <a:r>
-              <a:rPr sz="1650" b="1">
-                <a:solidFill>
-                  <a:srgbClr val="9FC65B"/>
-                </a:solidFill>
-              </a:rPr>
-              <a:t>Every number shown here is traceable to the 638-column mega table.</a:t>
-            </a:r>
-          </a:p>
-        </p:txBody>
-      </p:sp>
-      <p:sp>
-        <p:nvSpPr>
-          <p:cNvPr id="26" name="source-7">
-            <a:extLst xmlns:a="http://schemas.openxmlformats.org/drawingml/2006/main">
-              <a:ext uri="{FF2B5EF4-FFF2-40B4-BE49-F238E27FC236}">
-                <a16:creationId xmlns:a16="http://schemas.microsoft.com/office/drawing/2014/main" id="{FD0CFC53-4118-4B8E-8C33-E6C68C902F9A}"/>
+          <p:cNvPr id="14" name="map-property-key-7">
+            <a:extLst xmlns:a="http://schemas.openxmlformats.org/drawingml/2006/main">
+              <a:ext uri="{FF2B5EF4-FFF2-40B4-BE49-F238E27FC236}">
+                <a16:creationId xmlns:a16="http://schemas.microsoft.com/office/drawing/2014/main" id="{70A29B68-3DC1-4B4F-8E4C-F347BFE97EB7}"/>
+              </a:ext>
+            </a:extLst>
+          </p:cNvPr>
+          <p:cNvSpPr>
+            <a:spLocks xmlns:a="http://schemas.openxmlformats.org/drawingml/2006/main" noGrp="1"/>
+          </p:cNvSpPr>
+          <p:nvPr/>
+        </p:nvSpPr>
+        <p:spPr>
+          <a:xfrm xmlns:a="http://schemas.openxmlformats.org/drawingml/2006/main">
+            <a:off x="857250" y="9010650"/>
+            <a:ext cx="16573500" cy="247650"/>
+          </a:xfrm>
+          <a:prstGeom xmlns:a="http://schemas.openxmlformats.org/drawingml/2006/main" prst="rect">
+            <a:avLst/>
+          </a:prstGeom>
+        </p:spPr>
+        <p:txBody>
+          <a:bodyPr xmlns:a="http://schemas.openxmlformats.org/drawingml/2006/main" lIns="0" tIns="0" rIns="0" bIns="0"/>
+          <a:lstStyle xmlns:a="http://schemas.openxmlformats.org/drawingml/2006/main"/>
+          <a:p xmlns:a="http://schemas.openxmlformats.org/drawingml/2006/main">
+            <a:pPr>
+              <a:defRPr sz="975">
+                <a:solidFill>
+                  <a:srgbClr val="5D716C"/>
+                </a:solidFill>
+              </a:defRPr>
+            </a:pPr>
+            <a:r>
+              <a:rPr sz="975">
+                <a:solidFill>
+                  <a:srgbClr val="5D716C"/>
+                </a:solidFill>
+              </a:rPr>
+              <a:t>CAR boundary: MT-5103437-3035138E282C4E6686B61959CF506B0D</a:t>
+            </a:r>
+          </a:p>
+        </p:txBody>
+      </p:sp>
+      <p:sp>
+        <p:nvSpPr>
+          <p:cNvPr id="15" name="source-7">
+            <a:extLst xmlns:a="http://schemas.openxmlformats.org/drawingml/2006/main">
+              <a:ext uri="{FF2B5EF4-FFF2-40B4-BE49-F238E27FC236}">
+                <a16:creationId xmlns:a16="http://schemas.microsoft.com/office/drawing/2014/main" id="{368E8951-3CCB-4E53-A908-FBBF0ACE3A1A}"/>
               </a:ext>
             </a:extLst>
           </p:cNvPr>
@@ -8116,10 +7463,10 @@
       </p:sp>
       <p:sp>
         <p:nvSpPr>
-          <p:cNvPr id="27" name="page-7">
-            <a:extLst xmlns:a="http://schemas.openxmlformats.org/drawingml/2006/main">
-              <a:ext uri="{FF2B5EF4-FFF2-40B4-BE49-F238E27FC236}">
-                <a16:creationId xmlns:a16="http://schemas.microsoft.com/office/drawing/2014/main" id="{4975978F-7ACF-48DA-B989-89BF9AE144CC}"/>
+          <p:cNvPr id="16" name="page-7">
+            <a:extLst xmlns:a="http://schemas.openxmlformats.org/drawingml/2006/main">
+              <a:ext uri="{FF2B5EF4-FFF2-40B4-BE49-F238E27FC236}">
+                <a16:creationId xmlns:a16="http://schemas.microsoft.com/office/drawing/2014/main" id="{B6C742B7-F9D4-476B-81E2-15D2D078D1F2}"/>
               </a:ext>
             </a:extLst>
           </p:cNvPr>
@@ -8162,7 +7509,2232 @@
     </p:spTree>
     <p:extLst>
       <p:ext uri="{BB962C8B-B14F-4D97-AF65-F5344CB8AC3E}">
-        <p14:creationId xmlns:p14="http://schemas.microsoft.com/office/powerpoint/2010/main" val="880943956"/>
+        <p14:creationId xmlns:p14="http://schemas.microsoft.com/office/powerpoint/2010/main" val="484141771"/>
+      </p:ext>
+    </p:extLst>
+  </p:cSld>
+</p:sld>
+</file>
+
+<file path=ppt/slides/slide8.xml><?xml version="1.0" encoding="utf-8"?>
+<p:sld xmlns:p="http://schemas.openxmlformats.org/presentationml/2006/main">
+  <p:cSld>
+    <p:spTree>
+      <p:nvGrpSpPr>
+        <p:cNvPr id="1" name=""/>
+        <p:cNvGrpSpPr/>
+        <p:nvPr/>
+      </p:nvGrpSpPr>
+      <p:grpSpPr>
+        <a:xfrm xmlns:a="http://schemas.openxmlformats.org/drawingml/2006/main"/>
+      </p:grpSpPr>
+      <p:sp>
+        <p:nvSpPr>
+          <p:cNvPr id="1" name="slide-title-8">
+            <a:extLst xmlns:a="http://schemas.openxmlformats.org/drawingml/2006/main">
+              <a:ext uri="{FF2B5EF4-FFF2-40B4-BE49-F238E27FC236}">
+                <a16:creationId xmlns:a16="http://schemas.microsoft.com/office/drawing/2014/main" id="{341E4D22-4C65-4299-AEDC-D5917234C04A}"/>
+              </a:ext>
+            </a:extLst>
+          </p:cNvPr>
+          <p:cNvSpPr>
+            <a:spLocks xmlns:a="http://schemas.openxmlformats.org/drawingml/2006/main" noGrp="1"/>
+          </p:cNvSpPr>
+          <p:nvPr/>
+        </p:nvSpPr>
+        <p:spPr>
+          <a:xfrm xmlns:a="http://schemas.openxmlformats.org/drawingml/2006/main">
+            <a:off x="857250" y="533400"/>
+            <a:ext cx="16573500" cy="647700"/>
+          </a:xfrm>
+          <a:prstGeom xmlns:a="http://schemas.openxmlformats.org/drawingml/2006/main" prst="rect">
+            <a:avLst/>
+          </a:prstGeom>
+        </p:spPr>
+        <p:txBody>
+          <a:bodyPr xmlns:a="http://schemas.openxmlformats.org/drawingml/2006/main" lIns="0" tIns="0" rIns="0" bIns="0"/>
+          <a:lstStyle xmlns:a="http://schemas.openxmlformats.org/drawingml/2006/main"/>
+          <a:p xmlns:a="http://schemas.openxmlformats.org/drawingml/2006/main">
+            <a:pPr>
+              <a:defRPr sz="3450" b="1">
+                <a:solidFill>
+                  <a:srgbClr val="17312B"/>
+                </a:solidFill>
+              </a:defRPr>
+            </a:pPr>
+            <a:r>
+              <a:rPr sz="3450" b="1">
+                <a:solidFill>
+                  <a:srgbClr val="17312B"/>
+                </a:solidFill>
+              </a:rPr>
+              <a:t>Small-property calculation chain</a:t>
+            </a:r>
+          </a:p>
+        </p:txBody>
+      </p:sp>
+      <p:sp>
+        <p:nvSpPr>
+          <p:cNvPr id="2" name="slide-subtitle-8">
+            <a:extLst xmlns:a="http://schemas.openxmlformats.org/drawingml/2006/main">
+              <a:ext uri="{FF2B5EF4-FFF2-40B4-BE49-F238E27FC236}">
+                <a16:creationId xmlns:a16="http://schemas.microsoft.com/office/drawing/2014/main" id="{9DCA7629-7DF1-45F8-B5EA-63A454F18241}"/>
+              </a:ext>
+            </a:extLst>
+          </p:cNvPr>
+          <p:cNvSpPr>
+            <a:spLocks xmlns:a="http://schemas.openxmlformats.org/drawingml/2006/main" noGrp="1"/>
+          </p:cNvSpPr>
+          <p:nvPr/>
+        </p:nvSpPr>
+        <p:spPr>
+          <a:xfrm xmlns:a="http://schemas.openxmlformats.org/drawingml/2006/main">
+            <a:off x="857250" y="1276350"/>
+            <a:ext cx="7905750" cy="552450"/>
+          </a:xfrm>
+          <a:prstGeom xmlns:a="http://schemas.openxmlformats.org/drawingml/2006/main" prst="rect">
+            <a:avLst/>
+          </a:prstGeom>
+        </p:spPr>
+        <p:txBody>
+          <a:bodyPr xmlns:a="http://schemas.openxmlformats.org/drawingml/2006/main" lIns="0" tIns="0" rIns="0" bIns="0"/>
+          <a:lstStyle xmlns:a="http://schemas.openxmlformats.org/drawingml/2006/main"/>
+          <a:p xmlns:a="http://schemas.openxmlformats.org/drawingml/2006/main">
+            <a:pPr>
+              <a:defRPr sz="1875">
+                <a:solidFill>
+                  <a:srgbClr val="5D716C"/>
+                </a:solidFill>
+              </a:defRPr>
+            </a:pPr>
+            <a:r>
+              <a:rPr sz="1875">
+                <a:solidFill>
+                  <a:srgbClr val="5D716C"/>
+                </a:solidFill>
+              </a:rPr>
+              <a:t>Article 67 determines LR; APP and secondary vegetation are calculated separately.</a:t>
+            </a:r>
+          </a:p>
+        </p:txBody>
+      </p:sp>
+      <p:sp>
+        <p:nvSpPr>
+          <p:cNvPr id="3" name="">
+            <a:extLst xmlns:a="http://schemas.openxmlformats.org/drawingml/2006/main">
+              <a:ext uri="{FF2B5EF4-FFF2-40B4-BE49-F238E27FC236}">
+                <a16:creationId xmlns:a16="http://schemas.microsoft.com/office/drawing/2014/main" id="{C2377F28-D483-4F33-9BFF-7DC0985CDF6D}"/>
+              </a:ext>
+            </a:extLst>
+          </p:cNvPr>
+          <p:cNvSpPr>
+            <a:spLocks xmlns:a="http://schemas.openxmlformats.org/drawingml/2006/main" noGrp="1"/>
+          </p:cNvSpPr>
+          <p:nvPr/>
+        </p:nvSpPr>
+        <p:spPr>
+          <a:xfrm xmlns:a="http://schemas.openxmlformats.org/drawingml/2006/main">
+            <a:off x="1066800" y="2305050"/>
+            <a:ext cx="7753350" cy="247650"/>
+          </a:xfrm>
+          <a:prstGeom xmlns:a="http://schemas.openxmlformats.org/drawingml/2006/main" prst="rect">
+            <a:avLst/>
+          </a:prstGeom>
+        </p:spPr>
+        <p:txBody>
+          <a:bodyPr xmlns:a="http://schemas.openxmlformats.org/drawingml/2006/main" lIns="0" tIns="0" rIns="0" bIns="0"/>
+          <a:lstStyle xmlns:a="http://schemas.openxmlformats.org/drawingml/2006/main"/>
+          <a:p xmlns:a="http://schemas.openxmlformats.org/drawingml/2006/main">
+            <a:pPr>
+              <a:defRPr sz="1275" b="1">
+                <a:solidFill>
+                  <a:srgbClr val="D49A45"/>
+                </a:solidFill>
+              </a:defRPr>
+            </a:pPr>
+            <a:r>
+              <a:rPr sz="1275" b="1">
+                <a:solidFill>
+                  <a:srgbClr val="D49A45"/>
+                </a:solidFill>
+              </a:rPr>
+              <a:t>2008 cut-off</a:t>
+            </a:r>
+          </a:p>
+        </p:txBody>
+      </p:sp>
+      <p:sp>
+        <p:nvSpPr>
+          <p:cNvPr id="4" name="">
+            <a:extLst xmlns:a="http://schemas.openxmlformats.org/drawingml/2006/main">
+              <a:ext uri="{FF2B5EF4-FFF2-40B4-BE49-F238E27FC236}">
+                <a16:creationId xmlns:a16="http://schemas.microsoft.com/office/drawing/2014/main" id="{E8FAED0C-1288-47A6-86EA-922E9880C015}"/>
+              </a:ext>
+            </a:extLst>
+          </p:cNvPr>
+          <p:cNvSpPr>
+            <a:spLocks xmlns:a="http://schemas.openxmlformats.org/drawingml/2006/main" noGrp="1"/>
+          </p:cNvSpPr>
+          <p:nvPr/>
+        </p:nvSpPr>
+        <p:spPr>
+          <a:xfrm xmlns:a="http://schemas.openxmlformats.org/drawingml/2006/main">
+            <a:off x="1066800" y="2609850"/>
+            <a:ext cx="7753350" cy="323850"/>
+          </a:xfrm>
+          <a:prstGeom xmlns:a="http://schemas.openxmlformats.org/drawingml/2006/main" prst="rect">
+            <a:avLst/>
+          </a:prstGeom>
+        </p:spPr>
+        <p:txBody>
+          <a:bodyPr xmlns:a="http://schemas.openxmlformats.org/drawingml/2006/main" lIns="0" tIns="0" rIns="0" bIns="0"/>
+          <a:lstStyle xmlns:a="http://schemas.openxmlformats.org/drawingml/2006/main"/>
+          <a:p xmlns:a="http://schemas.openxmlformats.org/drawingml/2006/main">
+            <a:pPr>
+              <a:defRPr sz="1425">
+                <a:solidFill>
+                  <a:srgbClr val="17312B"/>
+                </a:solidFill>
+              </a:defRPr>
+            </a:pPr>
+            <a:r>
+              <a:rPr sz="1425">
+                <a:solidFill>
+                  <a:srgbClr val="17312B"/>
+                </a:solidFill>
+              </a:rPr>
+              <a:t>MIN(115.24 ha, 128.34 ha)</a:t>
+            </a:r>
+          </a:p>
+        </p:txBody>
+      </p:sp>
+      <p:sp>
+        <p:nvSpPr>
+          <p:cNvPr id="5" name="">
+            <a:extLst xmlns:a="http://schemas.openxmlformats.org/drawingml/2006/main">
+              <a:ext uri="{FF2B5EF4-FFF2-40B4-BE49-F238E27FC236}">
+                <a16:creationId xmlns:a16="http://schemas.microsoft.com/office/drawing/2014/main" id="{0F4B2F22-56A0-48BE-9C2D-27F0A340FD22}"/>
+              </a:ext>
+            </a:extLst>
+          </p:cNvPr>
+          <p:cNvSpPr>
+            <a:spLocks xmlns:a="http://schemas.openxmlformats.org/drawingml/2006/main" noGrp="1"/>
+          </p:cNvSpPr>
+          <p:nvPr/>
+        </p:nvSpPr>
+        <p:spPr>
+          <a:xfrm xmlns:a="http://schemas.openxmlformats.org/drawingml/2006/main">
+            <a:off x="1066800" y="2990850"/>
+            <a:ext cx="7753350" cy="342900"/>
+          </a:xfrm>
+          <a:prstGeom xmlns:a="http://schemas.openxmlformats.org/drawingml/2006/main" prst="rect">
+            <a:avLst/>
+          </a:prstGeom>
+        </p:spPr>
+        <p:txBody>
+          <a:bodyPr xmlns:a="http://schemas.openxmlformats.org/drawingml/2006/main" lIns="0" tIns="0" rIns="0" bIns="0"/>
+          <a:lstStyle xmlns:a="http://schemas.openxmlformats.org/drawingml/2006/main"/>
+          <a:p xmlns:a="http://schemas.openxmlformats.org/drawingml/2006/main">
+            <a:pPr>
+              <a:defRPr sz="1800" b="1">
+                <a:solidFill>
+                  <a:srgbClr val="D49A45"/>
+                </a:solidFill>
+              </a:defRPr>
+            </a:pPr>
+            <a:r>
+              <a:rPr sz="1800" b="1">
+                <a:solidFill>
+                  <a:srgbClr val="D49A45"/>
+                </a:solidFill>
+              </a:rPr>
+              <a:t>= Article 67 requirement: 115.24 ha</a:t>
+            </a:r>
+          </a:p>
+        </p:txBody>
+      </p:sp>
+      <p:sp>
+        <p:nvSpPr>
+          <p:cNvPr id="6" name="">
+            <a:extLst xmlns:a="http://schemas.openxmlformats.org/drawingml/2006/main">
+              <a:ext uri="{FF2B5EF4-FFF2-40B4-BE49-F238E27FC236}">
+                <a16:creationId xmlns:a16="http://schemas.microsoft.com/office/drawing/2014/main" id="{2019A859-C866-435B-B9F8-11E16D273478}"/>
+              </a:ext>
+            </a:extLst>
+          </p:cNvPr>
+          <p:cNvSpPr>
+            <a:spLocks xmlns:a="http://schemas.openxmlformats.org/drawingml/2006/main" noGrp="1"/>
+          </p:cNvSpPr>
+          <p:nvPr/>
+        </p:nvSpPr>
+        <p:spPr>
+          <a:xfrm xmlns:a="http://schemas.openxmlformats.org/drawingml/2006/main">
+            <a:off x="9467850" y="2305050"/>
+            <a:ext cx="7753350" cy="247650"/>
+          </a:xfrm>
+          <a:prstGeom xmlns:a="http://schemas.openxmlformats.org/drawingml/2006/main" prst="rect">
+            <a:avLst/>
+          </a:prstGeom>
+        </p:spPr>
+        <p:txBody>
+          <a:bodyPr xmlns:a="http://schemas.openxmlformats.org/drawingml/2006/main" lIns="0" tIns="0" rIns="0" bIns="0"/>
+          <a:lstStyle xmlns:a="http://schemas.openxmlformats.org/drawingml/2006/main"/>
+          <a:p xmlns:a="http://schemas.openxmlformats.org/drawingml/2006/main">
+            <a:pPr>
+              <a:defRPr sz="1275" b="1">
+                <a:solidFill>
+                  <a:srgbClr val="D49A45"/>
+                </a:solidFill>
+              </a:defRPr>
+            </a:pPr>
+            <a:r>
+              <a:rPr sz="1275" b="1">
+                <a:solidFill>
+                  <a:srgbClr val="D49A45"/>
+                </a:solidFill>
+              </a:rPr>
+              <a:t>Legal Reserve deficit</a:t>
+            </a:r>
+          </a:p>
+        </p:txBody>
+      </p:sp>
+      <p:sp>
+        <p:nvSpPr>
+          <p:cNvPr id="7" name="">
+            <a:extLst xmlns:a="http://schemas.openxmlformats.org/drawingml/2006/main">
+              <a:ext uri="{FF2B5EF4-FFF2-40B4-BE49-F238E27FC236}">
+                <a16:creationId xmlns:a16="http://schemas.microsoft.com/office/drawing/2014/main" id="{028B55D6-239D-4737-ABAA-513F0FD31D5C}"/>
+              </a:ext>
+            </a:extLst>
+          </p:cNvPr>
+          <p:cNvSpPr>
+            <a:spLocks xmlns:a="http://schemas.openxmlformats.org/drawingml/2006/main" noGrp="1"/>
+          </p:cNvSpPr>
+          <p:nvPr/>
+        </p:nvSpPr>
+        <p:spPr>
+          <a:xfrm xmlns:a="http://schemas.openxmlformats.org/drawingml/2006/main">
+            <a:off x="9467850" y="2609850"/>
+            <a:ext cx="7753350" cy="323850"/>
+          </a:xfrm>
+          <a:prstGeom xmlns:a="http://schemas.openxmlformats.org/drawingml/2006/main" prst="rect">
+            <a:avLst/>
+          </a:prstGeom>
+        </p:spPr>
+        <p:txBody>
+          <a:bodyPr xmlns:a="http://schemas.openxmlformats.org/drawingml/2006/main" lIns="0" tIns="0" rIns="0" bIns="0"/>
+          <a:lstStyle xmlns:a="http://schemas.openxmlformats.org/drawingml/2006/main"/>
+          <a:p xmlns:a="http://schemas.openxmlformats.org/drawingml/2006/main">
+            <a:pPr>
+              <a:defRPr sz="1425">
+                <a:solidFill>
+                  <a:srgbClr val="17312B"/>
+                </a:solidFill>
+              </a:defRPr>
+            </a:pPr>
+            <a:r>
+              <a:rPr sz="1425">
+                <a:solidFill>
+                  <a:srgbClr val="17312B"/>
+                </a:solidFill>
+              </a:rPr>
+              <a:t>115.24 ha − 61.34 ha</a:t>
+            </a:r>
+          </a:p>
+        </p:txBody>
+      </p:sp>
+      <p:sp>
+        <p:nvSpPr>
+          <p:cNvPr id="8" name="">
+            <a:extLst xmlns:a="http://schemas.openxmlformats.org/drawingml/2006/main">
+              <a:ext uri="{FF2B5EF4-FFF2-40B4-BE49-F238E27FC236}">
+                <a16:creationId xmlns:a16="http://schemas.microsoft.com/office/drawing/2014/main" id="{9573AC2B-DD3E-43EA-9938-13E604DBA805}"/>
+              </a:ext>
+            </a:extLst>
+          </p:cNvPr>
+          <p:cNvSpPr>
+            <a:spLocks xmlns:a="http://schemas.openxmlformats.org/drawingml/2006/main" noGrp="1"/>
+          </p:cNvSpPr>
+          <p:nvPr/>
+        </p:nvSpPr>
+        <p:spPr>
+          <a:xfrm xmlns:a="http://schemas.openxmlformats.org/drawingml/2006/main">
+            <a:off x="9467850" y="2990850"/>
+            <a:ext cx="7753350" cy="342900"/>
+          </a:xfrm>
+          <a:prstGeom xmlns:a="http://schemas.openxmlformats.org/drawingml/2006/main" prst="rect">
+            <a:avLst/>
+          </a:prstGeom>
+        </p:spPr>
+        <p:txBody>
+          <a:bodyPr xmlns:a="http://schemas.openxmlformats.org/drawingml/2006/main" lIns="0" tIns="0" rIns="0" bIns="0"/>
+          <a:lstStyle xmlns:a="http://schemas.openxmlformats.org/drawingml/2006/main"/>
+          <a:p xmlns:a="http://schemas.openxmlformats.org/drawingml/2006/main">
+            <a:pPr>
+              <a:defRPr sz="1800" b="1">
+                <a:solidFill>
+                  <a:srgbClr val="D49A45"/>
+                </a:solidFill>
+              </a:defRPr>
+            </a:pPr>
+            <a:r>
+              <a:rPr sz="1800" b="1">
+                <a:solidFill>
+                  <a:srgbClr val="D49A45"/>
+                </a:solidFill>
+              </a:rPr>
+              <a:t>= 53.90 ha</a:t>
+            </a:r>
+          </a:p>
+        </p:txBody>
+      </p:sp>
+      <p:sp>
+        <p:nvSpPr>
+          <p:cNvPr id="9" name="">
+            <a:extLst xmlns:a="http://schemas.openxmlformats.org/drawingml/2006/main">
+              <a:ext uri="{FF2B5EF4-FFF2-40B4-BE49-F238E27FC236}">
+                <a16:creationId xmlns:a16="http://schemas.microsoft.com/office/drawing/2014/main" id="{475D98D6-5F3F-4E54-A4AF-DACDF36DBDEE}"/>
+              </a:ext>
+            </a:extLst>
+          </p:cNvPr>
+          <p:cNvSpPr>
+            <a:spLocks xmlns:a="http://schemas.openxmlformats.org/drawingml/2006/main" noGrp="1"/>
+          </p:cNvSpPr>
+          <p:nvPr/>
+        </p:nvSpPr>
+        <p:spPr>
+          <a:xfrm xmlns:a="http://schemas.openxmlformats.org/drawingml/2006/main">
+            <a:off x="1066800" y="5124450"/>
+            <a:ext cx="7753350" cy="247650"/>
+          </a:xfrm>
+          <a:prstGeom xmlns:a="http://schemas.openxmlformats.org/drawingml/2006/main" prst="rect">
+            <a:avLst/>
+          </a:prstGeom>
+        </p:spPr>
+        <p:txBody>
+          <a:bodyPr xmlns:a="http://schemas.openxmlformats.org/drawingml/2006/main" lIns="0" tIns="0" rIns="0" bIns="0"/>
+          <a:lstStyle xmlns:a="http://schemas.openxmlformats.org/drawingml/2006/main"/>
+          <a:p xmlns:a="http://schemas.openxmlformats.org/drawingml/2006/main">
+            <a:pPr>
+              <a:defRPr sz="1275" b="1">
+                <a:solidFill>
+                  <a:srgbClr val="D49A45"/>
+                </a:solidFill>
+              </a:defRPr>
+            </a:pPr>
+            <a:r>
+              <a:rPr sz="1275" b="1">
+                <a:solidFill>
+                  <a:srgbClr val="D49A45"/>
+                </a:solidFill>
+              </a:rPr>
+              <a:t>LR pathway</a:t>
+            </a:r>
+          </a:p>
+        </p:txBody>
+      </p:sp>
+      <p:sp>
+        <p:nvSpPr>
+          <p:cNvPr id="10" name="">
+            <a:extLst xmlns:a="http://schemas.openxmlformats.org/drawingml/2006/main">
+              <a:ext uri="{FF2B5EF4-FFF2-40B4-BE49-F238E27FC236}">
+                <a16:creationId xmlns:a16="http://schemas.microsoft.com/office/drawing/2014/main" id="{1E622FAB-7B02-4337-A44C-770037990142}"/>
+              </a:ext>
+            </a:extLst>
+          </p:cNvPr>
+          <p:cNvSpPr>
+            <a:spLocks xmlns:a="http://schemas.openxmlformats.org/drawingml/2006/main" noGrp="1"/>
+          </p:cNvSpPr>
+          <p:nvPr/>
+        </p:nvSpPr>
+        <p:spPr>
+          <a:xfrm xmlns:a="http://schemas.openxmlformats.org/drawingml/2006/main">
+            <a:off x="1066800" y="5429250"/>
+            <a:ext cx="7753350" cy="323850"/>
+          </a:xfrm>
+          <a:prstGeom xmlns:a="http://schemas.openxmlformats.org/drawingml/2006/main" prst="rect">
+            <a:avLst/>
+          </a:prstGeom>
+        </p:spPr>
+        <p:txBody>
+          <a:bodyPr xmlns:a="http://schemas.openxmlformats.org/drawingml/2006/main" lIns="0" tIns="0" rIns="0" bIns="0"/>
+          <a:lstStyle xmlns:a="http://schemas.openxmlformats.org/drawingml/2006/main"/>
+          <a:p xmlns:a="http://schemas.openxmlformats.org/drawingml/2006/main">
+            <a:pPr>
+              <a:defRPr sz="1425">
+                <a:solidFill>
+                  <a:srgbClr val="17312B"/>
+                </a:solidFill>
+              </a:defRPr>
+            </a:pPr>
+            <a:r>
+              <a:rPr sz="1425">
+                <a:solidFill>
+                  <a:srgbClr val="17312B"/>
+                </a:solidFill>
+              </a:rPr>
+              <a:t>Restore = MIN(post-2008 clearing, LR deficit)</a:t>
+            </a:r>
+          </a:p>
+        </p:txBody>
+      </p:sp>
+      <p:sp>
+        <p:nvSpPr>
+          <p:cNvPr id="11" name="">
+            <a:extLst xmlns:a="http://schemas.openxmlformats.org/drawingml/2006/main">
+              <a:ext uri="{FF2B5EF4-FFF2-40B4-BE49-F238E27FC236}">
+                <a16:creationId xmlns:a16="http://schemas.microsoft.com/office/drawing/2014/main" id="{CF1573A7-2F9A-472F-A5EC-C4098EDBCDB1}"/>
+              </a:ext>
+            </a:extLst>
+          </p:cNvPr>
+          <p:cNvSpPr>
+            <a:spLocks xmlns:a="http://schemas.openxmlformats.org/drawingml/2006/main" noGrp="1"/>
+          </p:cNvSpPr>
+          <p:nvPr/>
+        </p:nvSpPr>
+        <p:spPr>
+          <a:xfrm xmlns:a="http://schemas.openxmlformats.org/drawingml/2006/main">
+            <a:off x="1066800" y="5810250"/>
+            <a:ext cx="7753350" cy="342900"/>
+          </a:xfrm>
+          <a:prstGeom xmlns:a="http://schemas.openxmlformats.org/drawingml/2006/main" prst="rect">
+            <a:avLst/>
+          </a:prstGeom>
+        </p:spPr>
+        <p:txBody>
+          <a:bodyPr xmlns:a="http://schemas.openxmlformats.org/drawingml/2006/main" lIns="0" tIns="0" rIns="0" bIns="0"/>
+          <a:lstStyle xmlns:a="http://schemas.openxmlformats.org/drawingml/2006/main"/>
+          <a:p xmlns:a="http://schemas.openxmlformats.org/drawingml/2006/main">
+            <a:pPr>
+              <a:defRPr sz="1800" b="1">
+                <a:solidFill>
+                  <a:srgbClr val="D49A45"/>
+                </a:solidFill>
+              </a:defRPr>
+            </a:pPr>
+            <a:r>
+              <a:rPr sz="1800" b="1">
+                <a:solidFill>
+                  <a:srgbClr val="D49A45"/>
+                </a:solidFill>
+              </a:rPr>
+              <a:t>= 0.00 ha restore · 53.90 ha compensate</a:t>
+            </a:r>
+          </a:p>
+        </p:txBody>
+      </p:sp>
+      <p:sp>
+        <p:nvSpPr>
+          <p:cNvPr id="12" name="">
+            <a:extLst xmlns:a="http://schemas.openxmlformats.org/drawingml/2006/main">
+              <a:ext uri="{FF2B5EF4-FFF2-40B4-BE49-F238E27FC236}">
+                <a16:creationId xmlns:a16="http://schemas.microsoft.com/office/drawing/2014/main" id="{EF628587-61C8-4746-A9C9-081BB7E94F6F}"/>
+              </a:ext>
+            </a:extLst>
+          </p:cNvPr>
+          <p:cNvSpPr>
+            <a:spLocks xmlns:a="http://schemas.openxmlformats.org/drawingml/2006/main" noGrp="1"/>
+          </p:cNvSpPr>
+          <p:nvPr/>
+        </p:nvSpPr>
+        <p:spPr>
+          <a:xfrm xmlns:a="http://schemas.openxmlformats.org/drawingml/2006/main">
+            <a:off x="9467850" y="5124450"/>
+            <a:ext cx="7753350" cy="247650"/>
+          </a:xfrm>
+          <a:prstGeom xmlns:a="http://schemas.openxmlformats.org/drawingml/2006/main" prst="rect">
+            <a:avLst/>
+          </a:prstGeom>
+        </p:spPr>
+        <p:txBody>
+          <a:bodyPr xmlns:a="http://schemas.openxmlformats.org/drawingml/2006/main" lIns="0" tIns="0" rIns="0" bIns="0"/>
+          <a:lstStyle xmlns:a="http://schemas.openxmlformats.org/drawingml/2006/main"/>
+          <a:p xmlns:a="http://schemas.openxmlformats.org/drawingml/2006/main">
+            <a:pPr>
+              <a:defRPr sz="1275" b="1">
+                <a:solidFill>
+                  <a:srgbClr val="D49A45"/>
+                </a:solidFill>
+              </a:defRPr>
+            </a:pPr>
+            <a:r>
+              <a:rPr sz="1275" b="1">
+                <a:solidFill>
+                  <a:srgbClr val="D49A45"/>
+                </a:solidFill>
+              </a:rPr>
+              <a:t>APP restoration</a:t>
+            </a:r>
+          </a:p>
+        </p:txBody>
+      </p:sp>
+      <p:sp>
+        <p:nvSpPr>
+          <p:cNvPr id="13" name="">
+            <a:extLst xmlns:a="http://schemas.openxmlformats.org/drawingml/2006/main">
+              <a:ext uri="{FF2B5EF4-FFF2-40B4-BE49-F238E27FC236}">
+                <a16:creationId xmlns:a16="http://schemas.microsoft.com/office/drawing/2014/main" id="{171111E6-760A-4B7C-87B7-D0FCFE39963F}"/>
+              </a:ext>
+            </a:extLst>
+          </p:cNvPr>
+          <p:cNvSpPr>
+            <a:spLocks xmlns:a="http://schemas.openxmlformats.org/drawingml/2006/main" noGrp="1"/>
+          </p:cNvSpPr>
+          <p:nvPr/>
+        </p:nvSpPr>
+        <p:spPr>
+          <a:xfrm xmlns:a="http://schemas.openxmlformats.org/drawingml/2006/main">
+            <a:off x="9467850" y="5429250"/>
+            <a:ext cx="7753350" cy="323850"/>
+          </a:xfrm>
+          <a:prstGeom xmlns:a="http://schemas.openxmlformats.org/drawingml/2006/main" prst="rect">
+            <a:avLst/>
+          </a:prstGeom>
+        </p:spPr>
+        <p:txBody>
+          <a:bodyPr xmlns:a="http://schemas.openxmlformats.org/drawingml/2006/main" lIns="0" tIns="0" rIns="0" bIns="0"/>
+          <a:lstStyle xmlns:a="http://schemas.openxmlformats.org/drawingml/2006/main"/>
+          <a:p xmlns:a="http://schemas.openxmlformats.org/drawingml/2006/main">
+            <a:pPr>
+              <a:defRPr sz="1425">
+                <a:solidFill>
+                  <a:srgbClr val="17312B"/>
+                </a:solidFill>
+              </a:defRPr>
+            </a:pPr>
+            <a:r>
+              <a:rPr sz="1425">
+                <a:solidFill>
+                  <a:srgbClr val="17312B"/>
+                </a:solidFill>
+              </a:rPr>
+              <a:t>Pre-2008 component after cap + post-2008 APP clearing</a:t>
+            </a:r>
+          </a:p>
+        </p:txBody>
+      </p:sp>
+      <p:sp>
+        <p:nvSpPr>
+          <p:cNvPr id="14" name="">
+            <a:extLst xmlns:a="http://schemas.openxmlformats.org/drawingml/2006/main">
+              <a:ext uri="{FF2B5EF4-FFF2-40B4-BE49-F238E27FC236}">
+                <a16:creationId xmlns:a16="http://schemas.microsoft.com/office/drawing/2014/main" id="{5C04531E-8AC0-4173-AD56-0E72F3854429}"/>
+              </a:ext>
+            </a:extLst>
+          </p:cNvPr>
+          <p:cNvSpPr>
+            <a:spLocks xmlns:a="http://schemas.openxmlformats.org/drawingml/2006/main" noGrp="1"/>
+          </p:cNvSpPr>
+          <p:nvPr/>
+        </p:nvSpPr>
+        <p:spPr>
+          <a:xfrm xmlns:a="http://schemas.openxmlformats.org/drawingml/2006/main">
+            <a:off x="9467850" y="5810250"/>
+            <a:ext cx="7753350" cy="342900"/>
+          </a:xfrm>
+          <a:prstGeom xmlns:a="http://schemas.openxmlformats.org/drawingml/2006/main" prst="rect">
+            <a:avLst/>
+          </a:prstGeom>
+        </p:spPr>
+        <p:txBody>
+          <a:bodyPr xmlns:a="http://schemas.openxmlformats.org/drawingml/2006/main" lIns="0" tIns="0" rIns="0" bIns="0"/>
+          <a:lstStyle xmlns:a="http://schemas.openxmlformats.org/drawingml/2006/main"/>
+          <a:p xmlns:a="http://schemas.openxmlformats.org/drawingml/2006/main">
+            <a:pPr>
+              <a:defRPr sz="1800" b="1">
+                <a:solidFill>
+                  <a:srgbClr val="D49A45"/>
+                </a:solidFill>
+              </a:defRPr>
+            </a:pPr>
+            <a:r>
+              <a:rPr sz="1800" b="1">
+                <a:solidFill>
+                  <a:srgbClr val="D49A45"/>
+                </a:solidFill>
+              </a:rPr>
+              <a:t>= 3.17 ha</a:t>
+            </a:r>
+          </a:p>
+        </p:txBody>
+      </p:sp>
+      <p:sp>
+        <p:nvSpPr>
+          <p:cNvPr id="15" name="">
+            <a:extLst xmlns:a="http://schemas.openxmlformats.org/drawingml/2006/main">
+              <a:ext uri="{FF2B5EF4-FFF2-40B4-BE49-F238E27FC236}">
+                <a16:creationId xmlns:a16="http://schemas.microsoft.com/office/drawing/2014/main" id="{406DE4C3-E84F-422F-9B2C-FE55DEDE20DE}"/>
+              </a:ext>
+            </a:extLst>
+          </p:cNvPr>
+          <p:cNvSpPr>
+            <a:spLocks xmlns:a="http://schemas.openxmlformats.org/drawingml/2006/main" noGrp="1"/>
+          </p:cNvSpPr>
+          <p:nvPr/>
+        </p:nvSpPr>
+        <p:spPr>
+          <a:xfrm xmlns:a="http://schemas.openxmlformats.org/drawingml/2006/main">
+            <a:off x="857250" y="7848600"/>
+            <a:ext cx="6800850" cy="266700"/>
+          </a:xfrm>
+          <a:prstGeom xmlns:a="http://schemas.openxmlformats.org/drawingml/2006/main" prst="rect">
+            <a:avLst/>
+          </a:prstGeom>
+        </p:spPr>
+        <p:txBody>
+          <a:bodyPr xmlns:a="http://schemas.openxmlformats.org/drawingml/2006/main" lIns="0" tIns="0" rIns="0" bIns="0"/>
+          <a:lstStyle xmlns:a="http://schemas.openxmlformats.org/drawingml/2006/main"/>
+          <a:p xmlns:a="http://schemas.openxmlformats.org/drawingml/2006/main">
+            <a:pPr>
+              <a:defRPr sz="1275" b="1">
+                <a:solidFill>
+                  <a:srgbClr val="5D716C"/>
+                </a:solidFill>
+              </a:defRPr>
+            </a:pPr>
+            <a:r>
+              <a:rPr sz="1275" b="1">
+                <a:solidFill>
+                  <a:srgbClr val="5D716C"/>
+                </a:solidFill>
+              </a:rPr>
+              <a:t>BASELINE TOTAL</a:t>
+            </a:r>
+          </a:p>
+        </p:txBody>
+      </p:sp>
+      <p:sp>
+        <p:nvSpPr>
+          <p:cNvPr id="16" name="">
+            <a:extLst xmlns:a="http://schemas.openxmlformats.org/drawingml/2006/main">
+              <a:ext uri="{FF2B5EF4-FFF2-40B4-BE49-F238E27FC236}">
+                <a16:creationId xmlns:a16="http://schemas.microsoft.com/office/drawing/2014/main" id="{5C156DC4-3EC1-4D18-B3E3-EB009ABBFAA5}"/>
+              </a:ext>
+            </a:extLst>
+          </p:cNvPr>
+          <p:cNvSpPr>
+            <a:spLocks xmlns:a="http://schemas.openxmlformats.org/drawingml/2006/main" noGrp="1"/>
+          </p:cNvSpPr>
+          <p:nvPr/>
+        </p:nvSpPr>
+        <p:spPr>
+          <a:xfrm xmlns:a="http://schemas.openxmlformats.org/drawingml/2006/main">
+            <a:off x="857250" y="8191500"/>
+            <a:ext cx="6800850" cy="552450"/>
+          </a:xfrm>
+          <a:prstGeom xmlns:a="http://schemas.openxmlformats.org/drawingml/2006/main" prst="rect">
+            <a:avLst/>
+          </a:prstGeom>
+        </p:spPr>
+        <p:txBody>
+          <a:bodyPr xmlns:a="http://schemas.openxmlformats.org/drawingml/2006/main" lIns="0" tIns="0" rIns="0" bIns="0"/>
+          <a:lstStyle xmlns:a="http://schemas.openxmlformats.org/drawingml/2006/main"/>
+          <a:p xmlns:a="http://schemas.openxmlformats.org/drawingml/2006/main">
+            <a:pPr>
+              <a:defRPr sz="3300" b="1">
+                <a:solidFill>
+                  <a:srgbClr val="B95B4C"/>
+                </a:solidFill>
+              </a:defRPr>
+            </a:pPr>
+            <a:r>
+              <a:rPr sz="3300" b="1">
+                <a:solidFill>
+                  <a:srgbClr val="B95B4C"/>
+                </a:solidFill>
+              </a:rPr>
+              <a:t>57.07 ha</a:t>
+            </a:r>
+          </a:p>
+        </p:txBody>
+      </p:sp>
+      <p:sp>
+        <p:nvSpPr>
+          <p:cNvPr id="17" name="">
+            <a:extLst xmlns:a="http://schemas.openxmlformats.org/drawingml/2006/main">
+              <a:ext uri="{FF2B5EF4-FFF2-40B4-BE49-F238E27FC236}">
+                <a16:creationId xmlns:a16="http://schemas.microsoft.com/office/drawing/2014/main" id="{5DA9B4AA-D6E8-429F-A99A-3844F8053D5E}"/>
+              </a:ext>
+            </a:extLst>
+          </p:cNvPr>
+          <p:cNvSpPr>
+            <a:spLocks xmlns:a="http://schemas.openxmlformats.org/drawingml/2006/main" noGrp="1"/>
+          </p:cNvSpPr>
+          <p:nvPr/>
+        </p:nvSpPr>
+        <p:spPr>
+          <a:xfrm xmlns:a="http://schemas.openxmlformats.org/drawingml/2006/main">
+            <a:off x="7924800" y="7848600"/>
+            <a:ext cx="9505950" cy="266700"/>
+          </a:xfrm>
+          <a:prstGeom xmlns:a="http://schemas.openxmlformats.org/drawingml/2006/main" prst="rect">
+            <a:avLst/>
+          </a:prstGeom>
+        </p:spPr>
+        <p:txBody>
+          <a:bodyPr xmlns:a="http://schemas.openxmlformats.org/drawingml/2006/main" lIns="0" tIns="0" rIns="0" bIns="0"/>
+          <a:lstStyle xmlns:a="http://schemas.openxmlformats.org/drawingml/2006/main"/>
+          <a:p xmlns:a="http://schemas.openxmlformats.org/drawingml/2006/main">
+            <a:pPr>
+              <a:defRPr sz="1275" b="1">
+                <a:solidFill>
+                  <a:srgbClr val="5D716C"/>
+                </a:solidFill>
+              </a:defRPr>
+            </a:pPr>
+            <a:r>
+              <a:rPr sz="1275" b="1">
+                <a:solidFill>
+                  <a:srgbClr val="5D716C"/>
+                </a:solidFill>
+              </a:rPr>
+              <a:t>SECONDARY VEGETATION SCENARIO</a:t>
+            </a:r>
+          </a:p>
+        </p:txBody>
+      </p:sp>
+      <p:sp>
+        <p:nvSpPr>
+          <p:cNvPr id="18" name="">
+            <a:extLst xmlns:a="http://schemas.openxmlformats.org/drawingml/2006/main">
+              <a:ext uri="{FF2B5EF4-FFF2-40B4-BE49-F238E27FC236}">
+                <a16:creationId xmlns:a16="http://schemas.microsoft.com/office/drawing/2014/main" id="{1B384067-78A1-4764-9F5D-A16674365148}"/>
+              </a:ext>
+            </a:extLst>
+          </p:cNvPr>
+          <p:cNvSpPr>
+            <a:spLocks xmlns:a="http://schemas.openxmlformats.org/drawingml/2006/main" noGrp="1"/>
+          </p:cNvSpPr>
+          <p:nvPr/>
+        </p:nvSpPr>
+        <p:spPr>
+          <a:xfrm xmlns:a="http://schemas.openxmlformats.org/drawingml/2006/main">
+            <a:off x="7924800" y="8191500"/>
+            <a:ext cx="9505950" cy="552450"/>
+          </a:xfrm>
+          <a:prstGeom xmlns:a="http://schemas.openxmlformats.org/drawingml/2006/main" prst="rect">
+            <a:avLst/>
+          </a:prstGeom>
+        </p:spPr>
+        <p:txBody>
+          <a:bodyPr xmlns:a="http://schemas.openxmlformats.org/drawingml/2006/main" lIns="0" tIns="0" rIns="0" bIns="0"/>
+          <a:lstStyle xmlns:a="http://schemas.openxmlformats.org/drawingml/2006/main"/>
+          <a:p xmlns:a="http://schemas.openxmlformats.org/drawingml/2006/main">
+            <a:pPr>
+              <a:defRPr sz="2625" b="1">
+                <a:solidFill>
+                  <a:srgbClr val="1E6B52"/>
+                </a:solidFill>
+              </a:defRPr>
+            </a:pPr>
+            <a:r>
+              <a:rPr sz="2625" b="1">
+                <a:solidFill>
+                  <a:srgbClr val="1E6B52"/>
+                </a:solidFill>
+              </a:rPr>
+              <a:t>48.40 ha added → 8.67 ha remaining</a:t>
+            </a:r>
+          </a:p>
+        </p:txBody>
+      </p:sp>
+      <p:sp>
+        <p:nvSpPr>
+          <p:cNvPr id="19" name="source-8">
+            <a:extLst xmlns:a="http://schemas.openxmlformats.org/drawingml/2006/main">
+              <a:ext uri="{FF2B5EF4-FFF2-40B4-BE49-F238E27FC236}">
+                <a16:creationId xmlns:a16="http://schemas.microsoft.com/office/drawing/2014/main" id="{D075FDAC-0563-4D15-BA8E-4994DE7BD4A0}"/>
+              </a:ext>
+            </a:extLst>
+          </p:cNvPr>
+          <p:cNvSpPr>
+            <a:spLocks xmlns:a="http://schemas.openxmlformats.org/drawingml/2006/main" noGrp="1"/>
+          </p:cNvSpPr>
+          <p:nvPr/>
+        </p:nvSpPr>
+        <p:spPr>
+          <a:xfrm xmlns:a="http://schemas.openxmlformats.org/drawingml/2006/main">
+            <a:off x="857250" y="9467850"/>
+            <a:ext cx="3295650" cy="266700"/>
+          </a:xfrm>
+          <a:prstGeom xmlns:a="http://schemas.openxmlformats.org/drawingml/2006/main" prst="rect">
+            <a:avLst/>
+          </a:prstGeom>
+        </p:spPr>
+        <p:txBody>
+          <a:bodyPr xmlns:a="http://schemas.openxmlformats.org/drawingml/2006/main" lIns="0" tIns="0" rIns="0" bIns="0"/>
+          <a:lstStyle xmlns:a="http://schemas.openxmlformats.org/drawingml/2006/main"/>
+          <a:p xmlns:a="http://schemas.openxmlformats.org/drawingml/2006/main">
+            <a:pPr>
+              <a:defRPr sz="975">
+                <a:solidFill>
+                  <a:srgbClr val="5D716C"/>
+                </a:solidFill>
+              </a:defRPr>
+            </a:pPr>
+            <a:r>
+              <a:rPr sz="975">
+                <a:solidFill>
+                  <a:srgbClr val="5D716C"/>
+                </a:solidFill>
+              </a:rPr>
+              <a:t>Source: MT Forest Code compliance mega table · final 2026-09-30</a:t>
+            </a:r>
+          </a:p>
+        </p:txBody>
+      </p:sp>
+      <p:sp>
+        <p:nvSpPr>
+          <p:cNvPr id="20" name="page-8">
+            <a:extLst xmlns:a="http://schemas.openxmlformats.org/drawingml/2006/main">
+              <a:ext uri="{FF2B5EF4-FFF2-40B4-BE49-F238E27FC236}">
+                <a16:creationId xmlns:a16="http://schemas.microsoft.com/office/drawing/2014/main" id="{F893B9BA-72FF-47DC-919D-90CAB489D4EF}"/>
+              </a:ext>
+            </a:extLst>
+          </p:cNvPr>
+          <p:cNvSpPr>
+            <a:spLocks xmlns:a="http://schemas.openxmlformats.org/drawingml/2006/main" noGrp="1"/>
+          </p:cNvSpPr>
+          <p:nvPr/>
+        </p:nvSpPr>
+        <p:spPr>
+          <a:xfrm xmlns:a="http://schemas.openxmlformats.org/drawingml/2006/main">
+            <a:off x="16859250" y="9467850"/>
+            <a:ext cx="571500" cy="266700"/>
+          </a:xfrm>
+          <a:prstGeom xmlns:a="http://schemas.openxmlformats.org/drawingml/2006/main" prst="rect">
+            <a:avLst/>
+          </a:prstGeom>
+        </p:spPr>
+        <p:txBody>
+          <a:bodyPr xmlns:a="http://schemas.openxmlformats.org/drawingml/2006/main" lIns="0" tIns="0" rIns="0" bIns="0"/>
+          <a:lstStyle xmlns:a="http://schemas.openxmlformats.org/drawingml/2006/main"/>
+          <a:p xmlns:a="http://schemas.openxmlformats.org/drawingml/2006/main">
+            <a:pPr>
+              <a:defRPr sz="1050" b="1">
+                <a:solidFill>
+                  <a:srgbClr val="1E6B52"/>
+                </a:solidFill>
+              </a:defRPr>
+            </a:pPr>
+            <a:r>
+              <a:rPr sz="1050" b="1">
+                <a:solidFill>
+                  <a:srgbClr val="1E6B52"/>
+                </a:solidFill>
+              </a:rPr>
+              <a:t>08</a:t>
+            </a:r>
+          </a:p>
+        </p:txBody>
+      </p:sp>
+    </p:spTree>
+    <p:extLst>
+      <p:ext uri="{BB962C8B-B14F-4D97-AF65-F5344CB8AC3E}">
+        <p14:creationId xmlns:p14="http://schemas.microsoft.com/office/powerpoint/2010/main" val="393196816"/>
+      </p:ext>
+    </p:extLst>
+  </p:cSld>
+</p:sld>
+</file>
+
+<file path=ppt/slides/slide9.xml><?xml version="1.0" encoding="utf-8"?>
+<p:sld xmlns:p="http://schemas.openxmlformats.org/presentationml/2006/main">
+  <p:cSld>
+    <p:spTree>
+      <p:nvGrpSpPr>
+        <p:cNvPr id="1" name=""/>
+        <p:cNvGrpSpPr/>
+        <p:nvPr/>
+      </p:nvGrpSpPr>
+      <p:grpSpPr>
+        <a:xfrm xmlns:a="http://schemas.openxmlformats.org/drawingml/2006/main"/>
+      </p:grpSpPr>
+      <p:sp>
+        <p:nvSpPr>
+          <p:cNvPr id="1" name="slide-title-9">
+            <a:extLst xmlns:a="http://schemas.openxmlformats.org/drawingml/2006/main">
+              <a:ext uri="{FF2B5EF4-FFF2-40B4-BE49-F238E27FC236}">
+                <a16:creationId xmlns:a16="http://schemas.microsoft.com/office/drawing/2014/main" id="{FF075B3F-9F56-4BF1-B827-7189DCA10E0C}"/>
+              </a:ext>
+            </a:extLst>
+          </p:cNvPr>
+          <p:cNvSpPr>
+            <a:spLocks xmlns:a="http://schemas.openxmlformats.org/drawingml/2006/main" noGrp="1"/>
+          </p:cNvSpPr>
+          <p:nvPr/>
+        </p:nvSpPr>
+        <p:spPr>
+          <a:xfrm xmlns:a="http://schemas.openxmlformats.org/drawingml/2006/main">
+            <a:off x="857250" y="533400"/>
+            <a:ext cx="16573500" cy="647700"/>
+          </a:xfrm>
+          <a:prstGeom xmlns:a="http://schemas.openxmlformats.org/drawingml/2006/main" prst="rect">
+            <a:avLst/>
+          </a:prstGeom>
+        </p:spPr>
+        <p:txBody>
+          <a:bodyPr xmlns:a="http://schemas.openxmlformats.org/drawingml/2006/main" lIns="0" tIns="0" rIns="0" bIns="0"/>
+          <a:lstStyle xmlns:a="http://schemas.openxmlformats.org/drawingml/2006/main"/>
+          <a:p xmlns:a="http://schemas.openxmlformats.org/drawingml/2006/main">
+            <a:pPr>
+              <a:defRPr sz="3450" b="1">
+                <a:solidFill>
+                  <a:srgbClr val="17312B"/>
+                </a:solidFill>
+              </a:defRPr>
+            </a:pPr>
+            <a:r>
+              <a:rPr sz="3450" b="1">
+                <a:solidFill>
+                  <a:srgbClr val="17312B"/>
+                </a:solidFill>
+              </a:rPr>
+              <a:t>What the two examples make visible</a:t>
+            </a:r>
+          </a:p>
+        </p:txBody>
+      </p:sp>
+      <p:sp>
+        <p:nvSpPr>
+          <p:cNvPr id="2" name="slide-subtitle-9">
+            <a:extLst xmlns:a="http://schemas.openxmlformats.org/drawingml/2006/main">
+              <a:ext uri="{FF2B5EF4-FFF2-40B4-BE49-F238E27FC236}">
+                <a16:creationId xmlns:a16="http://schemas.microsoft.com/office/drawing/2014/main" id="{0F228F9B-4551-446C-88A6-BEE4BDF09B52}"/>
+              </a:ext>
+            </a:extLst>
+          </p:cNvPr>
+          <p:cNvSpPr>
+            <a:spLocks xmlns:a="http://schemas.openxmlformats.org/drawingml/2006/main" noGrp="1"/>
+          </p:cNvSpPr>
+          <p:nvPr/>
+        </p:nvSpPr>
+        <p:spPr>
+          <a:xfrm xmlns:a="http://schemas.openxmlformats.org/drawingml/2006/main">
+            <a:off x="857250" y="1276350"/>
+            <a:ext cx="9791700" cy="552450"/>
+          </a:xfrm>
+          <a:prstGeom xmlns:a="http://schemas.openxmlformats.org/drawingml/2006/main" prst="rect">
+            <a:avLst/>
+          </a:prstGeom>
+        </p:spPr>
+        <p:txBody>
+          <a:bodyPr xmlns:a="http://schemas.openxmlformats.org/drawingml/2006/main" lIns="0" tIns="0" rIns="0" bIns="0"/>
+          <a:lstStyle xmlns:a="http://schemas.openxmlformats.org/drawingml/2006/main"/>
+          <a:p xmlns:a="http://schemas.openxmlformats.org/drawingml/2006/main">
+            <a:pPr>
+              <a:defRPr sz="1875">
+                <a:solidFill>
+                  <a:srgbClr val="5D716C"/>
+                </a:solidFill>
+              </a:defRPr>
+            </a:pPr>
+            <a:r>
+              <a:rPr sz="1875">
+                <a:solidFill>
+                  <a:srgbClr val="5D716C"/>
+                </a:solidFill>
+              </a:rPr>
+              <a:t>The threshold changes the requirement—not the need for transparent inputs and reconciled outputs.</a:t>
+            </a:r>
+          </a:p>
+        </p:txBody>
+      </p:sp>
+      <p:sp>
+        <p:nvSpPr>
+          <p:cNvPr id="3" name="">
+            <a:extLst xmlns:a="http://schemas.openxmlformats.org/drawingml/2006/main">
+              <a:ext uri="{FF2B5EF4-FFF2-40B4-BE49-F238E27FC236}">
+                <a16:creationId xmlns:a16="http://schemas.microsoft.com/office/drawing/2014/main" id="{2BBD1C13-F768-4286-BADE-31480291073A}"/>
+              </a:ext>
+            </a:extLst>
+          </p:cNvPr>
+          <p:cNvSpPr>
+            <a:spLocks xmlns:a="http://schemas.openxmlformats.org/drawingml/2006/main" noGrp="1"/>
+          </p:cNvSpPr>
+          <p:nvPr/>
+        </p:nvSpPr>
+        <p:spPr>
+          <a:xfrm xmlns:a="http://schemas.openxmlformats.org/drawingml/2006/main">
+            <a:off x="1028700" y="2724150"/>
+            <a:ext cx="3105150" cy="304800"/>
+          </a:xfrm>
+          <a:prstGeom xmlns:a="http://schemas.openxmlformats.org/drawingml/2006/main" prst="rect">
+            <a:avLst/>
+          </a:prstGeom>
+        </p:spPr>
+        <p:txBody>
+          <a:bodyPr xmlns:a="http://schemas.openxmlformats.org/drawingml/2006/main" lIns="0" tIns="0" rIns="0" bIns="0"/>
+          <a:lstStyle xmlns:a="http://schemas.openxmlformats.org/drawingml/2006/main"/>
+          <a:p xmlns:a="http://schemas.openxmlformats.org/drawingml/2006/main">
+            <a:pPr>
+              <a:defRPr sz="1275">
+                <a:solidFill>
+                  <a:srgbClr val="5D716C"/>
+                </a:solidFill>
+              </a:defRPr>
+            </a:pPr>
+            <a:r>
+              <a:rPr sz="1275">
+                <a:solidFill>
+                  <a:srgbClr val="5D716C"/>
+                </a:solidFill>
+              </a:rPr>
+              <a:t>Property</a:t>
+            </a:r>
+          </a:p>
+        </p:txBody>
+      </p:sp>
+      <p:sp>
+        <p:nvSpPr>
+          <p:cNvPr id="4" name="">
+            <a:extLst xmlns:a="http://schemas.openxmlformats.org/drawingml/2006/main">
+              <a:ext uri="{FF2B5EF4-FFF2-40B4-BE49-F238E27FC236}">
+                <a16:creationId xmlns:a16="http://schemas.microsoft.com/office/drawing/2014/main" id="{B2B51C8C-5974-47B3-9836-66CF498964B3}"/>
+              </a:ext>
+            </a:extLst>
+          </p:cNvPr>
+          <p:cNvSpPr>
+            <a:spLocks xmlns:a="http://schemas.openxmlformats.org/drawingml/2006/main" noGrp="1"/>
+          </p:cNvSpPr>
+          <p:nvPr/>
+        </p:nvSpPr>
+        <p:spPr>
+          <a:xfrm xmlns:a="http://schemas.openxmlformats.org/drawingml/2006/main">
+            <a:off x="4133850" y="2724150"/>
+            <a:ext cx="2305050" cy="323850"/>
+          </a:xfrm>
+          <a:prstGeom xmlns:a="http://schemas.openxmlformats.org/drawingml/2006/main" prst="rect">
+            <a:avLst/>
+          </a:prstGeom>
+        </p:spPr>
+        <p:txBody>
+          <a:bodyPr xmlns:a="http://schemas.openxmlformats.org/drawingml/2006/main" lIns="0" tIns="0" rIns="0" bIns="0"/>
+          <a:lstStyle xmlns:a="http://schemas.openxmlformats.org/drawingml/2006/main"/>
+          <a:p xmlns:a="http://schemas.openxmlformats.org/drawingml/2006/main">
+            <a:pPr>
+              <a:defRPr sz="1650" b="1">
+                <a:solidFill>
+                  <a:srgbClr val="1E6B52"/>
+                </a:solidFill>
+              </a:defRPr>
+            </a:pPr>
+            <a:r>
+              <a:rPr sz="1650" b="1">
+                <a:solidFill>
+                  <a:srgbClr val="1E6B52"/>
+                </a:solidFill>
+              </a:rPr>
+              <a:t>&gt; 4 modules</a:t>
+            </a:r>
+          </a:p>
+        </p:txBody>
+      </p:sp>
+      <p:sp>
+        <p:nvSpPr>
+          <p:cNvPr id="5" name="">
+            <a:extLst xmlns:a="http://schemas.openxmlformats.org/drawingml/2006/main">
+              <a:ext uri="{FF2B5EF4-FFF2-40B4-BE49-F238E27FC236}">
+                <a16:creationId xmlns:a16="http://schemas.microsoft.com/office/drawing/2014/main" id="{F223C350-BD13-4020-8E85-A8333C375148}"/>
+              </a:ext>
+            </a:extLst>
+          </p:cNvPr>
+          <p:cNvSpPr>
+            <a:spLocks xmlns:a="http://schemas.openxmlformats.org/drawingml/2006/main" noGrp="1"/>
+          </p:cNvSpPr>
+          <p:nvPr/>
+        </p:nvSpPr>
+        <p:spPr>
+          <a:xfrm xmlns:a="http://schemas.openxmlformats.org/drawingml/2006/main">
+            <a:off x="1028700" y="4133850"/>
+            <a:ext cx="3105150" cy="304800"/>
+          </a:xfrm>
+          <a:prstGeom xmlns:a="http://schemas.openxmlformats.org/drawingml/2006/main" prst="rect">
+            <a:avLst/>
+          </a:prstGeom>
+        </p:spPr>
+        <p:txBody>
+          <a:bodyPr xmlns:a="http://schemas.openxmlformats.org/drawingml/2006/main" lIns="0" tIns="0" rIns="0" bIns="0"/>
+          <a:lstStyle xmlns:a="http://schemas.openxmlformats.org/drawingml/2006/main"/>
+          <a:p xmlns:a="http://schemas.openxmlformats.org/drawingml/2006/main">
+            <a:pPr>
+              <a:defRPr sz="1275">
+                <a:solidFill>
+                  <a:srgbClr val="5D716C"/>
+                </a:solidFill>
+              </a:defRPr>
+            </a:pPr>
+            <a:r>
+              <a:rPr sz="1275">
+                <a:solidFill>
+                  <a:srgbClr val="5D716C"/>
+                </a:solidFill>
+              </a:rPr>
+              <a:t>Legal branch</a:t>
+            </a:r>
+          </a:p>
+        </p:txBody>
+      </p:sp>
+      <p:sp>
+        <p:nvSpPr>
+          <p:cNvPr id="6" name="">
+            <a:extLst xmlns:a="http://schemas.openxmlformats.org/drawingml/2006/main">
+              <a:ext uri="{FF2B5EF4-FFF2-40B4-BE49-F238E27FC236}">
+                <a16:creationId xmlns:a16="http://schemas.microsoft.com/office/drawing/2014/main" id="{AAC785F8-D86D-446F-B1C2-2F2B9A62A081}"/>
+              </a:ext>
+            </a:extLst>
+          </p:cNvPr>
+          <p:cNvSpPr>
+            <a:spLocks xmlns:a="http://schemas.openxmlformats.org/drawingml/2006/main" noGrp="1"/>
+          </p:cNvSpPr>
+          <p:nvPr/>
+        </p:nvSpPr>
+        <p:spPr>
+          <a:xfrm xmlns:a="http://schemas.openxmlformats.org/drawingml/2006/main">
+            <a:off x="4133850" y="4133850"/>
+            <a:ext cx="2305050" cy="323850"/>
+          </a:xfrm>
+          <a:prstGeom xmlns:a="http://schemas.openxmlformats.org/drawingml/2006/main" prst="rect">
+            <a:avLst/>
+          </a:prstGeom>
+        </p:spPr>
+        <p:txBody>
+          <a:bodyPr xmlns:a="http://schemas.openxmlformats.org/drawingml/2006/main" lIns="0" tIns="0" rIns="0" bIns="0"/>
+          <a:lstStyle xmlns:a="http://schemas.openxmlformats.org/drawingml/2006/main"/>
+          <a:p xmlns:a="http://schemas.openxmlformats.org/drawingml/2006/main">
+            <a:pPr>
+              <a:defRPr sz="1650" b="1">
+                <a:solidFill>
+                  <a:srgbClr val="1E6B52"/>
+                </a:solidFill>
+              </a:defRPr>
+            </a:pPr>
+            <a:r>
+              <a:rPr sz="1650" b="1">
+                <a:solidFill>
+                  <a:srgbClr val="1E6B52"/>
+                </a:solidFill>
+              </a:rPr>
+              <a:t>Article 68</a:t>
+            </a:r>
+          </a:p>
+        </p:txBody>
+      </p:sp>
+      <p:sp>
+        <p:nvSpPr>
+          <p:cNvPr id="7" name="">
+            <a:extLst xmlns:a="http://schemas.openxmlformats.org/drawingml/2006/main">
+              <a:ext uri="{FF2B5EF4-FFF2-40B4-BE49-F238E27FC236}">
+                <a16:creationId xmlns:a16="http://schemas.microsoft.com/office/drawing/2014/main" id="{B652D452-8B67-43C0-BEDC-52B6A9B1992A}"/>
+              </a:ext>
+            </a:extLst>
+          </p:cNvPr>
+          <p:cNvSpPr>
+            <a:spLocks xmlns:a="http://schemas.openxmlformats.org/drawingml/2006/main" noGrp="1"/>
+          </p:cNvSpPr>
+          <p:nvPr/>
+        </p:nvSpPr>
+        <p:spPr>
+          <a:xfrm xmlns:a="http://schemas.openxmlformats.org/drawingml/2006/main">
+            <a:off x="1028700" y="5543550"/>
+            <a:ext cx="3105150" cy="304800"/>
+          </a:xfrm>
+          <a:prstGeom xmlns:a="http://schemas.openxmlformats.org/drawingml/2006/main" prst="rect">
+            <a:avLst/>
+          </a:prstGeom>
+        </p:spPr>
+        <p:txBody>
+          <a:bodyPr xmlns:a="http://schemas.openxmlformats.org/drawingml/2006/main" lIns="0" tIns="0" rIns="0" bIns="0"/>
+          <a:lstStyle xmlns:a="http://schemas.openxmlformats.org/drawingml/2006/main"/>
+          <a:p xmlns:a="http://schemas.openxmlformats.org/drawingml/2006/main">
+            <a:pPr>
+              <a:defRPr sz="1275">
+                <a:solidFill>
+                  <a:srgbClr val="5D716C"/>
+                </a:solidFill>
+              </a:defRPr>
+            </a:pPr>
+            <a:r>
+              <a:rPr sz="1275">
+                <a:solidFill>
+                  <a:srgbClr val="5D716C"/>
+                </a:solidFill>
+              </a:rPr>
+              <a:t>Requirement</a:t>
+            </a:r>
+          </a:p>
+        </p:txBody>
+      </p:sp>
+      <p:sp>
+        <p:nvSpPr>
+          <p:cNvPr id="8" name="">
+            <a:extLst xmlns:a="http://schemas.openxmlformats.org/drawingml/2006/main">
+              <a:ext uri="{FF2B5EF4-FFF2-40B4-BE49-F238E27FC236}">
+                <a16:creationId xmlns:a16="http://schemas.microsoft.com/office/drawing/2014/main" id="{00BD8D05-F56D-404A-A1CA-D5F03DE7CCBC}"/>
+              </a:ext>
+            </a:extLst>
+          </p:cNvPr>
+          <p:cNvSpPr>
+            <a:spLocks xmlns:a="http://schemas.openxmlformats.org/drawingml/2006/main" noGrp="1"/>
+          </p:cNvSpPr>
+          <p:nvPr/>
+        </p:nvSpPr>
+        <p:spPr>
+          <a:xfrm xmlns:a="http://schemas.openxmlformats.org/drawingml/2006/main">
+            <a:off x="4133850" y="5543550"/>
+            <a:ext cx="2305050" cy="323850"/>
+          </a:xfrm>
+          <a:prstGeom xmlns:a="http://schemas.openxmlformats.org/drawingml/2006/main" prst="rect">
+            <a:avLst/>
+          </a:prstGeom>
+        </p:spPr>
+        <p:txBody>
+          <a:bodyPr xmlns:a="http://schemas.openxmlformats.org/drawingml/2006/main" lIns="0" tIns="0" rIns="0" bIns="0"/>
+          <a:lstStyle xmlns:a="http://schemas.openxmlformats.org/drawingml/2006/main"/>
+          <a:p xmlns:a="http://schemas.openxmlformats.org/drawingml/2006/main">
+            <a:pPr>
+              <a:defRPr sz="1650" b="1">
+                <a:solidFill>
+                  <a:srgbClr val="1E6B52"/>
+                </a:solidFill>
+              </a:defRPr>
+            </a:pPr>
+            <a:r>
+              <a:rPr sz="1650" b="1">
+                <a:solidFill>
+                  <a:srgbClr val="1E6B52"/>
+                </a:solidFill>
+              </a:rPr>
+              <a:t>170.75 ha</a:t>
+            </a:r>
+          </a:p>
+        </p:txBody>
+      </p:sp>
+      <p:sp>
+        <p:nvSpPr>
+          <p:cNvPr id="9" name="">
+            <a:extLst xmlns:a="http://schemas.openxmlformats.org/drawingml/2006/main">
+              <a:ext uri="{FF2B5EF4-FFF2-40B4-BE49-F238E27FC236}">
+                <a16:creationId xmlns:a16="http://schemas.microsoft.com/office/drawing/2014/main" id="{2E0D2764-D405-4EBB-B3F0-81C9A5EE22EA}"/>
+              </a:ext>
+            </a:extLst>
+          </p:cNvPr>
+          <p:cNvSpPr>
+            <a:spLocks xmlns:a="http://schemas.openxmlformats.org/drawingml/2006/main" noGrp="1"/>
+          </p:cNvSpPr>
+          <p:nvPr/>
+        </p:nvSpPr>
+        <p:spPr>
+          <a:xfrm xmlns:a="http://schemas.openxmlformats.org/drawingml/2006/main">
+            <a:off x="1028700" y="6953250"/>
+            <a:ext cx="3105150" cy="304800"/>
+          </a:xfrm>
+          <a:prstGeom xmlns:a="http://schemas.openxmlformats.org/drawingml/2006/main" prst="rect">
+            <a:avLst/>
+          </a:prstGeom>
+        </p:spPr>
+        <p:txBody>
+          <a:bodyPr xmlns:a="http://schemas.openxmlformats.org/drawingml/2006/main" lIns="0" tIns="0" rIns="0" bIns="0"/>
+          <a:lstStyle xmlns:a="http://schemas.openxmlformats.org/drawingml/2006/main"/>
+          <a:p xmlns:a="http://schemas.openxmlformats.org/drawingml/2006/main">
+            <a:pPr>
+              <a:defRPr sz="1275">
+                <a:solidFill>
+                  <a:srgbClr val="5D716C"/>
+                </a:solidFill>
+              </a:defRPr>
+            </a:pPr>
+            <a:r>
+              <a:rPr sz="1275">
+                <a:solidFill>
+                  <a:srgbClr val="5D716C"/>
+                </a:solidFill>
+              </a:rPr>
+              <a:t>Baseline total</a:t>
+            </a:r>
+          </a:p>
+        </p:txBody>
+      </p:sp>
+      <p:sp>
+        <p:nvSpPr>
+          <p:cNvPr id="10" name="">
+            <a:extLst xmlns:a="http://schemas.openxmlformats.org/drawingml/2006/main">
+              <a:ext uri="{FF2B5EF4-FFF2-40B4-BE49-F238E27FC236}">
+                <a16:creationId xmlns:a16="http://schemas.microsoft.com/office/drawing/2014/main" id="{6F42A391-4922-4147-832A-B115DFCBF335}"/>
+              </a:ext>
+            </a:extLst>
+          </p:cNvPr>
+          <p:cNvSpPr>
+            <a:spLocks xmlns:a="http://schemas.openxmlformats.org/drawingml/2006/main" noGrp="1"/>
+          </p:cNvSpPr>
+          <p:nvPr/>
+        </p:nvSpPr>
+        <p:spPr>
+          <a:xfrm xmlns:a="http://schemas.openxmlformats.org/drawingml/2006/main">
+            <a:off x="4133850" y="6934200"/>
+            <a:ext cx="2305050" cy="323850"/>
+          </a:xfrm>
+          <a:prstGeom xmlns:a="http://schemas.openxmlformats.org/drawingml/2006/main" prst="rect">
+            <a:avLst/>
+          </a:prstGeom>
+        </p:spPr>
+        <p:txBody>
+          <a:bodyPr xmlns:a="http://schemas.openxmlformats.org/drawingml/2006/main" lIns="0" tIns="0" rIns="0" bIns="0"/>
+          <a:lstStyle xmlns:a="http://schemas.openxmlformats.org/drawingml/2006/main"/>
+          <a:p xmlns:a="http://schemas.openxmlformats.org/drawingml/2006/main">
+            <a:pPr>
+              <a:defRPr sz="1650" b="1">
+                <a:solidFill>
+                  <a:srgbClr val="1E6B52"/>
+                </a:solidFill>
+              </a:defRPr>
+            </a:pPr>
+            <a:r>
+              <a:rPr sz="1650" b="1">
+                <a:solidFill>
+                  <a:srgbClr val="1E6B52"/>
+                </a:solidFill>
+              </a:rPr>
+              <a:t>52.61 ha</a:t>
+            </a:r>
+          </a:p>
+        </p:txBody>
+      </p:sp>
+      <p:sp>
+        <p:nvSpPr>
+          <p:cNvPr id="11" name="">
+            <a:extLst xmlns:a="http://schemas.openxmlformats.org/drawingml/2006/main">
+              <a:ext uri="{FF2B5EF4-FFF2-40B4-BE49-F238E27FC236}">
+                <a16:creationId xmlns:a16="http://schemas.microsoft.com/office/drawing/2014/main" id="{E1B4770E-E7CC-4333-8610-17AF99ADB189}"/>
+              </a:ext>
+            </a:extLst>
+          </p:cNvPr>
+          <p:cNvSpPr>
+            <a:spLocks xmlns:a="http://schemas.openxmlformats.org/drawingml/2006/main" noGrp="1"/>
+          </p:cNvSpPr>
+          <p:nvPr/>
+        </p:nvSpPr>
+        <p:spPr>
+          <a:xfrm xmlns:a="http://schemas.openxmlformats.org/drawingml/2006/main">
+            <a:off x="1028700" y="8362950"/>
+            <a:ext cx="3105150" cy="304800"/>
+          </a:xfrm>
+          <a:prstGeom xmlns:a="http://schemas.openxmlformats.org/drawingml/2006/main" prst="rect">
+            <a:avLst/>
+          </a:prstGeom>
+        </p:spPr>
+        <p:txBody>
+          <a:bodyPr xmlns:a="http://schemas.openxmlformats.org/drawingml/2006/main" lIns="0" tIns="0" rIns="0" bIns="0"/>
+          <a:lstStyle xmlns:a="http://schemas.openxmlformats.org/drawingml/2006/main"/>
+          <a:p xmlns:a="http://schemas.openxmlformats.org/drawingml/2006/main">
+            <a:pPr>
+              <a:defRPr sz="1275">
+                <a:solidFill>
+                  <a:srgbClr val="5D716C"/>
+                </a:solidFill>
+              </a:defRPr>
+            </a:pPr>
+            <a:r>
+              <a:rPr sz="1275">
+                <a:solidFill>
+                  <a:srgbClr val="5D716C"/>
+                </a:solidFill>
+              </a:rPr>
+              <a:t>With secondary</a:t>
+            </a:r>
+          </a:p>
+        </p:txBody>
+      </p:sp>
+      <p:sp>
+        <p:nvSpPr>
+          <p:cNvPr id="12" name="">
+            <a:extLst xmlns:a="http://schemas.openxmlformats.org/drawingml/2006/main">
+              <a:ext uri="{FF2B5EF4-FFF2-40B4-BE49-F238E27FC236}">
+                <a16:creationId xmlns:a16="http://schemas.microsoft.com/office/drawing/2014/main" id="{582B4C2A-37E8-4264-977B-DFF1422D390F}"/>
+              </a:ext>
+            </a:extLst>
+          </p:cNvPr>
+          <p:cNvSpPr>
+            <a:spLocks xmlns:a="http://schemas.openxmlformats.org/drawingml/2006/main" noGrp="1"/>
+          </p:cNvSpPr>
+          <p:nvPr/>
+        </p:nvSpPr>
+        <p:spPr>
+          <a:xfrm xmlns:a="http://schemas.openxmlformats.org/drawingml/2006/main">
+            <a:off x="4133850" y="8343900"/>
+            <a:ext cx="2305050" cy="323850"/>
+          </a:xfrm>
+          <a:prstGeom xmlns:a="http://schemas.openxmlformats.org/drawingml/2006/main" prst="rect">
+            <a:avLst/>
+          </a:prstGeom>
+        </p:spPr>
+        <p:txBody>
+          <a:bodyPr xmlns:a="http://schemas.openxmlformats.org/drawingml/2006/main" lIns="0" tIns="0" rIns="0" bIns="0"/>
+          <a:lstStyle xmlns:a="http://schemas.openxmlformats.org/drawingml/2006/main"/>
+          <a:p xmlns:a="http://schemas.openxmlformats.org/drawingml/2006/main">
+            <a:pPr>
+              <a:defRPr sz="1650" b="1">
+                <a:solidFill>
+                  <a:srgbClr val="1E6B52"/>
+                </a:solidFill>
+              </a:defRPr>
+            </a:pPr>
+            <a:r>
+              <a:rPr sz="1650" b="1">
+                <a:solidFill>
+                  <a:srgbClr val="1E6B52"/>
+                </a:solidFill>
+              </a:rPr>
+              <a:t>0.00 ha</a:t>
+            </a:r>
+          </a:p>
+        </p:txBody>
+      </p:sp>
+      <p:sp>
+        <p:nvSpPr>
+          <p:cNvPr id="13" name="">
+            <a:extLst xmlns:a="http://schemas.openxmlformats.org/drawingml/2006/main">
+              <a:ext uri="{FF2B5EF4-FFF2-40B4-BE49-F238E27FC236}">
+                <a16:creationId xmlns:a16="http://schemas.microsoft.com/office/drawing/2014/main" id="{6C8BF053-6BF3-42CB-9362-4E944534BCF3}"/>
+              </a:ext>
+            </a:extLst>
+          </p:cNvPr>
+          <p:cNvSpPr>
+            <a:spLocks xmlns:a="http://schemas.openxmlformats.org/drawingml/2006/main" noGrp="1"/>
+          </p:cNvSpPr>
+          <p:nvPr/>
+        </p:nvSpPr>
+        <p:spPr>
+          <a:xfrm xmlns:a="http://schemas.openxmlformats.org/drawingml/2006/main">
+            <a:off x="6953250" y="2724150"/>
+            <a:ext cx="2819400" cy="304800"/>
+          </a:xfrm>
+          <a:prstGeom xmlns:a="http://schemas.openxmlformats.org/drawingml/2006/main" prst="rect">
+            <a:avLst/>
+          </a:prstGeom>
+        </p:spPr>
+        <p:txBody>
+          <a:bodyPr xmlns:a="http://schemas.openxmlformats.org/drawingml/2006/main" lIns="0" tIns="0" rIns="0" bIns="0"/>
+          <a:lstStyle xmlns:a="http://schemas.openxmlformats.org/drawingml/2006/main"/>
+          <a:p xmlns:a="http://schemas.openxmlformats.org/drawingml/2006/main">
+            <a:pPr>
+              <a:defRPr sz="1275">
+                <a:solidFill>
+                  <a:srgbClr val="5D716C"/>
+                </a:solidFill>
+              </a:defRPr>
+            </a:pPr>
+            <a:r>
+              <a:rPr sz="1275">
+                <a:solidFill>
+                  <a:srgbClr val="5D716C"/>
+                </a:solidFill>
+              </a:rPr>
+              <a:t>Property</a:t>
+            </a:r>
+          </a:p>
+        </p:txBody>
+      </p:sp>
+      <p:sp>
+        <p:nvSpPr>
+          <p:cNvPr id="14" name="">
+            <a:extLst xmlns:a="http://schemas.openxmlformats.org/drawingml/2006/main">
+              <a:ext uri="{FF2B5EF4-FFF2-40B4-BE49-F238E27FC236}">
+                <a16:creationId xmlns:a16="http://schemas.microsoft.com/office/drawing/2014/main" id="{7445DC24-7192-41C6-8B9D-5F7909CE6748}"/>
+              </a:ext>
+            </a:extLst>
+          </p:cNvPr>
+          <p:cNvSpPr>
+            <a:spLocks xmlns:a="http://schemas.openxmlformats.org/drawingml/2006/main" noGrp="1"/>
+          </p:cNvSpPr>
+          <p:nvPr/>
+        </p:nvSpPr>
+        <p:spPr>
+          <a:xfrm xmlns:a="http://schemas.openxmlformats.org/drawingml/2006/main">
+            <a:off x="9772650" y="2724150"/>
+            <a:ext cx="2076450" cy="323850"/>
+          </a:xfrm>
+          <a:prstGeom xmlns:a="http://schemas.openxmlformats.org/drawingml/2006/main" prst="rect">
+            <a:avLst/>
+          </a:prstGeom>
+        </p:spPr>
+        <p:txBody>
+          <a:bodyPr xmlns:a="http://schemas.openxmlformats.org/drawingml/2006/main" lIns="0" tIns="0" rIns="0" bIns="0"/>
+          <a:lstStyle xmlns:a="http://schemas.openxmlformats.org/drawingml/2006/main"/>
+          <a:p xmlns:a="http://schemas.openxmlformats.org/drawingml/2006/main">
+            <a:pPr>
+              <a:defRPr sz="1650" b="1">
+                <a:solidFill>
+                  <a:srgbClr val="D49A45"/>
+                </a:solidFill>
+              </a:defRPr>
+            </a:pPr>
+            <a:r>
+              <a:rPr sz="1650" b="1">
+                <a:solidFill>
+                  <a:srgbClr val="D49A45"/>
+                </a:solidFill>
+              </a:rPr>
+              <a:t>&lt; 4 modules</a:t>
+            </a:r>
+          </a:p>
+        </p:txBody>
+      </p:sp>
+      <p:sp>
+        <p:nvSpPr>
+          <p:cNvPr id="15" name="">
+            <a:extLst xmlns:a="http://schemas.openxmlformats.org/drawingml/2006/main">
+              <a:ext uri="{FF2B5EF4-FFF2-40B4-BE49-F238E27FC236}">
+                <a16:creationId xmlns:a16="http://schemas.microsoft.com/office/drawing/2014/main" id="{B966081F-C686-4444-9D23-35639CA6F3C7}"/>
+              </a:ext>
+            </a:extLst>
+          </p:cNvPr>
+          <p:cNvSpPr>
+            <a:spLocks xmlns:a="http://schemas.openxmlformats.org/drawingml/2006/main" noGrp="1"/>
+          </p:cNvSpPr>
+          <p:nvPr/>
+        </p:nvSpPr>
+        <p:spPr>
+          <a:xfrm xmlns:a="http://schemas.openxmlformats.org/drawingml/2006/main">
+            <a:off x="6953250" y="4133850"/>
+            <a:ext cx="2819400" cy="304800"/>
+          </a:xfrm>
+          <a:prstGeom xmlns:a="http://schemas.openxmlformats.org/drawingml/2006/main" prst="rect">
+            <a:avLst/>
+          </a:prstGeom>
+        </p:spPr>
+        <p:txBody>
+          <a:bodyPr xmlns:a="http://schemas.openxmlformats.org/drawingml/2006/main" lIns="0" tIns="0" rIns="0" bIns="0"/>
+          <a:lstStyle xmlns:a="http://schemas.openxmlformats.org/drawingml/2006/main"/>
+          <a:p xmlns:a="http://schemas.openxmlformats.org/drawingml/2006/main">
+            <a:pPr>
+              <a:defRPr sz="1275">
+                <a:solidFill>
+                  <a:srgbClr val="5D716C"/>
+                </a:solidFill>
+              </a:defRPr>
+            </a:pPr>
+            <a:r>
+              <a:rPr sz="1275">
+                <a:solidFill>
+                  <a:srgbClr val="5D716C"/>
+                </a:solidFill>
+              </a:rPr>
+              <a:t>Legal branch</a:t>
+            </a:r>
+          </a:p>
+        </p:txBody>
+      </p:sp>
+      <p:sp>
+        <p:nvSpPr>
+          <p:cNvPr id="16" name="">
+            <a:extLst xmlns:a="http://schemas.openxmlformats.org/drawingml/2006/main">
+              <a:ext uri="{FF2B5EF4-FFF2-40B4-BE49-F238E27FC236}">
+                <a16:creationId xmlns:a16="http://schemas.microsoft.com/office/drawing/2014/main" id="{36E6202B-8100-495F-AC77-9A5C91AA2D70}"/>
+              </a:ext>
+            </a:extLst>
+          </p:cNvPr>
+          <p:cNvSpPr>
+            <a:spLocks xmlns:a="http://schemas.openxmlformats.org/drawingml/2006/main" noGrp="1"/>
+          </p:cNvSpPr>
+          <p:nvPr/>
+        </p:nvSpPr>
+        <p:spPr>
+          <a:xfrm xmlns:a="http://schemas.openxmlformats.org/drawingml/2006/main">
+            <a:off x="9772650" y="4133850"/>
+            <a:ext cx="2076450" cy="323850"/>
+          </a:xfrm>
+          <a:prstGeom xmlns:a="http://schemas.openxmlformats.org/drawingml/2006/main" prst="rect">
+            <a:avLst/>
+          </a:prstGeom>
+        </p:spPr>
+        <p:txBody>
+          <a:bodyPr xmlns:a="http://schemas.openxmlformats.org/drawingml/2006/main" lIns="0" tIns="0" rIns="0" bIns="0"/>
+          <a:lstStyle xmlns:a="http://schemas.openxmlformats.org/drawingml/2006/main"/>
+          <a:p xmlns:a="http://schemas.openxmlformats.org/drawingml/2006/main">
+            <a:pPr>
+              <a:defRPr sz="1650" b="1">
+                <a:solidFill>
+                  <a:srgbClr val="D49A45"/>
+                </a:solidFill>
+              </a:defRPr>
+            </a:pPr>
+            <a:r>
+              <a:rPr sz="1650" b="1">
+                <a:solidFill>
+                  <a:srgbClr val="D49A45"/>
+                </a:solidFill>
+              </a:rPr>
+              <a:t>Article 67</a:t>
+            </a:r>
+          </a:p>
+        </p:txBody>
+      </p:sp>
+      <p:sp>
+        <p:nvSpPr>
+          <p:cNvPr id="17" name="">
+            <a:extLst xmlns:a="http://schemas.openxmlformats.org/drawingml/2006/main">
+              <a:ext uri="{FF2B5EF4-FFF2-40B4-BE49-F238E27FC236}">
+                <a16:creationId xmlns:a16="http://schemas.microsoft.com/office/drawing/2014/main" id="{A1EDC25C-75FB-426C-B380-E6A4B229426E}"/>
+              </a:ext>
+            </a:extLst>
+          </p:cNvPr>
+          <p:cNvSpPr>
+            <a:spLocks xmlns:a="http://schemas.openxmlformats.org/drawingml/2006/main" noGrp="1"/>
+          </p:cNvSpPr>
+          <p:nvPr/>
+        </p:nvSpPr>
+        <p:spPr>
+          <a:xfrm xmlns:a="http://schemas.openxmlformats.org/drawingml/2006/main">
+            <a:off x="6953250" y="5543550"/>
+            <a:ext cx="2819400" cy="304800"/>
+          </a:xfrm>
+          <a:prstGeom xmlns:a="http://schemas.openxmlformats.org/drawingml/2006/main" prst="rect">
+            <a:avLst/>
+          </a:prstGeom>
+        </p:spPr>
+        <p:txBody>
+          <a:bodyPr xmlns:a="http://schemas.openxmlformats.org/drawingml/2006/main" lIns="0" tIns="0" rIns="0" bIns="0"/>
+          <a:lstStyle xmlns:a="http://schemas.openxmlformats.org/drawingml/2006/main"/>
+          <a:p xmlns:a="http://schemas.openxmlformats.org/drawingml/2006/main">
+            <a:pPr>
+              <a:defRPr sz="1275">
+                <a:solidFill>
+                  <a:srgbClr val="5D716C"/>
+                </a:solidFill>
+              </a:defRPr>
+            </a:pPr>
+            <a:r>
+              <a:rPr sz="1275">
+                <a:solidFill>
+                  <a:srgbClr val="5D716C"/>
+                </a:solidFill>
+              </a:rPr>
+              <a:t>Requirement</a:t>
+            </a:r>
+          </a:p>
+        </p:txBody>
+      </p:sp>
+      <p:sp>
+        <p:nvSpPr>
+          <p:cNvPr id="18" name="">
+            <a:extLst xmlns:a="http://schemas.openxmlformats.org/drawingml/2006/main">
+              <a:ext uri="{FF2B5EF4-FFF2-40B4-BE49-F238E27FC236}">
+                <a16:creationId xmlns:a16="http://schemas.microsoft.com/office/drawing/2014/main" id="{E1B18228-3CE8-4148-8A9A-FD28730F104A}"/>
+              </a:ext>
+            </a:extLst>
+          </p:cNvPr>
+          <p:cNvSpPr>
+            <a:spLocks xmlns:a="http://schemas.openxmlformats.org/drawingml/2006/main" noGrp="1"/>
+          </p:cNvSpPr>
+          <p:nvPr/>
+        </p:nvSpPr>
+        <p:spPr>
+          <a:xfrm xmlns:a="http://schemas.openxmlformats.org/drawingml/2006/main">
+            <a:off x="9772650" y="5543550"/>
+            <a:ext cx="2076450" cy="323850"/>
+          </a:xfrm>
+          <a:prstGeom xmlns:a="http://schemas.openxmlformats.org/drawingml/2006/main" prst="rect">
+            <a:avLst/>
+          </a:prstGeom>
+        </p:spPr>
+        <p:txBody>
+          <a:bodyPr xmlns:a="http://schemas.openxmlformats.org/drawingml/2006/main" lIns="0" tIns="0" rIns="0" bIns="0"/>
+          <a:lstStyle xmlns:a="http://schemas.openxmlformats.org/drawingml/2006/main"/>
+          <a:p xmlns:a="http://schemas.openxmlformats.org/drawingml/2006/main">
+            <a:pPr>
+              <a:defRPr sz="1650" b="1">
+                <a:solidFill>
+                  <a:srgbClr val="D49A45"/>
+                </a:solidFill>
+              </a:defRPr>
+            </a:pPr>
+            <a:r>
+              <a:rPr sz="1650" b="1">
+                <a:solidFill>
+                  <a:srgbClr val="D49A45"/>
+                </a:solidFill>
+              </a:rPr>
+              <a:t>115.24 ha</a:t>
+            </a:r>
+          </a:p>
+        </p:txBody>
+      </p:sp>
+      <p:sp>
+        <p:nvSpPr>
+          <p:cNvPr id="19" name="">
+            <a:extLst xmlns:a="http://schemas.openxmlformats.org/drawingml/2006/main">
+              <a:ext uri="{FF2B5EF4-FFF2-40B4-BE49-F238E27FC236}">
+                <a16:creationId xmlns:a16="http://schemas.microsoft.com/office/drawing/2014/main" id="{82D22DA4-95FB-484D-96FA-FD6BA29E58A1}"/>
+              </a:ext>
+            </a:extLst>
+          </p:cNvPr>
+          <p:cNvSpPr>
+            <a:spLocks xmlns:a="http://schemas.openxmlformats.org/drawingml/2006/main" noGrp="1"/>
+          </p:cNvSpPr>
+          <p:nvPr/>
+        </p:nvSpPr>
+        <p:spPr>
+          <a:xfrm xmlns:a="http://schemas.openxmlformats.org/drawingml/2006/main">
+            <a:off x="6953250" y="6953250"/>
+            <a:ext cx="2819400" cy="304800"/>
+          </a:xfrm>
+          <a:prstGeom xmlns:a="http://schemas.openxmlformats.org/drawingml/2006/main" prst="rect">
+            <a:avLst/>
+          </a:prstGeom>
+        </p:spPr>
+        <p:txBody>
+          <a:bodyPr xmlns:a="http://schemas.openxmlformats.org/drawingml/2006/main" lIns="0" tIns="0" rIns="0" bIns="0"/>
+          <a:lstStyle xmlns:a="http://schemas.openxmlformats.org/drawingml/2006/main"/>
+          <a:p xmlns:a="http://schemas.openxmlformats.org/drawingml/2006/main">
+            <a:pPr>
+              <a:defRPr sz="1275">
+                <a:solidFill>
+                  <a:srgbClr val="5D716C"/>
+                </a:solidFill>
+              </a:defRPr>
+            </a:pPr>
+            <a:r>
+              <a:rPr sz="1275">
+                <a:solidFill>
+                  <a:srgbClr val="5D716C"/>
+                </a:solidFill>
+              </a:rPr>
+              <a:t>Baseline total</a:t>
+            </a:r>
+          </a:p>
+        </p:txBody>
+      </p:sp>
+      <p:sp>
+        <p:nvSpPr>
+          <p:cNvPr id="20" name="">
+            <a:extLst xmlns:a="http://schemas.openxmlformats.org/drawingml/2006/main">
+              <a:ext uri="{FF2B5EF4-FFF2-40B4-BE49-F238E27FC236}">
+                <a16:creationId xmlns:a16="http://schemas.microsoft.com/office/drawing/2014/main" id="{B90B8863-F7D6-4D50-A489-56C2376D2135}"/>
+              </a:ext>
+            </a:extLst>
+          </p:cNvPr>
+          <p:cNvSpPr>
+            <a:spLocks xmlns:a="http://schemas.openxmlformats.org/drawingml/2006/main" noGrp="1"/>
+          </p:cNvSpPr>
+          <p:nvPr/>
+        </p:nvSpPr>
+        <p:spPr>
+          <a:xfrm xmlns:a="http://schemas.openxmlformats.org/drawingml/2006/main">
+            <a:off x="9772650" y="6934200"/>
+            <a:ext cx="2076450" cy="323850"/>
+          </a:xfrm>
+          <a:prstGeom xmlns:a="http://schemas.openxmlformats.org/drawingml/2006/main" prst="rect">
+            <a:avLst/>
+          </a:prstGeom>
+        </p:spPr>
+        <p:txBody>
+          <a:bodyPr xmlns:a="http://schemas.openxmlformats.org/drawingml/2006/main" lIns="0" tIns="0" rIns="0" bIns="0"/>
+          <a:lstStyle xmlns:a="http://schemas.openxmlformats.org/drawingml/2006/main"/>
+          <a:p xmlns:a="http://schemas.openxmlformats.org/drawingml/2006/main">
+            <a:pPr>
+              <a:defRPr sz="1650" b="1">
+                <a:solidFill>
+                  <a:srgbClr val="D49A45"/>
+                </a:solidFill>
+              </a:defRPr>
+            </a:pPr>
+            <a:r>
+              <a:rPr sz="1650" b="1">
+                <a:solidFill>
+                  <a:srgbClr val="D49A45"/>
+                </a:solidFill>
+              </a:rPr>
+              <a:t>57.07 ha</a:t>
+            </a:r>
+          </a:p>
+        </p:txBody>
+      </p:sp>
+      <p:sp>
+        <p:nvSpPr>
+          <p:cNvPr id="21" name="">
+            <a:extLst xmlns:a="http://schemas.openxmlformats.org/drawingml/2006/main">
+              <a:ext uri="{FF2B5EF4-FFF2-40B4-BE49-F238E27FC236}">
+                <a16:creationId xmlns:a16="http://schemas.microsoft.com/office/drawing/2014/main" id="{9A7D654F-C384-4DE3-8215-54044065B362}"/>
+              </a:ext>
+            </a:extLst>
+          </p:cNvPr>
+          <p:cNvSpPr>
+            <a:spLocks xmlns:a="http://schemas.openxmlformats.org/drawingml/2006/main" noGrp="1"/>
+          </p:cNvSpPr>
+          <p:nvPr/>
+        </p:nvSpPr>
+        <p:spPr>
+          <a:xfrm xmlns:a="http://schemas.openxmlformats.org/drawingml/2006/main">
+            <a:off x="6953250" y="8362950"/>
+            <a:ext cx="2819400" cy="304800"/>
+          </a:xfrm>
+          <a:prstGeom xmlns:a="http://schemas.openxmlformats.org/drawingml/2006/main" prst="rect">
+            <a:avLst/>
+          </a:prstGeom>
+        </p:spPr>
+        <p:txBody>
+          <a:bodyPr xmlns:a="http://schemas.openxmlformats.org/drawingml/2006/main" lIns="0" tIns="0" rIns="0" bIns="0"/>
+          <a:lstStyle xmlns:a="http://schemas.openxmlformats.org/drawingml/2006/main"/>
+          <a:p xmlns:a="http://schemas.openxmlformats.org/drawingml/2006/main">
+            <a:pPr>
+              <a:defRPr sz="1275">
+                <a:solidFill>
+                  <a:srgbClr val="5D716C"/>
+                </a:solidFill>
+              </a:defRPr>
+            </a:pPr>
+            <a:r>
+              <a:rPr sz="1275">
+                <a:solidFill>
+                  <a:srgbClr val="5D716C"/>
+                </a:solidFill>
+              </a:rPr>
+              <a:t>With secondary</a:t>
+            </a:r>
+          </a:p>
+        </p:txBody>
+      </p:sp>
+      <p:sp>
+        <p:nvSpPr>
+          <p:cNvPr id="22" name="">
+            <a:extLst xmlns:a="http://schemas.openxmlformats.org/drawingml/2006/main">
+              <a:ext uri="{FF2B5EF4-FFF2-40B4-BE49-F238E27FC236}">
+                <a16:creationId xmlns:a16="http://schemas.microsoft.com/office/drawing/2014/main" id="{C91ADE8B-7A76-4598-B9B7-D4D64F56132C}"/>
+              </a:ext>
+            </a:extLst>
+          </p:cNvPr>
+          <p:cNvSpPr>
+            <a:spLocks xmlns:a="http://schemas.openxmlformats.org/drawingml/2006/main" noGrp="1"/>
+          </p:cNvSpPr>
+          <p:nvPr/>
+        </p:nvSpPr>
+        <p:spPr>
+          <a:xfrm xmlns:a="http://schemas.openxmlformats.org/drawingml/2006/main">
+            <a:off x="9772650" y="8343900"/>
+            <a:ext cx="2076450" cy="323850"/>
+          </a:xfrm>
+          <a:prstGeom xmlns:a="http://schemas.openxmlformats.org/drawingml/2006/main" prst="rect">
+            <a:avLst/>
+          </a:prstGeom>
+        </p:spPr>
+        <p:txBody>
+          <a:bodyPr xmlns:a="http://schemas.openxmlformats.org/drawingml/2006/main" lIns="0" tIns="0" rIns="0" bIns="0"/>
+          <a:lstStyle xmlns:a="http://schemas.openxmlformats.org/drawingml/2006/main"/>
+          <a:p xmlns:a="http://schemas.openxmlformats.org/drawingml/2006/main">
+            <a:pPr>
+              <a:defRPr sz="1650" b="1">
+                <a:solidFill>
+                  <a:srgbClr val="D49A45"/>
+                </a:solidFill>
+              </a:defRPr>
+            </a:pPr>
+            <a:r>
+              <a:rPr sz="1650" b="1">
+                <a:solidFill>
+                  <a:srgbClr val="D49A45"/>
+                </a:solidFill>
+              </a:rPr>
+              <a:t>8.67 ha</a:t>
+            </a:r>
+          </a:p>
+        </p:txBody>
+      </p:sp>
+      <p:sp>
+        <p:nvSpPr>
+          <p:cNvPr id="23" name="">
+            <a:extLst xmlns:a="http://schemas.openxmlformats.org/drawingml/2006/main">
+              <a:ext uri="{FF2B5EF4-FFF2-40B4-BE49-F238E27FC236}">
+                <a16:creationId xmlns:a16="http://schemas.microsoft.com/office/drawing/2014/main" id="{27484528-7DEE-4E73-A882-C42AF6143977}"/>
+              </a:ext>
+            </a:extLst>
+          </p:cNvPr>
+          <p:cNvSpPr>
+            <a:spLocks xmlns:a="http://schemas.openxmlformats.org/drawingml/2006/main" noGrp="1"/>
+          </p:cNvSpPr>
+          <p:nvPr/>
+        </p:nvSpPr>
+        <p:spPr>
+          <a:xfrm xmlns:a="http://schemas.openxmlformats.org/drawingml/2006/main">
+            <a:off x="12458700" y="2419350"/>
+            <a:ext cx="4705350" cy="419100"/>
+          </a:xfrm>
+          <a:prstGeom xmlns:a="http://schemas.openxmlformats.org/drawingml/2006/main" prst="rect">
+            <a:avLst/>
+          </a:prstGeom>
+        </p:spPr>
+        <p:txBody>
+          <a:bodyPr xmlns:a="http://schemas.openxmlformats.org/drawingml/2006/main" lIns="0" tIns="0" rIns="0" bIns="0"/>
+          <a:lstStyle xmlns:a="http://schemas.openxmlformats.org/drawingml/2006/main"/>
+          <a:p xmlns:a="http://schemas.openxmlformats.org/drawingml/2006/main">
+            <a:pPr>
+              <a:defRPr sz="2400" b="1">
+                <a:solidFill>
+                  <a:srgbClr val="17312B"/>
+                </a:solidFill>
+              </a:defRPr>
+            </a:pPr>
+            <a:r>
+              <a:rPr sz="2400" b="1">
+                <a:solidFill>
+                  <a:srgbClr val="17312B"/>
+                </a:solidFill>
+              </a:rPr>
+              <a:t>Audit rules</a:t>
+            </a:r>
+          </a:p>
+        </p:txBody>
+      </p:sp>
+      <p:sp>
+        <p:nvSpPr>
+          <p:cNvPr id="24" name="">
+            <a:extLst xmlns:a="http://schemas.openxmlformats.org/drawingml/2006/main">
+              <a:ext uri="{FF2B5EF4-FFF2-40B4-BE49-F238E27FC236}">
+                <a16:creationId xmlns:a16="http://schemas.microsoft.com/office/drawing/2014/main" id="{8FFE63B5-B953-42EA-A1EE-9C59258A2FAB}"/>
+              </a:ext>
+            </a:extLst>
+          </p:cNvPr>
+          <p:cNvSpPr>
+            <a:spLocks xmlns:a="http://schemas.openxmlformats.org/drawingml/2006/main" noGrp="1"/>
+          </p:cNvSpPr>
+          <p:nvPr/>
+        </p:nvSpPr>
+        <p:spPr>
+          <a:xfrm xmlns:a="http://schemas.openxmlformats.org/drawingml/2006/main">
+            <a:off x="12458700" y="3048000"/>
+            <a:ext cx="4705350" cy="3714750"/>
+          </a:xfrm>
+          <a:prstGeom xmlns:a="http://schemas.openxmlformats.org/drawingml/2006/main" prst="rect">
+            <a:avLst/>
+          </a:prstGeom>
+        </p:spPr>
+        <p:txBody>
+          <a:bodyPr xmlns:a="http://schemas.openxmlformats.org/drawingml/2006/main" lIns="0" tIns="0" rIns="0" bIns="0"/>
+          <a:lstStyle xmlns:a="http://schemas.openxmlformats.org/drawingml/2006/main"/>
+          <a:p xmlns:a="http://schemas.openxmlformats.org/drawingml/2006/main">
+            <a:pPr>
+              <a:defRPr sz="1725">
+                <a:solidFill>
+                  <a:srgbClr val="5D716C"/>
+                </a:solidFill>
+              </a:defRPr>
+            </a:pPr>
+            <a:r>
+              <a:rPr sz="1725">
+                <a:solidFill>
+                  <a:srgbClr val="5D716C"/>
+                </a:solidFill>
+              </a:rPr>
+              <a:t>1. Inputs retain their source-specific columns.</a:t>
+            </a:r>
+          </a:p>
+          <a:p xmlns:a="http://schemas.openxmlformats.org/drawingml/2006/main">
+            <a:r>
+              <a:t/>
+            </a:r>
+          </a:p>
+          <a:p xmlns:a="http://schemas.openxmlformats.org/drawingml/2006/main">
+            <a:pPr>
+              <a:defRPr sz="1725">
+                <a:solidFill>
+                  <a:srgbClr val="5D716C"/>
+                </a:solidFill>
+              </a:defRPr>
+            </a:pPr>
+            <a:r>
+              <a:rPr sz="1725">
+                <a:solidFill>
+                  <a:srgbClr val="5D716C"/>
+                </a:solidFill>
+              </a:rPr>
+              <a:t>2. 2000 and 2008 remain separate cut-offs.</a:t>
+            </a:r>
+          </a:p>
+          <a:p xmlns:a="http://schemas.openxmlformats.org/drawingml/2006/main">
+            <a:r>
+              <a:t/>
+            </a:r>
+          </a:p>
+          <a:p xmlns:a="http://schemas.openxmlformats.org/drawingml/2006/main">
+            <a:pPr>
+              <a:defRPr sz="1725">
+                <a:solidFill>
+                  <a:srgbClr val="5D716C"/>
+                </a:solidFill>
+              </a:defRPr>
+            </a:pPr>
+            <a:r>
+              <a:rPr sz="1725">
+                <a:solidFill>
+                  <a:srgbClr val="5D716C"/>
+                </a:solidFill>
+              </a:rPr>
+              <a:t>3. Restore + compensate = LR deficit.</a:t>
+            </a:r>
+          </a:p>
+          <a:p xmlns:a="http://schemas.openxmlformats.org/drawingml/2006/main">
+            <a:r>
+              <a:t/>
+            </a:r>
+          </a:p>
+          <a:p xmlns:a="http://schemas.openxmlformats.org/drawingml/2006/main">
+            <a:pPr>
+              <a:defRPr sz="1725">
+                <a:solidFill>
+                  <a:srgbClr val="5D716C"/>
+                </a:solidFill>
+              </a:defRPr>
+            </a:pPr>
+            <a:r>
+              <a:rPr sz="1725">
+                <a:solidFill>
+                  <a:srgbClr val="5D716C"/>
+                </a:solidFill>
+              </a:rPr>
+              <a:t>4. Secondary vegetation cannot push vegetation above property area.</a:t>
+            </a:r>
+          </a:p>
+        </p:txBody>
+      </p:sp>
+      <p:sp>
+        <p:nvSpPr>
+          <p:cNvPr id="25" name="">
+            <a:extLst xmlns:a="http://schemas.openxmlformats.org/drawingml/2006/main">
+              <a:ext uri="{FF2B5EF4-FFF2-40B4-BE49-F238E27FC236}">
+                <a16:creationId xmlns:a16="http://schemas.microsoft.com/office/drawing/2014/main" id="{45B298A2-50E7-4755-B47B-49FEA26CE912}"/>
+              </a:ext>
+            </a:extLst>
+          </p:cNvPr>
+          <p:cNvSpPr>
+            <a:spLocks xmlns:a="http://schemas.openxmlformats.org/drawingml/2006/main" noGrp="1"/>
+          </p:cNvSpPr>
+          <p:nvPr/>
+        </p:nvSpPr>
+        <p:spPr>
+          <a:xfrm xmlns:a="http://schemas.openxmlformats.org/drawingml/2006/main">
+            <a:off x="12458700" y="6972300"/>
+            <a:ext cx="4705350" cy="666750"/>
+          </a:xfrm>
+          <a:prstGeom xmlns:a="http://schemas.openxmlformats.org/drawingml/2006/main" prst="rect">
+            <a:avLst/>
+          </a:prstGeom>
+        </p:spPr>
+        <p:txBody>
+          <a:bodyPr xmlns:a="http://schemas.openxmlformats.org/drawingml/2006/main" lIns="0" tIns="0" rIns="0" bIns="0"/>
+          <a:lstStyle xmlns:a="http://schemas.openxmlformats.org/drawingml/2006/main"/>
+          <a:p xmlns:a="http://schemas.openxmlformats.org/drawingml/2006/main">
+            <a:pPr>
+              <a:defRPr sz="1650" b="1">
+                <a:solidFill>
+                  <a:srgbClr val="9FC65B"/>
+                </a:solidFill>
+              </a:defRPr>
+            </a:pPr>
+            <a:r>
+              <a:rPr sz="1650" b="1">
+                <a:solidFill>
+                  <a:srgbClr val="9FC65B"/>
+                </a:solidFill>
+              </a:rPr>
+              <a:t>Every number shown here is traceable to the 638-column mega table.</a:t>
+            </a:r>
+          </a:p>
+        </p:txBody>
+      </p:sp>
+      <p:sp>
+        <p:nvSpPr>
+          <p:cNvPr id="26" name="source-9">
+            <a:extLst xmlns:a="http://schemas.openxmlformats.org/drawingml/2006/main">
+              <a:ext uri="{FF2B5EF4-FFF2-40B4-BE49-F238E27FC236}">
+                <a16:creationId xmlns:a16="http://schemas.microsoft.com/office/drawing/2014/main" id="{34B98853-EF0C-408F-BD83-9908CFC5E118}"/>
+              </a:ext>
+            </a:extLst>
+          </p:cNvPr>
+          <p:cNvSpPr>
+            <a:spLocks xmlns:a="http://schemas.openxmlformats.org/drawingml/2006/main" noGrp="1"/>
+          </p:cNvSpPr>
+          <p:nvPr/>
+        </p:nvSpPr>
+        <p:spPr>
+          <a:xfrm xmlns:a="http://schemas.openxmlformats.org/drawingml/2006/main">
+            <a:off x="857250" y="9467850"/>
+            <a:ext cx="3295650" cy="266700"/>
+          </a:xfrm>
+          <a:prstGeom xmlns:a="http://schemas.openxmlformats.org/drawingml/2006/main" prst="rect">
+            <a:avLst/>
+          </a:prstGeom>
+        </p:spPr>
+        <p:txBody>
+          <a:bodyPr xmlns:a="http://schemas.openxmlformats.org/drawingml/2006/main" lIns="0" tIns="0" rIns="0" bIns="0"/>
+          <a:lstStyle xmlns:a="http://schemas.openxmlformats.org/drawingml/2006/main"/>
+          <a:p xmlns:a="http://schemas.openxmlformats.org/drawingml/2006/main">
+            <a:pPr>
+              <a:defRPr sz="975">
+                <a:solidFill>
+                  <a:srgbClr val="5D716C"/>
+                </a:solidFill>
+              </a:defRPr>
+            </a:pPr>
+            <a:r>
+              <a:rPr sz="975">
+                <a:solidFill>
+                  <a:srgbClr val="5D716C"/>
+                </a:solidFill>
+              </a:rPr>
+              <a:t>Source: MT Forest Code compliance mega table · final 2026-09-30</a:t>
+            </a:r>
+          </a:p>
+        </p:txBody>
+      </p:sp>
+      <p:sp>
+        <p:nvSpPr>
+          <p:cNvPr id="27" name="page-9">
+            <a:extLst xmlns:a="http://schemas.openxmlformats.org/drawingml/2006/main">
+              <a:ext uri="{FF2B5EF4-FFF2-40B4-BE49-F238E27FC236}">
+                <a16:creationId xmlns:a16="http://schemas.microsoft.com/office/drawing/2014/main" id="{1037BE4C-7D68-4EE0-AE25-232AB51B82DE}"/>
+              </a:ext>
+            </a:extLst>
+          </p:cNvPr>
+          <p:cNvSpPr>
+            <a:spLocks xmlns:a="http://schemas.openxmlformats.org/drawingml/2006/main" noGrp="1"/>
+          </p:cNvSpPr>
+          <p:nvPr/>
+        </p:nvSpPr>
+        <p:spPr>
+          <a:xfrm xmlns:a="http://schemas.openxmlformats.org/drawingml/2006/main">
+            <a:off x="16859250" y="9467850"/>
+            <a:ext cx="571500" cy="266700"/>
+          </a:xfrm>
+          <a:prstGeom xmlns:a="http://schemas.openxmlformats.org/drawingml/2006/main" prst="rect">
+            <a:avLst/>
+          </a:prstGeom>
+        </p:spPr>
+        <p:txBody>
+          <a:bodyPr xmlns:a="http://schemas.openxmlformats.org/drawingml/2006/main" lIns="0" tIns="0" rIns="0" bIns="0"/>
+          <a:lstStyle xmlns:a="http://schemas.openxmlformats.org/drawingml/2006/main"/>
+          <a:p xmlns:a="http://schemas.openxmlformats.org/drawingml/2006/main">
+            <a:pPr>
+              <a:defRPr sz="1050" b="1">
+                <a:solidFill>
+                  <a:srgbClr val="1E6B52"/>
+                </a:solidFill>
+              </a:defRPr>
+            </a:pPr>
+            <a:r>
+              <a:rPr sz="1050" b="1">
+                <a:solidFill>
+                  <a:srgbClr val="1E6B52"/>
+                </a:solidFill>
+              </a:rPr>
+              <a:t>09</a:t>
+            </a:r>
+          </a:p>
+        </p:txBody>
+      </p:sp>
+    </p:spTree>
+    <p:extLst>
+      <p:ext uri="{BB962C8B-B14F-4D97-AF65-F5344CB8AC3E}">
+        <p14:creationId xmlns:p14="http://schemas.microsoft.com/office/powerpoint/2010/main" val="1378637234"/>
       </p:ext>
     </p:extLst>
   </p:cSld>
